--- a/docs/presentation.pptx
+++ b/docs/presentation.pptx
@@ -8080,33 +8080,15 @@
                 <a:latin typeface="Arial" pitchFamily="34" charset="0"/>
                 <a:cs typeface="Arial" pitchFamily="34" charset="0"/>
               </a:rPr>
-              <a:t> </a:t>
-            </a:r>
-            <a:r>
-              <a:rPr lang="el-GR" sz="1600" dirty="0" smtClean="0">
-                <a:latin typeface="Arial" pitchFamily="34" charset="0"/>
-                <a:cs typeface="Arial" pitchFamily="34" charset="0"/>
-              </a:rPr>
-              <a:t> </a:t>
+              <a:t>  </a:t>
             </a:r>
             <a:r>
               <a:rPr lang="en-US" sz="1600" dirty="0" smtClean="0">
                 <a:latin typeface="Arial" pitchFamily="34" charset="0"/>
                 <a:cs typeface="Arial" pitchFamily="34" charset="0"/>
               </a:rPr>
-              <a:t>• </a:t>
-            </a:r>
-            <a:r>
-              <a:rPr lang="en-US" sz="1600" dirty="0" smtClean="0">
-                <a:latin typeface="Arial" pitchFamily="34" charset="0"/>
-                <a:cs typeface="Arial" pitchFamily="34" charset="0"/>
-              </a:rPr>
-              <a:t>API cost drops 10×: Haiku $21 → $2.10, GPT $2.75 → $0.20</a:t>
-            </a:r>
-            <a:endParaRPr lang="en-US" sz="1600" dirty="0" smtClean="0">
-              <a:latin typeface="Arial" pitchFamily="34" charset="0"/>
-              <a:cs typeface="Arial" pitchFamily="34" charset="0"/>
-            </a:endParaRPr>
+              <a:t>• API cost drops 10×: Haiku $21 → $2.10, GPT $2.75 → $0.20</a:t>
+            </a:r>
           </a:p>
           <a:p>
             <a:r>
@@ -11275,21 +11257,7 @@
                 <a:latin typeface="Arial" pitchFamily="34" charset="0"/>
                 <a:cs typeface="Arial" pitchFamily="34" charset="0"/>
               </a:rPr>
-              <a:t>  End-to-end Combined </a:t>
-            </a:r>
-            <a:r>
-              <a:rPr lang="en-US" sz="2000" dirty="0" smtClean="0">
-                <a:latin typeface="Arial" pitchFamily="34" charset="0"/>
-                <a:cs typeface="Arial" pitchFamily="34" charset="0"/>
-              </a:rPr>
-              <a:t>stays </a:t>
-            </a:r>
-            <a:r>
-              <a:rPr lang="en-US" sz="2000" dirty="0" smtClean="0">
-                <a:latin typeface="Arial" pitchFamily="34" charset="0"/>
-                <a:cs typeface="Arial" pitchFamily="34" charset="0"/>
-              </a:rPr>
-              <a:t>below APIs. </a:t>
+              <a:t>  End-to-end Combined stays below APIs. </a:t>
             </a:r>
           </a:p>
           <a:p>
@@ -11442,14 +11410,7 @@
                 <a:latin typeface="Arial" pitchFamily="34" charset="0"/>
                 <a:cs typeface="Arial" pitchFamily="34" charset="0"/>
               </a:rPr>
-              <a:t>Limitations</a:t>
-            </a:r>
-            <a:r>
-              <a:rPr lang="en-US" sz="2000" dirty="0" smtClean="0">
-                <a:latin typeface="Arial" pitchFamily="34" charset="0"/>
-                <a:cs typeface="Arial" pitchFamily="34" charset="0"/>
-              </a:rPr>
-              <a:t>:</a:t>
+              <a:t>Limitations:</a:t>
             </a:r>
             <a:endParaRPr lang="el-GR" sz="2000" dirty="0" smtClean="0">
               <a:latin typeface="Arial" pitchFamily="34" charset="0"/>
@@ -11465,82 +11426,53 @@
                 <a:latin typeface="Arial" pitchFamily="34" charset="0"/>
                 <a:cs typeface="Arial" pitchFamily="34" charset="0"/>
               </a:rPr>
+              <a:t>  </a:t>
+            </a:r>
+            <a:r>
+              <a:rPr lang="en-US" sz="2000" dirty="0" smtClean="0">
+                <a:latin typeface="Arial" pitchFamily="34" charset="0"/>
+                <a:cs typeface="Arial" pitchFamily="34" charset="0"/>
+              </a:rPr>
+              <a:t>• The architecture × discipline principle is empirical,</a:t>
+            </a:r>
+            <a:r>
+              <a:rPr lang="el-GR" sz="2000" dirty="0" smtClean="0">
+                <a:latin typeface="Arial" pitchFamily="34" charset="0"/>
+                <a:cs typeface="Arial" pitchFamily="34" charset="0"/>
+              </a:rPr>
               <a:t> </a:t>
             </a:r>
             <a:r>
-              <a:rPr lang="el-GR" sz="2000" dirty="0" smtClean="0">
-                <a:latin typeface="Arial" pitchFamily="34" charset="0"/>
-                <a:cs typeface="Arial" pitchFamily="34" charset="0"/>
-              </a:rPr>
-              <a:t> </a:t>
-            </a:r>
-            <a:r>
               <a:rPr lang="en-US" sz="2000" dirty="0" smtClean="0">
                 <a:latin typeface="Arial" pitchFamily="34" charset="0"/>
                 <a:cs typeface="Arial" pitchFamily="34" charset="0"/>
               </a:rPr>
-              <a:t>• </a:t>
-            </a:r>
+              <a:t>not theoretical</a:t>
+            </a:r>
+          </a:p>
+          <a:p>
+            <a:pPr>
+              <a:buNone/>
+            </a:pPr>
             <a:r>
               <a:rPr lang="en-US" sz="2000" dirty="0" smtClean="0">
                 <a:latin typeface="Arial" pitchFamily="34" charset="0"/>
                 <a:cs typeface="Arial" pitchFamily="34" charset="0"/>
               </a:rPr>
-              <a:t>The architecture × discipline principle is empirical,</a:t>
-            </a:r>
-            <a:r>
-              <a:rPr lang="el-GR" sz="2000" dirty="0" smtClean="0">
-                <a:latin typeface="Arial" pitchFamily="34" charset="0"/>
-                <a:cs typeface="Arial" pitchFamily="34" charset="0"/>
-              </a:rPr>
-              <a:t> </a:t>
-            </a:r>
+              <a:t>  • Domain scope: hotel + restaurant only,</a:t>
+            </a:r>
+          </a:p>
+          <a:p>
+            <a:pPr>
+              <a:buNone/>
+            </a:pPr>
             <a:r>
               <a:rPr lang="en-US" sz="2000" dirty="0" smtClean="0">
                 <a:latin typeface="Arial" pitchFamily="34" charset="0"/>
                 <a:cs typeface="Arial" pitchFamily="34" charset="0"/>
               </a:rPr>
-              <a:t>not theoretical</a:t>
-            </a:r>
-            <a:endParaRPr lang="en-US" sz="2000" dirty="0" smtClean="0">
-              <a:latin typeface="Arial" pitchFamily="34" charset="0"/>
-              <a:cs typeface="Arial" pitchFamily="34" charset="0"/>
-            </a:endParaRPr>
-          </a:p>
-          <a:p>
-            <a:pPr>
-              <a:buNone/>
-            </a:pPr>
-            <a:r>
-              <a:rPr lang="en-US" sz="2000" dirty="0" smtClean="0">
-                <a:latin typeface="Arial" pitchFamily="34" charset="0"/>
-                <a:cs typeface="Arial" pitchFamily="34" charset="0"/>
-              </a:rPr>
-              <a:t>  • Domain scope: hotel + restaurant only,</a:t>
-            </a:r>
-          </a:p>
-          <a:p>
-            <a:pPr>
-              <a:buNone/>
-            </a:pPr>
-            <a:r>
-              <a:rPr lang="en-US" sz="2000" dirty="0" smtClean="0">
-                <a:latin typeface="Arial" pitchFamily="34" charset="0"/>
-                <a:cs typeface="Arial" pitchFamily="34" charset="0"/>
-              </a:rPr>
-              <a:t>    not directly comparable to full-domain MultiWOZ </a:t>
-            </a:r>
-            <a:r>
-              <a:rPr lang="en-US" sz="2000" dirty="0" smtClean="0">
-                <a:latin typeface="Arial" pitchFamily="34" charset="0"/>
-                <a:cs typeface="Arial" pitchFamily="34" charset="0"/>
-              </a:rPr>
-              <a:t>leaderboard</a:t>
-            </a:r>
-            <a:endParaRPr lang="en-US" sz="2000" dirty="0" smtClean="0">
-              <a:latin typeface="Arial" pitchFamily="34" charset="0"/>
-              <a:cs typeface="Arial" pitchFamily="34" charset="0"/>
-            </a:endParaRPr>
+              <a:t>    not directly comparable to full-domain MultiWOZ leaderboard</a:t>
+            </a:r>
           </a:p>
           <a:p>
             <a:pPr>
@@ -11584,19 +11516,8 @@
                 <a:latin typeface="Arial" pitchFamily="34" charset="0"/>
                 <a:cs typeface="Arial" pitchFamily="34" charset="0"/>
               </a:rPr>
-              <a:t>  • Explore advanced prompting (knowledge generation, self </a:t>
-            </a:r>
-            <a:r>
-              <a:rPr lang="en-US" sz="2000" dirty="0" smtClean="0">
-                <a:latin typeface="Arial" pitchFamily="34" charset="0"/>
-                <a:cs typeface="Arial" pitchFamily="34" charset="0"/>
-              </a:rPr>
-              <a:t>consistency, retrieval-augmented few-shot examples)</a:t>
-            </a:r>
-            <a:endParaRPr lang="en-US" sz="2000" dirty="0" smtClean="0">
-              <a:latin typeface="Arial" pitchFamily="34" charset="0"/>
-              <a:cs typeface="Arial" pitchFamily="34" charset="0"/>
-            </a:endParaRPr>
+              <a:t>  • Explore advanced prompting (knowledge generation, self consistency, retrieval-augmented few-shot examples)</a:t>
+            </a:r>
           </a:p>
           <a:p>
             <a:pPr>
@@ -11876,7 +11797,21 @@
                 <a:latin typeface="Arial" pitchFamily="34" charset="0"/>
                 <a:cs typeface="Arial" pitchFamily="34" charset="0"/>
               </a:rPr>
-              <a:t>: a customer-service dialogue system that is reliable, controllable and affordable.</a:t>
+              <a:t>: </a:t>
+            </a:r>
+            <a:r>
+              <a:rPr lang="en-US" sz="2000" dirty="0" smtClean="0">
+                <a:latin typeface="Arial" pitchFamily="34" charset="0"/>
+                <a:cs typeface="Arial" pitchFamily="34" charset="0"/>
+              </a:rPr>
+              <a:t>investigate the architectural choices that lead to a customer-service </a:t>
+            </a:r>
+            <a:r>
+              <a:rPr lang="en-US" sz="2000" dirty="0" smtClean="0">
+                <a:latin typeface="Arial" pitchFamily="34" charset="0"/>
+                <a:cs typeface="Arial" pitchFamily="34" charset="0"/>
+              </a:rPr>
+              <a:t>dialogue system that is reliable, controllable and affordable.</a:t>
             </a:r>
           </a:p>
         </p:txBody>
@@ -12760,7 +12695,21 @@
                 <a:latin typeface="Arial" pitchFamily="34" charset="0"/>
                 <a:cs typeface="Arial" pitchFamily="34" charset="0"/>
               </a:rPr>
-              <a:t> Dialogue History + DB → LLM → Policy → supervisor → lexicalize → Response</a:t>
+              <a:t> Dialogue History + DB → LLM → </a:t>
+            </a:r>
+            <a:r>
+              <a:rPr lang="en-US" sz="2000" dirty="0" smtClean="0">
+                <a:latin typeface="Arial" pitchFamily="34" charset="0"/>
+                <a:cs typeface="Arial" pitchFamily="34" charset="0"/>
+              </a:rPr>
+              <a:t>lexicalize </a:t>
+            </a:r>
+            <a:r>
+              <a:rPr lang="en-US" sz="2000" dirty="0" smtClean="0">
+                <a:latin typeface="Arial" pitchFamily="34" charset="0"/>
+                <a:cs typeface="Arial" pitchFamily="34" charset="0"/>
+              </a:rPr>
+              <a:t>→ Response</a:t>
             </a:r>
           </a:p>
           <a:p>
@@ -12781,8 +12730,19 @@
                 <a:latin typeface="Arial" pitchFamily="34" charset="0"/>
                 <a:cs typeface="Arial" pitchFamily="34" charset="0"/>
               </a:rPr>
-              <a:t>The LLM produces in a single prompt:</a:t>
-            </a:r>
+              <a:t>The LLM produces in a single </a:t>
+            </a:r>
+            <a:r>
+              <a:rPr lang="en-US" sz="2000" dirty="0" smtClean="0">
+                <a:latin typeface="Arial" pitchFamily="34" charset="0"/>
+                <a:cs typeface="Arial" pitchFamily="34" charset="0"/>
+              </a:rPr>
+              <a:t>prompt (including Policy):</a:t>
+            </a:r>
+            <a:endParaRPr lang="en-US" sz="2000" dirty="0" smtClean="0">
+              <a:latin typeface="Arial" pitchFamily="34" charset="0"/>
+              <a:cs typeface="Arial" pitchFamily="34" charset="0"/>
+            </a:endParaRPr>
           </a:p>
           <a:p>
             <a:pPr>
@@ -12838,7 +12798,14 @@
                 <a:latin typeface="Arial" pitchFamily="34" charset="0"/>
                 <a:cs typeface="Arial" pitchFamily="34" charset="0"/>
               </a:rPr>
-              <a:t>External wrappers (rule-based):</a:t>
+              <a:t>Post-LLM steps (rule-based</a:t>
+            </a:r>
+            <a:r>
+              <a:rPr lang="en-US" sz="2000" dirty="0" smtClean="0">
+                <a:latin typeface="Arial" pitchFamily="34" charset="0"/>
+                <a:cs typeface="Arial" pitchFamily="34" charset="0"/>
+              </a:rPr>
+              <a:t>):</a:t>
             </a:r>
           </a:p>
           <a:p>
@@ -12850,7 +12817,21 @@
                 <a:latin typeface="Arial" pitchFamily="34" charset="0"/>
                 <a:cs typeface="Arial" pitchFamily="34" charset="0"/>
               </a:rPr>
-              <a:t>  • policy: verifies booking-rule compliance</a:t>
+              <a:t>  • </a:t>
+            </a:r>
+            <a:r>
+              <a:rPr lang="en-US" sz="2000" dirty="0" smtClean="0">
+                <a:latin typeface="Arial" pitchFamily="34" charset="0"/>
+                <a:cs typeface="Arial" pitchFamily="34" charset="0"/>
+              </a:rPr>
+              <a:t>lexicalize: fills placeholders with real entity </a:t>
+            </a:r>
+            <a:r>
+              <a:rPr lang="en-US" sz="2000" dirty="0" smtClean="0">
+                <a:latin typeface="Arial" pitchFamily="34" charset="0"/>
+                <a:cs typeface="Arial" pitchFamily="34" charset="0"/>
+              </a:rPr>
+              <a:t>values</a:t>
             </a:r>
           </a:p>
           <a:p>
@@ -12862,8 +12843,12 @@
                 <a:latin typeface="Arial" pitchFamily="34" charset="0"/>
                 <a:cs typeface="Arial" pitchFamily="34" charset="0"/>
               </a:rPr>
-              <a:t>  • supervisor: validates the response</a:t>
-            </a:r>
+              <a:t>Diagnostic checks:</a:t>
+            </a:r>
+            <a:endParaRPr lang="en-US" sz="2000" dirty="0" smtClean="0">
+              <a:latin typeface="Arial" pitchFamily="34" charset="0"/>
+              <a:cs typeface="Arial" pitchFamily="34" charset="0"/>
+            </a:endParaRPr>
           </a:p>
           <a:p>
             <a:pPr>
@@ -12874,7 +12859,33 @@
                 <a:latin typeface="Arial" pitchFamily="34" charset="0"/>
                 <a:cs typeface="Arial" pitchFamily="34" charset="0"/>
               </a:rPr>
-              <a:t>  • lexicalize: fills placeholders with real entity values</a:t>
+              <a:t>  </a:t>
+            </a:r>
+            <a:r>
+              <a:rPr lang="en-US" sz="2000" dirty="0" smtClean="0">
+                <a:latin typeface="Arial" pitchFamily="34" charset="0"/>
+                <a:cs typeface="Arial" pitchFamily="34" charset="0"/>
+              </a:rPr>
+              <a:t>• policy: verifies booking-rule compliance</a:t>
+            </a:r>
+          </a:p>
+          <a:p>
+            <a:pPr>
+              <a:buNone/>
+            </a:pPr>
+            <a:r>
+              <a:rPr lang="en-US" sz="2000" dirty="0" smtClean="0">
+                <a:latin typeface="Arial" pitchFamily="34" charset="0"/>
+                <a:cs typeface="Arial" pitchFamily="34" charset="0"/>
+              </a:rPr>
+              <a:t>  • supervisor: validates the </a:t>
+            </a:r>
+            <a:r>
+              <a:rPr lang="en-US" sz="2000" dirty="0" smtClean="0">
+                <a:latin typeface="Arial" pitchFamily="34" charset="0"/>
+                <a:cs typeface="Arial" pitchFamily="34" charset="0"/>
+              </a:rPr>
+              <a:t>response</a:t>
             </a:r>
           </a:p>
           <a:p>
@@ -12895,7 +12906,21 @@
                 <a:latin typeface="Arial" pitchFamily="34" charset="0"/>
                 <a:cs typeface="Arial" pitchFamily="34" charset="0"/>
               </a:rPr>
-              <a:t>Establishes the upper limit of a monolithic LLM approach.</a:t>
+              <a:t>Establishes the upper limit of a </a:t>
+            </a:r>
+            <a:r>
+              <a:rPr lang="en-US" sz="2000" dirty="0" smtClean="0">
+                <a:latin typeface="Arial" pitchFamily="34" charset="0"/>
+                <a:cs typeface="Arial" pitchFamily="34" charset="0"/>
+              </a:rPr>
+              <a:t>single-prompt </a:t>
+            </a:r>
+            <a:r>
+              <a:rPr lang="en-US" sz="2000" dirty="0" smtClean="0">
+                <a:latin typeface="Arial" pitchFamily="34" charset="0"/>
+                <a:cs typeface="Arial" pitchFamily="34" charset="0"/>
+              </a:rPr>
+              <a:t>LLM approach.</a:t>
             </a:r>
             <a:endParaRPr lang="en-US" sz="2000" dirty="0">
               <a:latin typeface="Arial" pitchFamily="34" charset="0"/>

--- a/docs/presentation.pptx
+++ b/docs/presentation.pptx
@@ -306,7 +306,7 @@
             <a:fld id="{791D8748-2515-4448-AFB0-4E0BAD67A439}" type="datetimeFigureOut">
               <a:rPr lang="en-US" smtClean="0"/>
               <a:pPr/>
-              <a:t>5/21/2026</a:t>
+              <a:t>5/22/2026</a:t>
             </a:fld>
             <a:endParaRPr lang="en-US"/>
           </a:p>
@@ -473,7 +473,7 @@
             <a:fld id="{791D8748-2515-4448-AFB0-4E0BAD67A439}" type="datetimeFigureOut">
               <a:rPr lang="en-US" smtClean="0"/>
               <a:pPr/>
-              <a:t>5/21/2026</a:t>
+              <a:t>5/22/2026</a:t>
             </a:fld>
             <a:endParaRPr lang="en-US"/>
           </a:p>
@@ -650,7 +650,7 @@
             <a:fld id="{791D8748-2515-4448-AFB0-4E0BAD67A439}" type="datetimeFigureOut">
               <a:rPr lang="en-US" smtClean="0"/>
               <a:pPr/>
-              <a:t>5/21/2026</a:t>
+              <a:t>5/22/2026</a:t>
             </a:fld>
             <a:endParaRPr lang="en-US"/>
           </a:p>
@@ -817,7 +817,7 @@
             <a:fld id="{791D8748-2515-4448-AFB0-4E0BAD67A439}" type="datetimeFigureOut">
               <a:rPr lang="en-US" smtClean="0"/>
               <a:pPr/>
-              <a:t>5/21/2026</a:t>
+              <a:t>5/22/2026</a:t>
             </a:fld>
             <a:endParaRPr lang="en-US"/>
           </a:p>
@@ -1060,7 +1060,7 @@
             <a:fld id="{791D8748-2515-4448-AFB0-4E0BAD67A439}" type="datetimeFigureOut">
               <a:rPr lang="en-US" smtClean="0"/>
               <a:pPr/>
-              <a:t>5/21/2026</a:t>
+              <a:t>5/22/2026</a:t>
             </a:fld>
             <a:endParaRPr lang="en-US"/>
           </a:p>
@@ -1345,7 +1345,7 @@
             <a:fld id="{791D8748-2515-4448-AFB0-4E0BAD67A439}" type="datetimeFigureOut">
               <a:rPr lang="en-US" smtClean="0"/>
               <a:pPr/>
-              <a:t>5/21/2026</a:t>
+              <a:t>5/22/2026</a:t>
             </a:fld>
             <a:endParaRPr lang="en-US"/>
           </a:p>
@@ -1764,7 +1764,7 @@
             <a:fld id="{791D8748-2515-4448-AFB0-4E0BAD67A439}" type="datetimeFigureOut">
               <a:rPr lang="en-US" smtClean="0"/>
               <a:pPr/>
-              <a:t>5/21/2026</a:t>
+              <a:t>5/22/2026</a:t>
             </a:fld>
             <a:endParaRPr lang="en-US"/>
           </a:p>
@@ -1879,7 +1879,7 @@
             <a:fld id="{791D8748-2515-4448-AFB0-4E0BAD67A439}" type="datetimeFigureOut">
               <a:rPr lang="en-US" smtClean="0"/>
               <a:pPr/>
-              <a:t>5/21/2026</a:t>
+              <a:t>5/22/2026</a:t>
             </a:fld>
             <a:endParaRPr lang="en-US"/>
           </a:p>
@@ -1971,7 +1971,7 @@
             <a:fld id="{791D8748-2515-4448-AFB0-4E0BAD67A439}" type="datetimeFigureOut">
               <a:rPr lang="en-US" smtClean="0"/>
               <a:pPr/>
-              <a:t>5/21/2026</a:t>
+              <a:t>5/22/2026</a:t>
             </a:fld>
             <a:endParaRPr lang="en-US"/>
           </a:p>
@@ -2245,7 +2245,7 @@
             <a:fld id="{791D8748-2515-4448-AFB0-4E0BAD67A439}" type="datetimeFigureOut">
               <a:rPr lang="en-US" smtClean="0"/>
               <a:pPr/>
-              <a:t>5/21/2026</a:t>
+              <a:t>5/22/2026</a:t>
             </a:fld>
             <a:endParaRPr lang="en-US"/>
           </a:p>
@@ -2495,7 +2495,7 @@
             <a:fld id="{791D8748-2515-4448-AFB0-4E0BAD67A439}" type="datetimeFigureOut">
               <a:rPr lang="en-US" smtClean="0"/>
               <a:pPr/>
-              <a:t>5/21/2026</a:t>
+              <a:t>5/22/2026</a:t>
             </a:fld>
             <a:endParaRPr lang="en-US"/>
           </a:p>
@@ -2705,7 +2705,7 @@
             <a:fld id="{791D8748-2515-4448-AFB0-4E0BAD67A439}" type="datetimeFigureOut">
               <a:rPr lang="en-US" smtClean="0"/>
               <a:pPr/>
-              <a:t>5/21/2026</a:t>
+              <a:t>5/22/2026</a:t>
             </a:fld>
             <a:endParaRPr lang="en-US"/>
           </a:p>
@@ -3405,8 +3405,8 @@
         </p:nvSpPr>
         <p:spPr>
           <a:xfrm>
-            <a:off x="457200" y="1484784"/>
-            <a:ext cx="8229600" cy="5256584"/>
+            <a:off x="457200" y="1628800"/>
+            <a:ext cx="8229600" cy="4608512"/>
           </a:xfrm>
         </p:spPr>
         <p:txBody>
@@ -3468,7 +3468,7 @@
                 <a:latin typeface="Arial" pitchFamily="34" charset="0"/>
                 <a:cs typeface="Arial" pitchFamily="34" charset="0"/>
               </a:rPr>
-              <a:t>Open-source LLMs (used in Exp 1, Exp 2, Exp 3, all 4-bit quantized):</a:t>
+              <a:t>Open-source LLMs (used in Exp 1, Exp 2, Exp 3):</a:t>
             </a:r>
           </a:p>
           <a:p>
@@ -3492,7 +3492,7 @@
                 <a:latin typeface="Arial" pitchFamily="34" charset="0"/>
                 <a:cs typeface="Arial" pitchFamily="34" charset="0"/>
               </a:rPr>
-              <a:t>  • Qwen2.5-14B,  Qwen3-4B / 8B / 14B (Alibaba)</a:t>
+              <a:t>  • Qwen3-4B / 8B / 14B (Alibaba)</a:t>
             </a:r>
           </a:p>
           <a:p>
@@ -3505,6 +3505,30 @@
                 <a:cs typeface="Arial" pitchFamily="34" charset="0"/>
               </a:rPr>
               <a:t>  • Phi-4-14B (Microsoft)</a:t>
+            </a:r>
+          </a:p>
+          <a:p>
+            <a:pPr>
+              <a:buNone/>
+            </a:pPr>
+            <a:r>
+              <a:rPr lang="en-US" sz="2000" dirty="0" smtClean="0">
+                <a:latin typeface="Arial" pitchFamily="34" charset="0"/>
+                <a:cs typeface="Arial" pitchFamily="34" charset="0"/>
+              </a:rPr>
+              <a:t>  • Range: 3B to 14B parameters, 16K to 200K context windows</a:t>
+            </a:r>
+          </a:p>
+          <a:p>
+            <a:pPr>
+              <a:buNone/>
+            </a:pPr>
+            <a:r>
+              <a:rPr lang="en-US" sz="2000" dirty="0" smtClean="0">
+                <a:latin typeface="Arial" pitchFamily="34" charset="0"/>
+                <a:cs typeface="Arial" pitchFamily="34" charset="0"/>
+              </a:rPr>
+              <a:t>  • Infrastructure: EuroHPC Leonardo (CINECA, Italy), NVIDIA A100 GPU</a:t>
             </a:r>
           </a:p>
           <a:p>
@@ -3520,46 +3544,10 @@
             <a:pPr>
               <a:buNone/>
             </a:pPr>
-            <a:r>
-              <a:rPr lang="en-US" sz="2000" dirty="0" smtClean="0">
-                <a:latin typeface="Arial" pitchFamily="34" charset="0"/>
-                <a:cs typeface="Arial" pitchFamily="34" charset="0"/>
-              </a:rPr>
-              <a:t>Range: 3B to 14B parameters, 16K to 200K context windows.</a:t>
-            </a:r>
-          </a:p>
-          <a:p>
-            <a:pPr>
-              <a:buNone/>
-            </a:pPr>
             <a:endParaRPr lang="en-US" sz="2000" dirty="0" smtClean="0">
               <a:latin typeface="Arial" pitchFamily="34" charset="0"/>
               <a:cs typeface="Arial" pitchFamily="34" charset="0"/>
             </a:endParaRPr>
-          </a:p>
-          <a:p>
-            <a:pPr>
-              <a:buNone/>
-            </a:pPr>
-            <a:r>
-              <a:rPr lang="en-US" sz="2000" dirty="0" smtClean="0">
-                <a:latin typeface="Arial" pitchFamily="34" charset="0"/>
-                <a:cs typeface="Arial" pitchFamily="34" charset="0"/>
-              </a:rPr>
-              <a:t>Infrastructure:</a:t>
-            </a:r>
-          </a:p>
-          <a:p>
-            <a:pPr>
-              <a:buNone/>
-            </a:pPr>
-            <a:r>
-              <a:rPr lang="en-US" sz="2000" dirty="0" smtClean="0">
-                <a:latin typeface="Arial" pitchFamily="34" charset="0"/>
-                <a:cs typeface="Arial" pitchFamily="34" charset="0"/>
-              </a:rPr>
-              <a:t>  EuroHPC Leonardo (CINECA, Italy), NVIDIA A100 GPUs.</a:t>
-            </a:r>
           </a:p>
           <a:p>
             <a:pPr>
@@ -3648,8 +3636,8 @@
         </p:nvSpPr>
         <p:spPr>
           <a:xfrm>
-            <a:off x="457200" y="1196752"/>
-            <a:ext cx="8229600" cy="5472608"/>
+            <a:off x="457200" y="1700808"/>
+            <a:ext cx="8229600" cy="4680520"/>
           </a:xfrm>
         </p:spPr>
         <p:txBody>
@@ -3666,8 +3654,19 @@
                 <a:latin typeface="Arial" pitchFamily="34" charset="0"/>
                 <a:cs typeface="Arial" pitchFamily="34" charset="0"/>
               </a:rPr>
-              <a:t>Standard MultiWOZ metrics (Tomiinek mwzeval):</a:t>
-            </a:r>
+              <a:t>Standard MultiWOZ </a:t>
+            </a:r>
+            <a:r>
+              <a:rPr lang="en-US" sz="2000" dirty="0" smtClean="0">
+                <a:latin typeface="Arial" pitchFamily="34" charset="0"/>
+                <a:cs typeface="Arial" pitchFamily="34" charset="0"/>
+              </a:rPr>
+              <a:t>metrics:</a:t>
+            </a:r>
+            <a:endParaRPr lang="en-US" sz="2000" dirty="0" smtClean="0">
+              <a:latin typeface="Arial" pitchFamily="34" charset="0"/>
+              <a:cs typeface="Arial" pitchFamily="34" charset="0"/>
+            </a:endParaRPr>
           </a:p>
           <a:p>
             <a:pPr>
@@ -3727,7 +3726,7 @@
             </a:endParaRPr>
           </a:p>
           <a:p>
-            <a:pPr>
+            <a:pPr marL="0" indent="0">
               <a:buNone/>
             </a:pPr>
             <a:r>
@@ -3735,56 +3734,61 @@
                 <a:latin typeface="Arial" pitchFamily="34" charset="0"/>
                 <a:cs typeface="Arial" pitchFamily="34" charset="0"/>
               </a:rPr>
-              <a:t>Custom metrics (operational):</a:t>
-            </a:r>
-          </a:p>
-          <a:p>
-            <a:pPr>
-              <a:buNone/>
-            </a:pPr>
+              <a:t>Custom metrics (operational</a:t>
+            </a:r>
             <a:r>
               <a:rPr lang="en-US" sz="2000" dirty="0" smtClean="0">
                 <a:latin typeface="Arial" pitchFamily="34" charset="0"/>
                 <a:cs typeface="Arial" pitchFamily="34" charset="0"/>
               </a:rPr>
-              <a:t>  • Hallucination Rate: response grounding</a:t>
-            </a:r>
-          </a:p>
-          <a:p>
-            <a:pPr>
-              <a:buNone/>
-            </a:pPr>
+              <a:t>): Hallucination Rate, Policy </a:t>
+            </a:r>
             <a:r>
               <a:rPr lang="en-US" sz="2000" dirty="0" smtClean="0">
                 <a:latin typeface="Arial" pitchFamily="34" charset="0"/>
                 <a:cs typeface="Arial" pitchFamily="34" charset="0"/>
               </a:rPr>
-              <a:t>  • Policy Violation Rate: booking-rule compliance</a:t>
-            </a:r>
-          </a:p>
-          <a:p>
-            <a:pPr>
-              <a:buNone/>
-            </a:pPr>
+              <a:t>Violation </a:t>
+            </a:r>
             <a:r>
               <a:rPr lang="en-US" sz="2000" dirty="0" smtClean="0">
                 <a:latin typeface="Arial" pitchFamily="34" charset="0"/>
                 <a:cs typeface="Arial" pitchFamily="34" charset="0"/>
               </a:rPr>
-              <a:t>  • Domain / Intent Precision: classification accuracy</a:t>
-            </a:r>
-          </a:p>
-          <a:p>
-            <a:pPr>
-              <a:buNone/>
-            </a:pPr>
+              <a:t>Rate, Domain </a:t>
+            </a:r>
             <a:r>
               <a:rPr lang="en-US" sz="2000" dirty="0" smtClean="0">
                 <a:latin typeface="Arial" pitchFamily="34" charset="0"/>
                 <a:cs typeface="Arial" pitchFamily="34" charset="0"/>
               </a:rPr>
-              <a:t>  • Latency (s),  Cost ($): deployment cost</a:t>
-            </a:r>
+              <a:t>/ Intent </a:t>
+            </a:r>
+            <a:r>
+              <a:rPr lang="en-US" sz="2000" dirty="0" smtClean="0">
+                <a:latin typeface="Arial" pitchFamily="34" charset="0"/>
+                <a:cs typeface="Arial" pitchFamily="34" charset="0"/>
+              </a:rPr>
+              <a:t>Precision, Latency </a:t>
+            </a:r>
+            <a:r>
+              <a:rPr lang="en-US" sz="2000" dirty="0" smtClean="0">
+                <a:latin typeface="Arial" pitchFamily="34" charset="0"/>
+                <a:cs typeface="Arial" pitchFamily="34" charset="0"/>
+              </a:rPr>
+              <a:t>(s),  Cost </a:t>
+            </a:r>
+            <a:r>
+              <a:rPr lang="en-US" sz="2000" dirty="0" smtClean="0">
+                <a:latin typeface="Arial" pitchFamily="34" charset="0"/>
+                <a:cs typeface="Arial" pitchFamily="34" charset="0"/>
+              </a:rPr>
+              <a:t>($).</a:t>
+            </a:r>
+            <a:endParaRPr lang="en-US" sz="2000" dirty="0" smtClean="0">
+              <a:latin typeface="Arial" pitchFamily="34" charset="0"/>
+              <a:cs typeface="Arial" pitchFamily="34" charset="0"/>
+            </a:endParaRPr>
           </a:p>
           <a:p>
             <a:pPr>
@@ -5465,8 +5469,19 @@
                 <a:latin typeface="Arial" pitchFamily="34" charset="0"/>
                 <a:cs typeface="Arial" pitchFamily="34" charset="0"/>
               </a:rPr>
-              <a:t>• Haiku leads, but at ~8× the cost of GPT-4o-mini</a:t>
-            </a:r>
+              <a:t>• Haiku leads, but at </a:t>
+            </a:r>
+            <a:r>
+              <a:rPr lang="en-US" sz="1600" dirty="0" smtClean="0">
+                <a:latin typeface="Arial" pitchFamily="34" charset="0"/>
+                <a:cs typeface="Arial" pitchFamily="34" charset="0"/>
+              </a:rPr>
+              <a:t>very high cost</a:t>
+            </a:r>
+            <a:endParaRPr lang="en-US" sz="1600" dirty="0" smtClean="0">
+              <a:latin typeface="Arial" pitchFamily="34" charset="0"/>
+              <a:cs typeface="Arial" pitchFamily="34" charset="0"/>
+            </a:endParaRPr>
           </a:p>
           <a:p>
             <a:r>
@@ -8096,16 +8111,41 @@
                 <a:latin typeface="Arial" pitchFamily="34" charset="0"/>
                 <a:cs typeface="Arial" pitchFamily="34" charset="0"/>
               </a:rPr>
-              <a:t>  • Decomposition helps weak models dramatically: LLaMA-3.1-8B, GPT-4o-mini.</a:t>
-            </a:r>
-          </a:p>
-          <a:p>
+              <a:t>  • Decomposition helps weak models dramatically: LLaMA-3.1-8B, </a:t>
+            </a:r>
             <a:r>
               <a:rPr lang="en-US" sz="1600" dirty="0" smtClean="0">
                 <a:latin typeface="Arial" pitchFamily="34" charset="0"/>
                 <a:cs typeface="Arial" pitchFamily="34" charset="0"/>
               </a:rPr>
-              <a:t>    But hurts strong open-source: Qwen3-14B, Phi-4-14B</a:t>
+              <a:t>GPT-4o-mini,</a:t>
+            </a:r>
+            <a:endParaRPr lang="en-US" sz="1600" dirty="0" smtClean="0">
+              <a:latin typeface="Arial" pitchFamily="34" charset="0"/>
+              <a:cs typeface="Arial" pitchFamily="34" charset="0"/>
+            </a:endParaRPr>
+          </a:p>
+          <a:p>
+            <a:r>
+              <a:rPr lang="en-US" sz="1600" dirty="0" smtClean="0">
+                <a:latin typeface="Arial" pitchFamily="34" charset="0"/>
+                <a:cs typeface="Arial" pitchFamily="34" charset="0"/>
+              </a:rPr>
+              <a:t>    </a:t>
+            </a:r>
+            <a:r>
+              <a:rPr lang="en-US" sz="1600" dirty="0" smtClean="0">
+                <a:latin typeface="Arial" pitchFamily="34" charset="0"/>
+                <a:cs typeface="Arial" pitchFamily="34" charset="0"/>
+              </a:rPr>
+              <a:t>but </a:t>
+            </a:r>
+            <a:r>
+              <a:rPr lang="en-US" sz="1600" dirty="0" smtClean="0">
+                <a:latin typeface="Arial" pitchFamily="34" charset="0"/>
+                <a:cs typeface="Arial" pitchFamily="34" charset="0"/>
+              </a:rPr>
+              <a:t>hurts strong open-source: Qwen3-14B, Phi-4-14B</a:t>
             </a:r>
           </a:p>
           <a:p>
@@ -9767,16 +9807,90 @@
                 <a:latin typeface="Arial" pitchFamily="34" charset="0"/>
                 <a:cs typeface="Arial" pitchFamily="34" charset="0"/>
               </a:rPr>
-              <a:t>  • Fine-tuning closes the DST gap with commercial APIs: Qwen3-14B FT reaches JGA 47.7, matching Haiku Exp 2 (45.1)</a:t>
-            </a:r>
-          </a:p>
-          <a:p>
+              <a:t>  • Fine-tuning closes the DST gap with commercial APIs: Qwen3-14B FT </a:t>
+            </a:r>
             <a:r>
               <a:rPr lang="en-US" sz="1600" dirty="0" smtClean="0">
                 <a:latin typeface="Arial" pitchFamily="34" charset="0"/>
                 <a:cs typeface="Arial" pitchFamily="34" charset="0"/>
               </a:rPr>
-              <a:t>  • But Combined Score plateaus at ~71, 21 points behind Haiku (91.4). Bottleneck shifts from DST to ResponseGen</a:t>
+              <a:t>reaches </a:t>
+            </a:r>
+          </a:p>
+          <a:p>
+            <a:r>
+              <a:rPr lang="en-US" sz="1600" dirty="0" smtClean="0">
+                <a:latin typeface="Arial" pitchFamily="34" charset="0"/>
+                <a:cs typeface="Arial" pitchFamily="34" charset="0"/>
+              </a:rPr>
+              <a:t>    JGA </a:t>
+            </a:r>
+            <a:r>
+              <a:rPr lang="en-US" sz="1600" dirty="0" smtClean="0">
+                <a:latin typeface="Arial" pitchFamily="34" charset="0"/>
+                <a:cs typeface="Arial" pitchFamily="34" charset="0"/>
+              </a:rPr>
+              <a:t>47.7, matching Haiku Exp 2 (45.1)</a:t>
+            </a:r>
+          </a:p>
+          <a:p>
+            <a:r>
+              <a:rPr lang="en-US" sz="1600" dirty="0" smtClean="0">
+                <a:latin typeface="Arial" pitchFamily="34" charset="0"/>
+                <a:cs typeface="Arial" pitchFamily="34" charset="0"/>
+              </a:rPr>
+              <a:t>  • But Combined Score </a:t>
+            </a:r>
+            <a:r>
+              <a:rPr lang="en-US" sz="1600" dirty="0" smtClean="0">
+                <a:latin typeface="Arial" pitchFamily="34" charset="0"/>
+                <a:cs typeface="Arial" pitchFamily="34" charset="0"/>
+              </a:rPr>
+              <a:t>stays </a:t>
+            </a:r>
+            <a:r>
+              <a:rPr lang="en-US" sz="1600" dirty="0" smtClean="0">
+                <a:latin typeface="Arial" pitchFamily="34" charset="0"/>
+                <a:cs typeface="Arial" pitchFamily="34" charset="0"/>
+              </a:rPr>
+              <a:t>at ~71, 21 points behind Haiku (91.4). </a:t>
+            </a:r>
+            <a:r>
+              <a:rPr lang="en-US" sz="1600" dirty="0" smtClean="0">
+                <a:latin typeface="Arial" pitchFamily="34" charset="0"/>
+                <a:cs typeface="Arial" pitchFamily="34" charset="0"/>
+              </a:rPr>
+              <a:t>Bottleneck </a:t>
+            </a:r>
+          </a:p>
+          <a:p>
+            <a:r>
+              <a:rPr lang="en-US" sz="1600" dirty="0" smtClean="0">
+                <a:latin typeface="Arial" pitchFamily="34" charset="0"/>
+                <a:cs typeface="Arial" pitchFamily="34" charset="0"/>
+              </a:rPr>
+              <a:t> </a:t>
+            </a:r>
+            <a:r>
+              <a:rPr lang="en-US" sz="1600" dirty="0" smtClean="0">
+                <a:latin typeface="Arial" pitchFamily="34" charset="0"/>
+                <a:cs typeface="Arial" pitchFamily="34" charset="0"/>
+              </a:rPr>
+              <a:t>  </a:t>
+            </a:r>
+            <a:r>
+              <a:rPr lang="en-US" sz="1600" dirty="0" smtClean="0">
+                <a:latin typeface="Arial" pitchFamily="34" charset="0"/>
+                <a:cs typeface="Arial" pitchFamily="34" charset="0"/>
+              </a:rPr>
+              <a:t> </a:t>
+            </a:r>
+            <a:r>
+              <a:rPr lang="en-US" sz="1600" dirty="0" smtClean="0">
+                <a:latin typeface="Arial" pitchFamily="34" charset="0"/>
+                <a:cs typeface="Arial" pitchFamily="34" charset="0"/>
+              </a:rPr>
+              <a:t>shifts from DST to ResponseGen</a:t>
             </a:r>
           </a:p>
           <a:p>
@@ -11159,7 +11273,7 @@
         <p:spPr>
           <a:xfrm>
             <a:off x="457200" y="1412776"/>
-            <a:ext cx="8229600" cy="5328592"/>
+            <a:ext cx="8229600" cy="5112568"/>
           </a:xfrm>
         </p:spPr>
         <p:txBody>
@@ -11290,8 +11404,19 @@
                 <a:latin typeface="Arial" pitchFamily="34" charset="0"/>
                 <a:cs typeface="Arial" pitchFamily="34" charset="0"/>
               </a:rPr>
-              <a:t>  Architecture × zero-shot discipline.</a:t>
-            </a:r>
+              <a:t>  Architecture </a:t>
+            </a:r>
+            <a:r>
+              <a:rPr lang="en-US" sz="2000" dirty="0" smtClean="0">
+                <a:latin typeface="Arial" pitchFamily="34" charset="0"/>
+                <a:cs typeface="Arial" pitchFamily="34" charset="0"/>
+              </a:rPr>
+              <a:t>depends on baseline.</a:t>
+            </a:r>
+            <a:endParaRPr lang="en-US" sz="2000" dirty="0" smtClean="0">
+              <a:latin typeface="Arial" pitchFamily="34" charset="0"/>
+              <a:cs typeface="Arial" pitchFamily="34" charset="0"/>
+            </a:endParaRPr>
           </a:p>
           <a:p>
             <a:pPr marL="0" indent="0">
@@ -11302,7 +11427,21 @@
                 <a:latin typeface="Arial" pitchFamily="34" charset="0"/>
                 <a:cs typeface="Arial" pitchFamily="34" charset="0"/>
               </a:rPr>
-              <a:t>  Disciplined zero-shot models peak in Exp 1.</a:t>
+              <a:t>  </a:t>
+            </a:r>
+            <a:r>
+              <a:rPr lang="en-US" sz="2000" dirty="0" smtClean="0">
+                <a:latin typeface="Arial" pitchFamily="34" charset="0"/>
+                <a:cs typeface="Arial" pitchFamily="34" charset="0"/>
+              </a:rPr>
+              <a:t>Disciplined </a:t>
+            </a:r>
+            <a:r>
+              <a:rPr lang="en-US" sz="2000" dirty="0" smtClean="0">
+                <a:latin typeface="Arial" pitchFamily="34" charset="0"/>
+                <a:cs typeface="Arial" pitchFamily="34" charset="0"/>
+              </a:rPr>
+              <a:t>models peak in Exp 1.</a:t>
             </a:r>
           </a:p>
           <a:p>
@@ -11433,7 +11572,21 @@
                 <a:latin typeface="Arial" pitchFamily="34" charset="0"/>
                 <a:cs typeface="Arial" pitchFamily="34" charset="0"/>
               </a:rPr>
-              <a:t>• The architecture × discipline principle is empirical,</a:t>
+              <a:t>• The architecture × </a:t>
+            </a:r>
+            <a:r>
+              <a:rPr lang="en-US" sz="2000" dirty="0" smtClean="0">
+                <a:latin typeface="Arial" pitchFamily="34" charset="0"/>
+                <a:cs typeface="Arial" pitchFamily="34" charset="0"/>
+              </a:rPr>
+              <a:t>baseline </a:t>
+            </a:r>
+            <a:r>
+              <a:rPr lang="en-US" sz="2000" dirty="0" smtClean="0">
+                <a:latin typeface="Arial" pitchFamily="34" charset="0"/>
+                <a:cs typeface="Arial" pitchFamily="34" charset="0"/>
+              </a:rPr>
+              <a:t>principle is empirical,</a:t>
             </a:r>
             <a:r>
               <a:rPr lang="el-GR" sz="2000" dirty="0" smtClean="0">
@@ -11504,7 +11657,21 @@
                 <a:latin typeface="Arial" pitchFamily="34" charset="0"/>
                 <a:cs typeface="Arial" pitchFamily="34" charset="0"/>
               </a:rPr>
-              <a:t>  • Extend to all 5 MultiWOZ domains, or specialize to a single domain</a:t>
+              <a:t>  • Extend to all </a:t>
+            </a:r>
+            <a:r>
+              <a:rPr lang="en-US" sz="2000" dirty="0" smtClean="0">
+                <a:latin typeface="Arial" pitchFamily="34" charset="0"/>
+                <a:cs typeface="Arial" pitchFamily="34" charset="0"/>
+              </a:rPr>
+              <a:t>MultiWOZ </a:t>
+            </a:r>
+            <a:r>
+              <a:rPr lang="en-US" sz="2000" dirty="0" smtClean="0">
+                <a:latin typeface="Arial" pitchFamily="34" charset="0"/>
+                <a:cs typeface="Arial" pitchFamily="34" charset="0"/>
+              </a:rPr>
+              <a:t>domains, or specialize to a single domain</a:t>
             </a:r>
           </a:p>
           <a:p>
@@ -11516,8 +11683,33 @@
                 <a:latin typeface="Arial" pitchFamily="34" charset="0"/>
                 <a:cs typeface="Arial" pitchFamily="34" charset="0"/>
               </a:rPr>
-              <a:t>  • Explore advanced prompting (knowledge generation, self consistency, retrieval-augmented few-shot examples)</a:t>
-            </a:r>
+              <a:t>  • Explore </a:t>
+            </a:r>
+            <a:r>
+              <a:rPr lang="en-US" sz="2000" dirty="0" smtClean="0">
+                <a:latin typeface="Arial" pitchFamily="34" charset="0"/>
+                <a:cs typeface="Arial" pitchFamily="34" charset="0"/>
+              </a:rPr>
+              <a:t>prompting alternatives, e.g., </a:t>
+            </a:r>
+            <a:r>
+              <a:rPr lang="en-US" sz="2000" dirty="0" smtClean="0">
+                <a:latin typeface="Arial" pitchFamily="34" charset="0"/>
+                <a:cs typeface="Arial" pitchFamily="34" charset="0"/>
+              </a:rPr>
+              <a:t>retrieval-augmented </a:t>
+            </a:r>
+            <a:r>
+              <a:rPr lang="en-US" sz="2000" dirty="0" smtClean="0">
+                <a:latin typeface="Arial" pitchFamily="34" charset="0"/>
+                <a:cs typeface="Arial" pitchFamily="34" charset="0"/>
+              </a:rPr>
+              <a:t>few-shot</a:t>
+            </a:r>
+            <a:endParaRPr lang="en-US" sz="2000" dirty="0" smtClean="0">
+              <a:latin typeface="Arial" pitchFamily="34" charset="0"/>
+              <a:cs typeface="Arial" pitchFamily="34" charset="0"/>
+            </a:endParaRPr>
           </a:p>
           <a:p>
             <a:pPr>
@@ -11797,21 +11989,7 @@
                 <a:latin typeface="Arial" pitchFamily="34" charset="0"/>
                 <a:cs typeface="Arial" pitchFamily="34" charset="0"/>
               </a:rPr>
-              <a:t>: </a:t>
-            </a:r>
-            <a:r>
-              <a:rPr lang="en-US" sz="2000" dirty="0" smtClean="0">
-                <a:latin typeface="Arial" pitchFamily="34" charset="0"/>
-                <a:cs typeface="Arial" pitchFamily="34" charset="0"/>
-              </a:rPr>
-              <a:t>investigate the architectural choices that lead to a customer-service </a:t>
-            </a:r>
-            <a:r>
-              <a:rPr lang="en-US" sz="2000" dirty="0" smtClean="0">
-                <a:latin typeface="Arial" pitchFamily="34" charset="0"/>
-                <a:cs typeface="Arial" pitchFamily="34" charset="0"/>
-              </a:rPr>
-              <a:t>dialogue system that is reliable, controllable and affordable.</a:t>
+              <a:t>: investigate the architectural choices that lead to a customer-service dialogue system that is reliable, controllable and affordable.</a:t>
             </a:r>
           </a:p>
         </p:txBody>
@@ -12266,8 +12444,60 @@
                 <a:latin typeface="Arial" pitchFamily="34" charset="0"/>
                 <a:cs typeface="Arial" pitchFamily="34" charset="0"/>
               </a:rPr>
-              <a:t>Zero-shot LLM pipelines (Hudeček &amp; Dušek 2023, SGP-TOD 2023)</a:t>
-            </a:r>
+              <a:t>Information enrichment: </a:t>
+            </a:r>
+          </a:p>
+          <a:p>
+            <a:pPr lvl="1"/>
+            <a:r>
+              <a:rPr lang="en-US" sz="1600" dirty="0" smtClean="0">
+                <a:latin typeface="Arial" pitchFamily="34" charset="0"/>
+                <a:cs typeface="Arial" pitchFamily="34" charset="0"/>
+              </a:rPr>
+              <a:t>Schema-guided prompts (SGP-TOD </a:t>
+            </a:r>
+            <a:r>
+              <a:rPr lang="en-US" sz="1600" dirty="0" smtClean="0">
+                <a:latin typeface="Arial" pitchFamily="34" charset="0"/>
+                <a:cs typeface="Arial" pitchFamily="34" charset="0"/>
+              </a:rPr>
+              <a:t>2023</a:t>
+            </a:r>
+            <a:r>
+              <a:rPr lang="en-US" sz="1600" dirty="0" smtClean="0">
+                <a:latin typeface="Arial" pitchFamily="34" charset="0"/>
+                <a:cs typeface="Arial" pitchFamily="34" charset="0"/>
+              </a:rPr>
+              <a:t>)</a:t>
+            </a:r>
+          </a:p>
+          <a:p>
+            <a:pPr lvl="1"/>
+            <a:r>
+              <a:rPr lang="en-US" sz="1600" dirty="0" smtClean="0">
+                <a:latin typeface="Arial" pitchFamily="34" charset="0"/>
+                <a:cs typeface="Arial" pitchFamily="34" charset="0"/>
+              </a:rPr>
+              <a:t>Examples from training </a:t>
+            </a:r>
+            <a:r>
+              <a:rPr lang="en-US" sz="1600" dirty="0" smtClean="0">
+                <a:latin typeface="Arial" pitchFamily="34" charset="0"/>
+                <a:cs typeface="Arial" pitchFamily="34" charset="0"/>
+              </a:rPr>
+              <a:t>set (Hudeček &amp; </a:t>
+            </a:r>
+            <a:r>
+              <a:rPr lang="en-US" sz="1600" dirty="0" smtClean="0">
+                <a:latin typeface="Arial" pitchFamily="34" charset="0"/>
+                <a:cs typeface="Arial" pitchFamily="34" charset="0"/>
+              </a:rPr>
+              <a:t>Dušek, few-shot variant)</a:t>
+            </a:r>
+            <a:endParaRPr lang="en-US" sz="1600" dirty="0" smtClean="0">
+              <a:latin typeface="Arial" pitchFamily="34" charset="0"/>
+              <a:cs typeface="Arial" pitchFamily="34" charset="0"/>
+            </a:endParaRPr>
           </a:p>
           <a:p>
             <a:r>
@@ -12275,16 +12505,74 @@
                 <a:latin typeface="Arial" pitchFamily="34" charset="0"/>
                 <a:cs typeface="Arial" pitchFamily="34" charset="0"/>
               </a:rPr>
-              <a:t>Modular / multi-agent LLMs (DARD 2024, DIMF 2025)</a:t>
-            </a:r>
-          </a:p>
-          <a:p>
+              <a:t>Task Decomposition: modular pipelines </a:t>
+            </a:r>
             <a:r>
               <a:rPr lang="en-US" sz="2000" dirty="0" smtClean="0">
                 <a:latin typeface="Arial" pitchFamily="34" charset="0"/>
                 <a:cs typeface="Arial" pitchFamily="34" charset="0"/>
               </a:rPr>
-              <a:t>PEFT for TOD (LDST 2024, Spec-TOD 2025)</a:t>
+              <a:t>/ multi-agent LLMs </a:t>
+            </a:r>
+            <a:endParaRPr lang="en-US" sz="2000" dirty="0" smtClean="0">
+              <a:latin typeface="Arial" pitchFamily="34" charset="0"/>
+              <a:cs typeface="Arial" pitchFamily="34" charset="0"/>
+            </a:endParaRPr>
+          </a:p>
+          <a:p>
+            <a:pPr>
+              <a:buNone/>
+            </a:pPr>
+            <a:r>
+              <a:rPr lang="en-US" sz="2000" dirty="0" smtClean="0">
+                <a:latin typeface="Arial" pitchFamily="34" charset="0"/>
+                <a:cs typeface="Arial" pitchFamily="34" charset="0"/>
+              </a:rPr>
+              <a:t> </a:t>
+            </a:r>
+            <a:r>
+              <a:rPr lang="en-US" sz="2000" dirty="0" smtClean="0">
+                <a:latin typeface="Arial" pitchFamily="34" charset="0"/>
+                <a:cs typeface="Arial" pitchFamily="34" charset="0"/>
+              </a:rPr>
+              <a:t>    </a:t>
+            </a:r>
+            <a:r>
+              <a:rPr lang="en-US" sz="2000" dirty="0" smtClean="0">
+                <a:latin typeface="Arial" pitchFamily="34" charset="0"/>
+                <a:cs typeface="Arial" pitchFamily="34" charset="0"/>
+              </a:rPr>
+              <a:t>(Hudeček &amp; Dušek 2023, </a:t>
+            </a:r>
+            <a:r>
+              <a:rPr lang="en-US" sz="2000" dirty="0" smtClean="0">
+                <a:latin typeface="Arial" pitchFamily="34" charset="0"/>
+                <a:cs typeface="Arial" pitchFamily="34" charset="0"/>
+              </a:rPr>
+              <a:t>DARD </a:t>
+            </a:r>
+            <a:r>
+              <a:rPr lang="en-US" sz="2000" dirty="0" smtClean="0">
+                <a:latin typeface="Arial" pitchFamily="34" charset="0"/>
+                <a:cs typeface="Arial" pitchFamily="34" charset="0"/>
+              </a:rPr>
+              <a:t>2024, DIMF 2025)</a:t>
+            </a:r>
+          </a:p>
+          <a:p>
+            <a:r>
+              <a:rPr lang="en-US" sz="2000" dirty="0" smtClean="0">
+                <a:latin typeface="Arial" pitchFamily="34" charset="0"/>
+                <a:cs typeface="Arial" pitchFamily="34" charset="0"/>
+              </a:rPr>
+              <a:t>PEFT: LoRA fine-tuning (Spec-TOD </a:t>
+            </a:r>
+            <a:r>
+              <a:rPr lang="en-US" sz="2000" dirty="0" smtClean="0">
+                <a:latin typeface="Arial" pitchFamily="34" charset="0"/>
+                <a:cs typeface="Arial" pitchFamily="34" charset="0"/>
+              </a:rPr>
+              <a:t>2025)</a:t>
             </a:r>
           </a:p>
           <a:p>
@@ -12665,8 +12953,8 @@
         </p:nvSpPr>
         <p:spPr>
           <a:xfrm>
-            <a:off x="457200" y="1340768"/>
-            <a:ext cx="8229600" cy="5517232"/>
+            <a:off x="457200" y="1412776"/>
+            <a:ext cx="8229600" cy="5256584"/>
           </a:xfrm>
         </p:spPr>
         <p:txBody>
@@ -12695,21 +12983,7 @@
                 <a:latin typeface="Arial" pitchFamily="34" charset="0"/>
                 <a:cs typeface="Arial" pitchFamily="34" charset="0"/>
               </a:rPr>
-              <a:t> Dialogue History + DB → LLM → </a:t>
-            </a:r>
-            <a:r>
-              <a:rPr lang="en-US" sz="2000" dirty="0" smtClean="0">
-                <a:latin typeface="Arial" pitchFamily="34" charset="0"/>
-                <a:cs typeface="Arial" pitchFamily="34" charset="0"/>
-              </a:rPr>
-              <a:t>lexicalize </a:t>
-            </a:r>
-            <a:r>
-              <a:rPr lang="en-US" sz="2000" dirty="0" smtClean="0">
-                <a:latin typeface="Arial" pitchFamily="34" charset="0"/>
-                <a:cs typeface="Arial" pitchFamily="34" charset="0"/>
-              </a:rPr>
-              <a:t>→ Response</a:t>
+              <a:t> Dialogue History + DB → LLM → lexicalize → Response</a:t>
             </a:r>
           </a:p>
           <a:p>
@@ -12730,19 +13004,8 @@
                 <a:latin typeface="Arial" pitchFamily="34" charset="0"/>
                 <a:cs typeface="Arial" pitchFamily="34" charset="0"/>
               </a:rPr>
-              <a:t>The LLM produces in a single </a:t>
-            </a:r>
-            <a:r>
-              <a:rPr lang="en-US" sz="2000" dirty="0" smtClean="0">
-                <a:latin typeface="Arial" pitchFamily="34" charset="0"/>
-                <a:cs typeface="Arial" pitchFamily="34" charset="0"/>
-              </a:rPr>
-              <a:t>prompt (including Policy):</a:t>
-            </a:r>
-            <a:endParaRPr lang="en-US" sz="2000" dirty="0" smtClean="0">
-              <a:latin typeface="Arial" pitchFamily="34" charset="0"/>
-              <a:cs typeface="Arial" pitchFamily="34" charset="0"/>
-            </a:endParaRPr>
+              <a:t>The LLM produces in a single prompt (including Policy):</a:t>
+            </a:r>
           </a:p>
           <a:p>
             <a:pPr>
@@ -12798,94 +13061,19 @@
                 <a:latin typeface="Arial" pitchFamily="34" charset="0"/>
                 <a:cs typeface="Arial" pitchFamily="34" charset="0"/>
               </a:rPr>
-              <a:t>Post-LLM steps (rule-based</a:t>
-            </a:r>
+              <a:t>Post-LLM steps (rule-based):</a:t>
+            </a:r>
+          </a:p>
+          <a:p>
+            <a:pPr>
+              <a:buNone/>
+            </a:pPr>
             <a:r>
               <a:rPr lang="en-US" sz="2000" dirty="0" smtClean="0">
                 <a:latin typeface="Arial" pitchFamily="34" charset="0"/>
                 <a:cs typeface="Arial" pitchFamily="34" charset="0"/>
               </a:rPr>
-              <a:t>):</a:t>
-            </a:r>
-          </a:p>
-          <a:p>
-            <a:pPr>
-              <a:buNone/>
-            </a:pPr>
-            <a:r>
-              <a:rPr lang="en-US" sz="2000" dirty="0" smtClean="0">
-                <a:latin typeface="Arial" pitchFamily="34" charset="0"/>
-                <a:cs typeface="Arial" pitchFamily="34" charset="0"/>
-              </a:rPr>
-              <a:t>  • </a:t>
-            </a:r>
-            <a:r>
-              <a:rPr lang="en-US" sz="2000" dirty="0" smtClean="0">
-                <a:latin typeface="Arial" pitchFamily="34" charset="0"/>
-                <a:cs typeface="Arial" pitchFamily="34" charset="0"/>
-              </a:rPr>
-              <a:t>lexicalize: fills placeholders with real entity </a:t>
-            </a:r>
-            <a:r>
-              <a:rPr lang="en-US" sz="2000" dirty="0" smtClean="0">
-                <a:latin typeface="Arial" pitchFamily="34" charset="0"/>
-                <a:cs typeface="Arial" pitchFamily="34" charset="0"/>
-              </a:rPr>
-              <a:t>values</a:t>
-            </a:r>
-          </a:p>
-          <a:p>
-            <a:pPr>
-              <a:buNone/>
-            </a:pPr>
-            <a:r>
-              <a:rPr lang="en-US" sz="2000" dirty="0" smtClean="0">
-                <a:latin typeface="Arial" pitchFamily="34" charset="0"/>
-                <a:cs typeface="Arial" pitchFamily="34" charset="0"/>
-              </a:rPr>
-              <a:t>Diagnostic checks:</a:t>
-            </a:r>
-            <a:endParaRPr lang="en-US" sz="2000" dirty="0" smtClean="0">
-              <a:latin typeface="Arial" pitchFamily="34" charset="0"/>
-              <a:cs typeface="Arial" pitchFamily="34" charset="0"/>
-            </a:endParaRPr>
-          </a:p>
-          <a:p>
-            <a:pPr>
-              <a:buNone/>
-            </a:pPr>
-            <a:r>
-              <a:rPr lang="en-US" sz="2000" dirty="0" smtClean="0">
-                <a:latin typeface="Arial" pitchFamily="34" charset="0"/>
-                <a:cs typeface="Arial" pitchFamily="34" charset="0"/>
-              </a:rPr>
-              <a:t>  </a:t>
-            </a:r>
-            <a:r>
-              <a:rPr lang="en-US" sz="2000" dirty="0" smtClean="0">
-                <a:latin typeface="Arial" pitchFamily="34" charset="0"/>
-                <a:cs typeface="Arial" pitchFamily="34" charset="0"/>
-              </a:rPr>
-              <a:t>• policy: verifies booking-rule compliance</a:t>
-            </a:r>
-          </a:p>
-          <a:p>
-            <a:pPr>
-              <a:buNone/>
-            </a:pPr>
-            <a:r>
-              <a:rPr lang="en-US" sz="2000" dirty="0" smtClean="0">
-                <a:latin typeface="Arial" pitchFamily="34" charset="0"/>
-                <a:cs typeface="Arial" pitchFamily="34" charset="0"/>
-              </a:rPr>
-              <a:t>  • supervisor: validates the </a:t>
-            </a:r>
-            <a:r>
-              <a:rPr lang="en-US" sz="2000" dirty="0" smtClean="0">
-                <a:latin typeface="Arial" pitchFamily="34" charset="0"/>
-                <a:cs typeface="Arial" pitchFamily="34" charset="0"/>
-              </a:rPr>
-              <a:t>response</a:t>
+              <a:t>  • lexicalize: fills placeholders with real entity values</a:t>
             </a:r>
           </a:p>
           <a:p>
@@ -12901,26 +13089,21 @@
             <a:pPr>
               <a:buNone/>
             </a:pPr>
+            <a:endParaRPr lang="en-US" sz="2000" dirty="0" smtClean="0">
+              <a:latin typeface="Arial" pitchFamily="34" charset="0"/>
+              <a:cs typeface="Arial" pitchFamily="34" charset="0"/>
+            </a:endParaRPr>
+          </a:p>
+          <a:p>
+            <a:pPr>
+              <a:buNone/>
+            </a:pPr>
             <a:r>
               <a:rPr lang="en-US" sz="2000" dirty="0" smtClean="0">
                 <a:latin typeface="Arial" pitchFamily="34" charset="0"/>
                 <a:cs typeface="Arial" pitchFamily="34" charset="0"/>
               </a:rPr>
-              <a:t>Establishes the upper limit of a </a:t>
-            </a:r>
-            <a:r>
-              <a:rPr lang="en-US" sz="2000" dirty="0" smtClean="0">
-                <a:latin typeface="Arial" pitchFamily="34" charset="0"/>
-                <a:cs typeface="Arial" pitchFamily="34" charset="0"/>
-              </a:rPr>
-              <a:t>single-prompt </a:t>
-            </a:r>
-            <a:r>
-              <a:rPr lang="en-US" sz="2000" dirty="0" smtClean="0">
-                <a:latin typeface="Arial" pitchFamily="34" charset="0"/>
-                <a:cs typeface="Arial" pitchFamily="34" charset="0"/>
-              </a:rPr>
-              <a:t>LLM approach.</a:t>
+              <a:t>Establishes the upper limit of a single-prompt LLM approach.</a:t>
             </a:r>
             <a:endParaRPr lang="en-US" sz="2000" dirty="0">
               <a:latin typeface="Arial" pitchFamily="34" charset="0"/>
@@ -13049,7 +13232,7 @@
                 <a:latin typeface="Arial" pitchFamily="34" charset="0"/>
                 <a:cs typeface="Arial" pitchFamily="34" charset="0"/>
               </a:rPr>
-              <a:t>Two LLM calls (zero-shot, prompted):</a:t>
+              <a:t>Two LLM calls:</a:t>
             </a:r>
           </a:p>
           <a:p>
@@ -13094,7 +13277,7 @@
                 <a:latin typeface="Arial" pitchFamily="34" charset="0"/>
                 <a:cs typeface="Arial" pitchFamily="34" charset="0"/>
               </a:rPr>
-              <a:t>Rule-based code (no LLM):</a:t>
+              <a:t>Deterministic steps (no LLM):</a:t>
             </a:r>
           </a:p>
           <a:p>
@@ -13163,7 +13346,7 @@
                 <a:latin typeface="Arial" pitchFamily="34" charset="0"/>
                 <a:cs typeface="Arial" pitchFamily="34" charset="0"/>
               </a:rPr>
-              <a:t>Decomposes the monolithic task into focused, role-specialized calls.</a:t>
+              <a:t>Decomposes Exp 1’s task into focused, role-specialized calls.</a:t>
             </a:r>
             <a:endParaRPr lang="en-US" sz="2000" dirty="0">
               <a:latin typeface="Arial" pitchFamily="34" charset="0"/>

--- a/docs/presentation.pptx
+++ b/docs/presentation.pptx
@@ -306,7 +306,7 @@
             <a:fld id="{791D8748-2515-4448-AFB0-4E0BAD67A439}" type="datetimeFigureOut">
               <a:rPr lang="en-US" smtClean="0"/>
               <a:pPr/>
-              <a:t>5/22/2026</a:t>
+              <a:t>5/24/2026</a:t>
             </a:fld>
             <a:endParaRPr lang="en-US"/>
           </a:p>
@@ -473,7 +473,7 @@
             <a:fld id="{791D8748-2515-4448-AFB0-4E0BAD67A439}" type="datetimeFigureOut">
               <a:rPr lang="en-US" smtClean="0"/>
               <a:pPr/>
-              <a:t>5/22/2026</a:t>
+              <a:t>5/24/2026</a:t>
             </a:fld>
             <a:endParaRPr lang="en-US"/>
           </a:p>
@@ -650,7 +650,7 @@
             <a:fld id="{791D8748-2515-4448-AFB0-4E0BAD67A439}" type="datetimeFigureOut">
               <a:rPr lang="en-US" smtClean="0"/>
               <a:pPr/>
-              <a:t>5/22/2026</a:t>
+              <a:t>5/24/2026</a:t>
             </a:fld>
             <a:endParaRPr lang="en-US"/>
           </a:p>
@@ -817,7 +817,7 @@
             <a:fld id="{791D8748-2515-4448-AFB0-4E0BAD67A439}" type="datetimeFigureOut">
               <a:rPr lang="en-US" smtClean="0"/>
               <a:pPr/>
-              <a:t>5/22/2026</a:t>
+              <a:t>5/24/2026</a:t>
             </a:fld>
             <a:endParaRPr lang="en-US"/>
           </a:p>
@@ -1060,7 +1060,7 @@
             <a:fld id="{791D8748-2515-4448-AFB0-4E0BAD67A439}" type="datetimeFigureOut">
               <a:rPr lang="en-US" smtClean="0"/>
               <a:pPr/>
-              <a:t>5/22/2026</a:t>
+              <a:t>5/24/2026</a:t>
             </a:fld>
             <a:endParaRPr lang="en-US"/>
           </a:p>
@@ -1345,7 +1345,7 @@
             <a:fld id="{791D8748-2515-4448-AFB0-4E0BAD67A439}" type="datetimeFigureOut">
               <a:rPr lang="en-US" smtClean="0"/>
               <a:pPr/>
-              <a:t>5/22/2026</a:t>
+              <a:t>5/24/2026</a:t>
             </a:fld>
             <a:endParaRPr lang="en-US"/>
           </a:p>
@@ -1764,7 +1764,7 @@
             <a:fld id="{791D8748-2515-4448-AFB0-4E0BAD67A439}" type="datetimeFigureOut">
               <a:rPr lang="en-US" smtClean="0"/>
               <a:pPr/>
-              <a:t>5/22/2026</a:t>
+              <a:t>5/24/2026</a:t>
             </a:fld>
             <a:endParaRPr lang="en-US"/>
           </a:p>
@@ -1879,7 +1879,7 @@
             <a:fld id="{791D8748-2515-4448-AFB0-4E0BAD67A439}" type="datetimeFigureOut">
               <a:rPr lang="en-US" smtClean="0"/>
               <a:pPr/>
-              <a:t>5/22/2026</a:t>
+              <a:t>5/24/2026</a:t>
             </a:fld>
             <a:endParaRPr lang="en-US"/>
           </a:p>
@@ -1971,7 +1971,7 @@
             <a:fld id="{791D8748-2515-4448-AFB0-4E0BAD67A439}" type="datetimeFigureOut">
               <a:rPr lang="en-US" smtClean="0"/>
               <a:pPr/>
-              <a:t>5/22/2026</a:t>
+              <a:t>5/24/2026</a:t>
             </a:fld>
             <a:endParaRPr lang="en-US"/>
           </a:p>
@@ -2245,7 +2245,7 @@
             <a:fld id="{791D8748-2515-4448-AFB0-4E0BAD67A439}" type="datetimeFigureOut">
               <a:rPr lang="en-US" smtClean="0"/>
               <a:pPr/>
-              <a:t>5/22/2026</a:t>
+              <a:t>5/24/2026</a:t>
             </a:fld>
             <a:endParaRPr lang="en-US"/>
           </a:p>
@@ -2495,7 +2495,7 @@
             <a:fld id="{791D8748-2515-4448-AFB0-4E0BAD67A439}" type="datetimeFigureOut">
               <a:rPr lang="en-US" smtClean="0"/>
               <a:pPr/>
-              <a:t>5/22/2026</a:t>
+              <a:t>5/24/2026</a:t>
             </a:fld>
             <a:endParaRPr lang="en-US"/>
           </a:p>
@@ -2705,7 +2705,7 @@
             <a:fld id="{791D8748-2515-4448-AFB0-4E0BAD67A439}" type="datetimeFigureOut">
               <a:rPr lang="en-US" smtClean="0"/>
               <a:pPr/>
-              <a:t>5/22/2026</a:t>
+              <a:t>5/24/2026</a:t>
             </a:fld>
             <a:endParaRPr lang="en-US"/>
           </a:p>
@@ -3654,19 +3654,8 @@
                 <a:latin typeface="Arial" pitchFamily="34" charset="0"/>
                 <a:cs typeface="Arial" pitchFamily="34" charset="0"/>
               </a:rPr>
-              <a:t>Standard MultiWOZ </a:t>
-            </a:r>
-            <a:r>
-              <a:rPr lang="en-US" sz="2000" dirty="0" smtClean="0">
-                <a:latin typeface="Arial" pitchFamily="34" charset="0"/>
-                <a:cs typeface="Arial" pitchFamily="34" charset="0"/>
-              </a:rPr>
-              <a:t>metrics:</a:t>
-            </a:r>
-            <a:endParaRPr lang="en-US" sz="2000" dirty="0" smtClean="0">
-              <a:latin typeface="Arial" pitchFamily="34" charset="0"/>
-              <a:cs typeface="Arial" pitchFamily="34" charset="0"/>
-            </a:endParaRPr>
+              <a:t>Standard MultiWOZ metrics:</a:t>
+            </a:r>
           </a:p>
           <a:p>
             <a:pPr>
@@ -3734,61 +3723,8 @@
                 <a:latin typeface="Arial" pitchFamily="34" charset="0"/>
                 <a:cs typeface="Arial" pitchFamily="34" charset="0"/>
               </a:rPr>
-              <a:t>Custom metrics (operational</a:t>
-            </a:r>
-            <a:r>
-              <a:rPr lang="en-US" sz="2000" dirty="0" smtClean="0">
-                <a:latin typeface="Arial" pitchFamily="34" charset="0"/>
-                <a:cs typeface="Arial" pitchFamily="34" charset="0"/>
-              </a:rPr>
-              <a:t>): Hallucination Rate, Policy </a:t>
-            </a:r>
-            <a:r>
-              <a:rPr lang="en-US" sz="2000" dirty="0" smtClean="0">
-                <a:latin typeface="Arial" pitchFamily="34" charset="0"/>
-                <a:cs typeface="Arial" pitchFamily="34" charset="0"/>
-              </a:rPr>
-              <a:t>Violation </a:t>
-            </a:r>
-            <a:r>
-              <a:rPr lang="en-US" sz="2000" dirty="0" smtClean="0">
-                <a:latin typeface="Arial" pitchFamily="34" charset="0"/>
-                <a:cs typeface="Arial" pitchFamily="34" charset="0"/>
-              </a:rPr>
-              <a:t>Rate, Domain </a:t>
-            </a:r>
-            <a:r>
-              <a:rPr lang="en-US" sz="2000" dirty="0" smtClean="0">
-                <a:latin typeface="Arial" pitchFamily="34" charset="0"/>
-                <a:cs typeface="Arial" pitchFamily="34" charset="0"/>
-              </a:rPr>
-              <a:t>/ Intent </a:t>
-            </a:r>
-            <a:r>
-              <a:rPr lang="en-US" sz="2000" dirty="0" smtClean="0">
-                <a:latin typeface="Arial" pitchFamily="34" charset="0"/>
-                <a:cs typeface="Arial" pitchFamily="34" charset="0"/>
-              </a:rPr>
-              <a:t>Precision, Latency </a:t>
-            </a:r>
-            <a:r>
-              <a:rPr lang="en-US" sz="2000" dirty="0" smtClean="0">
-                <a:latin typeface="Arial" pitchFamily="34" charset="0"/>
-                <a:cs typeface="Arial" pitchFamily="34" charset="0"/>
-              </a:rPr>
-              <a:t>(s),  Cost </a:t>
-            </a:r>
-            <a:r>
-              <a:rPr lang="en-US" sz="2000" dirty="0" smtClean="0">
-                <a:latin typeface="Arial" pitchFamily="34" charset="0"/>
-                <a:cs typeface="Arial" pitchFamily="34" charset="0"/>
-              </a:rPr>
-              <a:t>($).</a:t>
-            </a:r>
-            <a:endParaRPr lang="en-US" sz="2000" dirty="0" smtClean="0">
-              <a:latin typeface="Arial" pitchFamily="34" charset="0"/>
-              <a:cs typeface="Arial" pitchFamily="34" charset="0"/>
-            </a:endParaRPr>
+              <a:t>Custom metrics (operational): Hallucination Rate, Policy Violation Rate, Domain / Intent Precision, Latency (s),  Cost ($).</a:t>
+            </a:r>
           </a:p>
           <a:p>
             <a:pPr>
@@ -5469,19 +5405,8 @@
                 <a:latin typeface="Arial" pitchFamily="34" charset="0"/>
                 <a:cs typeface="Arial" pitchFamily="34" charset="0"/>
               </a:rPr>
-              <a:t>• Haiku leads, but at </a:t>
-            </a:r>
-            <a:r>
-              <a:rPr lang="en-US" sz="1600" dirty="0" smtClean="0">
-                <a:latin typeface="Arial" pitchFamily="34" charset="0"/>
-                <a:cs typeface="Arial" pitchFamily="34" charset="0"/>
-              </a:rPr>
-              <a:t>very high cost</a:t>
-            </a:r>
-            <a:endParaRPr lang="en-US" sz="1600" dirty="0" smtClean="0">
-              <a:latin typeface="Arial" pitchFamily="34" charset="0"/>
-              <a:cs typeface="Arial" pitchFamily="34" charset="0"/>
-            </a:endParaRPr>
+              <a:t>• Haiku leads, but at very high cost</a:t>
+            </a:r>
           </a:p>
           <a:p>
             <a:r>
@@ -8111,41 +8036,16 @@
                 <a:latin typeface="Arial" pitchFamily="34" charset="0"/>
                 <a:cs typeface="Arial" pitchFamily="34" charset="0"/>
               </a:rPr>
-              <a:t>  • Decomposition helps weak models dramatically: LLaMA-3.1-8B, </a:t>
-            </a:r>
+              <a:t>  • Decomposition helps weak models dramatically: LLaMA-3.1-8B, GPT-4o-mini,</a:t>
+            </a:r>
+          </a:p>
+          <a:p>
             <a:r>
               <a:rPr lang="en-US" sz="1600" dirty="0" smtClean="0">
                 <a:latin typeface="Arial" pitchFamily="34" charset="0"/>
                 <a:cs typeface="Arial" pitchFamily="34" charset="0"/>
               </a:rPr>
-              <a:t>GPT-4o-mini,</a:t>
-            </a:r>
-            <a:endParaRPr lang="en-US" sz="1600" dirty="0" smtClean="0">
-              <a:latin typeface="Arial" pitchFamily="34" charset="0"/>
-              <a:cs typeface="Arial" pitchFamily="34" charset="0"/>
-            </a:endParaRPr>
-          </a:p>
-          <a:p>
-            <a:r>
-              <a:rPr lang="en-US" sz="1600" dirty="0" smtClean="0">
-                <a:latin typeface="Arial" pitchFamily="34" charset="0"/>
-                <a:cs typeface="Arial" pitchFamily="34" charset="0"/>
-              </a:rPr>
-              <a:t>    </a:t>
-            </a:r>
-            <a:r>
-              <a:rPr lang="en-US" sz="1600" dirty="0" smtClean="0">
-                <a:latin typeface="Arial" pitchFamily="34" charset="0"/>
-                <a:cs typeface="Arial" pitchFamily="34" charset="0"/>
-              </a:rPr>
-              <a:t>but </a:t>
-            </a:r>
-            <a:r>
-              <a:rPr lang="en-US" sz="1600" dirty="0" smtClean="0">
-                <a:latin typeface="Arial" pitchFamily="34" charset="0"/>
-                <a:cs typeface="Arial" pitchFamily="34" charset="0"/>
-              </a:rPr>
-              <a:t>hurts strong open-source: Qwen3-14B, Phi-4-14B</a:t>
+              <a:t>    but hurts strong open-source: Qwen3-14B, Phi-4-14B</a:t>
             </a:r>
           </a:p>
           <a:p>
@@ -9807,14 +9707,16 @@
                 <a:latin typeface="Arial" pitchFamily="34" charset="0"/>
                 <a:cs typeface="Arial" pitchFamily="34" charset="0"/>
               </a:rPr>
-              <a:t>  • Fine-tuning closes the DST gap with commercial APIs: Qwen3-14B FT </a:t>
-            </a:r>
+              <a:t>  • Fine-tuning closes the DST gap with commercial APIs: Qwen3-14B FT reaches </a:t>
+            </a:r>
+          </a:p>
+          <a:p>
             <a:r>
               <a:rPr lang="en-US" sz="1600" dirty="0" smtClean="0">
                 <a:latin typeface="Arial" pitchFamily="34" charset="0"/>
                 <a:cs typeface="Arial" pitchFamily="34" charset="0"/>
               </a:rPr>
-              <a:t>reaches </a:t>
+              <a:t>    JGA 47.7, matching Haiku Exp 2 (45.1)</a:t>
             </a:r>
           </a:p>
           <a:p>
@@ -9823,74 +9725,16 @@
                 <a:latin typeface="Arial" pitchFamily="34" charset="0"/>
                 <a:cs typeface="Arial" pitchFamily="34" charset="0"/>
               </a:rPr>
-              <a:t>    JGA </a:t>
-            </a:r>
+              <a:t>  • But Combined Score stays at ~71, 21 points behind Haiku (91.4). Bottleneck </a:t>
+            </a:r>
+          </a:p>
+          <a:p>
             <a:r>
               <a:rPr lang="en-US" sz="1600" dirty="0" smtClean="0">
                 <a:latin typeface="Arial" pitchFamily="34" charset="0"/>
                 <a:cs typeface="Arial" pitchFamily="34" charset="0"/>
               </a:rPr>
-              <a:t>47.7, matching Haiku Exp 2 (45.1)</a:t>
-            </a:r>
-          </a:p>
-          <a:p>
-            <a:r>
-              <a:rPr lang="en-US" sz="1600" dirty="0" smtClean="0">
-                <a:latin typeface="Arial" pitchFamily="34" charset="0"/>
-                <a:cs typeface="Arial" pitchFamily="34" charset="0"/>
-              </a:rPr>
-              <a:t>  • But Combined Score </a:t>
-            </a:r>
-            <a:r>
-              <a:rPr lang="en-US" sz="1600" dirty="0" smtClean="0">
-                <a:latin typeface="Arial" pitchFamily="34" charset="0"/>
-                <a:cs typeface="Arial" pitchFamily="34" charset="0"/>
-              </a:rPr>
-              <a:t>stays </a:t>
-            </a:r>
-            <a:r>
-              <a:rPr lang="en-US" sz="1600" dirty="0" smtClean="0">
-                <a:latin typeface="Arial" pitchFamily="34" charset="0"/>
-                <a:cs typeface="Arial" pitchFamily="34" charset="0"/>
-              </a:rPr>
-              <a:t>at ~71, 21 points behind Haiku (91.4). </a:t>
-            </a:r>
-            <a:r>
-              <a:rPr lang="en-US" sz="1600" dirty="0" smtClean="0">
-                <a:latin typeface="Arial" pitchFamily="34" charset="0"/>
-                <a:cs typeface="Arial" pitchFamily="34" charset="0"/>
-              </a:rPr>
-              <a:t>Bottleneck </a:t>
-            </a:r>
-          </a:p>
-          <a:p>
-            <a:r>
-              <a:rPr lang="en-US" sz="1600" dirty="0" smtClean="0">
-                <a:latin typeface="Arial" pitchFamily="34" charset="0"/>
-                <a:cs typeface="Arial" pitchFamily="34" charset="0"/>
-              </a:rPr>
-              <a:t> </a:t>
-            </a:r>
-            <a:r>
-              <a:rPr lang="en-US" sz="1600" dirty="0" smtClean="0">
-                <a:latin typeface="Arial" pitchFamily="34" charset="0"/>
-                <a:cs typeface="Arial" pitchFamily="34" charset="0"/>
-              </a:rPr>
-              <a:t>  </a:t>
-            </a:r>
-            <a:r>
-              <a:rPr lang="en-US" sz="1600" dirty="0" smtClean="0">
-                <a:latin typeface="Arial" pitchFamily="34" charset="0"/>
-                <a:cs typeface="Arial" pitchFamily="34" charset="0"/>
-              </a:rPr>
-              <a:t> </a:t>
-            </a:r>
-            <a:r>
-              <a:rPr lang="en-US" sz="1600" dirty="0" smtClean="0">
-                <a:latin typeface="Arial" pitchFamily="34" charset="0"/>
-                <a:cs typeface="Arial" pitchFamily="34" charset="0"/>
-              </a:rPr>
-              <a:t>shifts from DST to ResponseGen</a:t>
+              <a:t>    shifts from DST to ResponseGen</a:t>
             </a:r>
           </a:p>
           <a:p>
@@ -11404,44 +11248,19 @@
                 <a:latin typeface="Arial" pitchFamily="34" charset="0"/>
                 <a:cs typeface="Arial" pitchFamily="34" charset="0"/>
               </a:rPr>
-              <a:t>  Architecture </a:t>
-            </a:r>
+              <a:t>  Architecture depends on baseline.</a:t>
+            </a:r>
+          </a:p>
+          <a:p>
+            <a:pPr marL="0" indent="0">
+              <a:buNone/>
+            </a:pPr>
             <a:r>
               <a:rPr lang="en-US" sz="2000" dirty="0" smtClean="0">
                 <a:latin typeface="Arial" pitchFamily="34" charset="0"/>
                 <a:cs typeface="Arial" pitchFamily="34" charset="0"/>
               </a:rPr>
-              <a:t>depends on baseline.</a:t>
-            </a:r>
-            <a:endParaRPr lang="en-US" sz="2000" dirty="0" smtClean="0">
-              <a:latin typeface="Arial" pitchFamily="34" charset="0"/>
-              <a:cs typeface="Arial" pitchFamily="34" charset="0"/>
-            </a:endParaRPr>
-          </a:p>
-          <a:p>
-            <a:pPr marL="0" indent="0">
-              <a:buNone/>
-            </a:pPr>
-            <a:r>
-              <a:rPr lang="en-US" sz="2000" dirty="0" smtClean="0">
-                <a:latin typeface="Arial" pitchFamily="34" charset="0"/>
-                <a:cs typeface="Arial" pitchFamily="34" charset="0"/>
-              </a:rPr>
-              <a:t>  </a:t>
-            </a:r>
-            <a:r>
-              <a:rPr lang="en-US" sz="2000" dirty="0" smtClean="0">
-                <a:latin typeface="Arial" pitchFamily="34" charset="0"/>
-                <a:cs typeface="Arial" pitchFamily="34" charset="0"/>
-              </a:rPr>
-              <a:t>Disciplined </a:t>
-            </a:r>
-            <a:r>
-              <a:rPr lang="en-US" sz="2000" dirty="0" smtClean="0">
-                <a:latin typeface="Arial" pitchFamily="34" charset="0"/>
-                <a:cs typeface="Arial" pitchFamily="34" charset="0"/>
-              </a:rPr>
-              <a:t>models peak in Exp 1.</a:t>
+              <a:t>  Disciplined models peak in Exp 1.</a:t>
             </a:r>
           </a:p>
           <a:p>
@@ -11572,21 +11391,7 @@
                 <a:latin typeface="Arial" pitchFamily="34" charset="0"/>
                 <a:cs typeface="Arial" pitchFamily="34" charset="0"/>
               </a:rPr>
-              <a:t>• The architecture × </a:t>
-            </a:r>
-            <a:r>
-              <a:rPr lang="en-US" sz="2000" dirty="0" smtClean="0">
-                <a:latin typeface="Arial" pitchFamily="34" charset="0"/>
-                <a:cs typeface="Arial" pitchFamily="34" charset="0"/>
-              </a:rPr>
-              <a:t>baseline </a:t>
-            </a:r>
-            <a:r>
-              <a:rPr lang="en-US" sz="2000" dirty="0" smtClean="0">
-                <a:latin typeface="Arial" pitchFamily="34" charset="0"/>
-                <a:cs typeface="Arial" pitchFamily="34" charset="0"/>
-              </a:rPr>
-              <a:t>principle is empirical,</a:t>
+              <a:t>• The architecture × baseline principle is empirical,</a:t>
             </a:r>
             <a:r>
               <a:rPr lang="el-GR" sz="2000" dirty="0" smtClean="0">
@@ -11657,59 +11462,20 @@
                 <a:latin typeface="Arial" pitchFamily="34" charset="0"/>
                 <a:cs typeface="Arial" pitchFamily="34" charset="0"/>
               </a:rPr>
-              <a:t>  • Extend to all </a:t>
-            </a:r>
+              <a:t>  • Extend to all MultiWOZ domains, or specialize to a single domain</a:t>
+            </a:r>
+          </a:p>
+          <a:p>
+            <a:pPr>
+              <a:buNone/>
+            </a:pPr>
             <a:r>
               <a:rPr lang="en-US" sz="2000" dirty="0" smtClean="0">
                 <a:latin typeface="Arial" pitchFamily="34" charset="0"/>
                 <a:cs typeface="Arial" pitchFamily="34" charset="0"/>
               </a:rPr>
-              <a:t>MultiWOZ </a:t>
-            </a:r>
-            <a:r>
-              <a:rPr lang="en-US" sz="2000" dirty="0" smtClean="0">
-                <a:latin typeface="Arial" pitchFamily="34" charset="0"/>
-                <a:cs typeface="Arial" pitchFamily="34" charset="0"/>
-              </a:rPr>
-              <a:t>domains, or specialize to a single domain</a:t>
-            </a:r>
-          </a:p>
-          <a:p>
-            <a:pPr>
-              <a:buNone/>
-            </a:pPr>
-            <a:r>
-              <a:rPr lang="en-US" sz="2000" dirty="0" smtClean="0">
-                <a:latin typeface="Arial" pitchFamily="34" charset="0"/>
-                <a:cs typeface="Arial" pitchFamily="34" charset="0"/>
-              </a:rPr>
-              <a:t>  • Explore </a:t>
-            </a:r>
-            <a:r>
-              <a:rPr lang="en-US" sz="2000" dirty="0" smtClean="0">
-                <a:latin typeface="Arial" pitchFamily="34" charset="0"/>
-                <a:cs typeface="Arial" pitchFamily="34" charset="0"/>
-              </a:rPr>
-              <a:t>prompting alternatives, e.g., </a:t>
-            </a:r>
-            <a:r>
-              <a:rPr lang="en-US" sz="2000" dirty="0" smtClean="0">
-                <a:latin typeface="Arial" pitchFamily="34" charset="0"/>
-                <a:cs typeface="Arial" pitchFamily="34" charset="0"/>
-              </a:rPr>
-              <a:t>retrieval-augmented </a:t>
-            </a:r>
-            <a:r>
-              <a:rPr lang="en-US" sz="2000" dirty="0" smtClean="0">
-                <a:latin typeface="Arial" pitchFamily="34" charset="0"/>
-                <a:cs typeface="Arial" pitchFamily="34" charset="0"/>
-              </a:rPr>
-              <a:t>few-shot</a:t>
-            </a:r>
-            <a:endParaRPr lang="en-US" sz="2000" dirty="0" smtClean="0">
-              <a:latin typeface="Arial" pitchFamily="34" charset="0"/>
-              <a:cs typeface="Arial" pitchFamily="34" charset="0"/>
-            </a:endParaRPr>
+              <a:t>  • Explore prompting alternatives, e.g., retrieval-augmented few-shot</a:t>
+            </a:r>
           </a:p>
           <a:p>
             <a:pPr>
@@ -12454,50 +12220,18 @@
                 <a:latin typeface="Arial" pitchFamily="34" charset="0"/>
                 <a:cs typeface="Arial" pitchFamily="34" charset="0"/>
               </a:rPr>
-              <a:t>Schema-guided prompts (SGP-TOD </a:t>
-            </a:r>
+              <a:t>Schema-guided prompts (SGP-TOD 2023)</a:t>
+            </a:r>
+          </a:p>
+          <a:p>
+            <a:pPr lvl="1"/>
             <a:r>
               <a:rPr lang="en-US" sz="1600" dirty="0" smtClean="0">
                 <a:latin typeface="Arial" pitchFamily="34" charset="0"/>
                 <a:cs typeface="Arial" pitchFamily="34" charset="0"/>
               </a:rPr>
-              <a:t>2023</a:t>
-            </a:r>
-            <a:r>
-              <a:rPr lang="en-US" sz="1600" dirty="0" smtClean="0">
-                <a:latin typeface="Arial" pitchFamily="34" charset="0"/>
-                <a:cs typeface="Arial" pitchFamily="34" charset="0"/>
-              </a:rPr>
-              <a:t>)</a:t>
-            </a:r>
-          </a:p>
-          <a:p>
-            <a:pPr lvl="1"/>
-            <a:r>
-              <a:rPr lang="en-US" sz="1600" dirty="0" smtClean="0">
-                <a:latin typeface="Arial" pitchFamily="34" charset="0"/>
-                <a:cs typeface="Arial" pitchFamily="34" charset="0"/>
-              </a:rPr>
-              <a:t>Examples from training </a:t>
-            </a:r>
-            <a:r>
-              <a:rPr lang="en-US" sz="1600" dirty="0" smtClean="0">
-                <a:latin typeface="Arial" pitchFamily="34" charset="0"/>
-                <a:cs typeface="Arial" pitchFamily="34" charset="0"/>
-              </a:rPr>
-              <a:t>set (Hudeček &amp; </a:t>
-            </a:r>
-            <a:r>
-              <a:rPr lang="en-US" sz="1600" dirty="0" smtClean="0">
-                <a:latin typeface="Arial" pitchFamily="34" charset="0"/>
-                <a:cs typeface="Arial" pitchFamily="34" charset="0"/>
-              </a:rPr>
-              <a:t>Dušek, few-shot variant)</a:t>
-            </a:r>
-            <a:endParaRPr lang="en-US" sz="1600" dirty="0" smtClean="0">
-              <a:latin typeface="Arial" pitchFamily="34" charset="0"/>
-              <a:cs typeface="Arial" pitchFamily="34" charset="0"/>
-            </a:endParaRPr>
+              <a:t>Examples from training set (Hudeček &amp; Dušek, few-shot variant)</a:t>
+            </a:r>
           </a:p>
           <a:p>
             <a:r>
@@ -12505,74 +12239,28 @@
                 <a:latin typeface="Arial" pitchFamily="34" charset="0"/>
                 <a:cs typeface="Arial" pitchFamily="34" charset="0"/>
               </a:rPr>
-              <a:t>Task Decomposition: modular pipelines </a:t>
-            </a:r>
+              <a:t>Task Decomposition: modular pipelines / multi-agent LLMs </a:t>
+            </a:r>
+          </a:p>
+          <a:p>
+            <a:pPr>
+              <a:buNone/>
+            </a:pPr>
             <a:r>
               <a:rPr lang="en-US" sz="2000" dirty="0" smtClean="0">
                 <a:latin typeface="Arial" pitchFamily="34" charset="0"/>
                 <a:cs typeface="Arial" pitchFamily="34" charset="0"/>
               </a:rPr>
-              <a:t>/ multi-agent LLMs </a:t>
-            </a:r>
-            <a:endParaRPr lang="en-US" sz="2000" dirty="0" smtClean="0">
-              <a:latin typeface="Arial" pitchFamily="34" charset="0"/>
-              <a:cs typeface="Arial" pitchFamily="34" charset="0"/>
-            </a:endParaRPr>
-          </a:p>
-          <a:p>
-            <a:pPr>
-              <a:buNone/>
-            </a:pPr>
+              <a:t>     (Hudeček &amp; Dušek 2023, DARD 2024, DIMF 2025)</a:t>
+            </a:r>
+          </a:p>
+          <a:p>
             <a:r>
               <a:rPr lang="en-US" sz="2000" dirty="0" smtClean="0">
                 <a:latin typeface="Arial" pitchFamily="34" charset="0"/>
                 <a:cs typeface="Arial" pitchFamily="34" charset="0"/>
               </a:rPr>
-              <a:t> </a:t>
-            </a:r>
-            <a:r>
-              <a:rPr lang="en-US" sz="2000" dirty="0" smtClean="0">
-                <a:latin typeface="Arial" pitchFamily="34" charset="0"/>
-                <a:cs typeface="Arial" pitchFamily="34" charset="0"/>
-              </a:rPr>
-              <a:t>    </a:t>
-            </a:r>
-            <a:r>
-              <a:rPr lang="en-US" sz="2000" dirty="0" smtClean="0">
-                <a:latin typeface="Arial" pitchFamily="34" charset="0"/>
-                <a:cs typeface="Arial" pitchFamily="34" charset="0"/>
-              </a:rPr>
-              <a:t>(Hudeček &amp; Dušek 2023, </a:t>
-            </a:r>
-            <a:r>
-              <a:rPr lang="en-US" sz="2000" dirty="0" smtClean="0">
-                <a:latin typeface="Arial" pitchFamily="34" charset="0"/>
-                <a:cs typeface="Arial" pitchFamily="34" charset="0"/>
-              </a:rPr>
-              <a:t>DARD </a:t>
-            </a:r>
-            <a:r>
-              <a:rPr lang="en-US" sz="2000" dirty="0" smtClean="0">
-                <a:latin typeface="Arial" pitchFamily="34" charset="0"/>
-                <a:cs typeface="Arial" pitchFamily="34" charset="0"/>
-              </a:rPr>
-              <a:t>2024, DIMF 2025)</a:t>
-            </a:r>
-          </a:p>
-          <a:p>
-            <a:r>
-              <a:rPr lang="en-US" sz="2000" dirty="0" smtClean="0">
-                <a:latin typeface="Arial" pitchFamily="34" charset="0"/>
-                <a:cs typeface="Arial" pitchFamily="34" charset="0"/>
-              </a:rPr>
-              <a:t>PEFT: LoRA fine-tuning (Spec-TOD </a:t>
-            </a:r>
-            <a:r>
-              <a:rPr lang="en-US" sz="2000" dirty="0" smtClean="0">
-                <a:latin typeface="Arial" pitchFamily="34" charset="0"/>
-                <a:cs typeface="Arial" pitchFamily="34" charset="0"/>
-              </a:rPr>
-              <a:t>2025)</a:t>
+              <a:t>PEFT: LoRA fine-tuning (Spec-TOD 2025)</a:t>
             </a:r>
           </a:p>
           <a:p>
@@ -12590,29 +12278,15 @@
                 <a:latin typeface="Arial" pitchFamily="34" charset="0"/>
                 <a:cs typeface="Arial" pitchFamily="34" charset="0"/>
               </a:rPr>
-              <a:t>This work sits at the intersection with controlled comparisons along two axes:</a:t>
-            </a:r>
-            <a:endParaRPr lang="en-US" sz="2000" dirty="0">
-              <a:latin typeface="Arial" pitchFamily="34" charset="0"/>
-              <a:cs typeface="Arial" pitchFamily="34" charset="0"/>
-            </a:endParaRPr>
-          </a:p>
-          <a:p>
-            <a:pPr marL="0" indent="0">
-              <a:buNone/>
-            </a:pPr>
+              <a:t>This work sits at the intersection with controlled comparisons </a:t>
+            </a:r>
             <a:r>
               <a:rPr lang="en-US" sz="2000" dirty="0" smtClean="0">
                 <a:latin typeface="Arial" pitchFamily="34" charset="0"/>
                 <a:cs typeface="Arial" pitchFamily="34" charset="0"/>
               </a:rPr>
-              <a:t>  Exp 1 → Exp 2: isolates architectural decomposition</a:t>
-            </a:r>
-          </a:p>
-          <a:p>
-            <a:pPr marL="0" indent="0">
-              <a:buNone/>
-            </a:pPr>
+              <a:t>isolating each variable:</a:t>
+            </a:r>
             <a:r>
               <a:rPr lang="en-US" sz="2000" dirty="0">
                 <a:latin typeface="Arial" pitchFamily="34" charset="0"/>
@@ -12625,7 +12299,14 @@
                 <a:latin typeface="Arial" pitchFamily="34" charset="0"/>
                 <a:cs typeface="Arial" pitchFamily="34" charset="0"/>
               </a:rPr>
-              <a:t> Exp 2 → Exp 3: isolates role-specific LoRA fine-tuning</a:t>
+              <a:t>architectural decomposition and role-specific </a:t>
+            </a:r>
+            <a:r>
+              <a:rPr lang="en-US" sz="2000" dirty="0" smtClean="0">
+                <a:latin typeface="Arial" pitchFamily="34" charset="0"/>
+                <a:cs typeface="Arial" pitchFamily="34" charset="0"/>
+              </a:rPr>
+              <a:t>LoRA fine-tuning</a:t>
             </a:r>
           </a:p>
           <a:p>

--- a/docs/presentation.pptx
+++ b/docs/presentation.pptx
@@ -306,7 +306,7 @@
             <a:fld id="{791D8748-2515-4448-AFB0-4E0BAD67A439}" type="datetimeFigureOut">
               <a:rPr lang="en-US" smtClean="0"/>
               <a:pPr/>
-              <a:t>5/24/2026</a:t>
+              <a:t>5/26/2026</a:t>
             </a:fld>
             <a:endParaRPr lang="en-US"/>
           </a:p>
@@ -473,7 +473,7 @@
             <a:fld id="{791D8748-2515-4448-AFB0-4E0BAD67A439}" type="datetimeFigureOut">
               <a:rPr lang="en-US" smtClean="0"/>
               <a:pPr/>
-              <a:t>5/24/2026</a:t>
+              <a:t>5/26/2026</a:t>
             </a:fld>
             <a:endParaRPr lang="en-US"/>
           </a:p>
@@ -650,7 +650,7 @@
             <a:fld id="{791D8748-2515-4448-AFB0-4E0BAD67A439}" type="datetimeFigureOut">
               <a:rPr lang="en-US" smtClean="0"/>
               <a:pPr/>
-              <a:t>5/24/2026</a:t>
+              <a:t>5/26/2026</a:t>
             </a:fld>
             <a:endParaRPr lang="en-US"/>
           </a:p>
@@ -817,7 +817,7 @@
             <a:fld id="{791D8748-2515-4448-AFB0-4E0BAD67A439}" type="datetimeFigureOut">
               <a:rPr lang="en-US" smtClean="0"/>
               <a:pPr/>
-              <a:t>5/24/2026</a:t>
+              <a:t>5/26/2026</a:t>
             </a:fld>
             <a:endParaRPr lang="en-US"/>
           </a:p>
@@ -1060,7 +1060,7 @@
             <a:fld id="{791D8748-2515-4448-AFB0-4E0BAD67A439}" type="datetimeFigureOut">
               <a:rPr lang="en-US" smtClean="0"/>
               <a:pPr/>
-              <a:t>5/24/2026</a:t>
+              <a:t>5/26/2026</a:t>
             </a:fld>
             <a:endParaRPr lang="en-US"/>
           </a:p>
@@ -1345,7 +1345,7 @@
             <a:fld id="{791D8748-2515-4448-AFB0-4E0BAD67A439}" type="datetimeFigureOut">
               <a:rPr lang="en-US" smtClean="0"/>
               <a:pPr/>
-              <a:t>5/24/2026</a:t>
+              <a:t>5/26/2026</a:t>
             </a:fld>
             <a:endParaRPr lang="en-US"/>
           </a:p>
@@ -1764,7 +1764,7 @@
             <a:fld id="{791D8748-2515-4448-AFB0-4E0BAD67A439}" type="datetimeFigureOut">
               <a:rPr lang="en-US" smtClean="0"/>
               <a:pPr/>
-              <a:t>5/24/2026</a:t>
+              <a:t>5/26/2026</a:t>
             </a:fld>
             <a:endParaRPr lang="en-US"/>
           </a:p>
@@ -1879,7 +1879,7 @@
             <a:fld id="{791D8748-2515-4448-AFB0-4E0BAD67A439}" type="datetimeFigureOut">
               <a:rPr lang="en-US" smtClean="0"/>
               <a:pPr/>
-              <a:t>5/24/2026</a:t>
+              <a:t>5/26/2026</a:t>
             </a:fld>
             <a:endParaRPr lang="en-US"/>
           </a:p>
@@ -1971,7 +1971,7 @@
             <a:fld id="{791D8748-2515-4448-AFB0-4E0BAD67A439}" type="datetimeFigureOut">
               <a:rPr lang="en-US" smtClean="0"/>
               <a:pPr/>
-              <a:t>5/24/2026</a:t>
+              <a:t>5/26/2026</a:t>
             </a:fld>
             <a:endParaRPr lang="en-US"/>
           </a:p>
@@ -2245,7 +2245,7 @@
             <a:fld id="{791D8748-2515-4448-AFB0-4E0BAD67A439}" type="datetimeFigureOut">
               <a:rPr lang="en-US" smtClean="0"/>
               <a:pPr/>
-              <a:t>5/24/2026</a:t>
+              <a:t>5/26/2026</a:t>
             </a:fld>
             <a:endParaRPr lang="en-US"/>
           </a:p>
@@ -2495,7 +2495,7 @@
             <a:fld id="{791D8748-2515-4448-AFB0-4E0BAD67A439}" type="datetimeFigureOut">
               <a:rPr lang="en-US" smtClean="0"/>
               <a:pPr/>
-              <a:t>5/24/2026</a:t>
+              <a:t>5/26/2026</a:t>
             </a:fld>
             <a:endParaRPr lang="en-US"/>
           </a:p>
@@ -2705,7 +2705,7 @@
             <a:fld id="{791D8748-2515-4448-AFB0-4E0BAD67A439}" type="datetimeFigureOut">
               <a:rPr lang="en-US" smtClean="0"/>
               <a:pPr/>
-              <a:t>5/24/2026</a:t>
+              <a:t>5/26/2026</a:t>
             </a:fld>
             <a:endParaRPr lang="en-US"/>
           </a:p>
@@ -10950,7 +10950,7 @@
         <p:spPr>
           <a:xfrm>
             <a:off x="395536" y="4221088"/>
-            <a:ext cx="7920880" cy="2585323"/>
+            <a:ext cx="7920880" cy="1846659"/>
           </a:xfrm>
           <a:prstGeom prst="rect">
             <a:avLst/>
@@ -11018,28 +11018,15 @@
                 <a:latin typeface="Arial" pitchFamily="34" charset="0"/>
                 <a:cs typeface="Arial" pitchFamily="34" charset="0"/>
               </a:rPr>
-              <a:t>     – Non-monotonic: Phi-4-14B, Qwen3-4B</a:t>
-            </a:r>
-          </a:p>
-          <a:p>
+              <a:t>     – Non-monotonic: Phi-4-14B, </a:t>
+            </a:r>
             <a:r>
               <a:rPr lang="en-US" sz="1600" dirty="0" smtClean="0">
                 <a:latin typeface="Arial" pitchFamily="34" charset="0"/>
                 <a:cs typeface="Arial" pitchFamily="34" charset="0"/>
               </a:rPr>
-              <a:t>  • Disciplined zero-shot models peak in Exp 1, while undisciplined ones gain from </a:t>
-            </a:r>
-          </a:p>
-          <a:p>
-            <a:r>
-              <a:rPr lang="en-US" sz="1600" dirty="0" smtClean="0">
-                <a:latin typeface="Arial" pitchFamily="34" charset="0"/>
-                <a:cs typeface="Arial" pitchFamily="34" charset="0"/>
-              </a:rPr>
-              <a:t>    Exp 2, Exp 3</a:t>
-            </a:r>
-          </a:p>
-          <a:p>
+              <a:t>Qwen3-4B</a:t>
+            </a:r>
             <a:endParaRPr lang="en-US" sz="1600" dirty="0" smtClean="0">
               <a:latin typeface="Arial" pitchFamily="34" charset="0"/>
               <a:cs typeface="Arial" pitchFamily="34" charset="0"/>
@@ -11368,45 +11355,19 @@
                 <a:latin typeface="Arial" pitchFamily="34" charset="0"/>
                 <a:cs typeface="Arial" pitchFamily="34" charset="0"/>
               </a:rPr>
-              <a:t>Limitations:</a:t>
-            </a:r>
-            <a:endParaRPr lang="el-GR" sz="2000" dirty="0" smtClean="0">
+              <a:t>Limitations</a:t>
+            </a:r>
+            <a:r>
+              <a:rPr lang="en-US" sz="2000" dirty="0" smtClean="0">
+                <a:latin typeface="Arial" pitchFamily="34" charset="0"/>
+                <a:cs typeface="Arial" pitchFamily="34" charset="0"/>
+              </a:rPr>
+              <a:t>:</a:t>
+            </a:r>
+            <a:endParaRPr lang="en-US" sz="2000" dirty="0" smtClean="0">
               <a:latin typeface="Arial" pitchFamily="34" charset="0"/>
               <a:cs typeface="Arial" pitchFamily="34" charset="0"/>
             </a:endParaRPr>
-          </a:p>
-          <a:p>
-            <a:pPr>
-              <a:buNone/>
-            </a:pPr>
-            <a:r>
-              <a:rPr lang="el-GR" sz="2000" dirty="0" smtClean="0">
-                <a:latin typeface="Arial" pitchFamily="34" charset="0"/>
-                <a:cs typeface="Arial" pitchFamily="34" charset="0"/>
-              </a:rPr>
-              <a:t>  </a:t>
-            </a:r>
-            <a:r>
-              <a:rPr lang="en-US" sz="2000" dirty="0" smtClean="0">
-                <a:latin typeface="Arial" pitchFamily="34" charset="0"/>
-                <a:cs typeface="Arial" pitchFamily="34" charset="0"/>
-              </a:rPr>
-              <a:t>• The architecture × baseline principle is empirical,</a:t>
-            </a:r>
-            <a:r>
-              <a:rPr lang="el-GR" sz="2000" dirty="0" smtClean="0">
-                <a:latin typeface="Arial" pitchFamily="34" charset="0"/>
-                <a:cs typeface="Arial" pitchFamily="34" charset="0"/>
-              </a:rPr>
-              <a:t> </a:t>
-            </a:r>
-            <a:r>
-              <a:rPr lang="en-US" sz="2000" dirty="0" smtClean="0">
-                <a:latin typeface="Arial" pitchFamily="34" charset="0"/>
-                <a:cs typeface="Arial" pitchFamily="34" charset="0"/>
-              </a:rPr>
-              <a:t>not theoretical</a:t>
-            </a:r>
           </a:p>
           <a:p>
             <a:pPr>
@@ -12278,35 +12239,21 @@
                 <a:latin typeface="Arial" pitchFamily="34" charset="0"/>
                 <a:cs typeface="Arial" pitchFamily="34" charset="0"/>
               </a:rPr>
-              <a:t>This work sits at the intersection with controlled comparisons </a:t>
+              <a:t>This work sits at the intersection with controlled comparisons isolating each variable:</a:t>
+            </a:r>
+            <a:r>
+              <a:rPr lang="en-US" sz="2000" dirty="0">
+                <a:latin typeface="Arial" pitchFamily="34" charset="0"/>
+                <a:cs typeface="Arial" pitchFamily="34" charset="0"/>
+              </a:rPr>
+              <a:t> </a:t>
             </a:r>
             <a:r>
               <a:rPr lang="en-US" sz="2000" dirty="0" smtClean="0">
                 <a:latin typeface="Arial" pitchFamily="34" charset="0"/>
                 <a:cs typeface="Arial" pitchFamily="34" charset="0"/>
               </a:rPr>
-              <a:t>isolating each variable:</a:t>
-            </a:r>
-            <a:r>
-              <a:rPr lang="en-US" sz="2000" dirty="0">
-                <a:latin typeface="Arial" pitchFamily="34" charset="0"/>
-                <a:cs typeface="Arial" pitchFamily="34" charset="0"/>
-              </a:rPr>
-              <a:t> </a:t>
-            </a:r>
-            <a:r>
-              <a:rPr lang="en-US" sz="2000" dirty="0" smtClean="0">
-                <a:latin typeface="Arial" pitchFamily="34" charset="0"/>
-                <a:cs typeface="Arial" pitchFamily="34" charset="0"/>
-              </a:rPr>
-              <a:t>architectural decomposition and role-specific </a:t>
-            </a:r>
-            <a:r>
-              <a:rPr lang="en-US" sz="2000" dirty="0" smtClean="0">
-                <a:latin typeface="Arial" pitchFamily="34" charset="0"/>
-                <a:cs typeface="Arial" pitchFamily="34" charset="0"/>
-              </a:rPr>
-              <a:t>LoRA fine-tuning</a:t>
+              <a:t>architectural decomposition and role-specific LoRA fine-tuning</a:t>
             </a:r>
           </a:p>
           <a:p>
@@ -12664,7 +12611,21 @@
                 <a:latin typeface="Arial" pitchFamily="34" charset="0"/>
                 <a:cs typeface="Arial" pitchFamily="34" charset="0"/>
               </a:rPr>
-              <a:t> Dialogue History + DB → LLM → lexicalize → Response</a:t>
+              <a:t> Dialogue History + DB → </a:t>
+            </a:r>
+            <a:r>
+              <a:rPr lang="en-US" sz="2000" b="1" dirty="0" smtClean="0">
+                <a:latin typeface="Arial" pitchFamily="34" charset="0"/>
+                <a:cs typeface="Arial" pitchFamily="34" charset="0"/>
+              </a:rPr>
+              <a:t>LLM</a:t>
+            </a:r>
+            <a:r>
+              <a:rPr lang="en-US" sz="2000" dirty="0" smtClean="0">
+                <a:latin typeface="Arial" pitchFamily="34" charset="0"/>
+                <a:cs typeface="Arial" pitchFamily="34" charset="0"/>
+              </a:rPr>
+              <a:t> → lexicalize → Response</a:t>
             </a:r>
           </a:p>
           <a:p>
@@ -12784,7 +12745,7 @@
                 <a:latin typeface="Arial" pitchFamily="34" charset="0"/>
                 <a:cs typeface="Arial" pitchFamily="34" charset="0"/>
               </a:rPr>
-              <a:t>Establishes the upper limit of a single-prompt LLM approach.</a:t>
+              <a:t>Defines the reference point for Exp 2 and Exp 3.</a:t>
             </a:r>
             <a:endParaRPr lang="en-US" sz="2000" dirty="0">
               <a:latin typeface="Arial" pitchFamily="34" charset="0"/>
@@ -12892,7 +12853,35 @@
                 <a:latin typeface="Arial" pitchFamily="34" charset="0"/>
                 <a:cs typeface="Arial" pitchFamily="34" charset="0"/>
               </a:rPr>
-              <a:t>  Dialogue History → DST → Policy → DB → ResponseGen  → supervisor → lexicalize → Response</a:t>
+              <a:t>  Dialogue History → </a:t>
+            </a:r>
+            <a:r>
+              <a:rPr lang="en-US" sz="2000" b="1" dirty="0" smtClean="0">
+                <a:latin typeface="Arial" pitchFamily="34" charset="0"/>
+                <a:cs typeface="Arial" pitchFamily="34" charset="0"/>
+              </a:rPr>
+              <a:t>DST</a:t>
+            </a:r>
+            <a:r>
+              <a:rPr lang="en-US" sz="2000" dirty="0" smtClean="0">
+                <a:latin typeface="Arial" pitchFamily="34" charset="0"/>
+                <a:cs typeface="Arial" pitchFamily="34" charset="0"/>
+              </a:rPr>
+              <a:t> → Policy → DB → </a:t>
+            </a:r>
+            <a:r>
+              <a:rPr lang="en-US" sz="2000" b="1" dirty="0" smtClean="0">
+                <a:latin typeface="Arial" pitchFamily="34" charset="0"/>
+                <a:cs typeface="Arial" pitchFamily="34" charset="0"/>
+              </a:rPr>
+              <a:t>ResponseGen</a:t>
+            </a:r>
+            <a:r>
+              <a:rPr lang="en-US" sz="2000" dirty="0" smtClean="0">
+                <a:latin typeface="Arial" pitchFamily="34" charset="0"/>
+                <a:cs typeface="Arial" pitchFamily="34" charset="0"/>
+              </a:rPr>
+              <a:t>  → supervisor → lexicalize → Response</a:t>
             </a:r>
           </a:p>
           <a:p>
@@ -13135,7 +13124,35 @@
                 <a:latin typeface="Arial" pitchFamily="34" charset="0"/>
                 <a:cs typeface="Arial" pitchFamily="34" charset="0"/>
               </a:rPr>
-              <a:t>  Dialogue History → DST(LoRA) → Policy → DB → ResponseGen(LoRA) → supervisor → lexicalize → Response</a:t>
+              <a:t>  Dialogue History → </a:t>
+            </a:r>
+            <a:r>
+              <a:rPr lang="en-US" sz="2000" b="1" dirty="0" smtClean="0">
+                <a:latin typeface="Arial" pitchFamily="34" charset="0"/>
+                <a:cs typeface="Arial" pitchFamily="34" charset="0"/>
+              </a:rPr>
+              <a:t>DST(LoRA)</a:t>
+            </a:r>
+            <a:r>
+              <a:rPr lang="en-US" sz="2000" dirty="0" smtClean="0">
+                <a:latin typeface="Arial" pitchFamily="34" charset="0"/>
+                <a:cs typeface="Arial" pitchFamily="34" charset="0"/>
+              </a:rPr>
+              <a:t> → Policy → DB → </a:t>
+            </a:r>
+            <a:r>
+              <a:rPr lang="en-US" sz="2000" b="1" dirty="0" smtClean="0">
+                <a:latin typeface="Arial" pitchFamily="34" charset="0"/>
+                <a:cs typeface="Arial" pitchFamily="34" charset="0"/>
+              </a:rPr>
+              <a:t>ResponseGen(LoRA) </a:t>
+            </a:r>
+            <a:r>
+              <a:rPr lang="en-US" sz="2000" dirty="0" smtClean="0">
+                <a:latin typeface="Arial" pitchFamily="34" charset="0"/>
+                <a:cs typeface="Arial" pitchFamily="34" charset="0"/>
+              </a:rPr>
+              <a:t>→ supervisor → lexicalize → Response</a:t>
             </a:r>
           </a:p>
           <a:p>
@@ -13192,7 +13209,7 @@
                 <a:latin typeface="Arial" pitchFamily="34" charset="0"/>
                 <a:cs typeface="Arial" pitchFamily="34" charset="0"/>
               </a:rPr>
-              <a:t>  • Trainable parameters: ~0.75% of total weights (e.g., 24M of 3.2B for LLaMA-3.2-3B)</a:t>
+              <a:t>  • Trainable parameters: ~0.75% of total weights (e.g., 24M of 3.2B for LLaMA-3.2)</a:t>
             </a:r>
           </a:p>
           <a:p>

--- a/docs/presentation.pptx
+++ b/docs/presentation.pptx
@@ -306,7 +306,7 @@
             <a:fld id="{791D8748-2515-4448-AFB0-4E0BAD67A439}" type="datetimeFigureOut">
               <a:rPr lang="en-US" smtClean="0"/>
               <a:pPr/>
-              <a:t>5/26/2026</a:t>
+              <a:t>6/7/2026</a:t>
             </a:fld>
             <a:endParaRPr lang="en-US"/>
           </a:p>
@@ -473,7 +473,7 @@
             <a:fld id="{791D8748-2515-4448-AFB0-4E0BAD67A439}" type="datetimeFigureOut">
               <a:rPr lang="en-US" smtClean="0"/>
               <a:pPr/>
-              <a:t>5/26/2026</a:t>
+              <a:t>6/7/2026</a:t>
             </a:fld>
             <a:endParaRPr lang="en-US"/>
           </a:p>
@@ -650,7 +650,7 @@
             <a:fld id="{791D8748-2515-4448-AFB0-4E0BAD67A439}" type="datetimeFigureOut">
               <a:rPr lang="en-US" smtClean="0"/>
               <a:pPr/>
-              <a:t>5/26/2026</a:t>
+              <a:t>6/7/2026</a:t>
             </a:fld>
             <a:endParaRPr lang="en-US"/>
           </a:p>
@@ -817,7 +817,7 @@
             <a:fld id="{791D8748-2515-4448-AFB0-4E0BAD67A439}" type="datetimeFigureOut">
               <a:rPr lang="en-US" smtClean="0"/>
               <a:pPr/>
-              <a:t>5/26/2026</a:t>
+              <a:t>6/7/2026</a:t>
             </a:fld>
             <a:endParaRPr lang="en-US"/>
           </a:p>
@@ -1060,7 +1060,7 @@
             <a:fld id="{791D8748-2515-4448-AFB0-4E0BAD67A439}" type="datetimeFigureOut">
               <a:rPr lang="en-US" smtClean="0"/>
               <a:pPr/>
-              <a:t>5/26/2026</a:t>
+              <a:t>6/7/2026</a:t>
             </a:fld>
             <a:endParaRPr lang="en-US"/>
           </a:p>
@@ -1345,7 +1345,7 @@
             <a:fld id="{791D8748-2515-4448-AFB0-4E0BAD67A439}" type="datetimeFigureOut">
               <a:rPr lang="en-US" smtClean="0"/>
               <a:pPr/>
-              <a:t>5/26/2026</a:t>
+              <a:t>6/7/2026</a:t>
             </a:fld>
             <a:endParaRPr lang="en-US"/>
           </a:p>
@@ -1764,7 +1764,7 @@
             <a:fld id="{791D8748-2515-4448-AFB0-4E0BAD67A439}" type="datetimeFigureOut">
               <a:rPr lang="en-US" smtClean="0"/>
               <a:pPr/>
-              <a:t>5/26/2026</a:t>
+              <a:t>6/7/2026</a:t>
             </a:fld>
             <a:endParaRPr lang="en-US"/>
           </a:p>
@@ -1879,7 +1879,7 @@
             <a:fld id="{791D8748-2515-4448-AFB0-4E0BAD67A439}" type="datetimeFigureOut">
               <a:rPr lang="en-US" smtClean="0"/>
               <a:pPr/>
-              <a:t>5/26/2026</a:t>
+              <a:t>6/7/2026</a:t>
             </a:fld>
             <a:endParaRPr lang="en-US"/>
           </a:p>
@@ -1971,7 +1971,7 @@
             <a:fld id="{791D8748-2515-4448-AFB0-4E0BAD67A439}" type="datetimeFigureOut">
               <a:rPr lang="en-US" smtClean="0"/>
               <a:pPr/>
-              <a:t>5/26/2026</a:t>
+              <a:t>6/7/2026</a:t>
             </a:fld>
             <a:endParaRPr lang="en-US"/>
           </a:p>
@@ -2245,7 +2245,7 @@
             <a:fld id="{791D8748-2515-4448-AFB0-4E0BAD67A439}" type="datetimeFigureOut">
               <a:rPr lang="en-US" smtClean="0"/>
               <a:pPr/>
-              <a:t>5/26/2026</a:t>
+              <a:t>6/7/2026</a:t>
             </a:fld>
             <a:endParaRPr lang="en-US"/>
           </a:p>
@@ -2495,7 +2495,7 @@
             <a:fld id="{791D8748-2515-4448-AFB0-4E0BAD67A439}" type="datetimeFigureOut">
               <a:rPr lang="en-US" smtClean="0"/>
               <a:pPr/>
-              <a:t>5/26/2026</a:t>
+              <a:t>6/7/2026</a:t>
             </a:fld>
             <a:endParaRPr lang="en-US"/>
           </a:p>
@@ -2705,7 +2705,7 @@
             <a:fld id="{791D8748-2515-4448-AFB0-4E0BAD67A439}" type="datetimeFigureOut">
               <a:rPr lang="en-US" smtClean="0"/>
               <a:pPr/>
-              <a:t>5/26/2026</a:t>
+              <a:t>6/7/2026</a:t>
             </a:fld>
             <a:endParaRPr lang="en-US"/>
           </a:p>
@@ -11018,19 +11018,8 @@
                 <a:latin typeface="Arial" pitchFamily="34" charset="0"/>
                 <a:cs typeface="Arial" pitchFamily="34" charset="0"/>
               </a:rPr>
-              <a:t>     – Non-monotonic: Phi-4-14B, </a:t>
-            </a:r>
-            <a:r>
-              <a:rPr lang="en-US" sz="1600" dirty="0" smtClean="0">
-                <a:latin typeface="Arial" pitchFamily="34" charset="0"/>
-                <a:cs typeface="Arial" pitchFamily="34" charset="0"/>
-              </a:rPr>
-              <a:t>Qwen3-4B</a:t>
-            </a:r>
-            <a:endParaRPr lang="en-US" sz="1600" dirty="0" smtClean="0">
-              <a:latin typeface="Arial" pitchFamily="34" charset="0"/>
-              <a:cs typeface="Arial" pitchFamily="34" charset="0"/>
-            </a:endParaRPr>
+              <a:t>     – Non-monotonic: Phi-4-14B, Qwen3-4B</a:t>
+            </a:r>
           </a:p>
         </p:txBody>
       </p:sp>
@@ -11364,6 +11353,25 @@
               </a:rPr>
               <a:t>:</a:t>
             </a:r>
+          </a:p>
+          <a:p>
+            <a:pPr>
+              <a:buNone/>
+            </a:pPr>
+            <a:r>
+              <a:rPr lang="en-US" sz="2000" dirty="0" smtClean="0">
+                <a:latin typeface="Arial" pitchFamily="34" charset="0"/>
+                <a:cs typeface="Arial" pitchFamily="34" charset="0"/>
+              </a:rPr>
+              <a:t> </a:t>
+            </a:r>
+            <a:r>
+              <a:rPr lang="en-US" sz="2000" dirty="0" smtClean="0">
+                <a:latin typeface="Arial" pitchFamily="34" charset="0"/>
+                <a:cs typeface="Arial" pitchFamily="34" charset="0"/>
+              </a:rPr>
+              <a:t> • Results sensitive to implementation choices (prompts, delex protocol, fine-tuning hyperparameters)</a:t>
+            </a:r>
             <a:endParaRPr lang="en-US" sz="2000" dirty="0" smtClean="0">
               <a:latin typeface="Arial" pitchFamily="34" charset="0"/>
               <a:cs typeface="Arial" pitchFamily="34" charset="0"/>
@@ -11378,19 +11386,21 @@
                 <a:latin typeface="Arial" pitchFamily="34" charset="0"/>
                 <a:cs typeface="Arial" pitchFamily="34" charset="0"/>
               </a:rPr>
-              <a:t>  • Domain scope: hotel + restaurant only,</a:t>
-            </a:r>
-          </a:p>
-          <a:p>
-            <a:pPr>
-              <a:buNone/>
-            </a:pPr>
+              <a:t>  • Domain scope: hotel + restaurant only</a:t>
+            </a:r>
             <a:r>
               <a:rPr lang="en-US" sz="2000" dirty="0" smtClean="0">
                 <a:latin typeface="Arial" pitchFamily="34" charset="0"/>
                 <a:cs typeface="Arial" pitchFamily="34" charset="0"/>
               </a:rPr>
-              <a:t>    not directly comparable to full-domain MultiWOZ leaderboard</a:t>
+              <a:t>, not </a:t>
+            </a:r>
+            <a:r>
+              <a:rPr lang="en-US" sz="2000" dirty="0" smtClean="0">
+                <a:latin typeface="Arial" pitchFamily="34" charset="0"/>
+                <a:cs typeface="Arial" pitchFamily="34" charset="0"/>
+              </a:rPr>
+              <a:t>directly comparable to full-domain MultiWOZ leaderboard</a:t>
             </a:r>
           </a:p>
           <a:p>

--- a/docs/presentation.pptx
+++ b/docs/presentation.pptx
@@ -11093,7 +11093,7 @@
         <p:spPr>
           <a:xfrm>
             <a:off x="457200" y="1412776"/>
-            <a:ext cx="8229600" cy="5112568"/>
+            <a:ext cx="8229600" cy="4968552"/>
           </a:xfrm>
         </p:spPr>
         <p:txBody>
@@ -11207,13 +11207,26 @@
             <a:pPr marL="0" indent="0">
               <a:buNone/>
             </a:pPr>
+            <a:endParaRPr lang="en-US" sz="2000" dirty="0" smtClean="0">
+              <a:latin typeface="Arial" pitchFamily="34" charset="0"/>
+              <a:cs typeface="Arial" pitchFamily="34" charset="0"/>
+            </a:endParaRPr>
+          </a:p>
+          <a:p>
+            <a:pPr marL="0" indent="0">
+              <a:buNone/>
+            </a:pPr>
             <a:r>
               <a:rPr lang="en-US" sz="2000" dirty="0" smtClean="0">
                 <a:latin typeface="Arial" pitchFamily="34" charset="0"/>
                 <a:cs typeface="Arial" pitchFamily="34" charset="0"/>
               </a:rPr>
-              <a:t>The principle: </a:t>
-            </a:r>
+              <a:t>Observed pattern: </a:t>
+            </a:r>
+            <a:endParaRPr lang="en-US" sz="2000" dirty="0" smtClean="0">
+              <a:latin typeface="Arial" pitchFamily="34" charset="0"/>
+              <a:cs typeface="Arial" pitchFamily="34" charset="0"/>
+            </a:endParaRPr>
           </a:p>
           <a:p>
             <a:pPr marL="0" indent="0">
@@ -11224,7 +11237,35 @@
                 <a:latin typeface="Arial" pitchFamily="34" charset="0"/>
                 <a:cs typeface="Arial" pitchFamily="34" charset="0"/>
               </a:rPr>
-              <a:t>  Architecture depends on baseline.</a:t>
+              <a:t>  </a:t>
+            </a:r>
+            <a:r>
+              <a:rPr lang="en-US" sz="2000" dirty="0" smtClean="0">
+                <a:latin typeface="Arial" pitchFamily="34" charset="0"/>
+                <a:cs typeface="Arial" pitchFamily="34" charset="0"/>
+              </a:rPr>
+              <a:t>Disciplined </a:t>
+            </a:r>
+            <a:r>
+              <a:rPr lang="en-US" sz="2000" dirty="0" smtClean="0">
+                <a:latin typeface="Arial" pitchFamily="34" charset="0"/>
+                <a:cs typeface="Arial" pitchFamily="34" charset="0"/>
+              </a:rPr>
+              <a:t>models </a:t>
+            </a:r>
+            <a:r>
+              <a:rPr lang="en-US" sz="2000" dirty="0" smtClean="0">
+                <a:latin typeface="Arial" pitchFamily="34" charset="0"/>
+                <a:cs typeface="Arial" pitchFamily="34" charset="0"/>
+              </a:rPr>
+              <a:t>tend to peak </a:t>
+            </a:r>
+            <a:r>
+              <a:rPr lang="en-US" sz="2000" dirty="0" smtClean="0">
+                <a:latin typeface="Arial" pitchFamily="34" charset="0"/>
+                <a:cs typeface="Arial" pitchFamily="34" charset="0"/>
+              </a:rPr>
+              <a:t>in Exp 1.</a:t>
             </a:r>
           </a:p>
           <a:p>
@@ -11236,19 +11277,21 @@
                 <a:latin typeface="Arial" pitchFamily="34" charset="0"/>
                 <a:cs typeface="Arial" pitchFamily="34" charset="0"/>
               </a:rPr>
-              <a:t>  Disciplined models peak in Exp 1.</a:t>
-            </a:r>
-          </a:p>
-          <a:p>
-            <a:pPr marL="0" indent="0">
-              <a:buNone/>
-            </a:pPr>
+              <a:t>  Undisciplined ones </a:t>
+            </a:r>
             <a:r>
               <a:rPr lang="en-US" sz="2000" dirty="0" smtClean="0">
                 <a:latin typeface="Arial" pitchFamily="34" charset="0"/>
                 <a:cs typeface="Arial" pitchFamily="34" charset="0"/>
               </a:rPr>
-              <a:t>  Undisciplined ones gain from Exp 2 or Exp 3.</a:t>
+              <a:t>tend to gain </a:t>
+            </a:r>
+            <a:r>
+              <a:rPr lang="en-US" sz="2000" dirty="0" smtClean="0">
+                <a:latin typeface="Arial" pitchFamily="34" charset="0"/>
+                <a:cs typeface="Arial" pitchFamily="34" charset="0"/>
+              </a:rPr>
+              <a:t>from Exp 2 or Exp 3.</a:t>
             </a:r>
             <a:endParaRPr lang="en-US" sz="2000" dirty="0">
               <a:latin typeface="Arial" pitchFamily="34" charset="0"/>
@@ -11344,14 +11387,19 @@
                 <a:latin typeface="Arial" pitchFamily="34" charset="0"/>
                 <a:cs typeface="Arial" pitchFamily="34" charset="0"/>
               </a:rPr>
-              <a:t>Limitations</a:t>
-            </a:r>
+              <a:t>Limitations:</a:t>
+            </a:r>
+          </a:p>
+          <a:p>
+            <a:pPr>
+              <a:buNone/>
+            </a:pPr>
             <a:r>
               <a:rPr lang="en-US" sz="2000" dirty="0" smtClean="0">
                 <a:latin typeface="Arial" pitchFamily="34" charset="0"/>
                 <a:cs typeface="Arial" pitchFamily="34" charset="0"/>
               </a:rPr>
-              <a:t>:</a:t>
+              <a:t>  • Results sensitive to implementation choices (prompts, delex protocol, fine-tuning hyperparameters)</a:t>
             </a:r>
           </a:p>
           <a:p>
@@ -11363,44 +11411,7 @@
                 <a:latin typeface="Arial" pitchFamily="34" charset="0"/>
                 <a:cs typeface="Arial" pitchFamily="34" charset="0"/>
               </a:rPr>
-              <a:t> </a:t>
-            </a:r>
-            <a:r>
-              <a:rPr lang="en-US" sz="2000" dirty="0" smtClean="0">
-                <a:latin typeface="Arial" pitchFamily="34" charset="0"/>
-                <a:cs typeface="Arial" pitchFamily="34" charset="0"/>
-              </a:rPr>
-              <a:t> • Results sensitive to implementation choices (prompts, delex protocol, fine-tuning hyperparameters)</a:t>
-            </a:r>
-            <a:endParaRPr lang="en-US" sz="2000" dirty="0" smtClean="0">
-              <a:latin typeface="Arial" pitchFamily="34" charset="0"/>
-              <a:cs typeface="Arial" pitchFamily="34" charset="0"/>
-            </a:endParaRPr>
-          </a:p>
-          <a:p>
-            <a:pPr>
-              <a:buNone/>
-            </a:pPr>
-            <a:r>
-              <a:rPr lang="en-US" sz="2000" dirty="0" smtClean="0">
-                <a:latin typeface="Arial" pitchFamily="34" charset="0"/>
-                <a:cs typeface="Arial" pitchFamily="34" charset="0"/>
-              </a:rPr>
-              <a:t>  • Domain scope: hotel + restaurant only</a:t>
-            </a:r>
-            <a:r>
-              <a:rPr lang="en-US" sz="2000" dirty="0" smtClean="0">
-                <a:latin typeface="Arial" pitchFamily="34" charset="0"/>
-                <a:cs typeface="Arial" pitchFamily="34" charset="0"/>
-              </a:rPr>
-              <a:t>, not </a:t>
-            </a:r>
-            <a:r>
-              <a:rPr lang="en-US" sz="2000" dirty="0" smtClean="0">
-                <a:latin typeface="Arial" pitchFamily="34" charset="0"/>
-                <a:cs typeface="Arial" pitchFamily="34" charset="0"/>
-              </a:rPr>
-              <a:t>directly comparable to full-domain MultiWOZ leaderboard</a:t>
+              <a:t>  • Domain scope: hotel + restaurant only, not directly comparable to full-domain MultiWOZ leaderboard</a:t>
             </a:r>
           </a:p>
           <a:p>

--- a/docs/presentation.pptx
+++ b/docs/presentation.pptx
@@ -306,7 +306,7 @@
             <a:fld id="{791D8748-2515-4448-AFB0-4E0BAD67A439}" type="datetimeFigureOut">
               <a:rPr lang="en-US" smtClean="0"/>
               <a:pPr/>
-              <a:t>6/7/2026</a:t>
+              <a:t>6/9/2026</a:t>
             </a:fld>
             <a:endParaRPr lang="en-US"/>
           </a:p>
@@ -473,7 +473,7 @@
             <a:fld id="{791D8748-2515-4448-AFB0-4E0BAD67A439}" type="datetimeFigureOut">
               <a:rPr lang="en-US" smtClean="0"/>
               <a:pPr/>
-              <a:t>6/7/2026</a:t>
+              <a:t>6/9/2026</a:t>
             </a:fld>
             <a:endParaRPr lang="en-US"/>
           </a:p>
@@ -650,7 +650,7 @@
             <a:fld id="{791D8748-2515-4448-AFB0-4E0BAD67A439}" type="datetimeFigureOut">
               <a:rPr lang="en-US" smtClean="0"/>
               <a:pPr/>
-              <a:t>6/7/2026</a:t>
+              <a:t>6/9/2026</a:t>
             </a:fld>
             <a:endParaRPr lang="en-US"/>
           </a:p>
@@ -817,7 +817,7 @@
             <a:fld id="{791D8748-2515-4448-AFB0-4E0BAD67A439}" type="datetimeFigureOut">
               <a:rPr lang="en-US" smtClean="0"/>
               <a:pPr/>
-              <a:t>6/7/2026</a:t>
+              <a:t>6/9/2026</a:t>
             </a:fld>
             <a:endParaRPr lang="en-US"/>
           </a:p>
@@ -1060,7 +1060,7 @@
             <a:fld id="{791D8748-2515-4448-AFB0-4E0BAD67A439}" type="datetimeFigureOut">
               <a:rPr lang="en-US" smtClean="0"/>
               <a:pPr/>
-              <a:t>6/7/2026</a:t>
+              <a:t>6/9/2026</a:t>
             </a:fld>
             <a:endParaRPr lang="en-US"/>
           </a:p>
@@ -1345,7 +1345,7 @@
             <a:fld id="{791D8748-2515-4448-AFB0-4E0BAD67A439}" type="datetimeFigureOut">
               <a:rPr lang="en-US" smtClean="0"/>
               <a:pPr/>
-              <a:t>6/7/2026</a:t>
+              <a:t>6/9/2026</a:t>
             </a:fld>
             <a:endParaRPr lang="en-US"/>
           </a:p>
@@ -1764,7 +1764,7 @@
             <a:fld id="{791D8748-2515-4448-AFB0-4E0BAD67A439}" type="datetimeFigureOut">
               <a:rPr lang="en-US" smtClean="0"/>
               <a:pPr/>
-              <a:t>6/7/2026</a:t>
+              <a:t>6/9/2026</a:t>
             </a:fld>
             <a:endParaRPr lang="en-US"/>
           </a:p>
@@ -1879,7 +1879,7 @@
             <a:fld id="{791D8748-2515-4448-AFB0-4E0BAD67A439}" type="datetimeFigureOut">
               <a:rPr lang="en-US" smtClean="0"/>
               <a:pPr/>
-              <a:t>6/7/2026</a:t>
+              <a:t>6/9/2026</a:t>
             </a:fld>
             <a:endParaRPr lang="en-US"/>
           </a:p>
@@ -1971,7 +1971,7 @@
             <a:fld id="{791D8748-2515-4448-AFB0-4E0BAD67A439}" type="datetimeFigureOut">
               <a:rPr lang="en-US" smtClean="0"/>
               <a:pPr/>
-              <a:t>6/7/2026</a:t>
+              <a:t>6/9/2026</a:t>
             </a:fld>
             <a:endParaRPr lang="en-US"/>
           </a:p>
@@ -2245,7 +2245,7 @@
             <a:fld id="{791D8748-2515-4448-AFB0-4E0BAD67A439}" type="datetimeFigureOut">
               <a:rPr lang="en-US" smtClean="0"/>
               <a:pPr/>
-              <a:t>6/7/2026</a:t>
+              <a:t>6/9/2026</a:t>
             </a:fld>
             <a:endParaRPr lang="en-US"/>
           </a:p>
@@ -2495,7 +2495,7 @@
             <a:fld id="{791D8748-2515-4448-AFB0-4E0BAD67A439}" type="datetimeFigureOut">
               <a:rPr lang="en-US" smtClean="0"/>
               <a:pPr/>
-              <a:t>6/7/2026</a:t>
+              <a:t>6/9/2026</a:t>
             </a:fld>
             <a:endParaRPr lang="en-US"/>
           </a:p>
@@ -2705,7 +2705,7 @@
             <a:fld id="{791D8748-2515-4448-AFB0-4E0BAD67A439}" type="datetimeFigureOut">
               <a:rPr lang="en-US" smtClean="0"/>
               <a:pPr/>
-              <a:t>6/7/2026</a:t>
+              <a:t>6/9/2026</a:t>
             </a:fld>
             <a:endParaRPr lang="en-US"/>
           </a:p>
@@ -3723,7 +3723,21 @@
                 <a:latin typeface="Arial" pitchFamily="34" charset="0"/>
                 <a:cs typeface="Arial" pitchFamily="34" charset="0"/>
               </a:rPr>
-              <a:t>Custom metrics (operational): Hallucination Rate, Policy Violation Rate, Domain / Intent Precision, Latency (s),  Cost ($).</a:t>
+              <a:t>Custom metrics (operational): Hallucination Rate, Policy Violation Rate, Domain / Intent Precision, Latency (s), </a:t>
+            </a:r>
+            <a:r>
+              <a:rPr lang="en-US" sz="2000" dirty="0" smtClean="0">
+                <a:latin typeface="Arial" pitchFamily="34" charset="0"/>
+                <a:cs typeface="Arial" pitchFamily="34" charset="0"/>
+              </a:rPr>
+              <a:t>Cost </a:t>
+            </a:r>
+            <a:r>
+              <a:rPr lang="en-US" sz="2000" dirty="0" smtClean="0">
+                <a:latin typeface="Arial" pitchFamily="34" charset="0"/>
+                <a:cs typeface="Arial" pitchFamily="34" charset="0"/>
+              </a:rPr>
+              <a:t>($).</a:t>
             </a:r>
           </a:p>
           <a:p>
@@ -11223,10 +11237,6 @@
               </a:rPr>
               <a:t>Observed pattern: </a:t>
             </a:r>
-            <a:endParaRPr lang="en-US" sz="2000" dirty="0" smtClean="0">
-              <a:latin typeface="Arial" pitchFamily="34" charset="0"/>
-              <a:cs typeface="Arial" pitchFamily="34" charset="0"/>
-            </a:endParaRPr>
           </a:p>
           <a:p>
             <a:pPr marL="0" indent="0">
@@ -11237,61 +11247,19 @@
                 <a:latin typeface="Arial" pitchFamily="34" charset="0"/>
                 <a:cs typeface="Arial" pitchFamily="34" charset="0"/>
               </a:rPr>
-              <a:t>  </a:t>
-            </a:r>
+              <a:t>  Disciplined models tend to peak in Exp 1.</a:t>
+            </a:r>
+          </a:p>
+          <a:p>
+            <a:pPr marL="0" indent="0">
+              <a:buNone/>
+            </a:pPr>
             <a:r>
               <a:rPr lang="en-US" sz="2000" dirty="0" smtClean="0">
                 <a:latin typeface="Arial" pitchFamily="34" charset="0"/>
                 <a:cs typeface="Arial" pitchFamily="34" charset="0"/>
               </a:rPr>
-              <a:t>Disciplined </a:t>
-            </a:r>
-            <a:r>
-              <a:rPr lang="en-US" sz="2000" dirty="0" smtClean="0">
-                <a:latin typeface="Arial" pitchFamily="34" charset="0"/>
-                <a:cs typeface="Arial" pitchFamily="34" charset="0"/>
-              </a:rPr>
-              <a:t>models </a:t>
-            </a:r>
-            <a:r>
-              <a:rPr lang="en-US" sz="2000" dirty="0" smtClean="0">
-                <a:latin typeface="Arial" pitchFamily="34" charset="0"/>
-                <a:cs typeface="Arial" pitchFamily="34" charset="0"/>
-              </a:rPr>
-              <a:t>tend to peak </a:t>
-            </a:r>
-            <a:r>
-              <a:rPr lang="en-US" sz="2000" dirty="0" smtClean="0">
-                <a:latin typeface="Arial" pitchFamily="34" charset="0"/>
-                <a:cs typeface="Arial" pitchFamily="34" charset="0"/>
-              </a:rPr>
-              <a:t>in Exp 1.</a:t>
-            </a:r>
-          </a:p>
-          <a:p>
-            <a:pPr marL="0" indent="0">
-              <a:buNone/>
-            </a:pPr>
-            <a:r>
-              <a:rPr lang="en-US" sz="2000" dirty="0" smtClean="0">
-                <a:latin typeface="Arial" pitchFamily="34" charset="0"/>
-                <a:cs typeface="Arial" pitchFamily="34" charset="0"/>
-              </a:rPr>
-              <a:t>  Undisciplined ones </a:t>
-            </a:r>
-            <a:r>
-              <a:rPr lang="en-US" sz="2000" dirty="0" smtClean="0">
-                <a:latin typeface="Arial" pitchFamily="34" charset="0"/>
-                <a:cs typeface="Arial" pitchFamily="34" charset="0"/>
-              </a:rPr>
-              <a:t>tend to gain </a:t>
-            </a:r>
-            <a:r>
-              <a:rPr lang="en-US" sz="2000" dirty="0" smtClean="0">
-                <a:latin typeface="Arial" pitchFamily="34" charset="0"/>
-                <a:cs typeface="Arial" pitchFamily="34" charset="0"/>
-              </a:rPr>
-              <a:t>from Exp 2 or Exp 3.</a:t>
+              <a:t>  Undisciplined ones tend to gain from Exp 2 or Exp 3.</a:t>
             </a:r>
             <a:endParaRPr lang="en-US" sz="2000" dirty="0">
               <a:latin typeface="Arial" pitchFamily="34" charset="0"/>
@@ -11468,8 +11436,33 @@
                 <a:latin typeface="Arial" pitchFamily="34" charset="0"/>
                 <a:cs typeface="Arial" pitchFamily="34" charset="0"/>
               </a:rPr>
-              <a:t>  • DPO post-training as Exp 4: preference-based on top of LoRA fine-tuning</a:t>
-            </a:r>
+              <a:t>  • DPO </a:t>
+            </a:r>
+            <a:r>
+              <a:rPr lang="en-US" sz="2000" dirty="0" smtClean="0">
+                <a:latin typeface="Arial" pitchFamily="34" charset="0"/>
+                <a:cs typeface="Arial" pitchFamily="34" charset="0"/>
+              </a:rPr>
+              <a:t>post-training: </a:t>
+            </a:r>
+            <a:r>
+              <a:rPr lang="en-US" sz="2000" dirty="0" smtClean="0">
+                <a:latin typeface="Arial" pitchFamily="34" charset="0"/>
+                <a:cs typeface="Arial" pitchFamily="34" charset="0"/>
+              </a:rPr>
+              <a:t>preference-based </a:t>
+            </a:r>
+            <a:r>
+              <a:rPr lang="en-US" sz="2000" dirty="0" smtClean="0">
+                <a:latin typeface="Arial" pitchFamily="34" charset="0"/>
+                <a:cs typeface="Arial" pitchFamily="34" charset="0"/>
+              </a:rPr>
+              <a:t>fine-tuning</a:t>
+            </a:r>
+            <a:endParaRPr lang="en-US" sz="2000" dirty="0" smtClean="0">
+              <a:latin typeface="Arial" pitchFamily="34" charset="0"/>
+              <a:cs typeface="Arial" pitchFamily="34" charset="0"/>
+            </a:endParaRPr>
           </a:p>
           <a:p>
             <a:pPr>
@@ -11480,7 +11473,21 @@
                 <a:latin typeface="Arial" pitchFamily="34" charset="0"/>
                 <a:cs typeface="Arial" pitchFamily="34" charset="0"/>
               </a:rPr>
-              <a:t>  • Workflow-graph orchestration (e.g., LangGraph) with tool calling for booking flows</a:t>
+              <a:t>  • Workflow-graph orchestration </a:t>
+            </a:r>
+            <a:r>
+              <a:rPr lang="en-US" sz="2000" dirty="0" smtClean="0">
+                <a:latin typeface="Arial" pitchFamily="34" charset="0"/>
+                <a:cs typeface="Arial" pitchFamily="34" charset="0"/>
+              </a:rPr>
+              <a:t>with </a:t>
+            </a:r>
+            <a:r>
+              <a:rPr lang="en-US" sz="2000" dirty="0" smtClean="0">
+                <a:latin typeface="Arial" pitchFamily="34" charset="0"/>
+                <a:cs typeface="Arial" pitchFamily="34" charset="0"/>
+              </a:rPr>
+              <a:t>tool calling for booking flows</a:t>
             </a:r>
             <a:endParaRPr lang="en-US" sz="2000" dirty="0">
               <a:latin typeface="Arial" pitchFamily="34" charset="0"/>

--- a/docs/presentation.pptx
+++ b/docs/presentation.pptx
@@ -3723,21 +3723,7 @@
                 <a:latin typeface="Arial" pitchFamily="34" charset="0"/>
                 <a:cs typeface="Arial" pitchFamily="34" charset="0"/>
               </a:rPr>
-              <a:t>Custom metrics (operational): Hallucination Rate, Policy Violation Rate, Domain / Intent Precision, Latency (s), </a:t>
-            </a:r>
-            <a:r>
-              <a:rPr lang="en-US" sz="2000" dirty="0" smtClean="0">
-                <a:latin typeface="Arial" pitchFamily="34" charset="0"/>
-                <a:cs typeface="Arial" pitchFamily="34" charset="0"/>
-              </a:rPr>
-              <a:t>Cost </a:t>
-            </a:r>
-            <a:r>
-              <a:rPr lang="en-US" sz="2000" dirty="0" smtClean="0">
-                <a:latin typeface="Arial" pitchFamily="34" charset="0"/>
-                <a:cs typeface="Arial" pitchFamily="34" charset="0"/>
-              </a:rPr>
-              <a:t>($).</a:t>
+              <a:t>Custom metrics (operational): Hallucination Rate, Policy Violation Rate, Domain / Intent Precision, Latency (s), Cost ($).</a:t>
             </a:r>
           </a:p>
           <a:p>
@@ -11436,58 +11422,19 @@
                 <a:latin typeface="Arial" pitchFamily="34" charset="0"/>
                 <a:cs typeface="Arial" pitchFamily="34" charset="0"/>
               </a:rPr>
-              <a:t>  • DPO </a:t>
-            </a:r>
+              <a:t>  • DPO post-training: preference-based fine-tuning</a:t>
+            </a:r>
+          </a:p>
+          <a:p>
+            <a:pPr>
+              <a:buNone/>
+            </a:pPr>
             <a:r>
               <a:rPr lang="en-US" sz="2000" dirty="0" smtClean="0">
                 <a:latin typeface="Arial" pitchFamily="34" charset="0"/>
                 <a:cs typeface="Arial" pitchFamily="34" charset="0"/>
               </a:rPr>
-              <a:t>post-training: </a:t>
-            </a:r>
-            <a:r>
-              <a:rPr lang="en-US" sz="2000" dirty="0" smtClean="0">
-                <a:latin typeface="Arial" pitchFamily="34" charset="0"/>
-                <a:cs typeface="Arial" pitchFamily="34" charset="0"/>
-              </a:rPr>
-              <a:t>preference-based </a:t>
-            </a:r>
-            <a:r>
-              <a:rPr lang="en-US" sz="2000" dirty="0" smtClean="0">
-                <a:latin typeface="Arial" pitchFamily="34" charset="0"/>
-                <a:cs typeface="Arial" pitchFamily="34" charset="0"/>
-              </a:rPr>
-              <a:t>fine-tuning</a:t>
-            </a:r>
-            <a:endParaRPr lang="en-US" sz="2000" dirty="0" smtClean="0">
-              <a:latin typeface="Arial" pitchFamily="34" charset="0"/>
-              <a:cs typeface="Arial" pitchFamily="34" charset="0"/>
-            </a:endParaRPr>
-          </a:p>
-          <a:p>
-            <a:pPr>
-              <a:buNone/>
-            </a:pPr>
-            <a:r>
-              <a:rPr lang="en-US" sz="2000" dirty="0" smtClean="0">
-                <a:latin typeface="Arial" pitchFamily="34" charset="0"/>
-                <a:cs typeface="Arial" pitchFamily="34" charset="0"/>
-              </a:rPr>
-              <a:t>  • Workflow-graph orchestration </a:t>
-            </a:r>
-            <a:r>
-              <a:rPr lang="en-US" sz="2000" dirty="0" smtClean="0">
-                <a:latin typeface="Arial" pitchFamily="34" charset="0"/>
-                <a:cs typeface="Arial" pitchFamily="34" charset="0"/>
-              </a:rPr>
-              <a:t>with </a:t>
-            </a:r>
-            <a:r>
-              <a:rPr lang="en-US" sz="2000" dirty="0" smtClean="0">
-                <a:latin typeface="Arial" pitchFamily="34" charset="0"/>
-                <a:cs typeface="Arial" pitchFamily="34" charset="0"/>
-              </a:rPr>
-              <a:t>tool calling for booking flows</a:t>
+              <a:t>  • Workflow-graph orchestration with tool calling for booking flows</a:t>
             </a:r>
             <a:endParaRPr lang="en-US" sz="2000" dirty="0">
               <a:latin typeface="Arial" pitchFamily="34" charset="0"/>

--- a/docs/presentation.pptx
+++ b/docs/presentation.pptx
@@ -306,7 +306,7 @@
             <a:fld id="{791D8748-2515-4448-AFB0-4E0BAD67A439}" type="datetimeFigureOut">
               <a:rPr lang="en-US" smtClean="0"/>
               <a:pPr/>
-              <a:t>6/9/2026</a:t>
+              <a:t>6/10/2026</a:t>
             </a:fld>
             <a:endParaRPr lang="en-US"/>
           </a:p>
@@ -473,7 +473,7 @@
             <a:fld id="{791D8748-2515-4448-AFB0-4E0BAD67A439}" type="datetimeFigureOut">
               <a:rPr lang="en-US" smtClean="0"/>
               <a:pPr/>
-              <a:t>6/9/2026</a:t>
+              <a:t>6/10/2026</a:t>
             </a:fld>
             <a:endParaRPr lang="en-US"/>
           </a:p>
@@ -650,7 +650,7 @@
             <a:fld id="{791D8748-2515-4448-AFB0-4E0BAD67A439}" type="datetimeFigureOut">
               <a:rPr lang="en-US" smtClean="0"/>
               <a:pPr/>
-              <a:t>6/9/2026</a:t>
+              <a:t>6/10/2026</a:t>
             </a:fld>
             <a:endParaRPr lang="en-US"/>
           </a:p>
@@ -817,7 +817,7 @@
             <a:fld id="{791D8748-2515-4448-AFB0-4E0BAD67A439}" type="datetimeFigureOut">
               <a:rPr lang="en-US" smtClean="0"/>
               <a:pPr/>
-              <a:t>6/9/2026</a:t>
+              <a:t>6/10/2026</a:t>
             </a:fld>
             <a:endParaRPr lang="en-US"/>
           </a:p>
@@ -1060,7 +1060,7 @@
             <a:fld id="{791D8748-2515-4448-AFB0-4E0BAD67A439}" type="datetimeFigureOut">
               <a:rPr lang="en-US" smtClean="0"/>
               <a:pPr/>
-              <a:t>6/9/2026</a:t>
+              <a:t>6/10/2026</a:t>
             </a:fld>
             <a:endParaRPr lang="en-US"/>
           </a:p>
@@ -1345,7 +1345,7 @@
             <a:fld id="{791D8748-2515-4448-AFB0-4E0BAD67A439}" type="datetimeFigureOut">
               <a:rPr lang="en-US" smtClean="0"/>
               <a:pPr/>
-              <a:t>6/9/2026</a:t>
+              <a:t>6/10/2026</a:t>
             </a:fld>
             <a:endParaRPr lang="en-US"/>
           </a:p>
@@ -1764,7 +1764,7 @@
             <a:fld id="{791D8748-2515-4448-AFB0-4E0BAD67A439}" type="datetimeFigureOut">
               <a:rPr lang="en-US" smtClean="0"/>
               <a:pPr/>
-              <a:t>6/9/2026</a:t>
+              <a:t>6/10/2026</a:t>
             </a:fld>
             <a:endParaRPr lang="en-US"/>
           </a:p>
@@ -1879,7 +1879,7 @@
             <a:fld id="{791D8748-2515-4448-AFB0-4E0BAD67A439}" type="datetimeFigureOut">
               <a:rPr lang="en-US" smtClean="0"/>
               <a:pPr/>
-              <a:t>6/9/2026</a:t>
+              <a:t>6/10/2026</a:t>
             </a:fld>
             <a:endParaRPr lang="en-US"/>
           </a:p>
@@ -1971,7 +1971,7 @@
             <a:fld id="{791D8748-2515-4448-AFB0-4E0BAD67A439}" type="datetimeFigureOut">
               <a:rPr lang="en-US" smtClean="0"/>
               <a:pPr/>
-              <a:t>6/9/2026</a:t>
+              <a:t>6/10/2026</a:t>
             </a:fld>
             <a:endParaRPr lang="en-US"/>
           </a:p>
@@ -2245,7 +2245,7 @@
             <a:fld id="{791D8748-2515-4448-AFB0-4E0BAD67A439}" type="datetimeFigureOut">
               <a:rPr lang="en-US" smtClean="0"/>
               <a:pPr/>
-              <a:t>6/9/2026</a:t>
+              <a:t>6/10/2026</a:t>
             </a:fld>
             <a:endParaRPr lang="en-US"/>
           </a:p>
@@ -2495,7 +2495,7 @@
             <a:fld id="{791D8748-2515-4448-AFB0-4E0BAD67A439}" type="datetimeFigureOut">
               <a:rPr lang="en-US" smtClean="0"/>
               <a:pPr/>
-              <a:t>6/9/2026</a:t>
+              <a:t>6/10/2026</a:t>
             </a:fld>
             <a:endParaRPr lang="en-US"/>
           </a:p>
@@ -2705,7 +2705,7 @@
             <a:fld id="{791D8748-2515-4448-AFB0-4E0BAD67A439}" type="datetimeFigureOut">
               <a:rPr lang="en-US" smtClean="0"/>
               <a:pPr/>
-              <a:t>6/9/2026</a:t>
+              <a:t>6/10/2026</a:t>
             </a:fld>
             <a:endParaRPr lang="en-US"/>
           </a:p>
@@ -3143,7 +3143,7 @@
         </p:spPr>
         <p:txBody>
           <a:bodyPr>
-            <a:normAutofit fontScale="92500" lnSpcReduction="20000"/>
+            <a:normAutofit fontScale="77500" lnSpcReduction="20000"/>
           </a:bodyPr>
           <a:lstStyle/>
           <a:p>
@@ -3169,8 +3169,68 @@
                 <a:latin typeface="Arial" pitchFamily="34" charset="0"/>
                 <a:cs typeface="Arial" pitchFamily="34" charset="0"/>
               </a:rPr>
-              <a:t>Examiners: Vasilis Katsouros, Director of ILSP, Athena Research Center</a:t>
-            </a:r>
+              <a:t>Examiners</a:t>
+            </a:r>
+            <a:r>
+              <a:rPr lang="en-US" sz="1400" dirty="0" smtClean="0">
+                <a:solidFill>
+                  <a:schemeClr val="tx1"/>
+                </a:solidFill>
+                <a:latin typeface="Arial" pitchFamily="34" charset="0"/>
+                <a:cs typeface="Arial" pitchFamily="34" charset="0"/>
+              </a:rPr>
+              <a:t>: Aggelos Pikrakis, Associate Professor, University of Piraeus </a:t>
+            </a:r>
+          </a:p>
+          <a:p>
+            <a:pPr algn="l"/>
+            <a:r>
+              <a:rPr lang="en-US" sz="1400" dirty="0" smtClean="0">
+                <a:solidFill>
+                  <a:schemeClr val="tx1"/>
+                </a:solidFill>
+                <a:latin typeface="Arial" pitchFamily="34" charset="0"/>
+                <a:cs typeface="Arial" pitchFamily="34" charset="0"/>
+              </a:rPr>
+              <a:t> </a:t>
+            </a:r>
+            <a:r>
+              <a:rPr lang="en-US" sz="1400" dirty="0" smtClean="0">
+                <a:solidFill>
+                  <a:schemeClr val="tx1"/>
+                </a:solidFill>
+                <a:latin typeface="Arial" pitchFamily="34" charset="0"/>
+                <a:cs typeface="Arial" pitchFamily="34" charset="0"/>
+              </a:rPr>
+              <a:t>                  </a:t>
+            </a:r>
+            <a:r>
+              <a:rPr lang="en-US" sz="1400" dirty="0" smtClean="0">
+                <a:solidFill>
+                  <a:schemeClr val="tx1"/>
+                </a:solidFill>
+                <a:latin typeface="Arial" pitchFamily="34" charset="0"/>
+                <a:cs typeface="Arial" pitchFamily="34" charset="0"/>
+              </a:rPr>
+              <a:t>Georgios Paraskevopoulos</a:t>
+            </a:r>
+            <a:r>
+              <a:rPr lang="en-US" sz="1400" dirty="0" smtClean="0">
+                <a:solidFill>
+                  <a:schemeClr val="tx1"/>
+                </a:solidFill>
+                <a:latin typeface="Arial" pitchFamily="34" charset="0"/>
+                <a:cs typeface="Arial" pitchFamily="34" charset="0"/>
+              </a:rPr>
+              <a:t>, Scientific Associate, ILSP, Athena Research Center</a:t>
+            </a:r>
+            <a:endParaRPr lang="en-US" sz="1400" dirty="0" smtClean="0">
+              <a:solidFill>
+                <a:schemeClr val="tx1"/>
+              </a:solidFill>
+              <a:latin typeface="Arial" pitchFamily="34" charset="0"/>
+              <a:cs typeface="Arial" pitchFamily="34" charset="0"/>
+            </a:endParaRPr>
           </a:p>
           <a:p>
             <a:pPr algn="l"/>
@@ -3192,7 +3252,7 @@
                 <a:latin typeface="Arial" pitchFamily="34" charset="0"/>
                 <a:cs typeface="Arial" pitchFamily="34" charset="0"/>
               </a:rPr>
-              <a:t>                  Aggelos Pikrakis, Associate Professor, University of Piraeus</a:t>
+              <a:t>                  </a:t>
             </a:r>
           </a:p>
           <a:p>

--- a/docs/presentation.pptx
+++ b/docs/presentation.pptx
@@ -306,7 +306,7 @@
             <a:fld id="{791D8748-2515-4448-AFB0-4E0BAD67A439}" type="datetimeFigureOut">
               <a:rPr lang="en-US" smtClean="0"/>
               <a:pPr/>
-              <a:t>6/10/2026</a:t>
+              <a:t>6/11/2026</a:t>
             </a:fld>
             <a:endParaRPr lang="en-US"/>
           </a:p>
@@ -473,7 +473,7 @@
             <a:fld id="{791D8748-2515-4448-AFB0-4E0BAD67A439}" type="datetimeFigureOut">
               <a:rPr lang="en-US" smtClean="0"/>
               <a:pPr/>
-              <a:t>6/10/2026</a:t>
+              <a:t>6/11/2026</a:t>
             </a:fld>
             <a:endParaRPr lang="en-US"/>
           </a:p>
@@ -650,7 +650,7 @@
             <a:fld id="{791D8748-2515-4448-AFB0-4E0BAD67A439}" type="datetimeFigureOut">
               <a:rPr lang="en-US" smtClean="0"/>
               <a:pPr/>
-              <a:t>6/10/2026</a:t>
+              <a:t>6/11/2026</a:t>
             </a:fld>
             <a:endParaRPr lang="en-US"/>
           </a:p>
@@ -817,7 +817,7 @@
             <a:fld id="{791D8748-2515-4448-AFB0-4E0BAD67A439}" type="datetimeFigureOut">
               <a:rPr lang="en-US" smtClean="0"/>
               <a:pPr/>
-              <a:t>6/10/2026</a:t>
+              <a:t>6/11/2026</a:t>
             </a:fld>
             <a:endParaRPr lang="en-US"/>
           </a:p>
@@ -1060,7 +1060,7 @@
             <a:fld id="{791D8748-2515-4448-AFB0-4E0BAD67A439}" type="datetimeFigureOut">
               <a:rPr lang="en-US" smtClean="0"/>
               <a:pPr/>
-              <a:t>6/10/2026</a:t>
+              <a:t>6/11/2026</a:t>
             </a:fld>
             <a:endParaRPr lang="en-US"/>
           </a:p>
@@ -1345,7 +1345,7 @@
             <a:fld id="{791D8748-2515-4448-AFB0-4E0BAD67A439}" type="datetimeFigureOut">
               <a:rPr lang="en-US" smtClean="0"/>
               <a:pPr/>
-              <a:t>6/10/2026</a:t>
+              <a:t>6/11/2026</a:t>
             </a:fld>
             <a:endParaRPr lang="en-US"/>
           </a:p>
@@ -1764,7 +1764,7 @@
             <a:fld id="{791D8748-2515-4448-AFB0-4E0BAD67A439}" type="datetimeFigureOut">
               <a:rPr lang="en-US" smtClean="0"/>
               <a:pPr/>
-              <a:t>6/10/2026</a:t>
+              <a:t>6/11/2026</a:t>
             </a:fld>
             <a:endParaRPr lang="en-US"/>
           </a:p>
@@ -1879,7 +1879,7 @@
             <a:fld id="{791D8748-2515-4448-AFB0-4E0BAD67A439}" type="datetimeFigureOut">
               <a:rPr lang="en-US" smtClean="0"/>
               <a:pPr/>
-              <a:t>6/10/2026</a:t>
+              <a:t>6/11/2026</a:t>
             </a:fld>
             <a:endParaRPr lang="en-US"/>
           </a:p>
@@ -1971,7 +1971,7 @@
             <a:fld id="{791D8748-2515-4448-AFB0-4E0BAD67A439}" type="datetimeFigureOut">
               <a:rPr lang="en-US" smtClean="0"/>
               <a:pPr/>
-              <a:t>6/10/2026</a:t>
+              <a:t>6/11/2026</a:t>
             </a:fld>
             <a:endParaRPr lang="en-US"/>
           </a:p>
@@ -2245,7 +2245,7 @@
             <a:fld id="{791D8748-2515-4448-AFB0-4E0BAD67A439}" type="datetimeFigureOut">
               <a:rPr lang="en-US" smtClean="0"/>
               <a:pPr/>
-              <a:t>6/10/2026</a:t>
+              <a:t>6/11/2026</a:t>
             </a:fld>
             <a:endParaRPr lang="en-US"/>
           </a:p>
@@ -2495,7 +2495,7 @@
             <a:fld id="{791D8748-2515-4448-AFB0-4E0BAD67A439}" type="datetimeFigureOut">
               <a:rPr lang="en-US" smtClean="0"/>
               <a:pPr/>
-              <a:t>6/10/2026</a:t>
+              <a:t>6/11/2026</a:t>
             </a:fld>
             <a:endParaRPr lang="en-US"/>
           </a:p>
@@ -2705,7 +2705,7 @@
             <a:fld id="{791D8748-2515-4448-AFB0-4E0BAD67A439}" type="datetimeFigureOut">
               <a:rPr lang="en-US" smtClean="0"/>
               <a:pPr/>
-              <a:t>6/10/2026</a:t>
+              <a:t>6/11/2026</a:t>
             </a:fld>
             <a:endParaRPr lang="en-US"/>
           </a:p>
@@ -3169,8 +3169,11 @@
                 <a:latin typeface="Arial" pitchFamily="34" charset="0"/>
                 <a:cs typeface="Arial" pitchFamily="34" charset="0"/>
               </a:rPr>
-              <a:t>Examiners</a:t>
-            </a:r>
+              <a:t>Examiners: Aggelos Pikrakis, Associate Professor, University of Piraeus </a:t>
+            </a:r>
+          </a:p>
+          <a:p>
+            <a:pPr algn="l"/>
             <a:r>
               <a:rPr lang="en-US" sz="1400" dirty="0" smtClean="0">
                 <a:solidFill>
@@ -3179,58 +3182,8 @@
                 <a:latin typeface="Arial" pitchFamily="34" charset="0"/>
                 <a:cs typeface="Arial" pitchFamily="34" charset="0"/>
               </a:rPr>
-              <a:t>: Aggelos Pikrakis, Associate Professor, University of Piraeus </a:t>
-            </a:r>
-          </a:p>
-          <a:p>
-            <a:pPr algn="l"/>
-            <a:r>
-              <a:rPr lang="en-US" sz="1400" dirty="0" smtClean="0">
-                <a:solidFill>
-                  <a:schemeClr val="tx1"/>
-                </a:solidFill>
-                <a:latin typeface="Arial" pitchFamily="34" charset="0"/>
-                <a:cs typeface="Arial" pitchFamily="34" charset="0"/>
-              </a:rPr>
-              <a:t> </a:t>
-            </a:r>
-            <a:r>
-              <a:rPr lang="en-US" sz="1400" dirty="0" smtClean="0">
-                <a:solidFill>
-                  <a:schemeClr val="tx1"/>
-                </a:solidFill>
-                <a:latin typeface="Arial" pitchFamily="34" charset="0"/>
-                <a:cs typeface="Arial" pitchFamily="34" charset="0"/>
-              </a:rPr>
-              <a:t>                  </a:t>
-            </a:r>
-            <a:r>
-              <a:rPr lang="en-US" sz="1400" dirty="0" smtClean="0">
-                <a:solidFill>
-                  <a:schemeClr val="tx1"/>
-                </a:solidFill>
-                <a:latin typeface="Arial" pitchFamily="34" charset="0"/>
-                <a:cs typeface="Arial" pitchFamily="34" charset="0"/>
-              </a:rPr>
-              <a:t>Georgios Paraskevopoulos</a:t>
-            </a:r>
-            <a:r>
-              <a:rPr lang="en-US" sz="1400" dirty="0" smtClean="0">
-                <a:solidFill>
-                  <a:schemeClr val="tx1"/>
-                </a:solidFill>
-                <a:latin typeface="Arial" pitchFamily="34" charset="0"/>
-                <a:cs typeface="Arial" pitchFamily="34" charset="0"/>
-              </a:rPr>
-              <a:t>, Scientific Associate, ILSP, Athena Research Center</a:t>
-            </a:r>
-            <a:endParaRPr lang="en-US" sz="1400" dirty="0" smtClean="0">
-              <a:solidFill>
-                <a:schemeClr val="tx1"/>
-              </a:solidFill>
-              <a:latin typeface="Arial" pitchFamily="34" charset="0"/>
-              <a:cs typeface="Arial" pitchFamily="34" charset="0"/>
-            </a:endParaRPr>
+              <a:t>                   Georgios Paraskevopoulos, Scientific Associate, ILSP, Athena Research Center</a:t>
+            </a:r>
           </a:p>
           <a:p>
             <a:pPr algn="l"/>
@@ -12029,8 +11982,19 @@
                 <a:latin typeface="Arial" pitchFamily="34" charset="0"/>
                 <a:cs typeface="Arial" pitchFamily="34" charset="0"/>
               </a:rPr>
-              <a:t>Per-domain database with real entities for grounded recommendations</a:t>
-            </a:r>
+              <a:t>Per-domain database with real entities for grounded </a:t>
+            </a:r>
+            <a:r>
+              <a:rPr lang="en-US" sz="2000" dirty="0" smtClean="0">
+                <a:latin typeface="Arial" pitchFamily="34" charset="0"/>
+                <a:cs typeface="Arial" pitchFamily="34" charset="0"/>
+              </a:rPr>
+              <a:t>  recommendations</a:t>
+            </a:r>
+            <a:endParaRPr lang="en-US" sz="2000" dirty="0" smtClean="0">
+              <a:latin typeface="Arial" pitchFamily="34" charset="0"/>
+              <a:cs typeface="Arial" pitchFamily="34" charset="0"/>
+            </a:endParaRPr>
           </a:p>
           <a:p>
             <a:pPr marL="0" indent="0">

--- a/docs/presentation.pptx
+++ b/docs/presentation.pptx
@@ -306,7 +306,7 @@
             <a:fld id="{791D8748-2515-4448-AFB0-4E0BAD67A439}" type="datetimeFigureOut">
               <a:rPr lang="en-US" smtClean="0"/>
               <a:pPr/>
-              <a:t>6/11/2026</a:t>
+              <a:t>6/12/2026</a:t>
             </a:fld>
             <a:endParaRPr lang="en-US"/>
           </a:p>
@@ -473,7 +473,7 @@
             <a:fld id="{791D8748-2515-4448-AFB0-4E0BAD67A439}" type="datetimeFigureOut">
               <a:rPr lang="en-US" smtClean="0"/>
               <a:pPr/>
-              <a:t>6/11/2026</a:t>
+              <a:t>6/12/2026</a:t>
             </a:fld>
             <a:endParaRPr lang="en-US"/>
           </a:p>
@@ -650,7 +650,7 @@
             <a:fld id="{791D8748-2515-4448-AFB0-4E0BAD67A439}" type="datetimeFigureOut">
               <a:rPr lang="en-US" smtClean="0"/>
               <a:pPr/>
-              <a:t>6/11/2026</a:t>
+              <a:t>6/12/2026</a:t>
             </a:fld>
             <a:endParaRPr lang="en-US"/>
           </a:p>
@@ -817,7 +817,7 @@
             <a:fld id="{791D8748-2515-4448-AFB0-4E0BAD67A439}" type="datetimeFigureOut">
               <a:rPr lang="en-US" smtClean="0"/>
               <a:pPr/>
-              <a:t>6/11/2026</a:t>
+              <a:t>6/12/2026</a:t>
             </a:fld>
             <a:endParaRPr lang="en-US"/>
           </a:p>
@@ -1060,7 +1060,7 @@
             <a:fld id="{791D8748-2515-4448-AFB0-4E0BAD67A439}" type="datetimeFigureOut">
               <a:rPr lang="en-US" smtClean="0"/>
               <a:pPr/>
-              <a:t>6/11/2026</a:t>
+              <a:t>6/12/2026</a:t>
             </a:fld>
             <a:endParaRPr lang="en-US"/>
           </a:p>
@@ -1345,7 +1345,7 @@
             <a:fld id="{791D8748-2515-4448-AFB0-4E0BAD67A439}" type="datetimeFigureOut">
               <a:rPr lang="en-US" smtClean="0"/>
               <a:pPr/>
-              <a:t>6/11/2026</a:t>
+              <a:t>6/12/2026</a:t>
             </a:fld>
             <a:endParaRPr lang="en-US"/>
           </a:p>
@@ -1764,7 +1764,7 @@
             <a:fld id="{791D8748-2515-4448-AFB0-4E0BAD67A439}" type="datetimeFigureOut">
               <a:rPr lang="en-US" smtClean="0"/>
               <a:pPr/>
-              <a:t>6/11/2026</a:t>
+              <a:t>6/12/2026</a:t>
             </a:fld>
             <a:endParaRPr lang="en-US"/>
           </a:p>
@@ -1879,7 +1879,7 @@
             <a:fld id="{791D8748-2515-4448-AFB0-4E0BAD67A439}" type="datetimeFigureOut">
               <a:rPr lang="en-US" smtClean="0"/>
               <a:pPr/>
-              <a:t>6/11/2026</a:t>
+              <a:t>6/12/2026</a:t>
             </a:fld>
             <a:endParaRPr lang="en-US"/>
           </a:p>
@@ -1971,7 +1971,7 @@
             <a:fld id="{791D8748-2515-4448-AFB0-4E0BAD67A439}" type="datetimeFigureOut">
               <a:rPr lang="en-US" smtClean="0"/>
               <a:pPr/>
-              <a:t>6/11/2026</a:t>
+              <a:t>6/12/2026</a:t>
             </a:fld>
             <a:endParaRPr lang="en-US"/>
           </a:p>
@@ -2245,7 +2245,7 @@
             <a:fld id="{791D8748-2515-4448-AFB0-4E0BAD67A439}" type="datetimeFigureOut">
               <a:rPr lang="en-US" smtClean="0"/>
               <a:pPr/>
-              <a:t>6/11/2026</a:t>
+              <a:t>6/12/2026</a:t>
             </a:fld>
             <a:endParaRPr lang="en-US"/>
           </a:p>
@@ -2495,7 +2495,7 @@
             <a:fld id="{791D8748-2515-4448-AFB0-4E0BAD67A439}" type="datetimeFigureOut">
               <a:rPr lang="en-US" smtClean="0"/>
               <a:pPr/>
-              <a:t>6/11/2026</a:t>
+              <a:t>6/12/2026</a:t>
             </a:fld>
             <a:endParaRPr lang="en-US"/>
           </a:p>
@@ -2705,7 +2705,7 @@
             <a:fld id="{791D8748-2515-4448-AFB0-4E0BAD67A439}" type="datetimeFigureOut">
               <a:rPr lang="en-US" smtClean="0"/>
               <a:pPr/>
-              <a:t>6/11/2026</a:t>
+              <a:t>6/12/2026</a:t>
             </a:fld>
             <a:endParaRPr lang="en-US"/>
           </a:p>
@@ -11590,7 +11590,7 @@
         <p:spPr>
           <a:xfrm>
             <a:off x="467544" y="1412776"/>
-            <a:ext cx="8229600" cy="4896544"/>
+            <a:ext cx="8229600" cy="5112568"/>
           </a:xfrm>
         </p:spPr>
         <p:txBody>
@@ -11655,7 +11655,35 @@
                 <a:latin typeface="Arial" pitchFamily="34" charset="0"/>
                 <a:cs typeface="Arial" pitchFamily="34" charset="0"/>
               </a:rPr>
-              <a:t>This makes it a natural target for AI automation, since today the work is handled by human staff at significant cost in labor, errors, and no 24/7 availability.</a:t>
+              <a:t>This makes it a natural target for AI automation, since today the work is handled by human staff at significant cost in </a:t>
+            </a:r>
+            <a:r>
+              <a:rPr lang="en-US" sz="2000" dirty="0" smtClean="0">
+                <a:latin typeface="Arial" pitchFamily="34" charset="0"/>
+                <a:cs typeface="Arial" pitchFamily="34" charset="0"/>
+              </a:rPr>
+              <a:t>labor and </a:t>
+            </a:r>
+            <a:r>
+              <a:rPr lang="en-US" sz="2000" dirty="0" smtClean="0">
+                <a:latin typeface="Arial" pitchFamily="34" charset="0"/>
+                <a:cs typeface="Arial" pitchFamily="34" charset="0"/>
+              </a:rPr>
+              <a:t>errors, </a:t>
+            </a:r>
+            <a:r>
+              <a:rPr lang="en-US" sz="2000" dirty="0" smtClean="0">
+                <a:latin typeface="Arial" pitchFamily="34" charset="0"/>
+                <a:cs typeface="Arial" pitchFamily="34" charset="0"/>
+              </a:rPr>
+              <a:t>with </a:t>
+            </a:r>
+            <a:r>
+              <a:rPr lang="en-US" sz="2000" dirty="0" smtClean="0">
+                <a:latin typeface="Arial" pitchFamily="34" charset="0"/>
+                <a:cs typeface="Arial" pitchFamily="34" charset="0"/>
+              </a:rPr>
+              <a:t>no 24/7 availability.</a:t>
             </a:r>
           </a:p>
           <a:p>
@@ -11704,7 +11732,21 @@
                 <a:latin typeface="Arial" pitchFamily="34" charset="0"/>
                 <a:cs typeface="Arial" pitchFamily="34" charset="0"/>
               </a:rPr>
-              <a:t>: investigate the architectural choices that lead to a customer-service dialogue system that is reliable, controllable and affordable.</a:t>
+              <a:t>: investigate the architectural choices that </a:t>
+            </a:r>
+            <a:r>
+              <a:rPr lang="en-US" sz="2000" dirty="0" smtClean="0">
+                <a:latin typeface="Arial" pitchFamily="34" charset="0"/>
+                <a:cs typeface="Arial" pitchFamily="34" charset="0"/>
+              </a:rPr>
+              <a:t>lead to a TOD system for customer service that </a:t>
+            </a:r>
+            <a:r>
+              <a:rPr lang="en-US" sz="2000" dirty="0" smtClean="0">
+                <a:latin typeface="Arial" pitchFamily="34" charset="0"/>
+                <a:cs typeface="Arial" pitchFamily="34" charset="0"/>
+              </a:rPr>
+              <a:t>is reliable, controllable and affordable.</a:t>
             </a:r>
           </a:p>
         </p:txBody>
@@ -11982,19 +12024,8 @@
                 <a:latin typeface="Arial" pitchFamily="34" charset="0"/>
                 <a:cs typeface="Arial" pitchFamily="34" charset="0"/>
               </a:rPr>
-              <a:t>Per-domain database with real entities for grounded </a:t>
-            </a:r>
-            <a:r>
-              <a:rPr lang="en-US" sz="2000" dirty="0" smtClean="0">
-                <a:latin typeface="Arial" pitchFamily="34" charset="0"/>
-                <a:cs typeface="Arial" pitchFamily="34" charset="0"/>
-              </a:rPr>
-              <a:t>  recommendations</a:t>
-            </a:r>
-            <a:endParaRPr lang="en-US" sz="2000" dirty="0" smtClean="0">
-              <a:latin typeface="Arial" pitchFamily="34" charset="0"/>
-              <a:cs typeface="Arial" pitchFamily="34" charset="0"/>
-            </a:endParaRPr>
+              <a:t>Per-domain database with real entities for grounded   recommendations</a:t>
+            </a:r>
           </a:p>
           <a:p>
             <a:pPr marL="0" indent="0">

--- a/docs/presentation.pptx
+++ b/docs/presentation.pptx
@@ -306,7 +306,7 @@
             <a:fld id="{791D8748-2515-4448-AFB0-4E0BAD67A439}" type="datetimeFigureOut">
               <a:rPr lang="en-US" smtClean="0"/>
               <a:pPr/>
-              <a:t>6/12/2026</a:t>
+              <a:t>6/15/2026</a:t>
             </a:fld>
             <a:endParaRPr lang="en-US"/>
           </a:p>
@@ -473,7 +473,7 @@
             <a:fld id="{791D8748-2515-4448-AFB0-4E0BAD67A439}" type="datetimeFigureOut">
               <a:rPr lang="en-US" smtClean="0"/>
               <a:pPr/>
-              <a:t>6/12/2026</a:t>
+              <a:t>6/15/2026</a:t>
             </a:fld>
             <a:endParaRPr lang="en-US"/>
           </a:p>
@@ -650,7 +650,7 @@
             <a:fld id="{791D8748-2515-4448-AFB0-4E0BAD67A439}" type="datetimeFigureOut">
               <a:rPr lang="en-US" smtClean="0"/>
               <a:pPr/>
-              <a:t>6/12/2026</a:t>
+              <a:t>6/15/2026</a:t>
             </a:fld>
             <a:endParaRPr lang="en-US"/>
           </a:p>
@@ -817,7 +817,7 @@
             <a:fld id="{791D8748-2515-4448-AFB0-4E0BAD67A439}" type="datetimeFigureOut">
               <a:rPr lang="en-US" smtClean="0"/>
               <a:pPr/>
-              <a:t>6/12/2026</a:t>
+              <a:t>6/15/2026</a:t>
             </a:fld>
             <a:endParaRPr lang="en-US"/>
           </a:p>
@@ -1060,7 +1060,7 @@
             <a:fld id="{791D8748-2515-4448-AFB0-4E0BAD67A439}" type="datetimeFigureOut">
               <a:rPr lang="en-US" smtClean="0"/>
               <a:pPr/>
-              <a:t>6/12/2026</a:t>
+              <a:t>6/15/2026</a:t>
             </a:fld>
             <a:endParaRPr lang="en-US"/>
           </a:p>
@@ -1345,7 +1345,7 @@
             <a:fld id="{791D8748-2515-4448-AFB0-4E0BAD67A439}" type="datetimeFigureOut">
               <a:rPr lang="en-US" smtClean="0"/>
               <a:pPr/>
-              <a:t>6/12/2026</a:t>
+              <a:t>6/15/2026</a:t>
             </a:fld>
             <a:endParaRPr lang="en-US"/>
           </a:p>
@@ -1764,7 +1764,7 @@
             <a:fld id="{791D8748-2515-4448-AFB0-4E0BAD67A439}" type="datetimeFigureOut">
               <a:rPr lang="en-US" smtClean="0"/>
               <a:pPr/>
-              <a:t>6/12/2026</a:t>
+              <a:t>6/15/2026</a:t>
             </a:fld>
             <a:endParaRPr lang="en-US"/>
           </a:p>
@@ -1879,7 +1879,7 @@
             <a:fld id="{791D8748-2515-4448-AFB0-4E0BAD67A439}" type="datetimeFigureOut">
               <a:rPr lang="en-US" smtClean="0"/>
               <a:pPr/>
-              <a:t>6/12/2026</a:t>
+              <a:t>6/15/2026</a:t>
             </a:fld>
             <a:endParaRPr lang="en-US"/>
           </a:p>
@@ -1971,7 +1971,7 @@
             <a:fld id="{791D8748-2515-4448-AFB0-4E0BAD67A439}" type="datetimeFigureOut">
               <a:rPr lang="en-US" smtClean="0"/>
               <a:pPr/>
-              <a:t>6/12/2026</a:t>
+              <a:t>6/15/2026</a:t>
             </a:fld>
             <a:endParaRPr lang="en-US"/>
           </a:p>
@@ -2245,7 +2245,7 @@
             <a:fld id="{791D8748-2515-4448-AFB0-4E0BAD67A439}" type="datetimeFigureOut">
               <a:rPr lang="en-US" smtClean="0"/>
               <a:pPr/>
-              <a:t>6/12/2026</a:t>
+              <a:t>6/15/2026</a:t>
             </a:fld>
             <a:endParaRPr lang="en-US"/>
           </a:p>
@@ -2495,7 +2495,7 @@
             <a:fld id="{791D8748-2515-4448-AFB0-4E0BAD67A439}" type="datetimeFigureOut">
               <a:rPr lang="en-US" smtClean="0"/>
               <a:pPr/>
-              <a:t>6/12/2026</a:t>
+              <a:t>6/15/2026</a:t>
             </a:fld>
             <a:endParaRPr lang="en-US"/>
           </a:p>
@@ -2705,7 +2705,7 @@
             <a:fld id="{791D8748-2515-4448-AFB0-4E0BAD67A439}" type="datetimeFigureOut">
               <a:rPr lang="en-US" smtClean="0"/>
               <a:pPr/>
-              <a:t>6/12/2026</a:t>
+              <a:t>6/15/2026</a:t>
             </a:fld>
             <a:endParaRPr lang="en-US"/>
           </a:p>
@@ -3156,11 +3156,28 @@
                 <a:latin typeface="Arial" pitchFamily="34" charset="0"/>
                 <a:cs typeface="Arial" pitchFamily="34" charset="0"/>
               </a:rPr>
-              <a:t>Supervisor: Kosmas Kritsis, Scientific Associate, ILSP, Athena Research Center</a:t>
-            </a:r>
-          </a:p>
-          <a:p>
-            <a:pPr algn="l"/>
+              <a:t>Supervisor: Kosmas Kritsis</a:t>
+            </a:r>
+            <a:r>
+              <a:rPr lang="en-US" sz="1400" smtClean="0">
+                <a:solidFill>
+                  <a:schemeClr val="tx1"/>
+                </a:solidFill>
+                <a:latin typeface="Arial" pitchFamily="34" charset="0"/>
+                <a:cs typeface="Arial" pitchFamily="34" charset="0"/>
+              </a:rPr>
+              <a:t>, </a:t>
+            </a:r>
+            <a:r>
+              <a:rPr lang="en-US" sz="1400" smtClean="0">
+                <a:solidFill>
+                  <a:schemeClr val="tx1"/>
+                </a:solidFill>
+                <a:latin typeface="Arial" pitchFamily="34" charset="0"/>
+                <a:cs typeface="Arial" pitchFamily="34" charset="0"/>
+              </a:rPr>
+              <a:t>Research </a:t>
+            </a:r>
             <a:r>
               <a:rPr lang="en-US" sz="1400" dirty="0" smtClean="0">
                 <a:solidFill>
@@ -3169,7 +3186,7 @@
                 <a:latin typeface="Arial" pitchFamily="34" charset="0"/>
                 <a:cs typeface="Arial" pitchFamily="34" charset="0"/>
               </a:rPr>
-              <a:t>Examiners: Aggelos Pikrakis, Associate Professor, University of Piraeus </a:t>
+              <a:t>Associate, ILSP, ATHENA R.C.</a:t>
             </a:r>
           </a:p>
           <a:p>
@@ -3182,7 +3199,20 @@
                 <a:latin typeface="Arial" pitchFamily="34" charset="0"/>
                 <a:cs typeface="Arial" pitchFamily="34" charset="0"/>
               </a:rPr>
-              <a:t>                   Georgios Paraskevopoulos, Scientific Associate, ILSP, Athena Research Center</a:t>
+              <a:t>Examiners: Aggelos Pikrakis, Associate Professor, University of Piraeus </a:t>
+            </a:r>
+          </a:p>
+          <a:p>
+            <a:pPr algn="l"/>
+            <a:r>
+              <a:rPr lang="en-US" sz="1400" dirty="0" smtClean="0">
+                <a:solidFill>
+                  <a:schemeClr val="tx1"/>
+                </a:solidFill>
+                <a:latin typeface="Arial" pitchFamily="34" charset="0"/>
+                <a:cs typeface="Arial" pitchFamily="34" charset="0"/>
+              </a:rPr>
+              <a:t>                   Georgios Paraskevopoulos, Researcher C, ILSP, ATHENA R.C.</a:t>
             </a:r>
           </a:p>
           <a:p>
@@ -11655,35 +11685,7 @@
                 <a:latin typeface="Arial" pitchFamily="34" charset="0"/>
                 <a:cs typeface="Arial" pitchFamily="34" charset="0"/>
               </a:rPr>
-              <a:t>This makes it a natural target for AI automation, since today the work is handled by human staff at significant cost in </a:t>
-            </a:r>
-            <a:r>
-              <a:rPr lang="en-US" sz="2000" dirty="0" smtClean="0">
-                <a:latin typeface="Arial" pitchFamily="34" charset="0"/>
-                <a:cs typeface="Arial" pitchFamily="34" charset="0"/>
-              </a:rPr>
-              <a:t>labor and </a:t>
-            </a:r>
-            <a:r>
-              <a:rPr lang="en-US" sz="2000" dirty="0" smtClean="0">
-                <a:latin typeface="Arial" pitchFamily="34" charset="0"/>
-                <a:cs typeface="Arial" pitchFamily="34" charset="0"/>
-              </a:rPr>
-              <a:t>errors, </a:t>
-            </a:r>
-            <a:r>
-              <a:rPr lang="en-US" sz="2000" dirty="0" smtClean="0">
-                <a:latin typeface="Arial" pitchFamily="34" charset="0"/>
-                <a:cs typeface="Arial" pitchFamily="34" charset="0"/>
-              </a:rPr>
-              <a:t>with </a:t>
-            </a:r>
-            <a:r>
-              <a:rPr lang="en-US" sz="2000" dirty="0" smtClean="0">
-                <a:latin typeface="Arial" pitchFamily="34" charset="0"/>
-                <a:cs typeface="Arial" pitchFamily="34" charset="0"/>
-              </a:rPr>
-              <a:t>no 24/7 availability.</a:t>
+              <a:t>This makes it a natural target for AI automation, since today the work is handled by human staff at significant cost in labor and errors, with no 24/7 availability.</a:t>
             </a:r>
           </a:p>
           <a:p>
@@ -11732,21 +11734,7 @@
                 <a:latin typeface="Arial" pitchFamily="34" charset="0"/>
                 <a:cs typeface="Arial" pitchFamily="34" charset="0"/>
               </a:rPr>
-              <a:t>: investigate the architectural choices that </a:t>
-            </a:r>
-            <a:r>
-              <a:rPr lang="en-US" sz="2000" dirty="0" smtClean="0">
-                <a:latin typeface="Arial" pitchFamily="34" charset="0"/>
-                <a:cs typeface="Arial" pitchFamily="34" charset="0"/>
-              </a:rPr>
-              <a:t>lead to a TOD system for customer service that </a:t>
-            </a:r>
-            <a:r>
-              <a:rPr lang="en-US" sz="2000" dirty="0" smtClean="0">
-                <a:latin typeface="Arial" pitchFamily="34" charset="0"/>
-                <a:cs typeface="Arial" pitchFamily="34" charset="0"/>
-              </a:rPr>
-              <a:t>is reliable, controllable and affordable.</a:t>
+              <a:t>: investigate the architectural choices that lead to a TOD system for customer service that is reliable, controllable and affordable.</a:t>
             </a:r>
           </a:p>
         </p:txBody>

--- a/docs/presentation.pptx
+++ b/docs/presentation.pptx
@@ -306,7 +306,7 @@
             <a:fld id="{791D8748-2515-4448-AFB0-4E0BAD67A439}" type="datetimeFigureOut">
               <a:rPr lang="en-US" smtClean="0"/>
               <a:pPr/>
-              <a:t>6/15/2026</a:t>
+              <a:t>6/16/2026</a:t>
             </a:fld>
             <a:endParaRPr lang="en-US"/>
           </a:p>
@@ -473,7 +473,7 @@
             <a:fld id="{791D8748-2515-4448-AFB0-4E0BAD67A439}" type="datetimeFigureOut">
               <a:rPr lang="en-US" smtClean="0"/>
               <a:pPr/>
-              <a:t>6/15/2026</a:t>
+              <a:t>6/16/2026</a:t>
             </a:fld>
             <a:endParaRPr lang="en-US"/>
           </a:p>
@@ -650,7 +650,7 @@
             <a:fld id="{791D8748-2515-4448-AFB0-4E0BAD67A439}" type="datetimeFigureOut">
               <a:rPr lang="en-US" smtClean="0"/>
               <a:pPr/>
-              <a:t>6/15/2026</a:t>
+              <a:t>6/16/2026</a:t>
             </a:fld>
             <a:endParaRPr lang="en-US"/>
           </a:p>
@@ -817,7 +817,7 @@
             <a:fld id="{791D8748-2515-4448-AFB0-4E0BAD67A439}" type="datetimeFigureOut">
               <a:rPr lang="en-US" smtClean="0"/>
               <a:pPr/>
-              <a:t>6/15/2026</a:t>
+              <a:t>6/16/2026</a:t>
             </a:fld>
             <a:endParaRPr lang="en-US"/>
           </a:p>
@@ -1060,7 +1060,7 @@
             <a:fld id="{791D8748-2515-4448-AFB0-4E0BAD67A439}" type="datetimeFigureOut">
               <a:rPr lang="en-US" smtClean="0"/>
               <a:pPr/>
-              <a:t>6/15/2026</a:t>
+              <a:t>6/16/2026</a:t>
             </a:fld>
             <a:endParaRPr lang="en-US"/>
           </a:p>
@@ -1345,7 +1345,7 @@
             <a:fld id="{791D8748-2515-4448-AFB0-4E0BAD67A439}" type="datetimeFigureOut">
               <a:rPr lang="en-US" smtClean="0"/>
               <a:pPr/>
-              <a:t>6/15/2026</a:t>
+              <a:t>6/16/2026</a:t>
             </a:fld>
             <a:endParaRPr lang="en-US"/>
           </a:p>
@@ -1764,7 +1764,7 @@
             <a:fld id="{791D8748-2515-4448-AFB0-4E0BAD67A439}" type="datetimeFigureOut">
               <a:rPr lang="en-US" smtClean="0"/>
               <a:pPr/>
-              <a:t>6/15/2026</a:t>
+              <a:t>6/16/2026</a:t>
             </a:fld>
             <a:endParaRPr lang="en-US"/>
           </a:p>
@@ -1879,7 +1879,7 @@
             <a:fld id="{791D8748-2515-4448-AFB0-4E0BAD67A439}" type="datetimeFigureOut">
               <a:rPr lang="en-US" smtClean="0"/>
               <a:pPr/>
-              <a:t>6/15/2026</a:t>
+              <a:t>6/16/2026</a:t>
             </a:fld>
             <a:endParaRPr lang="en-US"/>
           </a:p>
@@ -1971,7 +1971,7 @@
             <a:fld id="{791D8748-2515-4448-AFB0-4E0BAD67A439}" type="datetimeFigureOut">
               <a:rPr lang="en-US" smtClean="0"/>
               <a:pPr/>
-              <a:t>6/15/2026</a:t>
+              <a:t>6/16/2026</a:t>
             </a:fld>
             <a:endParaRPr lang="en-US"/>
           </a:p>
@@ -2245,7 +2245,7 @@
             <a:fld id="{791D8748-2515-4448-AFB0-4E0BAD67A439}" type="datetimeFigureOut">
               <a:rPr lang="en-US" smtClean="0"/>
               <a:pPr/>
-              <a:t>6/15/2026</a:t>
+              <a:t>6/16/2026</a:t>
             </a:fld>
             <a:endParaRPr lang="en-US"/>
           </a:p>
@@ -2495,7 +2495,7 @@
             <a:fld id="{791D8748-2515-4448-AFB0-4E0BAD67A439}" type="datetimeFigureOut">
               <a:rPr lang="en-US" smtClean="0"/>
               <a:pPr/>
-              <a:t>6/15/2026</a:t>
+              <a:t>6/16/2026</a:t>
             </a:fld>
             <a:endParaRPr lang="en-US"/>
           </a:p>
@@ -2705,7 +2705,7 @@
             <a:fld id="{791D8748-2515-4448-AFB0-4E0BAD67A439}" type="datetimeFigureOut">
               <a:rPr lang="en-US" smtClean="0"/>
               <a:pPr/>
-              <a:t>6/15/2026</a:t>
+              <a:t>6/16/2026</a:t>
             </a:fld>
             <a:endParaRPr lang="en-US"/>
           </a:p>
@@ -3143,104 +3143,74 @@
         </p:spPr>
         <p:txBody>
           <a:bodyPr>
-            <a:normAutofit fontScale="77500" lnSpcReduction="20000"/>
+            <a:noAutofit/>
           </a:bodyPr>
           <a:lstStyle/>
           <a:p>
             <a:pPr algn="l"/>
             <a:r>
-              <a:rPr lang="en-US" sz="1400" dirty="0" smtClean="0">
+              <a:rPr lang="en-US" sz="1200" dirty="0" smtClean="0">
                 <a:solidFill>
                   <a:schemeClr val="tx1"/>
                 </a:solidFill>
                 <a:latin typeface="Arial" pitchFamily="34" charset="0"/>
                 <a:cs typeface="Arial" pitchFamily="34" charset="0"/>
               </a:rPr>
-              <a:t>Supervisor: Kosmas Kritsis</a:t>
-            </a:r>
-            <a:r>
-              <a:rPr lang="en-US" sz="1400" smtClean="0">
+              <a:t>Supervisor: Kosmas Kritsis, Research Associate, ILSP, ATHENA R.C.</a:t>
+            </a:r>
+          </a:p>
+          <a:p>
+            <a:pPr algn="l"/>
+            <a:r>
+              <a:rPr lang="en-US" sz="1200" dirty="0" smtClean="0">
                 <a:solidFill>
                   <a:schemeClr val="tx1"/>
                 </a:solidFill>
                 <a:latin typeface="Arial" pitchFamily="34" charset="0"/>
                 <a:cs typeface="Arial" pitchFamily="34" charset="0"/>
               </a:rPr>
-              <a:t>, </a:t>
-            </a:r>
-            <a:r>
-              <a:rPr lang="en-US" sz="1400" smtClean="0">
+              <a:t>Examiners: Aggelos Pikrakis, Associate Professor, University of Piraeus </a:t>
+            </a:r>
+          </a:p>
+          <a:p>
+            <a:pPr algn="l"/>
+            <a:r>
+              <a:rPr lang="en-US" sz="1200" dirty="0" smtClean="0">
                 <a:solidFill>
                   <a:schemeClr val="tx1"/>
                 </a:solidFill>
                 <a:latin typeface="Arial" pitchFamily="34" charset="0"/>
                 <a:cs typeface="Arial" pitchFamily="34" charset="0"/>
               </a:rPr>
-              <a:t>Research </a:t>
-            </a:r>
-            <a:r>
-              <a:rPr lang="en-US" sz="1400" dirty="0" smtClean="0">
+              <a:t>                   Georgios Paraskevopoulos, Researcher C, ILSP, ATHENA R.C.</a:t>
+            </a:r>
+          </a:p>
+          <a:p>
+            <a:pPr algn="l"/>
+            <a:r>
+              <a:rPr lang="en-US" sz="1200" dirty="0">
                 <a:solidFill>
                   <a:schemeClr val="tx1"/>
                 </a:solidFill>
                 <a:latin typeface="Arial" pitchFamily="34" charset="0"/>
                 <a:cs typeface="Arial" pitchFamily="34" charset="0"/>
               </a:rPr>
-              <a:t>Associate, ILSP, ATHENA R.C.</a:t>
-            </a:r>
-          </a:p>
-          <a:p>
-            <a:pPr algn="l"/>
-            <a:r>
-              <a:rPr lang="en-US" sz="1400" dirty="0" smtClean="0">
+              <a:t> </a:t>
+            </a:r>
+            <a:r>
+              <a:rPr lang="en-US" sz="1200" dirty="0" smtClean="0">
                 <a:solidFill>
                   <a:schemeClr val="tx1"/>
                 </a:solidFill>
                 <a:latin typeface="Arial" pitchFamily="34" charset="0"/>
                 <a:cs typeface="Arial" pitchFamily="34" charset="0"/>
               </a:rPr>
-              <a:t>Examiners: Aggelos Pikrakis, Associate Professor, University of Piraeus </a:t>
+              <a:t>                  </a:t>
             </a:r>
           </a:p>
           <a:p>
             <a:pPr algn="l"/>
-            <a:r>
-              <a:rPr lang="en-US" sz="1400" dirty="0" smtClean="0">
-                <a:solidFill>
-                  <a:schemeClr val="tx1"/>
-                </a:solidFill>
-                <a:latin typeface="Arial" pitchFamily="34" charset="0"/>
-                <a:cs typeface="Arial" pitchFamily="34" charset="0"/>
-              </a:rPr>
-              <a:t>                   Georgios Paraskevopoulos, Researcher C, ILSP, ATHENA R.C.</a:t>
-            </a:r>
-          </a:p>
-          <a:p>
-            <a:pPr algn="l"/>
-            <a:r>
-              <a:rPr lang="en-US" sz="1400" dirty="0">
-                <a:solidFill>
-                  <a:schemeClr val="tx1"/>
-                </a:solidFill>
-                <a:latin typeface="Arial" pitchFamily="34" charset="0"/>
-                <a:cs typeface="Arial" pitchFamily="34" charset="0"/>
-              </a:rPr>
-              <a:t> </a:t>
-            </a:r>
-            <a:r>
-              <a:rPr lang="en-US" sz="1400" dirty="0" smtClean="0">
-                <a:solidFill>
-                  <a:schemeClr val="tx1"/>
-                </a:solidFill>
-                <a:latin typeface="Arial" pitchFamily="34" charset="0"/>
-                <a:cs typeface="Arial" pitchFamily="34" charset="0"/>
-              </a:rPr>
-              <a:t>                  </a:t>
-            </a:r>
-          </a:p>
-          <a:p>
-            <a:pPr algn="l"/>
-            <a:endParaRPr lang="en-US" sz="1400" dirty="0">
+            <a:endParaRPr lang="en-US" sz="1200" dirty="0">
               <a:solidFill>
                 <a:schemeClr val="tx1"/>
               </a:solidFill>
@@ -3250,7 +3220,7 @@
           </a:p>
           <a:p>
             <a:r>
-              <a:rPr lang="en-US" sz="1500" dirty="0" smtClean="0">
+              <a:rPr lang="en-US" sz="1200" dirty="0" smtClean="0">
                 <a:solidFill>
                   <a:schemeClr val="tx1"/>
                 </a:solidFill>
@@ -3259,7 +3229,7 @@
               </a:rPr>
               <a:t>Athens, 2026</a:t>
             </a:r>
-            <a:endParaRPr lang="en-US" sz="1500" dirty="0">
+            <a:endParaRPr lang="en-US" sz="1200" dirty="0">
               <a:solidFill>
                 <a:schemeClr val="tx1"/>
               </a:solidFill>
@@ -3889,7 +3859,7 @@
         </p:nvGraphicFramePr>
         <p:xfrm>
           <a:off x="467544" y="1268760"/>
-          <a:ext cx="7776864" cy="2966720"/>
+          <a:ext cx="6923112" cy="2966720"/>
         </p:xfrm>
         <a:graphic>
           <a:graphicData uri="http://schemas.openxmlformats.org/drawingml/2006/table">
@@ -3905,7 +3875,6 @@
                 <a:gridCol w="1008112"/>
                 <a:gridCol w="792088"/>
                 <a:gridCol w="1224136"/>
-                <a:gridCol w="853752"/>
               </a:tblGrid>
               <a:tr h="370840">
                 <a:tc>
@@ -4062,28 +4031,6 @@
                     <a:noFill/>
                   </a:tcPr>
                 </a:tc>
-                <a:tc>
-                  <a:txBody>
-                    <a:bodyPr/>
-                    <a:lstStyle/>
-                    <a:p>
-                      <a:r>
-                        <a:rPr lang="en-US" sz="1400" b="1" dirty="0" smtClean="0">
-                          <a:latin typeface="Arial" pitchFamily="34" charset="0"/>
-                          <a:cs typeface="Arial" pitchFamily="34" charset="0"/>
-                        </a:rPr>
-                        <a:t>Cost</a:t>
-                      </a:r>
-                      <a:endParaRPr lang="en-US" sz="1400" b="1" dirty="0">
-                        <a:latin typeface="Arial" pitchFamily="34" charset="0"/>
-                        <a:cs typeface="Arial" pitchFamily="34" charset="0"/>
-                      </a:endParaRPr>
-                    </a:p>
-                  </a:txBody>
-                  <a:tcPr marL="45720" marR="45720" anchor="ctr">
-                    <a:noFill/>
-                  </a:tcPr>
-                </a:tc>
               </a:tr>
               <a:tr h="370840">
                 <a:tc>
@@ -4240,28 +4187,6 @@
                     <a:noFill/>
                   </a:tcPr>
                 </a:tc>
-                <a:tc>
-                  <a:txBody>
-                    <a:bodyPr/>
-                    <a:lstStyle/>
-                    <a:p>
-                      <a:r>
-                        <a:rPr lang="en-US" sz="1400" dirty="0" smtClean="0">
-                          <a:latin typeface="Arial" pitchFamily="34" charset="0"/>
-                          <a:cs typeface="Arial" pitchFamily="34" charset="0"/>
-                        </a:rPr>
-                        <a:t>$21.03</a:t>
-                      </a:r>
-                      <a:endParaRPr lang="en-US" sz="1400" dirty="0">
-                        <a:latin typeface="Arial" pitchFamily="34" charset="0"/>
-                        <a:cs typeface="Arial" pitchFamily="34" charset="0"/>
-                      </a:endParaRPr>
-                    </a:p>
-                  </a:txBody>
-                  <a:tcPr marL="45720" marR="45720" anchor="ctr">
-                    <a:noFill/>
-                  </a:tcPr>
-                </a:tc>
               </a:tr>
               <a:tr h="370840">
                 <a:tc>
@@ -4409,28 +4334,6 @@
                         <a:t>80.8</a:t>
                       </a:r>
                       <a:endParaRPr lang="en-US" sz="1400" b="1" dirty="0">
-                        <a:latin typeface="Arial" pitchFamily="34" charset="0"/>
-                        <a:cs typeface="Arial" pitchFamily="34" charset="0"/>
-                      </a:endParaRPr>
-                    </a:p>
-                  </a:txBody>
-                  <a:tcPr marL="45720" marR="45720" anchor="ctr">
-                    <a:noFill/>
-                  </a:tcPr>
-                </a:tc>
-                <a:tc>
-                  <a:txBody>
-                    <a:bodyPr/>
-                    <a:lstStyle/>
-                    <a:p>
-                      <a:r>
-                        <a:rPr lang="en-US" sz="1400" dirty="0" smtClean="0">
-                          <a:latin typeface="Arial" pitchFamily="34" charset="0"/>
-                          <a:cs typeface="Arial" pitchFamily="34" charset="0"/>
-                        </a:rPr>
-                        <a:t>free</a:t>
-                      </a:r>
-                      <a:endParaRPr lang="en-US" sz="1400" dirty="0">
                         <a:latin typeface="Arial" pitchFamily="34" charset="0"/>
                         <a:cs typeface="Arial" pitchFamily="34" charset="0"/>
                       </a:endParaRPr>
@@ -4609,28 +4512,6 @@
                     <a:noFill/>
                   </a:tcPr>
                 </a:tc>
-                <a:tc>
-                  <a:txBody>
-                    <a:bodyPr/>
-                    <a:lstStyle/>
-                    <a:p>
-                      <a:r>
-                        <a:rPr lang="en-US" sz="1400" dirty="0" smtClean="0">
-                          <a:latin typeface="Arial" pitchFamily="34" charset="0"/>
-                          <a:cs typeface="Arial" pitchFamily="34" charset="0"/>
-                        </a:rPr>
-                        <a:t>free</a:t>
-                      </a:r>
-                      <a:endParaRPr lang="en-US" sz="1400" dirty="0">
-                        <a:latin typeface="Arial" pitchFamily="34" charset="0"/>
-                        <a:cs typeface="Arial" pitchFamily="34" charset="0"/>
-                      </a:endParaRPr>
-                    </a:p>
-                  </a:txBody>
-                  <a:tcPr marL="45720" marR="45720" anchor="ctr">
-                    <a:noFill/>
-                  </a:tcPr>
-                </a:tc>
               </a:tr>
               <a:tr h="370840">
                 <a:tc>
@@ -4800,28 +4681,6 @@
                     <a:noFill/>
                   </a:tcPr>
                 </a:tc>
-                <a:tc>
-                  <a:txBody>
-                    <a:bodyPr/>
-                    <a:lstStyle/>
-                    <a:p>
-                      <a:r>
-                        <a:rPr lang="en-US" sz="1400" dirty="0" smtClean="0">
-                          <a:latin typeface="Arial" pitchFamily="34" charset="0"/>
-                          <a:cs typeface="Arial" pitchFamily="34" charset="0"/>
-                        </a:rPr>
-                        <a:t>$2.75</a:t>
-                      </a:r>
-                      <a:endParaRPr lang="en-US" sz="1400" dirty="0">
-                        <a:latin typeface="Arial" pitchFamily="34" charset="0"/>
-                        <a:cs typeface="Arial" pitchFamily="34" charset="0"/>
-                      </a:endParaRPr>
-                    </a:p>
-                  </a:txBody>
-                  <a:tcPr marL="45720" marR="45720" anchor="ctr">
-                    <a:noFill/>
-                  </a:tcPr>
-                </a:tc>
               </a:tr>
               <a:tr h="370840">
                 <a:tc>
@@ -4967,28 +4826,6 @@
                           <a:cs typeface="Arial" pitchFamily="34" charset="0"/>
                         </a:rPr>
                         <a:t>47.7</a:t>
-                      </a:r>
-                      <a:endParaRPr lang="en-US" sz="1400" dirty="0">
-                        <a:latin typeface="Arial" pitchFamily="34" charset="0"/>
-                        <a:cs typeface="Arial" pitchFamily="34" charset="0"/>
-                      </a:endParaRPr>
-                    </a:p>
-                  </a:txBody>
-                  <a:tcPr marL="45720" marR="45720" anchor="ctr">
-                    <a:noFill/>
-                  </a:tcPr>
-                </a:tc>
-                <a:tc>
-                  <a:txBody>
-                    <a:bodyPr/>
-                    <a:lstStyle/>
-                    <a:p>
-                      <a:r>
-                        <a:rPr lang="en-US" sz="1400" dirty="0" smtClean="0">
-                          <a:latin typeface="Arial" pitchFamily="34" charset="0"/>
-                          <a:cs typeface="Arial" pitchFamily="34" charset="0"/>
-                        </a:rPr>
-                        <a:t>free</a:t>
                       </a:r>
                       <a:endParaRPr lang="en-US" sz="1400" dirty="0">
                         <a:latin typeface="Arial" pitchFamily="34" charset="0"/>
@@ -5169,28 +5006,6 @@
                     <a:noFill/>
                   </a:tcPr>
                 </a:tc>
-                <a:tc>
-                  <a:txBody>
-                    <a:bodyPr/>
-                    <a:lstStyle/>
-                    <a:p>
-                      <a:r>
-                        <a:rPr lang="en-US" sz="1400" dirty="0" smtClean="0">
-                          <a:latin typeface="Arial" pitchFamily="34" charset="0"/>
-                          <a:cs typeface="Arial" pitchFamily="34" charset="0"/>
-                        </a:rPr>
-                        <a:t>free</a:t>
-                      </a:r>
-                      <a:endParaRPr lang="en-US" sz="1400" dirty="0">
-                        <a:latin typeface="Arial" pitchFamily="34" charset="0"/>
-                        <a:cs typeface="Arial" pitchFamily="34" charset="0"/>
-                      </a:endParaRPr>
-                    </a:p>
-                  </a:txBody>
-                  <a:tcPr marL="45720" marR="45720" anchor="ctr">
-                    <a:noFill/>
-                  </a:tcPr>
-                </a:tc>
               </a:tr>
               <a:tr h="370840">
                 <a:tc>
@@ -5373,28 +5188,6 @@
                     <a:noFill/>
                   </a:tcPr>
                 </a:tc>
-                <a:tc>
-                  <a:txBody>
-                    <a:bodyPr/>
-                    <a:lstStyle/>
-                    <a:p>
-                      <a:r>
-                        <a:rPr lang="en-US" sz="1400" dirty="0" smtClean="0">
-                          <a:latin typeface="Arial" pitchFamily="34" charset="0"/>
-                          <a:cs typeface="Arial" pitchFamily="34" charset="0"/>
-                        </a:rPr>
-                        <a:t>free</a:t>
-                      </a:r>
-                      <a:endParaRPr lang="en-US" sz="1400" dirty="0">
-                        <a:latin typeface="Arial" pitchFamily="34" charset="0"/>
-                        <a:cs typeface="Arial" pitchFamily="34" charset="0"/>
-                      </a:endParaRPr>
-                    </a:p>
-                  </a:txBody>
-                  <a:tcPr marL="45720" marR="45720" anchor="ctr">
-                    <a:noFill/>
-                  </a:tcPr>
-                </a:tc>
               </a:tr>
             </a:tbl>
           </a:graphicData>
@@ -5409,7 +5202,7 @@
         <p:spPr>
           <a:xfrm>
             <a:off x="467544" y="4509120"/>
-            <a:ext cx="7920880" cy="1415772"/>
+            <a:ext cx="7920880" cy="1661993"/>
           </a:xfrm>
           <a:prstGeom prst="rect">
             <a:avLst/>
@@ -5448,26 +5241,93 @@
                 <a:latin typeface="Arial" pitchFamily="34" charset="0"/>
                 <a:cs typeface="Arial" pitchFamily="34" charset="0"/>
               </a:rPr>
-              <a:t>• Haiku leads, but at very high cost</a:t>
-            </a:r>
-          </a:p>
-          <a:p>
+              <a:t>• Haiku leads, but </a:t>
+            </a:r>
             <a:r>
               <a:rPr lang="en-US" sz="1600" dirty="0" smtClean="0">
                 <a:latin typeface="Arial" pitchFamily="34" charset="0"/>
                 <a:cs typeface="Arial" pitchFamily="34" charset="0"/>
               </a:rPr>
-              <a:t>  • Qwen3-14B is the best open-source, close to API quality, free</a:t>
-            </a:r>
-          </a:p>
-          <a:p>
+              <a:t>at</a:t>
+            </a:r>
             <a:r>
               <a:rPr lang="en-US" sz="1600" dirty="0" smtClean="0">
                 <a:latin typeface="Arial" pitchFamily="34" charset="0"/>
                 <a:cs typeface="Arial" pitchFamily="34" charset="0"/>
               </a:rPr>
+              <a:t> </a:t>
+            </a:r>
+            <a:r>
+              <a:rPr lang="en-US" sz="1600" dirty="0" smtClean="0">
+                <a:latin typeface="Arial" pitchFamily="34" charset="0"/>
+                <a:cs typeface="Arial" pitchFamily="34" charset="0"/>
+              </a:rPr>
+              <a:t>$</a:t>
+            </a:r>
+            <a:r>
+              <a:rPr lang="en-US" sz="1600" dirty="0" smtClean="0">
+                <a:latin typeface="Arial" pitchFamily="34" charset="0"/>
+                <a:cs typeface="Arial" pitchFamily="34" charset="0"/>
+              </a:rPr>
+              <a:t>21 in API fees, ~8× more than GPT-4o-mini ($2.75)</a:t>
+            </a:r>
+            <a:endParaRPr lang="en-US" sz="1600" dirty="0" smtClean="0">
+              <a:latin typeface="Arial" pitchFamily="34" charset="0"/>
+              <a:cs typeface="Arial" pitchFamily="34" charset="0"/>
+            </a:endParaRPr>
+          </a:p>
+          <a:p>
+            <a:r>
+              <a:rPr lang="en-US" sz="1600" dirty="0" smtClean="0">
+                <a:latin typeface="Arial" pitchFamily="34" charset="0"/>
+                <a:cs typeface="Arial" pitchFamily="34" charset="0"/>
+              </a:rPr>
+              <a:t>  • Qwen3-14B is the best open-source, close to API quality, </a:t>
+            </a:r>
+            <a:r>
+              <a:rPr lang="en-US" sz="1600" dirty="0" smtClean="0">
+                <a:latin typeface="Arial" pitchFamily="34" charset="0"/>
+                <a:cs typeface="Arial" pitchFamily="34" charset="0"/>
+              </a:rPr>
+              <a:t>free</a:t>
+            </a:r>
+            <a:endParaRPr lang="en-US" sz="1600" dirty="0" smtClean="0">
+              <a:latin typeface="Arial" pitchFamily="34" charset="0"/>
+              <a:cs typeface="Arial" pitchFamily="34" charset="0"/>
+            </a:endParaRPr>
+          </a:p>
+          <a:p>
+            <a:r>
+              <a:rPr lang="en-US" sz="1600" dirty="0" smtClean="0">
+                <a:latin typeface="Arial" pitchFamily="34" charset="0"/>
+                <a:cs typeface="Arial" pitchFamily="34" charset="0"/>
+              </a:rPr>
               <a:t>  • LLaMA-3.1-8B fails entirely, Qwen3 scaling non-monotonic </a:t>
             </a:r>
+            <a:endParaRPr lang="en-US" sz="1600" dirty="0" smtClean="0">
+              <a:latin typeface="Arial" pitchFamily="34" charset="0"/>
+              <a:cs typeface="Arial" pitchFamily="34" charset="0"/>
+            </a:endParaRPr>
+          </a:p>
+          <a:p>
+            <a:r>
+              <a:rPr lang="en-US" sz="1600" dirty="0" smtClean="0">
+                <a:latin typeface="Arial" pitchFamily="34" charset="0"/>
+                <a:cs typeface="Arial" pitchFamily="34" charset="0"/>
+              </a:rPr>
+              <a:t> </a:t>
+            </a:r>
+            <a:r>
+              <a:rPr lang="en-US" sz="1600" dirty="0" smtClean="0">
+                <a:latin typeface="Arial" pitchFamily="34" charset="0"/>
+                <a:cs typeface="Arial" pitchFamily="34" charset="0"/>
+              </a:rPr>
+              <a:t> </a:t>
+            </a:r>
+            <a:endParaRPr lang="en-US" sz="1600" dirty="0" smtClean="0">
+              <a:latin typeface="Arial" pitchFamily="34" charset="0"/>
+              <a:cs typeface="Arial" pitchFamily="34" charset="0"/>
+            </a:endParaRPr>
           </a:p>
         </p:txBody>
       </p:sp>
@@ -5540,7 +5400,7 @@
         </p:nvGraphicFramePr>
         <p:xfrm>
           <a:off x="467544" y="1268760"/>
-          <a:ext cx="7920880" cy="3962400"/>
+          <a:ext cx="7119495" cy="3962400"/>
         </p:xfrm>
         <a:graphic>
           <a:graphicData uri="http://schemas.openxmlformats.org/drawingml/2006/table">
@@ -5556,7 +5416,6 @@
                 <a:gridCol w="934883"/>
                 <a:gridCol w="862969"/>
                 <a:gridCol w="1150625"/>
-                <a:gridCol w="801385"/>
               </a:tblGrid>
               <a:tr h="299110">
                 <a:tc>
@@ -5713,28 +5572,6 @@
                     <a:noFill/>
                   </a:tcPr>
                 </a:tc>
-                <a:tc>
-                  <a:txBody>
-                    <a:bodyPr/>
-                    <a:lstStyle/>
-                    <a:p>
-                      <a:r>
-                        <a:rPr lang="en-US" sz="1400" b="1" dirty="0" smtClean="0">
-                          <a:latin typeface="Arial" pitchFamily="34" charset="0"/>
-                          <a:cs typeface="Arial" pitchFamily="34" charset="0"/>
-                        </a:rPr>
-                        <a:t>Cost</a:t>
-                      </a:r>
-                      <a:endParaRPr lang="en-US" sz="1400" b="1" dirty="0">
-                        <a:latin typeface="Arial" pitchFamily="34" charset="0"/>
-                        <a:cs typeface="Arial" pitchFamily="34" charset="0"/>
-                      </a:endParaRPr>
-                    </a:p>
-                  </a:txBody>
-                  <a:tcPr marL="45720" marR="45720" anchor="ctr">
-                    <a:noFill/>
-                  </a:tcPr>
-                </a:tc>
               </a:tr>
               <a:tr h="299110">
                 <a:tc>
@@ -5891,28 +5728,6 @@
                     <a:noFill/>
                   </a:tcPr>
                 </a:tc>
-                <a:tc>
-                  <a:txBody>
-                    <a:bodyPr/>
-                    <a:lstStyle/>
-                    <a:p>
-                      <a:r>
-                        <a:rPr lang="en-US" sz="1400" dirty="0" smtClean="0">
-                          <a:latin typeface="Arial" pitchFamily="34" charset="0"/>
-                          <a:cs typeface="Arial" pitchFamily="34" charset="0"/>
-                        </a:rPr>
-                        <a:t>$2.10</a:t>
-                      </a:r>
-                      <a:endParaRPr lang="en-US" sz="1400" dirty="0">
-                        <a:latin typeface="Arial" pitchFamily="34" charset="0"/>
-                        <a:cs typeface="Arial" pitchFamily="34" charset="0"/>
-                      </a:endParaRPr>
-                    </a:p>
-                  </a:txBody>
-                  <a:tcPr marL="45720" marR="45720" anchor="ctr">
-                    <a:noFill/>
-                  </a:tcPr>
-                </a:tc>
               </a:tr>
               <a:tr h="299110">
                 <a:tc>
@@ -6060,28 +5875,6 @@
                         <a:t>87.7</a:t>
                       </a:r>
                       <a:endParaRPr lang="en-US" sz="1400" b="1" dirty="0">
-                        <a:latin typeface="Arial" pitchFamily="34" charset="0"/>
-                        <a:cs typeface="Arial" pitchFamily="34" charset="0"/>
-                      </a:endParaRPr>
-                    </a:p>
-                  </a:txBody>
-                  <a:tcPr marL="45720" marR="45720" anchor="ctr">
-                    <a:noFill/>
-                  </a:tcPr>
-                </a:tc>
-                <a:tc>
-                  <a:txBody>
-                    <a:bodyPr/>
-                    <a:lstStyle/>
-                    <a:p>
-                      <a:r>
-                        <a:rPr lang="en-US" sz="1400" dirty="0" smtClean="0">
-                          <a:latin typeface="Arial" pitchFamily="34" charset="0"/>
-                          <a:cs typeface="Arial" pitchFamily="34" charset="0"/>
-                        </a:rPr>
-                        <a:t>$1.53</a:t>
-                      </a:r>
-                      <a:endParaRPr lang="en-US" sz="1400" dirty="0">
                         <a:latin typeface="Arial" pitchFamily="34" charset="0"/>
                         <a:cs typeface="Arial" pitchFamily="34" charset="0"/>
                       </a:endParaRPr>
@@ -6260,28 +6053,6 @@
                     <a:noFill/>
                   </a:tcPr>
                 </a:tc>
-                <a:tc>
-                  <a:txBody>
-                    <a:bodyPr/>
-                    <a:lstStyle/>
-                    <a:p>
-                      <a:r>
-                        <a:rPr lang="en-US" sz="1400" dirty="0" smtClean="0">
-                          <a:latin typeface="Arial" pitchFamily="34" charset="0"/>
-                          <a:cs typeface="Arial" pitchFamily="34" charset="0"/>
-                        </a:rPr>
-                        <a:t>$0.78</a:t>
-                      </a:r>
-                      <a:endParaRPr lang="en-US" sz="1400" dirty="0">
-                        <a:latin typeface="Arial" pitchFamily="34" charset="0"/>
-                        <a:cs typeface="Arial" pitchFamily="34" charset="0"/>
-                      </a:endParaRPr>
-                    </a:p>
-                  </a:txBody>
-                  <a:tcPr marL="45720" marR="45720" anchor="ctr">
-                    <a:noFill/>
-                  </a:tcPr>
-                </a:tc>
               </a:tr>
               <a:tr h="299110">
                 <a:tc>
@@ -6451,28 +6222,6 @@
                     <a:noFill/>
                   </a:tcPr>
                 </a:tc>
-                <a:tc>
-                  <a:txBody>
-                    <a:bodyPr/>
-                    <a:lstStyle/>
-                    <a:p>
-                      <a:r>
-                        <a:rPr lang="en-US" sz="1400" dirty="0" smtClean="0">
-                          <a:latin typeface="Arial" pitchFamily="34" charset="0"/>
-                          <a:cs typeface="Arial" pitchFamily="34" charset="0"/>
-                        </a:rPr>
-                        <a:t>$0.20</a:t>
-                      </a:r>
-                      <a:endParaRPr lang="en-US" sz="1400" dirty="0">
-                        <a:latin typeface="Arial" pitchFamily="34" charset="0"/>
-                        <a:cs typeface="Arial" pitchFamily="34" charset="0"/>
-                      </a:endParaRPr>
-                    </a:p>
-                  </a:txBody>
-                  <a:tcPr marL="45720" marR="45720" anchor="ctr">
-                    <a:noFill/>
-                  </a:tcPr>
-                </a:tc>
               </a:tr>
               <a:tr h="299110">
                 <a:tc>
@@ -6618,28 +6367,6 @@
                           <a:cs typeface="Arial" pitchFamily="34" charset="0"/>
                         </a:rPr>
                         <a:t>76.0</a:t>
-                      </a:r>
-                      <a:endParaRPr lang="en-US" sz="1400" dirty="0">
-                        <a:latin typeface="Arial" pitchFamily="34" charset="0"/>
-                        <a:cs typeface="Arial" pitchFamily="34" charset="0"/>
-                      </a:endParaRPr>
-                    </a:p>
-                  </a:txBody>
-                  <a:tcPr marL="45720" marR="45720" anchor="ctr">
-                    <a:noFill/>
-                  </a:tcPr>
-                </a:tc>
-                <a:tc>
-                  <a:txBody>
-                    <a:bodyPr/>
-                    <a:lstStyle/>
-                    <a:p>
-                      <a:r>
-                        <a:rPr lang="en-US" sz="1400" dirty="0" smtClean="0">
-                          <a:latin typeface="Arial" pitchFamily="34" charset="0"/>
-                          <a:cs typeface="Arial" pitchFamily="34" charset="0"/>
-                        </a:rPr>
-                        <a:t>free</a:t>
                       </a:r>
                       <a:endParaRPr lang="en-US" sz="1400" dirty="0">
                         <a:latin typeface="Arial" pitchFamily="34" charset="0"/>
@@ -6820,6 +6547,8 @@
                     <a:noFill/>
                   </a:tcPr>
                 </a:tc>
+              </a:tr>
+              <a:tr h="299110">
                 <a:tc>
                   <a:txBody>
                     <a:bodyPr/>
@@ -6847,8 +6576,140 @@
                           <a:latin typeface="Arial" pitchFamily="34" charset="0"/>
                           <a:cs typeface="Arial" pitchFamily="34" charset="0"/>
                         </a:rPr>
-                        <a:t>free</a:t>
-                      </a:r>
+                        <a:t>Qwen3-4B</a:t>
+                      </a:r>
+                      <a:endParaRPr lang="en-US" sz="1400" dirty="0">
+                        <a:latin typeface="Arial" pitchFamily="34" charset="0"/>
+                        <a:cs typeface="Arial" pitchFamily="34" charset="0"/>
+                      </a:endParaRPr>
+                    </a:p>
+                  </a:txBody>
+                  <a:tcPr marL="45720" marR="45720" anchor="ctr">
+                    <a:noFill/>
+                  </a:tcPr>
+                </a:tc>
+                <a:tc>
+                  <a:txBody>
+                    <a:bodyPr/>
+                    <a:lstStyle/>
+                    <a:p>
+                      <a:r>
+                        <a:rPr lang="en-US" sz="1400" dirty="0" smtClean="0">
+                          <a:latin typeface="Arial" pitchFamily="34" charset="0"/>
+                          <a:cs typeface="Arial" pitchFamily="34" charset="0"/>
+                        </a:rPr>
+                        <a:t>26.7</a:t>
+                      </a:r>
+                    </a:p>
+                  </a:txBody>
+                  <a:tcPr marL="45720" marR="45720" anchor="ctr">
+                    <a:noFill/>
+                  </a:tcPr>
+                </a:tc>
+                <a:tc>
+                  <a:txBody>
+                    <a:bodyPr/>
+                    <a:lstStyle/>
+                    <a:p>
+                      <a:r>
+                        <a:rPr lang="en-US" sz="1400" dirty="0" smtClean="0">
+                          <a:latin typeface="Arial" pitchFamily="34" charset="0"/>
+                          <a:cs typeface="Arial" pitchFamily="34" charset="0"/>
+                        </a:rPr>
+                        <a:t>77.2</a:t>
+                      </a:r>
+                      <a:endParaRPr lang="en-US" sz="1400" dirty="0">
+                        <a:latin typeface="Arial" pitchFamily="34" charset="0"/>
+                        <a:cs typeface="Arial" pitchFamily="34" charset="0"/>
+                      </a:endParaRPr>
+                    </a:p>
+                  </a:txBody>
+                  <a:tcPr marL="45720" marR="45720" anchor="ctr">
+                    <a:noFill/>
+                  </a:tcPr>
+                </a:tc>
+                <a:tc>
+                  <a:txBody>
+                    <a:bodyPr/>
+                    <a:lstStyle/>
+                    <a:p>
+                      <a:r>
+                        <a:rPr lang="en-US" sz="1400" dirty="0" smtClean="0">
+                          <a:latin typeface="Arial" pitchFamily="34" charset="0"/>
+                          <a:cs typeface="Arial" pitchFamily="34" charset="0"/>
+                        </a:rPr>
+                        <a:t>68.3</a:t>
+                      </a:r>
+                      <a:endParaRPr lang="en-US" sz="1400" dirty="0">
+                        <a:latin typeface="Arial" pitchFamily="34" charset="0"/>
+                        <a:cs typeface="Arial" pitchFamily="34" charset="0"/>
+                      </a:endParaRPr>
+                    </a:p>
+                  </a:txBody>
+                  <a:tcPr marL="45720" marR="45720" anchor="ctr">
+                    <a:noFill/>
+                  </a:tcPr>
+                </a:tc>
+                <a:tc>
+                  <a:txBody>
+                    <a:bodyPr/>
+                    <a:lstStyle/>
+                    <a:p>
+                      <a:r>
+                        <a:rPr lang="en-US" sz="1400" dirty="0" smtClean="0">
+                          <a:latin typeface="Arial" pitchFamily="34" charset="0"/>
+                          <a:cs typeface="Arial" pitchFamily="34" charset="0"/>
+                        </a:rPr>
+                        <a:t>59.7</a:t>
+                      </a:r>
+                      <a:endParaRPr lang="en-US" sz="1400" dirty="0">
+                        <a:latin typeface="Arial" pitchFamily="34" charset="0"/>
+                        <a:cs typeface="Arial" pitchFamily="34" charset="0"/>
+                      </a:endParaRPr>
+                    </a:p>
+                  </a:txBody>
+                  <a:tcPr marL="45720" marR="45720" anchor="ctr">
+                    <a:noFill/>
+                  </a:tcPr>
+                </a:tc>
+                <a:tc>
+                  <a:txBody>
+                    <a:bodyPr/>
+                    <a:lstStyle/>
+                    <a:p>
+                      <a:r>
+                        <a:rPr lang="en-US" sz="1400" dirty="0" smtClean="0">
+                          <a:latin typeface="Arial" pitchFamily="34" charset="0"/>
+                          <a:cs typeface="Arial" pitchFamily="34" charset="0"/>
+                        </a:rPr>
+                        <a:t>3.11</a:t>
+                      </a:r>
+                      <a:endParaRPr lang="en-US" sz="1400" dirty="0">
+                        <a:latin typeface="Arial" pitchFamily="34" charset="0"/>
+                        <a:cs typeface="Arial" pitchFamily="34" charset="0"/>
+                      </a:endParaRPr>
+                    </a:p>
+                  </a:txBody>
+                  <a:tcPr marL="45720" marR="45720" anchor="ctr">
+                    <a:noFill/>
+                  </a:tcPr>
+                </a:tc>
+                <a:tc>
+                  <a:txBody>
+                    <a:bodyPr/>
+                    <a:lstStyle/>
+                    <a:p>
+                      <a:r>
+                        <a:rPr lang="en-US" sz="1400" dirty="0" smtClean="0">
+                          <a:latin typeface="Arial" pitchFamily="34" charset="0"/>
+                          <a:cs typeface="Arial" pitchFamily="34" charset="0"/>
+                        </a:rPr>
+                        <a:t>67.1</a:t>
+                      </a:r>
+                      <a:endParaRPr lang="en-US" sz="1400" dirty="0">
+                        <a:latin typeface="Arial" pitchFamily="34" charset="0"/>
+                        <a:cs typeface="Arial" pitchFamily="34" charset="0"/>
+                      </a:endParaRPr>
                     </a:p>
                   </a:txBody>
                   <a:tcPr marL="45720" marR="45720" anchor="ctr">
@@ -6884,157 +6745,139 @@
                           <a:latin typeface="Arial" pitchFamily="34" charset="0"/>
                           <a:cs typeface="Arial" pitchFamily="34" charset="0"/>
                         </a:rPr>
-                        <a:t>Qwen3-4B</a:t>
-                      </a:r>
-                      <a:endParaRPr lang="en-US" sz="1400" dirty="0">
-                        <a:latin typeface="Arial" pitchFamily="34" charset="0"/>
-                        <a:cs typeface="Arial" pitchFamily="34" charset="0"/>
-                      </a:endParaRPr>
-                    </a:p>
-                  </a:txBody>
-                  <a:tcPr marL="45720" marR="45720" anchor="ctr">
-                    <a:noFill/>
-                  </a:tcPr>
-                </a:tc>
-                <a:tc>
-                  <a:txBody>
-                    <a:bodyPr/>
-                    <a:lstStyle/>
-                    <a:p>
-                      <a:r>
-                        <a:rPr lang="en-US" sz="1400" dirty="0" smtClean="0">
-                          <a:latin typeface="Arial" pitchFamily="34" charset="0"/>
-                          <a:cs typeface="Arial" pitchFamily="34" charset="0"/>
-                        </a:rPr>
-                        <a:t>26.7</a:t>
-                      </a:r>
-                    </a:p>
-                  </a:txBody>
-                  <a:tcPr marL="45720" marR="45720" anchor="ctr">
-                    <a:noFill/>
-                  </a:tcPr>
-                </a:tc>
-                <a:tc>
-                  <a:txBody>
-                    <a:bodyPr/>
-                    <a:lstStyle/>
-                    <a:p>
-                      <a:r>
-                        <a:rPr lang="en-US" sz="1400" dirty="0" smtClean="0">
-                          <a:latin typeface="Arial" pitchFamily="34" charset="0"/>
-                          <a:cs typeface="Arial" pitchFamily="34" charset="0"/>
-                        </a:rPr>
-                        <a:t>77.2</a:t>
-                      </a:r>
-                      <a:endParaRPr lang="en-US" sz="1400" dirty="0">
-                        <a:latin typeface="Arial" pitchFamily="34" charset="0"/>
-                        <a:cs typeface="Arial" pitchFamily="34" charset="0"/>
-                      </a:endParaRPr>
-                    </a:p>
-                  </a:txBody>
-                  <a:tcPr marL="45720" marR="45720" anchor="ctr">
-                    <a:noFill/>
-                  </a:tcPr>
-                </a:tc>
-                <a:tc>
-                  <a:txBody>
-                    <a:bodyPr/>
-                    <a:lstStyle/>
-                    <a:p>
-                      <a:r>
-                        <a:rPr lang="en-US" sz="1400" dirty="0" smtClean="0">
-                          <a:latin typeface="Arial" pitchFamily="34" charset="0"/>
-                          <a:cs typeface="Arial" pitchFamily="34" charset="0"/>
-                        </a:rPr>
-                        <a:t>68.3</a:t>
-                      </a:r>
-                      <a:endParaRPr lang="en-US" sz="1400" dirty="0">
-                        <a:latin typeface="Arial" pitchFamily="34" charset="0"/>
-                        <a:cs typeface="Arial" pitchFamily="34" charset="0"/>
-                      </a:endParaRPr>
-                    </a:p>
-                  </a:txBody>
-                  <a:tcPr marL="45720" marR="45720" anchor="ctr">
-                    <a:noFill/>
-                  </a:tcPr>
-                </a:tc>
-                <a:tc>
-                  <a:txBody>
-                    <a:bodyPr/>
-                    <a:lstStyle/>
-                    <a:p>
-                      <a:r>
-                        <a:rPr lang="en-US" sz="1400" dirty="0" smtClean="0">
-                          <a:latin typeface="Arial" pitchFamily="34" charset="0"/>
-                          <a:cs typeface="Arial" pitchFamily="34" charset="0"/>
-                        </a:rPr>
-                        <a:t>59.7</a:t>
-                      </a:r>
-                      <a:endParaRPr lang="en-US" sz="1400" dirty="0">
-                        <a:latin typeface="Arial" pitchFamily="34" charset="0"/>
-                        <a:cs typeface="Arial" pitchFamily="34" charset="0"/>
-                      </a:endParaRPr>
-                    </a:p>
-                  </a:txBody>
-                  <a:tcPr marL="45720" marR="45720" anchor="ctr">
-                    <a:noFill/>
-                  </a:tcPr>
-                </a:tc>
-                <a:tc>
-                  <a:txBody>
-                    <a:bodyPr/>
-                    <a:lstStyle/>
-                    <a:p>
-                      <a:r>
-                        <a:rPr lang="en-US" sz="1400" dirty="0" smtClean="0">
-                          <a:latin typeface="Arial" pitchFamily="34" charset="0"/>
-                          <a:cs typeface="Arial" pitchFamily="34" charset="0"/>
-                        </a:rPr>
-                        <a:t>3.11</a:t>
-                      </a:r>
-                      <a:endParaRPr lang="en-US" sz="1400" dirty="0">
-                        <a:latin typeface="Arial" pitchFamily="34" charset="0"/>
-                        <a:cs typeface="Arial" pitchFamily="34" charset="0"/>
-                      </a:endParaRPr>
-                    </a:p>
-                  </a:txBody>
-                  <a:tcPr marL="45720" marR="45720" anchor="ctr">
-                    <a:noFill/>
-                  </a:tcPr>
-                </a:tc>
-                <a:tc>
-                  <a:txBody>
-                    <a:bodyPr/>
-                    <a:lstStyle/>
-                    <a:p>
-                      <a:r>
-                        <a:rPr lang="en-US" sz="1400" dirty="0" smtClean="0">
-                          <a:latin typeface="Arial" pitchFamily="34" charset="0"/>
-                          <a:cs typeface="Arial" pitchFamily="34" charset="0"/>
-                        </a:rPr>
-                        <a:t>67.1</a:t>
-                      </a:r>
-                      <a:endParaRPr lang="en-US" sz="1400" dirty="0">
-                        <a:latin typeface="Arial" pitchFamily="34" charset="0"/>
-                        <a:cs typeface="Arial" pitchFamily="34" charset="0"/>
-                      </a:endParaRPr>
-                    </a:p>
-                  </a:txBody>
-                  <a:tcPr marL="45720" marR="45720" anchor="ctr">
-                    <a:noFill/>
-                  </a:tcPr>
-                </a:tc>
-                <a:tc>
-                  <a:txBody>
-                    <a:bodyPr/>
-                    <a:lstStyle/>
-                    <a:p>
-                      <a:r>
-                        <a:rPr lang="en-US" sz="1400" dirty="0" smtClean="0">
-                          <a:latin typeface="Arial" pitchFamily="34" charset="0"/>
-                          <a:cs typeface="Arial" pitchFamily="34" charset="0"/>
-                        </a:rPr>
-                        <a:t>free</a:t>
+                        <a:t>Phi-4-14B</a:t>
+                      </a:r>
+                      <a:endParaRPr lang="en-US" sz="1400" dirty="0">
+                        <a:latin typeface="Arial" pitchFamily="34" charset="0"/>
+                        <a:cs typeface="Arial" pitchFamily="34" charset="0"/>
+                      </a:endParaRPr>
+                    </a:p>
+                  </a:txBody>
+                  <a:tcPr marL="45720" marR="45720" anchor="ctr">
+                    <a:noFill/>
+                  </a:tcPr>
+                </a:tc>
+                <a:tc>
+                  <a:txBody>
+                    <a:bodyPr/>
+                    <a:lstStyle/>
+                    <a:p>
+                      <a:r>
+                        <a:rPr lang="en-US" sz="1400" dirty="0" smtClean="0">
+                          <a:latin typeface="Arial" pitchFamily="34" charset="0"/>
+                          <a:cs typeface="Arial" pitchFamily="34" charset="0"/>
+                        </a:rPr>
+                        <a:t>23.8</a:t>
+                      </a:r>
+                      <a:endParaRPr lang="en-US" sz="1400" dirty="0">
+                        <a:latin typeface="Arial" pitchFamily="34" charset="0"/>
+                        <a:cs typeface="Arial" pitchFamily="34" charset="0"/>
+                      </a:endParaRPr>
+                    </a:p>
+                  </a:txBody>
+                  <a:tcPr marL="45720" marR="45720" anchor="ctr">
+                    <a:noFill/>
+                  </a:tcPr>
+                </a:tc>
+                <a:tc>
+                  <a:txBody>
+                    <a:bodyPr/>
+                    <a:lstStyle/>
+                    <a:p>
+                      <a:r>
+                        <a:rPr lang="en-US" sz="1400" dirty="0" smtClean="0">
+                          <a:latin typeface="Arial" pitchFamily="34" charset="0"/>
+                          <a:cs typeface="Arial" pitchFamily="34" charset="0"/>
+                        </a:rPr>
+                        <a:t>69.7</a:t>
+                      </a:r>
+                      <a:endParaRPr lang="en-US" sz="1400" dirty="0">
+                        <a:latin typeface="Arial" pitchFamily="34" charset="0"/>
+                        <a:cs typeface="Arial" pitchFamily="34" charset="0"/>
+                      </a:endParaRPr>
+                    </a:p>
+                  </a:txBody>
+                  <a:tcPr marL="45720" marR="45720" anchor="ctr">
+                    <a:noFill/>
+                  </a:tcPr>
+                </a:tc>
+                <a:tc>
+                  <a:txBody>
+                    <a:bodyPr/>
+                    <a:lstStyle/>
+                    <a:p>
+                      <a:r>
+                        <a:rPr lang="en-US" sz="1400" dirty="0" smtClean="0">
+                          <a:latin typeface="Arial" pitchFamily="34" charset="0"/>
+                          <a:cs typeface="Arial" pitchFamily="34" charset="0"/>
+                        </a:rPr>
+                        <a:t>61.3</a:t>
+                      </a:r>
+                      <a:endParaRPr lang="en-US" sz="1400" dirty="0">
+                        <a:latin typeface="Arial" pitchFamily="34" charset="0"/>
+                        <a:cs typeface="Arial" pitchFamily="34" charset="0"/>
+                      </a:endParaRPr>
+                    </a:p>
+                  </a:txBody>
+                  <a:tcPr marL="45720" marR="45720" anchor="ctr">
+                    <a:noFill/>
+                  </a:tcPr>
+                </a:tc>
+                <a:tc>
+                  <a:txBody>
+                    <a:bodyPr/>
+                    <a:lstStyle/>
+                    <a:p>
+                      <a:r>
+                        <a:rPr lang="en-US" sz="1400" dirty="0" smtClean="0">
+                          <a:latin typeface="Arial" pitchFamily="34" charset="0"/>
+                          <a:cs typeface="Arial" pitchFamily="34" charset="0"/>
+                        </a:rPr>
+                        <a:t>43.5</a:t>
+                      </a:r>
+                      <a:endParaRPr lang="en-US" sz="1400" dirty="0">
+                        <a:latin typeface="Arial" pitchFamily="34" charset="0"/>
+                        <a:cs typeface="Arial" pitchFamily="34" charset="0"/>
+                      </a:endParaRPr>
+                    </a:p>
+                  </a:txBody>
+                  <a:tcPr marL="45720" marR="45720" anchor="ctr">
+                    <a:noFill/>
+                  </a:tcPr>
+                </a:tc>
+                <a:tc>
+                  <a:txBody>
+                    <a:bodyPr/>
+                    <a:lstStyle/>
+                    <a:p>
+                      <a:r>
+                        <a:rPr lang="en-US" sz="1400" dirty="0" smtClean="0">
+                          <a:latin typeface="Arial" pitchFamily="34" charset="0"/>
+                          <a:cs typeface="Arial" pitchFamily="34" charset="0"/>
+                        </a:rPr>
+                        <a:t>2.83</a:t>
+                      </a:r>
+                      <a:endParaRPr lang="en-US" sz="1400" dirty="0">
+                        <a:latin typeface="Arial" pitchFamily="34" charset="0"/>
+                        <a:cs typeface="Arial" pitchFamily="34" charset="0"/>
+                      </a:endParaRPr>
+                    </a:p>
+                  </a:txBody>
+                  <a:tcPr marL="45720" marR="45720" anchor="ctr">
+                    <a:noFill/>
+                  </a:tcPr>
+                </a:tc>
+                <a:tc>
+                  <a:txBody>
+                    <a:bodyPr/>
+                    <a:lstStyle/>
+                    <a:p>
+                      <a:r>
+                        <a:rPr lang="en-US" sz="1400" dirty="0" smtClean="0">
+                          <a:latin typeface="Arial" pitchFamily="34" charset="0"/>
+                          <a:cs typeface="Arial" pitchFamily="34" charset="0"/>
+                        </a:rPr>
+                        <a:t>55.2</a:t>
                       </a:r>
                       <a:endParaRPr lang="en-US" sz="1400" dirty="0">
                         <a:latin typeface="Arial" pitchFamily="34" charset="0"/>
@@ -7075,162 +6918,144 @@
                           <a:latin typeface="Arial" pitchFamily="34" charset="0"/>
                           <a:cs typeface="Arial" pitchFamily="34" charset="0"/>
                         </a:rPr>
-                        <a:t>Phi-4-14B</a:t>
-                      </a:r>
-                      <a:endParaRPr lang="en-US" sz="1400" dirty="0">
-                        <a:latin typeface="Arial" pitchFamily="34" charset="0"/>
-                        <a:cs typeface="Arial" pitchFamily="34" charset="0"/>
-                      </a:endParaRPr>
-                    </a:p>
-                  </a:txBody>
-                  <a:tcPr marL="45720" marR="45720" anchor="ctr">
-                    <a:noFill/>
-                  </a:tcPr>
-                </a:tc>
-                <a:tc>
-                  <a:txBody>
-                    <a:bodyPr/>
-                    <a:lstStyle/>
-                    <a:p>
-                      <a:r>
-                        <a:rPr lang="en-US" sz="1400" dirty="0" smtClean="0">
-                          <a:latin typeface="Arial" pitchFamily="34" charset="0"/>
-                          <a:cs typeface="Arial" pitchFamily="34" charset="0"/>
-                        </a:rPr>
-                        <a:t>23.8</a:t>
-                      </a:r>
-                      <a:endParaRPr lang="en-US" sz="1400" dirty="0">
-                        <a:latin typeface="Arial" pitchFamily="34" charset="0"/>
-                        <a:cs typeface="Arial" pitchFamily="34" charset="0"/>
-                      </a:endParaRPr>
-                    </a:p>
-                  </a:txBody>
-                  <a:tcPr marL="45720" marR="45720" anchor="ctr">
-                    <a:noFill/>
-                  </a:tcPr>
-                </a:tc>
-                <a:tc>
-                  <a:txBody>
-                    <a:bodyPr/>
-                    <a:lstStyle/>
-                    <a:p>
-                      <a:r>
-                        <a:rPr lang="en-US" sz="1400" dirty="0" smtClean="0">
-                          <a:latin typeface="Arial" pitchFamily="34" charset="0"/>
-                          <a:cs typeface="Arial" pitchFamily="34" charset="0"/>
-                        </a:rPr>
-                        <a:t>69.7</a:t>
-                      </a:r>
-                      <a:endParaRPr lang="en-US" sz="1400" dirty="0">
-                        <a:latin typeface="Arial" pitchFamily="34" charset="0"/>
-                        <a:cs typeface="Arial" pitchFamily="34" charset="0"/>
-                      </a:endParaRPr>
-                    </a:p>
-                  </a:txBody>
-                  <a:tcPr marL="45720" marR="45720" anchor="ctr">
-                    <a:noFill/>
-                  </a:tcPr>
-                </a:tc>
-                <a:tc>
-                  <a:txBody>
-                    <a:bodyPr/>
-                    <a:lstStyle/>
-                    <a:p>
-                      <a:r>
-                        <a:rPr lang="en-US" sz="1400" dirty="0" smtClean="0">
-                          <a:latin typeface="Arial" pitchFamily="34" charset="0"/>
-                          <a:cs typeface="Arial" pitchFamily="34" charset="0"/>
-                        </a:rPr>
-                        <a:t>61.3</a:t>
-                      </a:r>
-                      <a:endParaRPr lang="en-US" sz="1400" dirty="0">
-                        <a:latin typeface="Arial" pitchFamily="34" charset="0"/>
-                        <a:cs typeface="Arial" pitchFamily="34" charset="0"/>
-                      </a:endParaRPr>
-                    </a:p>
-                  </a:txBody>
-                  <a:tcPr marL="45720" marR="45720" anchor="ctr">
-                    <a:noFill/>
-                  </a:tcPr>
-                </a:tc>
-                <a:tc>
-                  <a:txBody>
-                    <a:bodyPr/>
-                    <a:lstStyle/>
-                    <a:p>
-                      <a:r>
-                        <a:rPr lang="en-US" sz="1400" dirty="0" smtClean="0">
-                          <a:latin typeface="Arial" pitchFamily="34" charset="0"/>
-                          <a:cs typeface="Arial" pitchFamily="34" charset="0"/>
-                        </a:rPr>
-                        <a:t>43.5</a:t>
-                      </a:r>
-                      <a:endParaRPr lang="en-US" sz="1400" dirty="0">
-                        <a:latin typeface="Arial" pitchFamily="34" charset="0"/>
-                        <a:cs typeface="Arial" pitchFamily="34" charset="0"/>
-                      </a:endParaRPr>
-                    </a:p>
-                  </a:txBody>
-                  <a:tcPr marL="45720" marR="45720" anchor="ctr">
-                    <a:noFill/>
-                  </a:tcPr>
-                </a:tc>
-                <a:tc>
-                  <a:txBody>
-                    <a:bodyPr/>
-                    <a:lstStyle/>
-                    <a:p>
-                      <a:r>
-                        <a:rPr lang="en-US" sz="1400" dirty="0" smtClean="0">
-                          <a:latin typeface="Arial" pitchFamily="34" charset="0"/>
-                          <a:cs typeface="Arial" pitchFamily="34" charset="0"/>
-                        </a:rPr>
-                        <a:t>2.83</a:t>
-                      </a:r>
-                      <a:endParaRPr lang="en-US" sz="1400" dirty="0">
-                        <a:latin typeface="Arial" pitchFamily="34" charset="0"/>
-                        <a:cs typeface="Arial" pitchFamily="34" charset="0"/>
-                      </a:endParaRPr>
-                    </a:p>
-                  </a:txBody>
-                  <a:tcPr marL="45720" marR="45720" anchor="ctr">
-                    <a:noFill/>
-                  </a:tcPr>
-                </a:tc>
-                <a:tc>
-                  <a:txBody>
-                    <a:bodyPr/>
-                    <a:lstStyle/>
-                    <a:p>
-                      <a:r>
-                        <a:rPr lang="en-US" sz="1400" dirty="0" smtClean="0">
-                          <a:latin typeface="Arial" pitchFamily="34" charset="0"/>
-                          <a:cs typeface="Arial" pitchFamily="34" charset="0"/>
-                        </a:rPr>
-                        <a:t>55.2</a:t>
-                      </a:r>
-                      <a:endParaRPr lang="en-US" sz="1400" dirty="0">
-                        <a:latin typeface="Arial" pitchFamily="34" charset="0"/>
-                        <a:cs typeface="Arial" pitchFamily="34" charset="0"/>
-                      </a:endParaRPr>
-                    </a:p>
-                  </a:txBody>
-                  <a:tcPr marL="45720" marR="45720" anchor="ctr">
-                    <a:noFill/>
-                  </a:tcPr>
-                </a:tc>
-                <a:tc>
-                  <a:txBody>
-                    <a:bodyPr/>
-                    <a:lstStyle/>
-                    <a:p>
-                      <a:r>
-                        <a:rPr lang="en-US" sz="1400" dirty="0" smtClean="0">
-                          <a:latin typeface="Arial" pitchFamily="34" charset="0"/>
-                          <a:cs typeface="Arial" pitchFamily="34" charset="0"/>
-                        </a:rPr>
-                        <a:t>free</a:t>
-                      </a:r>
+                        <a:t>Qwen3-14B → Qwen3-8B</a:t>
+                      </a:r>
+                      <a:endParaRPr lang="en-US" sz="1400" dirty="0">
+                        <a:latin typeface="Arial" pitchFamily="34" charset="0"/>
+                        <a:cs typeface="Arial" pitchFamily="34" charset="0"/>
+                      </a:endParaRPr>
+                    </a:p>
+                  </a:txBody>
+                  <a:tcPr marL="45720" marR="45720" anchor="ctr">
+                    <a:noFill/>
+                  </a:tcPr>
+                </a:tc>
+                <a:tc>
+                  <a:txBody>
+                    <a:bodyPr/>
+                    <a:lstStyle/>
+                    <a:p>
+                      <a:r>
+                        <a:rPr lang="en-US" sz="1400" dirty="0" smtClean="0">
+                          <a:latin typeface="Arial" pitchFamily="34" charset="0"/>
+                          <a:cs typeface="Arial" pitchFamily="34" charset="0"/>
+                        </a:rPr>
+                        <a:t>33.7</a:t>
+                      </a:r>
+                      <a:endParaRPr lang="en-US" sz="1400" dirty="0">
+                        <a:latin typeface="Arial" pitchFamily="34" charset="0"/>
+                        <a:cs typeface="Arial" pitchFamily="34" charset="0"/>
+                      </a:endParaRPr>
+                    </a:p>
+                  </a:txBody>
+                  <a:tcPr marL="45720" marR="45720" anchor="ctr">
+                    <a:noFill/>
+                  </a:tcPr>
+                </a:tc>
+                <a:tc>
+                  <a:txBody>
+                    <a:bodyPr/>
+                    <a:lstStyle/>
+                    <a:p>
+                      <a:r>
+                        <a:rPr lang="en-US" sz="1400" dirty="0" smtClean="0">
+                          <a:latin typeface="Arial" pitchFamily="34" charset="0"/>
+                          <a:cs typeface="Arial" pitchFamily="34" charset="0"/>
+                        </a:rPr>
+                        <a:t>81.6</a:t>
+                      </a:r>
+                      <a:endParaRPr lang="en-US" sz="1400" dirty="0">
+                        <a:latin typeface="Arial" pitchFamily="34" charset="0"/>
+                        <a:cs typeface="Arial" pitchFamily="34" charset="0"/>
+                      </a:endParaRPr>
+                    </a:p>
+                  </a:txBody>
+                  <a:tcPr marL="45720" marR="45720" anchor="ctr">
+                    <a:noFill/>
+                  </a:tcPr>
+                </a:tc>
+                <a:tc>
+                  <a:txBody>
+                    <a:bodyPr/>
+                    <a:lstStyle/>
+                    <a:p>
+                      <a:r>
+                        <a:rPr lang="en-US" sz="1400" dirty="0" smtClean="0">
+                          <a:latin typeface="Arial" pitchFamily="34" charset="0"/>
+                          <a:cs typeface="Arial" pitchFamily="34" charset="0"/>
+                        </a:rPr>
+                        <a:t>52.7</a:t>
+                      </a:r>
+                      <a:endParaRPr lang="en-US" sz="1400" dirty="0">
+                        <a:latin typeface="Arial" pitchFamily="34" charset="0"/>
+                        <a:cs typeface="Arial" pitchFamily="34" charset="0"/>
+                      </a:endParaRPr>
+                    </a:p>
+                  </a:txBody>
+                  <a:tcPr marL="45720" marR="45720" anchor="ctr">
+                    <a:noFill/>
+                  </a:tcPr>
+                </a:tc>
+                <a:tc>
+                  <a:txBody>
+                    <a:bodyPr/>
+                    <a:lstStyle/>
+                    <a:p>
+                      <a:r>
+                        <a:rPr lang="en-US" sz="1400" dirty="0" smtClean="0">
+                          <a:latin typeface="Arial" pitchFamily="34" charset="0"/>
+                          <a:cs typeface="Arial" pitchFamily="34" charset="0"/>
+                        </a:rPr>
+                        <a:t>45.2</a:t>
+                      </a:r>
+                      <a:endParaRPr lang="en-US" sz="1400" dirty="0">
+                        <a:latin typeface="Arial" pitchFamily="34" charset="0"/>
+                        <a:cs typeface="Arial" pitchFamily="34" charset="0"/>
+                      </a:endParaRPr>
+                    </a:p>
+                  </a:txBody>
+                  <a:tcPr marL="45720" marR="45720" anchor="ctr">
+                    <a:noFill/>
+                  </a:tcPr>
+                </a:tc>
+                <a:tc>
+                  <a:txBody>
+                    <a:bodyPr/>
+                    <a:lstStyle/>
+                    <a:p>
+                      <a:r>
+                        <a:rPr lang="en-US" sz="1400" dirty="0" smtClean="0">
+                          <a:latin typeface="Arial" pitchFamily="34" charset="0"/>
+                          <a:cs typeface="Arial" pitchFamily="34" charset="0"/>
+                        </a:rPr>
+                        <a:t>5.20</a:t>
+                      </a:r>
+                      <a:endParaRPr lang="en-US" sz="1400" dirty="0">
+                        <a:latin typeface="Arial" pitchFamily="34" charset="0"/>
+                        <a:cs typeface="Arial" pitchFamily="34" charset="0"/>
+                      </a:endParaRPr>
+                    </a:p>
+                  </a:txBody>
+                  <a:tcPr marL="45720" marR="45720" anchor="ctr">
+                    <a:noFill/>
+                  </a:tcPr>
+                </a:tc>
+                <a:tc>
+                  <a:txBody>
+                    <a:bodyPr/>
+                    <a:lstStyle/>
+                    <a:p>
+                      <a:r>
+                        <a:rPr lang="en-US" sz="1400" dirty="0" smtClean="0">
+                          <a:latin typeface="Arial" pitchFamily="34" charset="0"/>
+                          <a:cs typeface="Arial" pitchFamily="34" charset="0"/>
+                        </a:rPr>
+                        <a:t>54.2</a:t>
+                      </a:r>
+                      <a:endParaRPr lang="en-US" sz="1400" dirty="0">
+                        <a:latin typeface="Arial" pitchFamily="34" charset="0"/>
+                        <a:cs typeface="Arial" pitchFamily="34" charset="0"/>
+                      </a:endParaRPr>
                     </a:p>
                   </a:txBody>
                   <a:tcPr marL="45720" marR="45720" anchor="ctr">
@@ -7266,161 +7091,139 @@
                           <a:latin typeface="Arial" pitchFamily="34" charset="0"/>
                           <a:cs typeface="Arial" pitchFamily="34" charset="0"/>
                         </a:rPr>
-                        <a:t>Qwen3-14B → Qwen3-8B</a:t>
-                      </a:r>
-                      <a:endParaRPr lang="en-US" sz="1400" dirty="0">
-                        <a:latin typeface="Arial" pitchFamily="34" charset="0"/>
-                        <a:cs typeface="Arial" pitchFamily="34" charset="0"/>
-                      </a:endParaRPr>
-                    </a:p>
-                  </a:txBody>
-                  <a:tcPr marL="45720" marR="45720" anchor="ctr">
-                    <a:noFill/>
-                  </a:tcPr>
-                </a:tc>
-                <a:tc>
-                  <a:txBody>
-                    <a:bodyPr/>
-                    <a:lstStyle/>
-                    <a:p>
-                      <a:r>
-                        <a:rPr lang="en-US" sz="1400" dirty="0" smtClean="0">
-                          <a:latin typeface="Arial" pitchFamily="34" charset="0"/>
-                          <a:cs typeface="Arial" pitchFamily="34" charset="0"/>
-                        </a:rPr>
-                        <a:t>33.7</a:t>
-                      </a:r>
-                      <a:endParaRPr lang="en-US" sz="1400" dirty="0">
-                        <a:latin typeface="Arial" pitchFamily="34" charset="0"/>
-                        <a:cs typeface="Arial" pitchFamily="34" charset="0"/>
-                      </a:endParaRPr>
-                    </a:p>
-                  </a:txBody>
-                  <a:tcPr marL="45720" marR="45720" anchor="ctr">
-                    <a:noFill/>
-                  </a:tcPr>
-                </a:tc>
-                <a:tc>
-                  <a:txBody>
-                    <a:bodyPr/>
-                    <a:lstStyle/>
-                    <a:p>
-                      <a:r>
-                        <a:rPr lang="en-US" sz="1400" dirty="0" smtClean="0">
-                          <a:latin typeface="Arial" pitchFamily="34" charset="0"/>
-                          <a:cs typeface="Arial" pitchFamily="34" charset="0"/>
-                        </a:rPr>
-                        <a:t>81.6</a:t>
-                      </a:r>
-                      <a:endParaRPr lang="en-US" sz="1400" dirty="0">
-                        <a:latin typeface="Arial" pitchFamily="34" charset="0"/>
-                        <a:cs typeface="Arial" pitchFamily="34" charset="0"/>
-                      </a:endParaRPr>
-                    </a:p>
-                  </a:txBody>
-                  <a:tcPr marL="45720" marR="45720" anchor="ctr">
-                    <a:noFill/>
-                  </a:tcPr>
-                </a:tc>
-                <a:tc>
-                  <a:txBody>
-                    <a:bodyPr/>
-                    <a:lstStyle/>
-                    <a:p>
-                      <a:r>
-                        <a:rPr lang="en-US" sz="1400" dirty="0" smtClean="0">
-                          <a:latin typeface="Arial" pitchFamily="34" charset="0"/>
-                          <a:cs typeface="Arial" pitchFamily="34" charset="0"/>
-                        </a:rPr>
-                        <a:t>52.7</a:t>
-                      </a:r>
-                      <a:endParaRPr lang="en-US" sz="1400" dirty="0">
-                        <a:latin typeface="Arial" pitchFamily="34" charset="0"/>
-                        <a:cs typeface="Arial" pitchFamily="34" charset="0"/>
-                      </a:endParaRPr>
-                    </a:p>
-                  </a:txBody>
-                  <a:tcPr marL="45720" marR="45720" anchor="ctr">
-                    <a:noFill/>
-                  </a:tcPr>
-                </a:tc>
-                <a:tc>
-                  <a:txBody>
-                    <a:bodyPr/>
-                    <a:lstStyle/>
-                    <a:p>
-                      <a:r>
-                        <a:rPr lang="en-US" sz="1400" dirty="0" smtClean="0">
-                          <a:latin typeface="Arial" pitchFamily="34" charset="0"/>
-                          <a:cs typeface="Arial" pitchFamily="34" charset="0"/>
-                        </a:rPr>
-                        <a:t>45.2</a:t>
-                      </a:r>
-                      <a:endParaRPr lang="en-US" sz="1400" dirty="0">
-                        <a:latin typeface="Arial" pitchFamily="34" charset="0"/>
-                        <a:cs typeface="Arial" pitchFamily="34" charset="0"/>
-                      </a:endParaRPr>
-                    </a:p>
-                  </a:txBody>
-                  <a:tcPr marL="45720" marR="45720" anchor="ctr">
-                    <a:noFill/>
-                  </a:tcPr>
-                </a:tc>
-                <a:tc>
-                  <a:txBody>
-                    <a:bodyPr/>
-                    <a:lstStyle/>
-                    <a:p>
-                      <a:r>
-                        <a:rPr lang="en-US" sz="1400" dirty="0" smtClean="0">
-                          <a:latin typeface="Arial" pitchFamily="34" charset="0"/>
-                          <a:cs typeface="Arial" pitchFamily="34" charset="0"/>
-                        </a:rPr>
-                        <a:t>5.20</a:t>
-                      </a:r>
-                      <a:endParaRPr lang="en-US" sz="1400" dirty="0">
-                        <a:latin typeface="Arial" pitchFamily="34" charset="0"/>
-                        <a:cs typeface="Arial" pitchFamily="34" charset="0"/>
-                      </a:endParaRPr>
-                    </a:p>
-                  </a:txBody>
-                  <a:tcPr marL="45720" marR="45720" anchor="ctr">
-                    <a:noFill/>
-                  </a:tcPr>
-                </a:tc>
-                <a:tc>
-                  <a:txBody>
-                    <a:bodyPr/>
-                    <a:lstStyle/>
-                    <a:p>
-                      <a:r>
-                        <a:rPr lang="en-US" sz="1400" dirty="0" smtClean="0">
-                          <a:latin typeface="Arial" pitchFamily="34" charset="0"/>
-                          <a:cs typeface="Arial" pitchFamily="34" charset="0"/>
-                        </a:rPr>
-                        <a:t>54.2</a:t>
-                      </a:r>
-                      <a:endParaRPr lang="en-US" sz="1400" dirty="0">
-                        <a:latin typeface="Arial" pitchFamily="34" charset="0"/>
-                        <a:cs typeface="Arial" pitchFamily="34" charset="0"/>
-                      </a:endParaRPr>
-                    </a:p>
-                  </a:txBody>
-                  <a:tcPr marL="45720" marR="45720" anchor="ctr">
-                    <a:noFill/>
-                  </a:tcPr>
-                </a:tc>
-                <a:tc>
-                  <a:txBody>
-                    <a:bodyPr/>
-                    <a:lstStyle/>
-                    <a:p>
-                      <a:r>
-                        <a:rPr lang="en-US" sz="1400" dirty="0" smtClean="0">
-                          <a:latin typeface="Arial" pitchFamily="34" charset="0"/>
-                          <a:cs typeface="Arial" pitchFamily="34" charset="0"/>
-                        </a:rPr>
-                        <a:t>free</a:t>
+                        <a:t>Qwen3-8B</a:t>
+                      </a:r>
+                      <a:endParaRPr lang="en-US" sz="1400" dirty="0">
+                        <a:latin typeface="Arial" pitchFamily="34" charset="0"/>
+                        <a:cs typeface="Arial" pitchFamily="34" charset="0"/>
+                      </a:endParaRPr>
+                    </a:p>
+                  </a:txBody>
+                  <a:tcPr marL="45720" marR="45720" anchor="ctr">
+                    <a:noFill/>
+                  </a:tcPr>
+                </a:tc>
+                <a:tc>
+                  <a:txBody>
+                    <a:bodyPr/>
+                    <a:lstStyle/>
+                    <a:p>
+                      <a:r>
+                        <a:rPr lang="en-US" sz="1400" dirty="0" smtClean="0">
+                          <a:latin typeface="Arial" pitchFamily="34" charset="0"/>
+                          <a:cs typeface="Arial" pitchFamily="34" charset="0"/>
+                        </a:rPr>
+                        <a:t>34.2</a:t>
+                      </a:r>
+                      <a:endParaRPr lang="en-US" sz="1400" dirty="0">
+                        <a:latin typeface="Arial" pitchFamily="34" charset="0"/>
+                        <a:cs typeface="Arial" pitchFamily="34" charset="0"/>
+                      </a:endParaRPr>
+                    </a:p>
+                  </a:txBody>
+                  <a:tcPr marL="45720" marR="45720" anchor="ctr">
+                    <a:noFill/>
+                  </a:tcPr>
+                </a:tc>
+                <a:tc>
+                  <a:txBody>
+                    <a:bodyPr/>
+                    <a:lstStyle/>
+                    <a:p>
+                      <a:r>
+                        <a:rPr lang="en-US" sz="1400" dirty="0" smtClean="0">
+                          <a:latin typeface="Arial" pitchFamily="34" charset="0"/>
+                          <a:cs typeface="Arial" pitchFamily="34" charset="0"/>
+                        </a:rPr>
+                        <a:t>81.3</a:t>
+                      </a:r>
+                      <a:endParaRPr lang="en-US" sz="1400" dirty="0">
+                        <a:latin typeface="Arial" pitchFamily="34" charset="0"/>
+                        <a:cs typeface="Arial" pitchFamily="34" charset="0"/>
+                      </a:endParaRPr>
+                    </a:p>
+                  </a:txBody>
+                  <a:tcPr marL="45720" marR="45720" anchor="ctr">
+                    <a:noFill/>
+                  </a:tcPr>
+                </a:tc>
+                <a:tc>
+                  <a:txBody>
+                    <a:bodyPr/>
+                    <a:lstStyle/>
+                    <a:p>
+                      <a:r>
+                        <a:rPr lang="en-US" sz="1400" dirty="0" smtClean="0">
+                          <a:latin typeface="Arial" pitchFamily="34" charset="0"/>
+                          <a:cs typeface="Arial" pitchFamily="34" charset="0"/>
+                        </a:rPr>
+                        <a:t>51.6</a:t>
+                      </a:r>
+                      <a:endParaRPr lang="en-US" sz="1400" dirty="0">
+                        <a:latin typeface="Arial" pitchFamily="34" charset="0"/>
+                        <a:cs typeface="Arial" pitchFamily="34" charset="0"/>
+                      </a:endParaRPr>
+                    </a:p>
+                  </a:txBody>
+                  <a:tcPr marL="45720" marR="45720" anchor="ctr">
+                    <a:noFill/>
+                  </a:tcPr>
+                </a:tc>
+                <a:tc>
+                  <a:txBody>
+                    <a:bodyPr/>
+                    <a:lstStyle/>
+                    <a:p>
+                      <a:r>
+                        <a:rPr lang="en-US" sz="1400" dirty="0" smtClean="0">
+                          <a:latin typeface="Arial" pitchFamily="34" charset="0"/>
+                          <a:cs typeface="Arial" pitchFamily="34" charset="0"/>
+                        </a:rPr>
+                        <a:t>42.5</a:t>
+                      </a:r>
+                      <a:endParaRPr lang="en-US" sz="1400" dirty="0">
+                        <a:latin typeface="Arial" pitchFamily="34" charset="0"/>
+                        <a:cs typeface="Arial" pitchFamily="34" charset="0"/>
+                      </a:endParaRPr>
+                    </a:p>
+                  </a:txBody>
+                  <a:tcPr marL="45720" marR="45720" anchor="ctr">
+                    <a:noFill/>
+                  </a:tcPr>
+                </a:tc>
+                <a:tc>
+                  <a:txBody>
+                    <a:bodyPr/>
+                    <a:lstStyle/>
+                    <a:p>
+                      <a:r>
+                        <a:rPr lang="en-US" sz="1400" dirty="0" smtClean="0">
+                          <a:latin typeface="Arial" pitchFamily="34" charset="0"/>
+                          <a:cs typeface="Arial" pitchFamily="34" charset="0"/>
+                        </a:rPr>
+                        <a:t>5.10</a:t>
+                      </a:r>
+                      <a:endParaRPr lang="en-US" sz="1400" dirty="0">
+                        <a:latin typeface="Arial" pitchFamily="34" charset="0"/>
+                        <a:cs typeface="Arial" pitchFamily="34" charset="0"/>
+                      </a:endParaRPr>
+                    </a:p>
+                  </a:txBody>
+                  <a:tcPr marL="45720" marR="45720" anchor="ctr">
+                    <a:noFill/>
+                  </a:tcPr>
+                </a:tc>
+                <a:tc>
+                  <a:txBody>
+                    <a:bodyPr/>
+                    <a:lstStyle/>
+                    <a:p>
+                      <a:r>
+                        <a:rPr lang="en-US" sz="1400" dirty="0" smtClean="0">
+                          <a:latin typeface="Arial" pitchFamily="34" charset="0"/>
+                          <a:cs typeface="Arial" pitchFamily="34" charset="0"/>
+                        </a:rPr>
+                        <a:t>52.2</a:t>
                       </a:r>
                       <a:endParaRPr lang="en-US" sz="1400" dirty="0">
                         <a:latin typeface="Arial" pitchFamily="34" charset="0"/>
@@ -7461,161 +7264,139 @@
                           <a:latin typeface="Arial" pitchFamily="34" charset="0"/>
                           <a:cs typeface="Arial" pitchFamily="34" charset="0"/>
                         </a:rPr>
-                        <a:t>Qwen3-8B</a:t>
-                      </a:r>
-                      <a:endParaRPr lang="en-US" sz="1400" dirty="0">
-                        <a:latin typeface="Arial" pitchFamily="34" charset="0"/>
-                        <a:cs typeface="Arial" pitchFamily="34" charset="0"/>
-                      </a:endParaRPr>
-                    </a:p>
-                  </a:txBody>
-                  <a:tcPr marL="45720" marR="45720" anchor="ctr">
-                    <a:noFill/>
-                  </a:tcPr>
-                </a:tc>
-                <a:tc>
-                  <a:txBody>
-                    <a:bodyPr/>
-                    <a:lstStyle/>
-                    <a:p>
-                      <a:r>
-                        <a:rPr lang="en-US" sz="1400" dirty="0" smtClean="0">
-                          <a:latin typeface="Arial" pitchFamily="34" charset="0"/>
-                          <a:cs typeface="Arial" pitchFamily="34" charset="0"/>
-                        </a:rPr>
-                        <a:t>34.2</a:t>
-                      </a:r>
-                      <a:endParaRPr lang="en-US" sz="1400" dirty="0">
-                        <a:latin typeface="Arial" pitchFamily="34" charset="0"/>
-                        <a:cs typeface="Arial" pitchFamily="34" charset="0"/>
-                      </a:endParaRPr>
-                    </a:p>
-                  </a:txBody>
-                  <a:tcPr marL="45720" marR="45720" anchor="ctr">
-                    <a:noFill/>
-                  </a:tcPr>
-                </a:tc>
-                <a:tc>
-                  <a:txBody>
-                    <a:bodyPr/>
-                    <a:lstStyle/>
-                    <a:p>
-                      <a:r>
-                        <a:rPr lang="en-US" sz="1400" dirty="0" smtClean="0">
-                          <a:latin typeface="Arial" pitchFamily="34" charset="0"/>
-                          <a:cs typeface="Arial" pitchFamily="34" charset="0"/>
-                        </a:rPr>
-                        <a:t>81.3</a:t>
-                      </a:r>
-                      <a:endParaRPr lang="en-US" sz="1400" dirty="0">
-                        <a:latin typeface="Arial" pitchFamily="34" charset="0"/>
-                        <a:cs typeface="Arial" pitchFamily="34" charset="0"/>
-                      </a:endParaRPr>
-                    </a:p>
-                  </a:txBody>
-                  <a:tcPr marL="45720" marR="45720" anchor="ctr">
-                    <a:noFill/>
-                  </a:tcPr>
-                </a:tc>
-                <a:tc>
-                  <a:txBody>
-                    <a:bodyPr/>
-                    <a:lstStyle/>
-                    <a:p>
-                      <a:r>
-                        <a:rPr lang="en-US" sz="1400" dirty="0" smtClean="0">
-                          <a:latin typeface="Arial" pitchFamily="34" charset="0"/>
-                          <a:cs typeface="Arial" pitchFamily="34" charset="0"/>
-                        </a:rPr>
-                        <a:t>51.6</a:t>
-                      </a:r>
-                      <a:endParaRPr lang="en-US" sz="1400" dirty="0">
-                        <a:latin typeface="Arial" pitchFamily="34" charset="0"/>
-                        <a:cs typeface="Arial" pitchFamily="34" charset="0"/>
-                      </a:endParaRPr>
-                    </a:p>
-                  </a:txBody>
-                  <a:tcPr marL="45720" marR="45720" anchor="ctr">
-                    <a:noFill/>
-                  </a:tcPr>
-                </a:tc>
-                <a:tc>
-                  <a:txBody>
-                    <a:bodyPr/>
-                    <a:lstStyle/>
-                    <a:p>
-                      <a:r>
-                        <a:rPr lang="en-US" sz="1400" dirty="0" smtClean="0">
-                          <a:latin typeface="Arial" pitchFamily="34" charset="0"/>
-                          <a:cs typeface="Arial" pitchFamily="34" charset="0"/>
-                        </a:rPr>
-                        <a:t>42.5</a:t>
-                      </a:r>
-                      <a:endParaRPr lang="en-US" sz="1400" dirty="0">
-                        <a:latin typeface="Arial" pitchFamily="34" charset="0"/>
-                        <a:cs typeface="Arial" pitchFamily="34" charset="0"/>
-                      </a:endParaRPr>
-                    </a:p>
-                  </a:txBody>
-                  <a:tcPr marL="45720" marR="45720" anchor="ctr">
-                    <a:noFill/>
-                  </a:tcPr>
-                </a:tc>
-                <a:tc>
-                  <a:txBody>
-                    <a:bodyPr/>
-                    <a:lstStyle/>
-                    <a:p>
-                      <a:r>
-                        <a:rPr lang="en-US" sz="1400" dirty="0" smtClean="0">
-                          <a:latin typeface="Arial" pitchFamily="34" charset="0"/>
-                          <a:cs typeface="Arial" pitchFamily="34" charset="0"/>
-                        </a:rPr>
-                        <a:t>5.10</a:t>
-                      </a:r>
-                      <a:endParaRPr lang="en-US" sz="1400" dirty="0">
-                        <a:latin typeface="Arial" pitchFamily="34" charset="0"/>
-                        <a:cs typeface="Arial" pitchFamily="34" charset="0"/>
-                      </a:endParaRPr>
-                    </a:p>
-                  </a:txBody>
-                  <a:tcPr marL="45720" marR="45720" anchor="ctr">
-                    <a:noFill/>
-                  </a:tcPr>
-                </a:tc>
-                <a:tc>
-                  <a:txBody>
-                    <a:bodyPr/>
-                    <a:lstStyle/>
-                    <a:p>
-                      <a:r>
-                        <a:rPr lang="en-US" sz="1400" dirty="0" smtClean="0">
-                          <a:latin typeface="Arial" pitchFamily="34" charset="0"/>
-                          <a:cs typeface="Arial" pitchFamily="34" charset="0"/>
-                        </a:rPr>
-                        <a:t>52.2</a:t>
-                      </a:r>
-                      <a:endParaRPr lang="en-US" sz="1400" dirty="0">
-                        <a:latin typeface="Arial" pitchFamily="34" charset="0"/>
-                        <a:cs typeface="Arial" pitchFamily="34" charset="0"/>
-                      </a:endParaRPr>
-                    </a:p>
-                  </a:txBody>
-                  <a:tcPr marL="45720" marR="45720" anchor="ctr">
-                    <a:noFill/>
-                  </a:tcPr>
-                </a:tc>
-                <a:tc>
-                  <a:txBody>
-                    <a:bodyPr/>
-                    <a:lstStyle/>
-                    <a:p>
-                      <a:r>
-                        <a:rPr lang="en-US" sz="1400" dirty="0" smtClean="0">
-                          <a:latin typeface="Arial" pitchFamily="34" charset="0"/>
-                          <a:cs typeface="Arial" pitchFamily="34" charset="0"/>
-                        </a:rPr>
-                        <a:t>free</a:t>
+                        <a:t>LLaMA-3.1-8B</a:t>
+                      </a:r>
+                      <a:endParaRPr lang="en-US" sz="1400" dirty="0">
+                        <a:latin typeface="Arial" pitchFamily="34" charset="0"/>
+                        <a:cs typeface="Arial" pitchFamily="34" charset="0"/>
+                      </a:endParaRPr>
+                    </a:p>
+                  </a:txBody>
+                  <a:tcPr marL="45720" marR="45720" anchor="ctr">
+                    <a:noFill/>
+                  </a:tcPr>
+                </a:tc>
+                <a:tc>
+                  <a:txBody>
+                    <a:bodyPr/>
+                    <a:lstStyle/>
+                    <a:p>
+                      <a:r>
+                        <a:rPr lang="en-US" sz="1400" dirty="0" smtClean="0">
+                          <a:latin typeface="Arial" pitchFamily="34" charset="0"/>
+                          <a:cs typeface="Arial" pitchFamily="34" charset="0"/>
+                        </a:rPr>
+                        <a:t>18.1</a:t>
+                      </a:r>
+                      <a:endParaRPr lang="en-US" sz="1400" dirty="0">
+                        <a:latin typeface="Arial" pitchFamily="34" charset="0"/>
+                        <a:cs typeface="Arial" pitchFamily="34" charset="0"/>
+                      </a:endParaRPr>
+                    </a:p>
+                  </a:txBody>
+                  <a:tcPr marL="45720" marR="45720" anchor="ctr">
+                    <a:noFill/>
+                  </a:tcPr>
+                </a:tc>
+                <a:tc>
+                  <a:txBody>
+                    <a:bodyPr/>
+                    <a:lstStyle/>
+                    <a:p>
+                      <a:r>
+                        <a:rPr lang="en-US" sz="1400" dirty="0" smtClean="0">
+                          <a:latin typeface="Arial" pitchFamily="34" charset="0"/>
+                          <a:cs typeface="Arial" pitchFamily="34" charset="0"/>
+                        </a:rPr>
+                        <a:t>63.4</a:t>
+                      </a:r>
+                      <a:endParaRPr lang="en-US" sz="1400" dirty="0">
+                        <a:latin typeface="Arial" pitchFamily="34" charset="0"/>
+                        <a:cs typeface="Arial" pitchFamily="34" charset="0"/>
+                      </a:endParaRPr>
+                    </a:p>
+                  </a:txBody>
+                  <a:tcPr marL="45720" marR="45720" anchor="ctr">
+                    <a:noFill/>
+                  </a:tcPr>
+                </a:tc>
+                <a:tc>
+                  <a:txBody>
+                    <a:bodyPr/>
+                    <a:lstStyle/>
+                    <a:p>
+                      <a:r>
+                        <a:rPr lang="en-US" sz="1400" dirty="0" smtClean="0">
+                          <a:latin typeface="Arial" pitchFamily="34" charset="0"/>
+                          <a:cs typeface="Arial" pitchFamily="34" charset="0"/>
+                        </a:rPr>
+                        <a:t>55.4</a:t>
+                      </a:r>
+                      <a:endParaRPr lang="en-US" sz="1400" dirty="0">
+                        <a:latin typeface="Arial" pitchFamily="34" charset="0"/>
+                        <a:cs typeface="Arial" pitchFamily="34" charset="0"/>
+                      </a:endParaRPr>
+                    </a:p>
+                  </a:txBody>
+                  <a:tcPr marL="45720" marR="45720" anchor="ctr">
+                    <a:noFill/>
+                  </a:tcPr>
+                </a:tc>
+                <a:tc>
+                  <a:txBody>
+                    <a:bodyPr/>
+                    <a:lstStyle/>
+                    <a:p>
+                      <a:r>
+                        <a:rPr lang="en-US" sz="1400" dirty="0" smtClean="0">
+                          <a:latin typeface="Arial" pitchFamily="34" charset="0"/>
+                          <a:cs typeface="Arial" pitchFamily="34" charset="0"/>
+                        </a:rPr>
+                        <a:t>35.5</a:t>
+                      </a:r>
+                      <a:endParaRPr lang="en-US" sz="1400" dirty="0">
+                        <a:latin typeface="Arial" pitchFamily="34" charset="0"/>
+                        <a:cs typeface="Arial" pitchFamily="34" charset="0"/>
+                      </a:endParaRPr>
+                    </a:p>
+                  </a:txBody>
+                  <a:tcPr marL="45720" marR="45720" anchor="ctr">
+                    <a:noFill/>
+                  </a:tcPr>
+                </a:tc>
+                <a:tc>
+                  <a:txBody>
+                    <a:bodyPr/>
+                    <a:lstStyle/>
+                    <a:p>
+                      <a:r>
+                        <a:rPr lang="en-US" sz="1400" dirty="0" smtClean="0">
+                          <a:latin typeface="Arial" pitchFamily="34" charset="0"/>
+                          <a:cs typeface="Arial" pitchFamily="34" charset="0"/>
+                        </a:rPr>
+                        <a:t>1.53</a:t>
+                      </a:r>
+                      <a:endParaRPr lang="en-US" sz="1400" dirty="0">
+                        <a:latin typeface="Arial" pitchFamily="34" charset="0"/>
+                        <a:cs typeface="Arial" pitchFamily="34" charset="0"/>
+                      </a:endParaRPr>
+                    </a:p>
+                  </a:txBody>
+                  <a:tcPr marL="45720" marR="45720" anchor="ctr">
+                    <a:noFill/>
+                  </a:tcPr>
+                </a:tc>
+                <a:tc>
+                  <a:txBody>
+                    <a:bodyPr/>
+                    <a:lstStyle/>
+                    <a:p>
+                      <a:r>
+                        <a:rPr lang="en-US" sz="1400" dirty="0" smtClean="0">
+                          <a:latin typeface="Arial" pitchFamily="34" charset="0"/>
+                          <a:cs typeface="Arial" pitchFamily="34" charset="0"/>
+                        </a:rPr>
+                        <a:t>47.0</a:t>
                       </a:r>
                       <a:endParaRPr lang="en-US" sz="1400" dirty="0">
                         <a:latin typeface="Arial" pitchFamily="34" charset="0"/>
@@ -7656,201 +7437,6 @@
                           <a:latin typeface="Arial" pitchFamily="34" charset="0"/>
                           <a:cs typeface="Arial" pitchFamily="34" charset="0"/>
                         </a:rPr>
-                        <a:t>LLaMA-3.1-8B</a:t>
-                      </a:r>
-                      <a:endParaRPr lang="en-US" sz="1400" dirty="0">
-                        <a:latin typeface="Arial" pitchFamily="34" charset="0"/>
-                        <a:cs typeface="Arial" pitchFamily="34" charset="0"/>
-                      </a:endParaRPr>
-                    </a:p>
-                  </a:txBody>
-                  <a:tcPr marL="45720" marR="45720" anchor="ctr">
-                    <a:noFill/>
-                  </a:tcPr>
-                </a:tc>
-                <a:tc>
-                  <a:txBody>
-                    <a:bodyPr/>
-                    <a:lstStyle/>
-                    <a:p>
-                      <a:r>
-                        <a:rPr lang="en-US" sz="1400" dirty="0" smtClean="0">
-                          <a:latin typeface="Arial" pitchFamily="34" charset="0"/>
-                          <a:cs typeface="Arial" pitchFamily="34" charset="0"/>
-                        </a:rPr>
-                        <a:t>18.1</a:t>
-                      </a:r>
-                      <a:endParaRPr lang="en-US" sz="1400" dirty="0">
-                        <a:latin typeface="Arial" pitchFamily="34" charset="0"/>
-                        <a:cs typeface="Arial" pitchFamily="34" charset="0"/>
-                      </a:endParaRPr>
-                    </a:p>
-                  </a:txBody>
-                  <a:tcPr marL="45720" marR="45720" anchor="ctr">
-                    <a:noFill/>
-                  </a:tcPr>
-                </a:tc>
-                <a:tc>
-                  <a:txBody>
-                    <a:bodyPr/>
-                    <a:lstStyle/>
-                    <a:p>
-                      <a:r>
-                        <a:rPr lang="en-US" sz="1400" dirty="0" smtClean="0">
-                          <a:latin typeface="Arial" pitchFamily="34" charset="0"/>
-                          <a:cs typeface="Arial" pitchFamily="34" charset="0"/>
-                        </a:rPr>
-                        <a:t>63.4</a:t>
-                      </a:r>
-                      <a:endParaRPr lang="en-US" sz="1400" dirty="0">
-                        <a:latin typeface="Arial" pitchFamily="34" charset="0"/>
-                        <a:cs typeface="Arial" pitchFamily="34" charset="0"/>
-                      </a:endParaRPr>
-                    </a:p>
-                  </a:txBody>
-                  <a:tcPr marL="45720" marR="45720" anchor="ctr">
-                    <a:noFill/>
-                  </a:tcPr>
-                </a:tc>
-                <a:tc>
-                  <a:txBody>
-                    <a:bodyPr/>
-                    <a:lstStyle/>
-                    <a:p>
-                      <a:r>
-                        <a:rPr lang="en-US" sz="1400" dirty="0" smtClean="0">
-                          <a:latin typeface="Arial" pitchFamily="34" charset="0"/>
-                          <a:cs typeface="Arial" pitchFamily="34" charset="0"/>
-                        </a:rPr>
-                        <a:t>55.4</a:t>
-                      </a:r>
-                      <a:endParaRPr lang="en-US" sz="1400" dirty="0">
-                        <a:latin typeface="Arial" pitchFamily="34" charset="0"/>
-                        <a:cs typeface="Arial" pitchFamily="34" charset="0"/>
-                      </a:endParaRPr>
-                    </a:p>
-                  </a:txBody>
-                  <a:tcPr marL="45720" marR="45720" anchor="ctr">
-                    <a:noFill/>
-                  </a:tcPr>
-                </a:tc>
-                <a:tc>
-                  <a:txBody>
-                    <a:bodyPr/>
-                    <a:lstStyle/>
-                    <a:p>
-                      <a:r>
-                        <a:rPr lang="en-US" sz="1400" dirty="0" smtClean="0">
-                          <a:latin typeface="Arial" pitchFamily="34" charset="0"/>
-                          <a:cs typeface="Arial" pitchFamily="34" charset="0"/>
-                        </a:rPr>
-                        <a:t>35.5</a:t>
-                      </a:r>
-                      <a:endParaRPr lang="en-US" sz="1400" dirty="0">
-                        <a:latin typeface="Arial" pitchFamily="34" charset="0"/>
-                        <a:cs typeface="Arial" pitchFamily="34" charset="0"/>
-                      </a:endParaRPr>
-                    </a:p>
-                  </a:txBody>
-                  <a:tcPr marL="45720" marR="45720" anchor="ctr">
-                    <a:noFill/>
-                  </a:tcPr>
-                </a:tc>
-                <a:tc>
-                  <a:txBody>
-                    <a:bodyPr/>
-                    <a:lstStyle/>
-                    <a:p>
-                      <a:r>
-                        <a:rPr lang="en-US" sz="1400" dirty="0" smtClean="0">
-                          <a:latin typeface="Arial" pitchFamily="34" charset="0"/>
-                          <a:cs typeface="Arial" pitchFamily="34" charset="0"/>
-                        </a:rPr>
-                        <a:t>1.53</a:t>
-                      </a:r>
-                      <a:endParaRPr lang="en-US" sz="1400" dirty="0">
-                        <a:latin typeface="Arial" pitchFamily="34" charset="0"/>
-                        <a:cs typeface="Arial" pitchFamily="34" charset="0"/>
-                      </a:endParaRPr>
-                    </a:p>
-                  </a:txBody>
-                  <a:tcPr marL="45720" marR="45720" anchor="ctr">
-                    <a:noFill/>
-                  </a:tcPr>
-                </a:tc>
-                <a:tc>
-                  <a:txBody>
-                    <a:bodyPr/>
-                    <a:lstStyle/>
-                    <a:p>
-                      <a:r>
-                        <a:rPr lang="en-US" sz="1400" dirty="0" smtClean="0">
-                          <a:latin typeface="Arial" pitchFamily="34" charset="0"/>
-                          <a:cs typeface="Arial" pitchFamily="34" charset="0"/>
-                        </a:rPr>
-                        <a:t>47.0</a:t>
-                      </a:r>
-                      <a:endParaRPr lang="en-US" sz="1400" dirty="0">
-                        <a:latin typeface="Arial" pitchFamily="34" charset="0"/>
-                        <a:cs typeface="Arial" pitchFamily="34" charset="0"/>
-                      </a:endParaRPr>
-                    </a:p>
-                  </a:txBody>
-                  <a:tcPr marL="45720" marR="45720" anchor="ctr">
-                    <a:noFill/>
-                  </a:tcPr>
-                </a:tc>
-                <a:tc>
-                  <a:txBody>
-                    <a:bodyPr/>
-                    <a:lstStyle/>
-                    <a:p>
-                      <a:r>
-                        <a:rPr lang="en-US" sz="1400" dirty="0" smtClean="0">
-                          <a:latin typeface="Arial" pitchFamily="34" charset="0"/>
-                          <a:cs typeface="Arial" pitchFamily="34" charset="0"/>
-                        </a:rPr>
-                        <a:t>free</a:t>
-                      </a:r>
-                      <a:endParaRPr lang="en-US" sz="1400" dirty="0">
-                        <a:latin typeface="Arial" pitchFamily="34" charset="0"/>
-                        <a:cs typeface="Arial" pitchFamily="34" charset="0"/>
-                      </a:endParaRPr>
-                    </a:p>
-                  </a:txBody>
-                  <a:tcPr marL="45720" marR="45720" anchor="ctr">
-                    <a:noFill/>
-                  </a:tcPr>
-                </a:tc>
-              </a:tr>
-              <a:tr h="299110">
-                <a:tc>
-                  <a:txBody>
-                    <a:bodyPr/>
-                    <a:lstStyle/>
-                    <a:p>
-                      <a:pPr marL="0" marR="0" indent="0" algn="l" defTabSz="914400" rtl="0" eaLnBrk="1" fontAlgn="auto" latinLnBrk="0" hangingPunct="1">
-                        <a:lnSpc>
-                          <a:spcPct val="100000"/>
-                        </a:lnSpc>
-                        <a:spcBef>
-                          <a:spcPts val="0"/>
-                        </a:spcBef>
-                        <a:spcAft>
-                          <a:spcPts val="0"/>
-                        </a:spcAft>
-                        <a:buClrTx/>
-                        <a:buSzTx/>
-                        <a:buFontTx/>
-                        <a:buNone/>
-                        <a:tabLst/>
-                        <a:defRPr/>
-                      </a:pPr>
-                      <a:r>
-                        <a:rPr lang="en-US" sz="1400" dirty="0" smtClean="0">
-                          <a:latin typeface="Arial" pitchFamily="34" charset="0"/>
-                          <a:cs typeface="Arial" pitchFamily="34" charset="0"/>
-                        </a:rPr>
                         <a:t>LLaMA-3.2-3B</a:t>
                       </a:r>
                       <a:endParaRPr lang="en-US" sz="1400" dirty="0">
@@ -7984,28 +7570,6 @@
                           <a:cs typeface="Arial" pitchFamily="34" charset="0"/>
                         </a:rPr>
                         <a:t>22.8</a:t>
-                      </a:r>
-                      <a:endParaRPr lang="en-US" sz="1400" dirty="0">
-                        <a:latin typeface="Arial" pitchFamily="34" charset="0"/>
-                        <a:cs typeface="Arial" pitchFamily="34" charset="0"/>
-                      </a:endParaRPr>
-                    </a:p>
-                  </a:txBody>
-                  <a:tcPr marL="45720" marR="45720" anchor="ctr">
-                    <a:noFill/>
-                  </a:tcPr>
-                </a:tc>
-                <a:tc>
-                  <a:txBody>
-                    <a:bodyPr/>
-                    <a:lstStyle/>
-                    <a:p>
-                      <a:r>
-                        <a:rPr lang="en-US" sz="1400" dirty="0" smtClean="0">
-                          <a:latin typeface="Arial" pitchFamily="34" charset="0"/>
-                          <a:cs typeface="Arial" pitchFamily="34" charset="0"/>
-                        </a:rPr>
-                        <a:t>free</a:t>
                       </a:r>
                       <a:endParaRPr lang="en-US" sz="1400" dirty="0">
                         <a:latin typeface="Arial" pitchFamily="34" charset="0"/>
@@ -8180,7 +7744,7 @@
         </p:nvGraphicFramePr>
         <p:xfrm>
           <a:off x="467544" y="1268760"/>
-          <a:ext cx="7848872" cy="2438400"/>
+          <a:ext cx="7119495" cy="2438400"/>
         </p:xfrm>
         <a:graphic>
           <a:graphicData uri="http://schemas.openxmlformats.org/drawingml/2006/table">
@@ -8196,7 +7760,6 @@
                 <a:gridCol w="934883"/>
                 <a:gridCol w="862969"/>
                 <a:gridCol w="1150625"/>
-                <a:gridCol w="729377"/>
               </a:tblGrid>
               <a:tr h="299110">
                 <a:tc>
@@ -8342,28 +7905,6 @@
                           <a:cs typeface="Arial" pitchFamily="34" charset="0"/>
                         </a:rPr>
                         <a:t>Combined</a:t>
-                      </a:r>
-                      <a:endParaRPr lang="en-US" sz="1400" b="1" dirty="0">
-                        <a:latin typeface="Arial" pitchFamily="34" charset="0"/>
-                        <a:cs typeface="Arial" pitchFamily="34" charset="0"/>
-                      </a:endParaRPr>
-                    </a:p>
-                  </a:txBody>
-                  <a:tcPr marL="45720" marR="45720" anchor="ctr">
-                    <a:noFill/>
-                  </a:tcPr>
-                </a:tc>
-                <a:tc>
-                  <a:txBody>
-                    <a:bodyPr/>
-                    <a:lstStyle/>
-                    <a:p>
-                      <a:r>
-                        <a:rPr lang="en-US" sz="1400" b="1" dirty="0" smtClean="0">
-                          <a:latin typeface="Arial" pitchFamily="34" charset="0"/>
-                          <a:cs typeface="Arial" pitchFamily="34" charset="0"/>
-                        </a:rPr>
-                        <a:t>Cost</a:t>
                       </a:r>
                       <a:endParaRPr lang="en-US" sz="1400" b="1" dirty="0">
                         <a:latin typeface="Arial" pitchFamily="34" charset="0"/>
@@ -8544,28 +8085,6 @@
                     <a:noFill/>
                   </a:tcPr>
                 </a:tc>
-                <a:tc>
-                  <a:txBody>
-                    <a:bodyPr/>
-                    <a:lstStyle/>
-                    <a:p>
-                      <a:r>
-                        <a:rPr lang="en-US" sz="1400" dirty="0" smtClean="0">
-                          <a:latin typeface="Arial" pitchFamily="34" charset="0"/>
-                          <a:cs typeface="Arial" pitchFamily="34" charset="0"/>
-                        </a:rPr>
-                        <a:t>free</a:t>
-                      </a:r>
-                      <a:endParaRPr lang="en-US" sz="1400" dirty="0">
-                        <a:latin typeface="Arial" pitchFamily="34" charset="0"/>
-                        <a:cs typeface="Arial" pitchFamily="34" charset="0"/>
-                      </a:endParaRPr>
-                    </a:p>
-                  </a:txBody>
-                  <a:tcPr marL="45720" marR="45720" anchor="ctr">
-                    <a:noFill/>
-                  </a:tcPr>
-                </a:tc>
               </a:tr>
               <a:tr h="299110">
                 <a:tc>
@@ -8716,24 +8235,6 @@
                         <a:latin typeface="Arial" pitchFamily="34" charset="0"/>
                         <a:cs typeface="Arial" pitchFamily="34" charset="0"/>
                       </a:endParaRPr>
-                    </a:p>
-                  </a:txBody>
-                  <a:tcPr marL="45720" marR="45720" anchor="ctr">
-                    <a:noFill/>
-                  </a:tcPr>
-                </a:tc>
-                <a:tc>
-                  <a:txBody>
-                    <a:bodyPr/>
-                    <a:lstStyle/>
-                    <a:p>
-                      <a:r>
-                        <a:rPr lang="en-US" sz="1400" dirty="0" smtClean="0">
-                          <a:latin typeface="Arial" pitchFamily="34" charset="0"/>
-                          <a:cs typeface="Arial" pitchFamily="34" charset="0"/>
-                        </a:rPr>
-                        <a:t>free</a:t>
-                      </a:r>
                     </a:p>
                   </a:txBody>
                   <a:tcPr marL="45720" marR="45720" anchor="ctr">
@@ -8909,6 +8410,8 @@
                     <a:noFill/>
                   </a:tcPr>
                 </a:tc>
+              </a:tr>
+              <a:tr h="299110">
                 <a:tc>
                   <a:txBody>
                     <a:bodyPr/>
@@ -8936,8 +8439,140 @@
                           <a:latin typeface="Arial" pitchFamily="34" charset="0"/>
                           <a:cs typeface="Arial" pitchFamily="34" charset="0"/>
                         </a:rPr>
-                        <a:t>free</a:t>
-                      </a:r>
+                        <a:t>Qwen3-8B</a:t>
+                      </a:r>
+                      <a:endParaRPr lang="en-US" sz="1400" dirty="0">
+                        <a:latin typeface="Arial" pitchFamily="34" charset="0"/>
+                        <a:cs typeface="Arial" pitchFamily="34" charset="0"/>
+                      </a:endParaRPr>
+                    </a:p>
+                  </a:txBody>
+                  <a:tcPr marL="45720" marR="45720" anchor="ctr">
+                    <a:noFill/>
+                  </a:tcPr>
+                </a:tc>
+                <a:tc>
+                  <a:txBody>
+                    <a:bodyPr/>
+                    <a:lstStyle/>
+                    <a:p>
+                      <a:r>
+                        <a:rPr lang="en-US" sz="1400" dirty="0" smtClean="0">
+                          <a:latin typeface="Arial" pitchFamily="34" charset="0"/>
+                          <a:cs typeface="Arial" pitchFamily="34" charset="0"/>
+                        </a:rPr>
+                        <a:t>47.3</a:t>
+                      </a:r>
+                    </a:p>
+                  </a:txBody>
+                  <a:tcPr marL="45720" marR="45720" anchor="ctr">
+                    <a:noFill/>
+                  </a:tcPr>
+                </a:tc>
+                <a:tc>
+                  <a:txBody>
+                    <a:bodyPr/>
+                    <a:lstStyle/>
+                    <a:p>
+                      <a:r>
+                        <a:rPr lang="en-US" sz="1400" dirty="0" smtClean="0">
+                          <a:latin typeface="Arial" pitchFamily="34" charset="0"/>
+                          <a:cs typeface="Arial" pitchFamily="34" charset="0"/>
+                        </a:rPr>
+                        <a:t>89.1</a:t>
+                      </a:r>
+                      <a:endParaRPr lang="en-US" sz="1400" dirty="0">
+                        <a:latin typeface="Arial" pitchFamily="34" charset="0"/>
+                        <a:cs typeface="Arial" pitchFamily="34" charset="0"/>
+                      </a:endParaRPr>
+                    </a:p>
+                  </a:txBody>
+                  <a:tcPr marL="45720" marR="45720" anchor="ctr">
+                    <a:noFill/>
+                  </a:tcPr>
+                </a:tc>
+                <a:tc>
+                  <a:txBody>
+                    <a:bodyPr/>
+                    <a:lstStyle/>
+                    <a:p>
+                      <a:r>
+                        <a:rPr lang="en-US" sz="1400" dirty="0" smtClean="0">
+                          <a:latin typeface="Arial" pitchFamily="34" charset="0"/>
+                          <a:cs typeface="Arial" pitchFamily="34" charset="0"/>
+                        </a:rPr>
+                        <a:t>53.2</a:t>
+                      </a:r>
+                      <a:endParaRPr lang="en-US" sz="1400" dirty="0">
+                        <a:latin typeface="Arial" pitchFamily="34" charset="0"/>
+                        <a:cs typeface="Arial" pitchFamily="34" charset="0"/>
+                      </a:endParaRPr>
+                    </a:p>
+                  </a:txBody>
+                  <a:tcPr marL="45720" marR="45720" anchor="ctr">
+                    <a:noFill/>
+                  </a:tcPr>
+                </a:tc>
+                <a:tc>
+                  <a:txBody>
+                    <a:bodyPr/>
+                    <a:lstStyle/>
+                    <a:p>
+                      <a:r>
+                        <a:rPr lang="en-US" sz="1400" dirty="0" smtClean="0">
+                          <a:latin typeface="Arial" pitchFamily="34" charset="0"/>
+                          <a:cs typeface="Arial" pitchFamily="34" charset="0"/>
+                        </a:rPr>
+                        <a:t>48.4</a:t>
+                      </a:r>
+                      <a:endParaRPr lang="en-US" sz="1400" dirty="0">
+                        <a:latin typeface="Arial" pitchFamily="34" charset="0"/>
+                        <a:cs typeface="Arial" pitchFamily="34" charset="0"/>
+                      </a:endParaRPr>
+                    </a:p>
+                  </a:txBody>
+                  <a:tcPr marL="45720" marR="45720" anchor="ctr">
+                    <a:noFill/>
+                  </a:tcPr>
+                </a:tc>
+                <a:tc>
+                  <a:txBody>
+                    <a:bodyPr/>
+                    <a:lstStyle/>
+                    <a:p>
+                      <a:r>
+                        <a:rPr lang="en-US" sz="1400" dirty="0" smtClean="0">
+                          <a:latin typeface="Arial" pitchFamily="34" charset="0"/>
+                          <a:cs typeface="Arial" pitchFamily="34" charset="0"/>
+                        </a:rPr>
+                        <a:t>11.35</a:t>
+                      </a:r>
+                      <a:endParaRPr lang="en-US" sz="1400" dirty="0">
+                        <a:latin typeface="Arial" pitchFamily="34" charset="0"/>
+                        <a:cs typeface="Arial" pitchFamily="34" charset="0"/>
+                      </a:endParaRPr>
+                    </a:p>
+                  </a:txBody>
+                  <a:tcPr marL="45720" marR="45720" anchor="ctr">
+                    <a:noFill/>
+                  </a:tcPr>
+                </a:tc>
+                <a:tc>
+                  <a:txBody>
+                    <a:bodyPr/>
+                    <a:lstStyle/>
+                    <a:p>
+                      <a:r>
+                        <a:rPr lang="en-US" sz="1400" dirty="0" smtClean="0">
+                          <a:latin typeface="Arial" pitchFamily="34" charset="0"/>
+                          <a:cs typeface="Arial" pitchFamily="34" charset="0"/>
+                        </a:rPr>
+                        <a:t>62.2</a:t>
+                      </a:r>
+                      <a:endParaRPr lang="en-US" sz="1400" dirty="0">
+                        <a:latin typeface="Arial" pitchFamily="34" charset="0"/>
+                        <a:cs typeface="Arial" pitchFamily="34" charset="0"/>
+                      </a:endParaRPr>
                     </a:p>
                   </a:txBody>
                   <a:tcPr marL="45720" marR="45720" anchor="ctr">
@@ -8973,157 +8608,135 @@
                           <a:latin typeface="Arial" pitchFamily="34" charset="0"/>
                           <a:cs typeface="Arial" pitchFamily="34" charset="0"/>
                         </a:rPr>
-                        <a:t>Qwen3-8B</a:t>
-                      </a:r>
-                      <a:endParaRPr lang="en-US" sz="1400" dirty="0">
-                        <a:latin typeface="Arial" pitchFamily="34" charset="0"/>
-                        <a:cs typeface="Arial" pitchFamily="34" charset="0"/>
-                      </a:endParaRPr>
-                    </a:p>
-                  </a:txBody>
-                  <a:tcPr marL="45720" marR="45720" anchor="ctr">
-                    <a:noFill/>
-                  </a:tcPr>
-                </a:tc>
-                <a:tc>
-                  <a:txBody>
-                    <a:bodyPr/>
-                    <a:lstStyle/>
-                    <a:p>
-                      <a:r>
-                        <a:rPr lang="en-US" sz="1400" dirty="0" smtClean="0">
-                          <a:latin typeface="Arial" pitchFamily="34" charset="0"/>
-                          <a:cs typeface="Arial" pitchFamily="34" charset="0"/>
-                        </a:rPr>
-                        <a:t>47.3</a:t>
-                      </a:r>
-                    </a:p>
-                  </a:txBody>
-                  <a:tcPr marL="45720" marR="45720" anchor="ctr">
-                    <a:noFill/>
-                  </a:tcPr>
-                </a:tc>
-                <a:tc>
-                  <a:txBody>
-                    <a:bodyPr/>
-                    <a:lstStyle/>
-                    <a:p>
-                      <a:r>
-                        <a:rPr lang="en-US" sz="1400" dirty="0" smtClean="0">
-                          <a:latin typeface="Arial" pitchFamily="34" charset="0"/>
-                          <a:cs typeface="Arial" pitchFamily="34" charset="0"/>
-                        </a:rPr>
-                        <a:t>89.1</a:t>
-                      </a:r>
-                      <a:endParaRPr lang="en-US" sz="1400" dirty="0">
-                        <a:latin typeface="Arial" pitchFamily="34" charset="0"/>
-                        <a:cs typeface="Arial" pitchFamily="34" charset="0"/>
-                      </a:endParaRPr>
-                    </a:p>
-                  </a:txBody>
-                  <a:tcPr marL="45720" marR="45720" anchor="ctr">
-                    <a:noFill/>
-                  </a:tcPr>
-                </a:tc>
-                <a:tc>
-                  <a:txBody>
-                    <a:bodyPr/>
-                    <a:lstStyle/>
-                    <a:p>
-                      <a:r>
-                        <a:rPr lang="en-US" sz="1400" dirty="0" smtClean="0">
-                          <a:latin typeface="Arial" pitchFamily="34" charset="0"/>
-                          <a:cs typeface="Arial" pitchFamily="34" charset="0"/>
-                        </a:rPr>
-                        <a:t>53.2</a:t>
-                      </a:r>
-                      <a:endParaRPr lang="en-US" sz="1400" dirty="0">
-                        <a:latin typeface="Arial" pitchFamily="34" charset="0"/>
-                        <a:cs typeface="Arial" pitchFamily="34" charset="0"/>
-                      </a:endParaRPr>
-                    </a:p>
-                  </a:txBody>
-                  <a:tcPr marL="45720" marR="45720" anchor="ctr">
-                    <a:noFill/>
-                  </a:tcPr>
-                </a:tc>
-                <a:tc>
-                  <a:txBody>
-                    <a:bodyPr/>
-                    <a:lstStyle/>
-                    <a:p>
-                      <a:r>
-                        <a:rPr lang="en-US" sz="1400" dirty="0" smtClean="0">
-                          <a:latin typeface="Arial" pitchFamily="34" charset="0"/>
-                          <a:cs typeface="Arial" pitchFamily="34" charset="0"/>
-                        </a:rPr>
-                        <a:t>48.4</a:t>
-                      </a:r>
-                      <a:endParaRPr lang="en-US" sz="1400" dirty="0">
-                        <a:latin typeface="Arial" pitchFamily="34" charset="0"/>
-                        <a:cs typeface="Arial" pitchFamily="34" charset="0"/>
-                      </a:endParaRPr>
-                    </a:p>
-                  </a:txBody>
-                  <a:tcPr marL="45720" marR="45720" anchor="ctr">
-                    <a:noFill/>
-                  </a:tcPr>
-                </a:tc>
-                <a:tc>
-                  <a:txBody>
-                    <a:bodyPr/>
-                    <a:lstStyle/>
-                    <a:p>
-                      <a:r>
-                        <a:rPr lang="en-US" sz="1400" dirty="0" smtClean="0">
-                          <a:latin typeface="Arial" pitchFamily="34" charset="0"/>
-                          <a:cs typeface="Arial" pitchFamily="34" charset="0"/>
-                        </a:rPr>
-                        <a:t>11.35</a:t>
-                      </a:r>
-                      <a:endParaRPr lang="en-US" sz="1400" dirty="0">
-                        <a:latin typeface="Arial" pitchFamily="34" charset="0"/>
-                        <a:cs typeface="Arial" pitchFamily="34" charset="0"/>
-                      </a:endParaRPr>
-                    </a:p>
-                  </a:txBody>
-                  <a:tcPr marL="45720" marR="45720" anchor="ctr">
-                    <a:noFill/>
-                  </a:tcPr>
-                </a:tc>
-                <a:tc>
-                  <a:txBody>
-                    <a:bodyPr/>
-                    <a:lstStyle/>
-                    <a:p>
-                      <a:r>
-                        <a:rPr lang="en-US" sz="1400" dirty="0" smtClean="0">
-                          <a:latin typeface="Arial" pitchFamily="34" charset="0"/>
-                          <a:cs typeface="Arial" pitchFamily="34" charset="0"/>
-                        </a:rPr>
-                        <a:t>62.2</a:t>
-                      </a:r>
-                      <a:endParaRPr lang="en-US" sz="1400" dirty="0">
-                        <a:latin typeface="Arial" pitchFamily="34" charset="0"/>
-                        <a:cs typeface="Arial" pitchFamily="34" charset="0"/>
-                      </a:endParaRPr>
-                    </a:p>
-                  </a:txBody>
-                  <a:tcPr marL="45720" marR="45720" anchor="ctr">
-                    <a:noFill/>
-                  </a:tcPr>
-                </a:tc>
-                <a:tc>
-                  <a:txBody>
-                    <a:bodyPr/>
-                    <a:lstStyle/>
-                    <a:p>
-                      <a:r>
-                        <a:rPr lang="en-US" sz="1400" dirty="0" smtClean="0">
-                          <a:latin typeface="Arial" pitchFamily="34" charset="0"/>
-                          <a:cs typeface="Arial" pitchFamily="34" charset="0"/>
-                        </a:rPr>
-                        <a:t>free</a:t>
+                        <a:t>LLaMA-3.2-3B</a:t>
+                      </a:r>
+                    </a:p>
+                  </a:txBody>
+                  <a:tcPr marL="45720" marR="45720" anchor="ctr">
+                    <a:noFill/>
+                  </a:tcPr>
+                </a:tc>
+                <a:tc>
+                  <a:txBody>
+                    <a:bodyPr/>
+                    <a:lstStyle/>
+                    <a:p>
+                      <a:r>
+                        <a:rPr lang="en-US" sz="1400" dirty="0" smtClean="0">
+                          <a:latin typeface="Arial" pitchFamily="34" charset="0"/>
+                          <a:cs typeface="Arial" pitchFamily="34" charset="0"/>
+                        </a:rPr>
+                        <a:t>43.5</a:t>
+                      </a:r>
+                      <a:endParaRPr lang="en-US" sz="1400" dirty="0">
+                        <a:latin typeface="Arial" pitchFamily="34" charset="0"/>
+                        <a:cs typeface="Arial" pitchFamily="34" charset="0"/>
+                      </a:endParaRPr>
+                    </a:p>
+                  </a:txBody>
+                  <a:tcPr marL="45720" marR="45720" anchor="ctr">
+                    <a:noFill/>
+                  </a:tcPr>
+                </a:tc>
+                <a:tc>
+                  <a:txBody>
+                    <a:bodyPr/>
+                    <a:lstStyle/>
+                    <a:p>
+                      <a:r>
+                        <a:rPr lang="en-US" sz="1400" dirty="0" smtClean="0">
+                          <a:latin typeface="Arial" pitchFamily="34" charset="0"/>
+                          <a:cs typeface="Arial" pitchFamily="34" charset="0"/>
+                        </a:rPr>
+                        <a:t>87.8</a:t>
+                      </a:r>
+                      <a:endParaRPr lang="en-US" sz="1400" dirty="0">
+                        <a:latin typeface="Arial" pitchFamily="34" charset="0"/>
+                        <a:cs typeface="Arial" pitchFamily="34" charset="0"/>
+                      </a:endParaRPr>
+                    </a:p>
+                  </a:txBody>
+                  <a:tcPr marL="45720" marR="45720" anchor="ctr">
+                    <a:noFill/>
+                  </a:tcPr>
+                </a:tc>
+                <a:tc>
+                  <a:txBody>
+                    <a:bodyPr/>
+                    <a:lstStyle/>
+                    <a:p>
+                      <a:r>
+                        <a:rPr lang="en-US" sz="1400" dirty="0" smtClean="0">
+                          <a:latin typeface="Arial" pitchFamily="34" charset="0"/>
+                          <a:cs typeface="Arial" pitchFamily="34" charset="0"/>
+                        </a:rPr>
+                        <a:t>57.0</a:t>
+                      </a:r>
+                      <a:endParaRPr lang="en-US" sz="1400" dirty="0">
+                        <a:latin typeface="Arial" pitchFamily="34" charset="0"/>
+                        <a:cs typeface="Arial" pitchFamily="34" charset="0"/>
+                      </a:endParaRPr>
+                    </a:p>
+                  </a:txBody>
+                  <a:tcPr marL="45720" marR="45720" anchor="ctr">
+                    <a:noFill/>
+                  </a:tcPr>
+                </a:tc>
+                <a:tc>
+                  <a:txBody>
+                    <a:bodyPr/>
+                    <a:lstStyle/>
+                    <a:p>
+                      <a:r>
+                        <a:rPr lang="en-US" sz="1400" dirty="0" smtClean="0">
+                          <a:latin typeface="Arial" pitchFamily="34" charset="0"/>
+                          <a:cs typeface="Arial" pitchFamily="34" charset="0"/>
+                        </a:rPr>
+                        <a:t>39.8</a:t>
+                      </a:r>
+                      <a:endParaRPr lang="en-US" sz="1400" dirty="0">
+                        <a:latin typeface="Arial" pitchFamily="34" charset="0"/>
+                        <a:cs typeface="Arial" pitchFamily="34" charset="0"/>
+                      </a:endParaRPr>
+                    </a:p>
+                  </a:txBody>
+                  <a:tcPr marL="45720" marR="45720" anchor="ctr">
+                    <a:noFill/>
+                  </a:tcPr>
+                </a:tc>
+                <a:tc>
+                  <a:txBody>
+                    <a:bodyPr/>
+                    <a:lstStyle/>
+                    <a:p>
+                      <a:r>
+                        <a:rPr lang="en-US" sz="1400" dirty="0" smtClean="0">
+                          <a:latin typeface="Arial" pitchFamily="34" charset="0"/>
+                          <a:cs typeface="Arial" pitchFamily="34" charset="0"/>
+                        </a:rPr>
+                        <a:t>9.39</a:t>
+                      </a:r>
+                      <a:endParaRPr lang="en-US" sz="1400" dirty="0">
+                        <a:latin typeface="Arial" pitchFamily="34" charset="0"/>
+                        <a:cs typeface="Arial" pitchFamily="34" charset="0"/>
+                      </a:endParaRPr>
+                    </a:p>
+                  </a:txBody>
+                  <a:tcPr marL="45720" marR="45720" anchor="ctr">
+                    <a:noFill/>
+                  </a:tcPr>
+                </a:tc>
+                <a:tc>
+                  <a:txBody>
+                    <a:bodyPr/>
+                    <a:lstStyle/>
+                    <a:p>
+                      <a:r>
+                        <a:rPr lang="en-US" sz="1400" dirty="0" smtClean="0">
+                          <a:latin typeface="Arial" pitchFamily="34" charset="0"/>
+                          <a:cs typeface="Arial" pitchFamily="34" charset="0"/>
+                        </a:rPr>
+                        <a:t>57.8</a:t>
                       </a:r>
                       <a:endParaRPr lang="en-US" sz="1400" dirty="0">
                         <a:latin typeface="Arial" pitchFamily="34" charset="0"/>
@@ -9164,158 +8777,140 @@
                           <a:latin typeface="Arial" pitchFamily="34" charset="0"/>
                           <a:cs typeface="Arial" pitchFamily="34" charset="0"/>
                         </a:rPr>
-                        <a:t>LLaMA-3.2-3B</a:t>
-                      </a:r>
-                    </a:p>
-                  </a:txBody>
-                  <a:tcPr marL="45720" marR="45720" anchor="ctr">
-                    <a:noFill/>
-                  </a:tcPr>
-                </a:tc>
-                <a:tc>
-                  <a:txBody>
-                    <a:bodyPr/>
-                    <a:lstStyle/>
-                    <a:p>
-                      <a:r>
-                        <a:rPr lang="en-US" sz="1400" dirty="0" smtClean="0">
-                          <a:latin typeface="Arial" pitchFamily="34" charset="0"/>
-                          <a:cs typeface="Arial" pitchFamily="34" charset="0"/>
-                        </a:rPr>
-                        <a:t>43.5</a:t>
-                      </a:r>
-                      <a:endParaRPr lang="en-US" sz="1400" dirty="0">
-                        <a:latin typeface="Arial" pitchFamily="34" charset="0"/>
-                        <a:cs typeface="Arial" pitchFamily="34" charset="0"/>
-                      </a:endParaRPr>
-                    </a:p>
-                  </a:txBody>
-                  <a:tcPr marL="45720" marR="45720" anchor="ctr">
-                    <a:noFill/>
-                  </a:tcPr>
-                </a:tc>
-                <a:tc>
-                  <a:txBody>
-                    <a:bodyPr/>
-                    <a:lstStyle/>
-                    <a:p>
-                      <a:r>
-                        <a:rPr lang="en-US" sz="1400" dirty="0" smtClean="0">
-                          <a:latin typeface="Arial" pitchFamily="34" charset="0"/>
-                          <a:cs typeface="Arial" pitchFamily="34" charset="0"/>
-                        </a:rPr>
-                        <a:t>87.8</a:t>
-                      </a:r>
-                      <a:endParaRPr lang="en-US" sz="1400" dirty="0">
-                        <a:latin typeface="Arial" pitchFamily="34" charset="0"/>
-                        <a:cs typeface="Arial" pitchFamily="34" charset="0"/>
-                      </a:endParaRPr>
-                    </a:p>
-                  </a:txBody>
-                  <a:tcPr marL="45720" marR="45720" anchor="ctr">
-                    <a:noFill/>
-                  </a:tcPr>
-                </a:tc>
-                <a:tc>
-                  <a:txBody>
-                    <a:bodyPr/>
-                    <a:lstStyle/>
-                    <a:p>
-                      <a:r>
-                        <a:rPr lang="en-US" sz="1400" dirty="0" smtClean="0">
-                          <a:latin typeface="Arial" pitchFamily="34" charset="0"/>
-                          <a:cs typeface="Arial" pitchFamily="34" charset="0"/>
-                        </a:rPr>
-                        <a:t>57.0</a:t>
-                      </a:r>
-                      <a:endParaRPr lang="en-US" sz="1400" dirty="0">
-                        <a:latin typeface="Arial" pitchFamily="34" charset="0"/>
-                        <a:cs typeface="Arial" pitchFamily="34" charset="0"/>
-                      </a:endParaRPr>
-                    </a:p>
-                  </a:txBody>
-                  <a:tcPr marL="45720" marR="45720" anchor="ctr">
-                    <a:noFill/>
-                  </a:tcPr>
-                </a:tc>
-                <a:tc>
-                  <a:txBody>
-                    <a:bodyPr/>
-                    <a:lstStyle/>
-                    <a:p>
-                      <a:r>
-                        <a:rPr lang="en-US" sz="1400" dirty="0" smtClean="0">
-                          <a:latin typeface="Arial" pitchFamily="34" charset="0"/>
-                          <a:cs typeface="Arial" pitchFamily="34" charset="0"/>
-                        </a:rPr>
-                        <a:t>39.8</a:t>
-                      </a:r>
-                      <a:endParaRPr lang="en-US" sz="1400" dirty="0">
-                        <a:latin typeface="Arial" pitchFamily="34" charset="0"/>
-                        <a:cs typeface="Arial" pitchFamily="34" charset="0"/>
-                      </a:endParaRPr>
-                    </a:p>
-                  </a:txBody>
-                  <a:tcPr marL="45720" marR="45720" anchor="ctr">
-                    <a:noFill/>
-                  </a:tcPr>
-                </a:tc>
-                <a:tc>
-                  <a:txBody>
-                    <a:bodyPr/>
-                    <a:lstStyle/>
-                    <a:p>
-                      <a:r>
-                        <a:rPr lang="en-US" sz="1400" dirty="0" smtClean="0">
-                          <a:latin typeface="Arial" pitchFamily="34" charset="0"/>
-                          <a:cs typeface="Arial" pitchFamily="34" charset="0"/>
-                        </a:rPr>
-                        <a:t>9.39</a:t>
-                      </a:r>
-                      <a:endParaRPr lang="en-US" sz="1400" dirty="0">
-                        <a:latin typeface="Arial" pitchFamily="34" charset="0"/>
-                        <a:cs typeface="Arial" pitchFamily="34" charset="0"/>
-                      </a:endParaRPr>
-                    </a:p>
-                  </a:txBody>
-                  <a:tcPr marL="45720" marR="45720" anchor="ctr">
-                    <a:noFill/>
-                  </a:tcPr>
-                </a:tc>
-                <a:tc>
-                  <a:txBody>
-                    <a:bodyPr/>
-                    <a:lstStyle/>
-                    <a:p>
-                      <a:r>
-                        <a:rPr lang="en-US" sz="1400" dirty="0" smtClean="0">
-                          <a:latin typeface="Arial" pitchFamily="34" charset="0"/>
-                          <a:cs typeface="Arial" pitchFamily="34" charset="0"/>
-                        </a:rPr>
-                        <a:t>57.8</a:t>
-                      </a:r>
-                      <a:endParaRPr lang="en-US" sz="1400" dirty="0">
-                        <a:latin typeface="Arial" pitchFamily="34" charset="0"/>
-                        <a:cs typeface="Arial" pitchFamily="34" charset="0"/>
-                      </a:endParaRPr>
-                    </a:p>
-                  </a:txBody>
-                  <a:tcPr marL="45720" marR="45720" anchor="ctr">
-                    <a:noFill/>
-                  </a:tcPr>
-                </a:tc>
-                <a:tc>
-                  <a:txBody>
-                    <a:bodyPr/>
-                    <a:lstStyle/>
-                    <a:p>
-                      <a:r>
-                        <a:rPr lang="en-US" sz="1400" dirty="0" smtClean="0">
-                          <a:latin typeface="Arial" pitchFamily="34" charset="0"/>
-                          <a:cs typeface="Arial" pitchFamily="34" charset="0"/>
-                        </a:rPr>
-                        <a:t>free</a:t>
-                      </a:r>
+                        <a:t>LLaMA-3.1-8B</a:t>
+                      </a:r>
+                    </a:p>
+                  </a:txBody>
+                  <a:tcPr marL="45720" marR="45720" anchor="ctr">
+                    <a:noFill/>
+                  </a:tcPr>
+                </a:tc>
+                <a:tc>
+                  <a:txBody>
+                    <a:bodyPr/>
+                    <a:lstStyle/>
+                    <a:p>
+                      <a:r>
+                        <a:rPr lang="en-US" sz="1400" dirty="0" smtClean="0">
+                          <a:latin typeface="Arial" pitchFamily="34" charset="0"/>
+                          <a:cs typeface="Arial" pitchFamily="34" charset="0"/>
+                        </a:rPr>
+                        <a:t>44.0</a:t>
+                      </a:r>
+                      <a:endParaRPr lang="en-US" sz="1400" dirty="0">
+                        <a:latin typeface="Arial" pitchFamily="34" charset="0"/>
+                        <a:cs typeface="Arial" pitchFamily="34" charset="0"/>
+                      </a:endParaRPr>
+                    </a:p>
+                  </a:txBody>
+                  <a:tcPr marL="45720" marR="45720" anchor="ctr">
+                    <a:noFill/>
+                  </a:tcPr>
+                </a:tc>
+                <a:tc>
+                  <a:txBody>
+                    <a:bodyPr/>
+                    <a:lstStyle/>
+                    <a:p>
+                      <a:r>
+                        <a:rPr lang="en-US" sz="1400" dirty="0" smtClean="0">
+                          <a:latin typeface="Arial" pitchFamily="34" charset="0"/>
+                          <a:cs typeface="Arial" pitchFamily="34" charset="0"/>
+                        </a:rPr>
+                        <a:t>87.1</a:t>
+                      </a:r>
+                      <a:endParaRPr lang="en-US" sz="1400" dirty="0">
+                        <a:latin typeface="Arial" pitchFamily="34" charset="0"/>
+                        <a:cs typeface="Arial" pitchFamily="34" charset="0"/>
+                      </a:endParaRPr>
+                    </a:p>
+                  </a:txBody>
+                  <a:tcPr marL="45720" marR="45720" anchor="ctr">
+                    <a:noFill/>
+                  </a:tcPr>
+                </a:tc>
+                <a:tc>
+                  <a:txBody>
+                    <a:bodyPr/>
+                    <a:lstStyle/>
+                    <a:p>
+                      <a:r>
+                        <a:rPr lang="en-US" sz="1400" dirty="0" smtClean="0">
+                          <a:latin typeface="Arial" pitchFamily="34" charset="0"/>
+                          <a:cs typeface="Arial" pitchFamily="34" charset="0"/>
+                        </a:rPr>
+                        <a:t>50.5</a:t>
+                      </a:r>
+                      <a:endParaRPr lang="en-US" sz="1400" dirty="0">
+                        <a:latin typeface="Arial" pitchFamily="34" charset="0"/>
+                        <a:cs typeface="Arial" pitchFamily="34" charset="0"/>
+                      </a:endParaRPr>
+                    </a:p>
+                  </a:txBody>
+                  <a:tcPr marL="45720" marR="45720" anchor="ctr">
+                    <a:noFill/>
+                  </a:tcPr>
+                </a:tc>
+                <a:tc>
+                  <a:txBody>
+                    <a:bodyPr/>
+                    <a:lstStyle/>
+                    <a:p>
+                      <a:r>
+                        <a:rPr lang="en-US" sz="1400" dirty="0" smtClean="0">
+                          <a:latin typeface="Arial" pitchFamily="34" charset="0"/>
+                          <a:cs typeface="Arial" pitchFamily="34" charset="0"/>
+                        </a:rPr>
+                        <a:t>40.3</a:t>
+                      </a:r>
+                      <a:endParaRPr lang="en-US" sz="1400" dirty="0">
+                        <a:latin typeface="Arial" pitchFamily="34" charset="0"/>
+                        <a:cs typeface="Arial" pitchFamily="34" charset="0"/>
+                      </a:endParaRPr>
+                    </a:p>
+                  </a:txBody>
+                  <a:tcPr marL="45720" marR="45720" anchor="ctr">
+                    <a:noFill/>
+                  </a:tcPr>
+                </a:tc>
+                <a:tc>
+                  <a:txBody>
+                    <a:bodyPr/>
+                    <a:lstStyle/>
+                    <a:p>
+                      <a:r>
+                        <a:rPr lang="en-US" sz="1400" dirty="0" smtClean="0">
+                          <a:latin typeface="Arial" pitchFamily="34" charset="0"/>
+                          <a:cs typeface="Arial" pitchFamily="34" charset="0"/>
+                        </a:rPr>
+                        <a:t>9.22</a:t>
+                      </a:r>
+                      <a:endParaRPr lang="en-US" sz="1400" dirty="0">
+                        <a:latin typeface="Arial" pitchFamily="34" charset="0"/>
+                        <a:cs typeface="Arial" pitchFamily="34" charset="0"/>
+                      </a:endParaRPr>
+                    </a:p>
+                  </a:txBody>
+                  <a:tcPr marL="45720" marR="45720" anchor="ctr">
+                    <a:noFill/>
+                  </a:tcPr>
+                </a:tc>
+                <a:tc>
+                  <a:txBody>
+                    <a:bodyPr/>
+                    <a:lstStyle/>
+                    <a:p>
+                      <a:r>
+                        <a:rPr lang="en-US" sz="1400" dirty="0" smtClean="0">
+                          <a:latin typeface="Arial" pitchFamily="34" charset="0"/>
+                          <a:cs typeface="Arial" pitchFamily="34" charset="0"/>
+                        </a:rPr>
+                        <a:t>54.6</a:t>
+                      </a:r>
+                      <a:endParaRPr lang="en-US" sz="1400" dirty="0">
+                        <a:latin typeface="Arial" pitchFamily="34" charset="0"/>
+                        <a:cs typeface="Arial" pitchFamily="34" charset="0"/>
+                      </a:endParaRPr>
                     </a:p>
                   </a:txBody>
                   <a:tcPr marL="45720" marR="45720" anchor="ctr">
@@ -9351,197 +8946,6 @@
                           <a:latin typeface="Arial" pitchFamily="34" charset="0"/>
                           <a:cs typeface="Arial" pitchFamily="34" charset="0"/>
                         </a:rPr>
-                        <a:t>LLaMA-3.1-8B</a:t>
-                      </a:r>
-                    </a:p>
-                  </a:txBody>
-                  <a:tcPr marL="45720" marR="45720" anchor="ctr">
-                    <a:noFill/>
-                  </a:tcPr>
-                </a:tc>
-                <a:tc>
-                  <a:txBody>
-                    <a:bodyPr/>
-                    <a:lstStyle/>
-                    <a:p>
-                      <a:r>
-                        <a:rPr lang="en-US" sz="1400" dirty="0" smtClean="0">
-                          <a:latin typeface="Arial" pitchFamily="34" charset="0"/>
-                          <a:cs typeface="Arial" pitchFamily="34" charset="0"/>
-                        </a:rPr>
-                        <a:t>44.0</a:t>
-                      </a:r>
-                      <a:endParaRPr lang="en-US" sz="1400" dirty="0">
-                        <a:latin typeface="Arial" pitchFamily="34" charset="0"/>
-                        <a:cs typeface="Arial" pitchFamily="34" charset="0"/>
-                      </a:endParaRPr>
-                    </a:p>
-                  </a:txBody>
-                  <a:tcPr marL="45720" marR="45720" anchor="ctr">
-                    <a:noFill/>
-                  </a:tcPr>
-                </a:tc>
-                <a:tc>
-                  <a:txBody>
-                    <a:bodyPr/>
-                    <a:lstStyle/>
-                    <a:p>
-                      <a:r>
-                        <a:rPr lang="en-US" sz="1400" dirty="0" smtClean="0">
-                          <a:latin typeface="Arial" pitchFamily="34" charset="0"/>
-                          <a:cs typeface="Arial" pitchFamily="34" charset="0"/>
-                        </a:rPr>
-                        <a:t>87.1</a:t>
-                      </a:r>
-                      <a:endParaRPr lang="en-US" sz="1400" dirty="0">
-                        <a:latin typeface="Arial" pitchFamily="34" charset="0"/>
-                        <a:cs typeface="Arial" pitchFamily="34" charset="0"/>
-                      </a:endParaRPr>
-                    </a:p>
-                  </a:txBody>
-                  <a:tcPr marL="45720" marR="45720" anchor="ctr">
-                    <a:noFill/>
-                  </a:tcPr>
-                </a:tc>
-                <a:tc>
-                  <a:txBody>
-                    <a:bodyPr/>
-                    <a:lstStyle/>
-                    <a:p>
-                      <a:r>
-                        <a:rPr lang="en-US" sz="1400" dirty="0" smtClean="0">
-                          <a:latin typeface="Arial" pitchFamily="34" charset="0"/>
-                          <a:cs typeface="Arial" pitchFamily="34" charset="0"/>
-                        </a:rPr>
-                        <a:t>50.5</a:t>
-                      </a:r>
-                      <a:endParaRPr lang="en-US" sz="1400" dirty="0">
-                        <a:latin typeface="Arial" pitchFamily="34" charset="0"/>
-                        <a:cs typeface="Arial" pitchFamily="34" charset="0"/>
-                      </a:endParaRPr>
-                    </a:p>
-                  </a:txBody>
-                  <a:tcPr marL="45720" marR="45720" anchor="ctr">
-                    <a:noFill/>
-                  </a:tcPr>
-                </a:tc>
-                <a:tc>
-                  <a:txBody>
-                    <a:bodyPr/>
-                    <a:lstStyle/>
-                    <a:p>
-                      <a:r>
-                        <a:rPr lang="en-US" sz="1400" dirty="0" smtClean="0">
-                          <a:latin typeface="Arial" pitchFamily="34" charset="0"/>
-                          <a:cs typeface="Arial" pitchFamily="34" charset="0"/>
-                        </a:rPr>
-                        <a:t>40.3</a:t>
-                      </a:r>
-                      <a:endParaRPr lang="en-US" sz="1400" dirty="0">
-                        <a:latin typeface="Arial" pitchFamily="34" charset="0"/>
-                        <a:cs typeface="Arial" pitchFamily="34" charset="0"/>
-                      </a:endParaRPr>
-                    </a:p>
-                  </a:txBody>
-                  <a:tcPr marL="45720" marR="45720" anchor="ctr">
-                    <a:noFill/>
-                  </a:tcPr>
-                </a:tc>
-                <a:tc>
-                  <a:txBody>
-                    <a:bodyPr/>
-                    <a:lstStyle/>
-                    <a:p>
-                      <a:r>
-                        <a:rPr lang="en-US" sz="1400" dirty="0" smtClean="0">
-                          <a:latin typeface="Arial" pitchFamily="34" charset="0"/>
-                          <a:cs typeface="Arial" pitchFamily="34" charset="0"/>
-                        </a:rPr>
-                        <a:t>9.22</a:t>
-                      </a:r>
-                      <a:endParaRPr lang="en-US" sz="1400" dirty="0">
-                        <a:latin typeface="Arial" pitchFamily="34" charset="0"/>
-                        <a:cs typeface="Arial" pitchFamily="34" charset="0"/>
-                      </a:endParaRPr>
-                    </a:p>
-                  </a:txBody>
-                  <a:tcPr marL="45720" marR="45720" anchor="ctr">
-                    <a:noFill/>
-                  </a:tcPr>
-                </a:tc>
-                <a:tc>
-                  <a:txBody>
-                    <a:bodyPr/>
-                    <a:lstStyle/>
-                    <a:p>
-                      <a:r>
-                        <a:rPr lang="en-US" sz="1400" dirty="0" smtClean="0">
-                          <a:latin typeface="Arial" pitchFamily="34" charset="0"/>
-                          <a:cs typeface="Arial" pitchFamily="34" charset="0"/>
-                        </a:rPr>
-                        <a:t>54.6</a:t>
-                      </a:r>
-                      <a:endParaRPr lang="en-US" sz="1400" dirty="0">
-                        <a:latin typeface="Arial" pitchFamily="34" charset="0"/>
-                        <a:cs typeface="Arial" pitchFamily="34" charset="0"/>
-                      </a:endParaRPr>
-                    </a:p>
-                  </a:txBody>
-                  <a:tcPr marL="45720" marR="45720" anchor="ctr">
-                    <a:noFill/>
-                  </a:tcPr>
-                </a:tc>
-                <a:tc>
-                  <a:txBody>
-                    <a:bodyPr/>
-                    <a:lstStyle/>
-                    <a:p>
-                      <a:r>
-                        <a:rPr lang="en-US" sz="1400" dirty="0" smtClean="0">
-                          <a:latin typeface="Arial" pitchFamily="34" charset="0"/>
-                          <a:cs typeface="Arial" pitchFamily="34" charset="0"/>
-                        </a:rPr>
-                        <a:t>free</a:t>
-                      </a:r>
-                      <a:endParaRPr lang="en-US" sz="1400" dirty="0">
-                        <a:latin typeface="Arial" pitchFamily="34" charset="0"/>
-                        <a:cs typeface="Arial" pitchFamily="34" charset="0"/>
-                      </a:endParaRPr>
-                    </a:p>
-                  </a:txBody>
-                  <a:tcPr marL="45720" marR="45720" anchor="ctr">
-                    <a:noFill/>
-                  </a:tcPr>
-                </a:tc>
-              </a:tr>
-              <a:tr h="299110">
-                <a:tc>
-                  <a:txBody>
-                    <a:bodyPr/>
-                    <a:lstStyle/>
-                    <a:p>
-                      <a:pPr marL="0" marR="0" indent="0" algn="l" defTabSz="914400" rtl="0" eaLnBrk="1" fontAlgn="auto" latinLnBrk="0" hangingPunct="1">
-                        <a:lnSpc>
-                          <a:spcPct val="100000"/>
-                        </a:lnSpc>
-                        <a:spcBef>
-                          <a:spcPts val="0"/>
-                        </a:spcBef>
-                        <a:spcAft>
-                          <a:spcPts val="0"/>
-                        </a:spcAft>
-                        <a:buClrTx/>
-                        <a:buSzTx/>
-                        <a:buFontTx/>
-                        <a:buNone/>
-                        <a:tabLst/>
-                        <a:defRPr/>
-                      </a:pPr>
-                      <a:r>
-                        <a:rPr lang="en-US" sz="1400" dirty="0" smtClean="0">
-                          <a:latin typeface="Arial" pitchFamily="34" charset="0"/>
-                          <a:cs typeface="Arial" pitchFamily="34" charset="0"/>
-                        </a:rPr>
                         <a:t>Qwen3-4B</a:t>
                       </a:r>
                     </a:p>
@@ -9671,28 +9075,6 @@
                           <a:cs typeface="Arial" pitchFamily="34" charset="0"/>
                         </a:rPr>
                         <a:t>53.8</a:t>
-                      </a:r>
-                      <a:endParaRPr lang="en-US" sz="1400" dirty="0">
-                        <a:latin typeface="Arial" pitchFamily="34" charset="0"/>
-                        <a:cs typeface="Arial" pitchFamily="34" charset="0"/>
-                      </a:endParaRPr>
-                    </a:p>
-                  </a:txBody>
-                  <a:tcPr marL="45720" marR="45720" anchor="ctr">
-                    <a:noFill/>
-                  </a:tcPr>
-                </a:tc>
-                <a:tc>
-                  <a:txBody>
-                    <a:bodyPr/>
-                    <a:lstStyle/>
-                    <a:p>
-                      <a:r>
-                        <a:rPr lang="en-US" sz="1400" dirty="0" smtClean="0">
-                          <a:latin typeface="Arial" pitchFamily="34" charset="0"/>
-                          <a:cs typeface="Arial" pitchFamily="34" charset="0"/>
-                        </a:rPr>
-                        <a:t>free</a:t>
                       </a:r>
                       <a:endParaRPr lang="en-US" sz="1400" dirty="0">
                         <a:latin typeface="Arial" pitchFamily="34" charset="0"/>
@@ -11828,6 +11210,15 @@
             <a:pPr>
               <a:buNone/>
             </a:pPr>
+            <a:endParaRPr lang="en-US" sz="2000" dirty="0" smtClean="0">
+              <a:latin typeface="Arial" pitchFamily="34" charset="0"/>
+              <a:cs typeface="Arial" pitchFamily="34" charset="0"/>
+            </a:endParaRPr>
+          </a:p>
+          <a:p>
+            <a:pPr>
+              <a:buNone/>
+            </a:pPr>
             <a:endParaRPr lang="en-US" sz="2000" dirty="0">
               <a:latin typeface="Arial" pitchFamily="34" charset="0"/>
               <a:cs typeface="Arial" pitchFamily="34" charset="0"/>
@@ -11862,18 +11253,6 @@
               <a:latin typeface="Arial" pitchFamily="34" charset="0"/>
               <a:cs typeface="Arial" pitchFamily="34" charset="0"/>
             </a:endParaRPr>
-          </a:p>
-          <a:p>
-            <a:pPr marL="0" indent="0">
-              <a:buNone/>
-            </a:pPr>
-            <a:r>
-              <a:rPr lang="en-US" sz="2000" dirty="0" smtClean="0">
-                <a:latin typeface="Arial" pitchFamily="34" charset="0"/>
-                <a:cs typeface="Arial" pitchFamily="34" charset="0"/>
-              </a:rPr>
-              <a:t>Both questions are evaluated across commercial API models (GPT-4o-mini, Claude 3 Haiku) and open-source models (LLaMA, Qwen, Phi).</a:t>
-            </a:r>
           </a:p>
           <a:p>
             <a:pPr marL="0" indent="0">
@@ -12899,7 +12278,21 @@
                 <a:latin typeface="Arial" pitchFamily="34" charset="0"/>
                 <a:cs typeface="Arial" pitchFamily="34" charset="0"/>
               </a:rPr>
-              <a:t>  → supervisor → lexicalize → Response</a:t>
+              <a:t> </a:t>
+            </a:r>
+            <a:r>
+              <a:rPr lang="en-US" sz="2000" dirty="0" smtClean="0">
+                <a:latin typeface="Arial" pitchFamily="34" charset="0"/>
+                <a:cs typeface="Arial" pitchFamily="34" charset="0"/>
+              </a:rPr>
+              <a:t>→ </a:t>
+            </a:r>
+            <a:r>
+              <a:rPr lang="en-US" sz="2000" dirty="0" smtClean="0">
+                <a:latin typeface="Arial" pitchFamily="34" charset="0"/>
+                <a:cs typeface="Arial" pitchFamily="34" charset="0"/>
+              </a:rPr>
+              <a:t>supervisor → lexicalize → Response</a:t>
             </a:r>
           </a:p>
           <a:p>

--- a/docs/presentation.pptx
+++ b/docs/presentation.pptx
@@ -5282,14 +5282,21 @@
                 <a:latin typeface="Arial" pitchFamily="34" charset="0"/>
                 <a:cs typeface="Arial" pitchFamily="34" charset="0"/>
               </a:rPr>
-              <a:t>  • Qwen3-14B is the best open-source, close to API quality, </a:t>
-            </a:r>
-            <a:r>
-              <a:rPr lang="en-US" sz="1600" dirty="0" smtClean="0">
-                <a:latin typeface="Arial" pitchFamily="34" charset="0"/>
-                <a:cs typeface="Arial" pitchFamily="34" charset="0"/>
-              </a:rPr>
-              <a:t>free</a:t>
+              <a:t>  • Qwen3-14B is the best open-source, close to </a:t>
+            </a:r>
+            <a:r>
+              <a:rPr lang="en-US" sz="1600" smtClean="0">
+                <a:latin typeface="Arial" pitchFamily="34" charset="0"/>
+                <a:cs typeface="Arial" pitchFamily="34" charset="0"/>
+              </a:rPr>
+              <a:t>API </a:t>
+            </a:r>
+            <a:r>
+              <a:rPr lang="en-US" sz="1600" smtClean="0">
+                <a:latin typeface="Arial" pitchFamily="34" charset="0"/>
+                <a:cs typeface="Arial" pitchFamily="34" charset="0"/>
+              </a:rPr>
+              <a:t>quality</a:t>
             </a:r>
             <a:endParaRPr lang="en-US" sz="1600" dirty="0" smtClean="0">
               <a:latin typeface="Arial" pitchFamily="34" charset="0"/>
@@ -11374,8 +11381,19 @@
                 <a:latin typeface="Arial" pitchFamily="34" charset="0"/>
                 <a:cs typeface="Arial" pitchFamily="34" charset="0"/>
               </a:rPr>
-              <a:t> Per-turn annotations: belief state (intent + slot values), dialog acts</a:t>
-            </a:r>
+              <a:t> Per-turn annotations: belief state (intent + slot values</a:t>
+            </a:r>
+            <a:r>
+              <a:rPr lang="en-US" sz="2000" dirty="0" smtClean="0">
+                <a:latin typeface="Arial" pitchFamily="34" charset="0"/>
+                <a:cs typeface="Arial" pitchFamily="34" charset="0"/>
+              </a:rPr>
+              <a:t>), dialog acts</a:t>
+            </a:r>
+            <a:endParaRPr lang="en-US" sz="2000" dirty="0" smtClean="0">
+              <a:latin typeface="Arial" pitchFamily="34" charset="0"/>
+              <a:cs typeface="Arial" pitchFamily="34" charset="0"/>
+            </a:endParaRPr>
           </a:p>
           <a:p>
             <a:pPr marL="0" indent="0"/>

--- a/docs/presentation.pptx
+++ b/docs/presentation.pptx
@@ -5282,17 +5282,10 @@
                 <a:latin typeface="Arial" pitchFamily="34" charset="0"/>
                 <a:cs typeface="Arial" pitchFamily="34" charset="0"/>
               </a:rPr>
-              <a:t>  • Qwen3-14B is the best open-source, close to </a:t>
-            </a:r>
-            <a:r>
-              <a:rPr lang="en-US" sz="1600" smtClean="0">
-                <a:latin typeface="Arial" pitchFamily="34" charset="0"/>
-                <a:cs typeface="Arial" pitchFamily="34" charset="0"/>
-              </a:rPr>
-              <a:t>API </a:t>
-            </a:r>
-            <a:r>
-              <a:rPr lang="en-US" sz="1600" smtClean="0">
+              <a:t>  • Qwen3-14B is the best open-source, close to API </a:t>
+            </a:r>
+            <a:r>
+              <a:rPr lang="en-US" sz="1600" dirty="0" smtClean="0">
                 <a:latin typeface="Arial" pitchFamily="34" charset="0"/>
                 <a:cs typeface="Arial" pitchFamily="34" charset="0"/>
               </a:rPr>

--- a/docs/presentation.pptx
+++ b/docs/presentation.pptx
@@ -3736,7 +3736,28 @@
                 <a:latin typeface="Arial" pitchFamily="34" charset="0"/>
                 <a:cs typeface="Arial" pitchFamily="34" charset="0"/>
               </a:rPr>
-              <a:t>Custom metrics (operational): Hallucination Rate, Policy Violation Rate, Domain / Intent Precision, Latency (s), Cost ($).</a:t>
+              <a:t>Custom metrics (operational): Hallucination Rate, Policy Violation Rate, Domain / Intent Precision, Latency (s</a:t>
+            </a:r>
+            <a:r>
+              <a:rPr lang="en-US" sz="2000" smtClean="0">
+                <a:latin typeface="Arial" pitchFamily="34" charset="0"/>
+                <a:cs typeface="Arial" pitchFamily="34" charset="0"/>
+              </a:rPr>
+              <a:t>), </a:t>
+            </a:r>
+            <a:r>
+              <a:rPr lang="en-US" sz="2000" smtClean="0">
+                <a:latin typeface="Arial" pitchFamily="34" charset="0"/>
+                <a:cs typeface="Arial" pitchFamily="34" charset="0"/>
+              </a:rPr>
+              <a:t>API Cost </a:t>
+            </a:r>
+            <a:r>
+              <a:rPr lang="en-US" sz="2000" dirty="0" smtClean="0">
+                <a:latin typeface="Arial" pitchFamily="34" charset="0"/>
+                <a:cs typeface="Arial" pitchFamily="34" charset="0"/>
+              </a:rPr>
+              <a:t>($).</a:t>
             </a:r>
           </a:p>
           <a:p>

--- a/docs/presentation.pptx
+++ b/docs/presentation.pptx
@@ -21,8 +21,9 @@
     <p:sldId id="275" r:id="rId15"/>
     <p:sldId id="276" r:id="rId16"/>
     <p:sldId id="270" r:id="rId17"/>
-    <p:sldId id="271" r:id="rId18"/>
-    <p:sldId id="272" r:id="rId19"/>
+    <p:sldId id="277" r:id="rId18"/>
+    <p:sldId id="271" r:id="rId19"/>
+    <p:sldId id="272" r:id="rId20"/>
   </p:sldIdLst>
   <p:sldSz cx="9144000" cy="6858000" type="screen4x3"/>
   <p:notesSz cx="6858000" cy="9144000"/>
@@ -3354,6 +3355,13 @@
   <p:clrMapOvr>
     <a:masterClrMapping/>
   </p:clrMapOvr>
+  <p:timing>
+    <p:tnLst>
+      <p:par>
+        <p:cTn id="1" dur="indefinite" restart="never" nodeType="tmRoot"/>
+      </p:par>
+    </p:tnLst>
+  </p:timing>
 </p:sld>
 </file>
 
@@ -3585,6 +3593,13 @@
   <p:clrMapOvr>
     <a:masterClrMapping/>
   </p:clrMapOvr>
+  <p:timing>
+    <p:tnLst>
+      <p:par>
+        <p:cTn id="1" dur="indefinite" restart="never" nodeType="tmRoot"/>
+      </p:par>
+    </p:tnLst>
+  </p:timing>
 </p:sld>
 </file>
 
@@ -3736,28 +3751,7 @@
                 <a:latin typeface="Arial" pitchFamily="34" charset="0"/>
                 <a:cs typeface="Arial" pitchFamily="34" charset="0"/>
               </a:rPr>
-              <a:t>Custom metrics (operational): Hallucination Rate, Policy Violation Rate, Domain / Intent Precision, Latency (s</a:t>
-            </a:r>
-            <a:r>
-              <a:rPr lang="en-US" sz="2000" smtClean="0">
-                <a:latin typeface="Arial" pitchFamily="34" charset="0"/>
-                <a:cs typeface="Arial" pitchFamily="34" charset="0"/>
-              </a:rPr>
-              <a:t>), </a:t>
-            </a:r>
-            <a:r>
-              <a:rPr lang="en-US" sz="2000" smtClean="0">
-                <a:latin typeface="Arial" pitchFamily="34" charset="0"/>
-                <a:cs typeface="Arial" pitchFamily="34" charset="0"/>
-              </a:rPr>
-              <a:t>API Cost </a:t>
-            </a:r>
-            <a:r>
-              <a:rPr lang="en-US" sz="2000" dirty="0" smtClean="0">
-                <a:latin typeface="Arial" pitchFamily="34" charset="0"/>
-                <a:cs typeface="Arial" pitchFamily="34" charset="0"/>
-              </a:rPr>
-              <a:t>($).</a:t>
+              <a:t>Custom metrics (operational): Hallucination Rate, Policy Violation Rate, Domain / Intent Precision, Latency (s), API Cost ($).</a:t>
             </a:r>
           </a:p>
           <a:p>
@@ -3816,6 +3810,13 @@
   <p:clrMapOvr>
     <a:masterClrMapping/>
   </p:clrMapOvr>
+  <p:timing>
+    <p:tnLst>
+      <p:par>
+        <p:cTn id="1" dur="indefinite" restart="never" nodeType="tmRoot"/>
+      </p:par>
+    </p:tnLst>
+  </p:timing>
 </p:sld>
 </file>
 
@@ -5262,93 +5263,35 @@
                 <a:latin typeface="Arial" pitchFamily="34" charset="0"/>
                 <a:cs typeface="Arial" pitchFamily="34" charset="0"/>
               </a:rPr>
-              <a:t>• Haiku leads, but </a:t>
-            </a:r>
+              <a:t>• Haiku leads, but at $21 in API fees, ~8× more than GPT-4o-mini ($2.75)</a:t>
+            </a:r>
+          </a:p>
+          <a:p>
             <a:r>
               <a:rPr lang="en-US" sz="1600" dirty="0" smtClean="0">
                 <a:latin typeface="Arial" pitchFamily="34" charset="0"/>
                 <a:cs typeface="Arial" pitchFamily="34" charset="0"/>
               </a:rPr>
-              <a:t>at</a:t>
-            </a:r>
+              <a:t>  • Qwen3-14B is the best open-source, close to API quality</a:t>
+            </a:r>
+          </a:p>
+          <a:p>
             <a:r>
               <a:rPr lang="en-US" sz="1600" dirty="0" smtClean="0">
                 <a:latin typeface="Arial" pitchFamily="34" charset="0"/>
                 <a:cs typeface="Arial" pitchFamily="34" charset="0"/>
               </a:rPr>
-              <a:t> </a:t>
-            </a:r>
+              <a:t>  • LLaMA-3.1-8B fails entirely, Qwen3 scaling non-monotonic </a:t>
+            </a:r>
+          </a:p>
+          <a:p>
             <a:r>
               <a:rPr lang="en-US" sz="1600" dirty="0" smtClean="0">
                 <a:latin typeface="Arial" pitchFamily="34" charset="0"/>
                 <a:cs typeface="Arial" pitchFamily="34" charset="0"/>
               </a:rPr>
-              <a:t>$</a:t>
-            </a:r>
-            <a:r>
-              <a:rPr lang="en-US" sz="1600" dirty="0" smtClean="0">
-                <a:latin typeface="Arial" pitchFamily="34" charset="0"/>
-                <a:cs typeface="Arial" pitchFamily="34" charset="0"/>
-              </a:rPr>
-              <a:t>21 in API fees, ~8× more than GPT-4o-mini ($2.75)</a:t>
-            </a:r>
-            <a:endParaRPr lang="en-US" sz="1600" dirty="0" smtClean="0">
-              <a:latin typeface="Arial" pitchFamily="34" charset="0"/>
-              <a:cs typeface="Arial" pitchFamily="34" charset="0"/>
-            </a:endParaRPr>
-          </a:p>
-          <a:p>
-            <a:r>
-              <a:rPr lang="en-US" sz="1600" dirty="0" smtClean="0">
-                <a:latin typeface="Arial" pitchFamily="34" charset="0"/>
-                <a:cs typeface="Arial" pitchFamily="34" charset="0"/>
-              </a:rPr>
-              <a:t>  • Qwen3-14B is the best open-source, close to API </a:t>
-            </a:r>
-            <a:r>
-              <a:rPr lang="en-US" sz="1600" dirty="0" smtClean="0">
-                <a:latin typeface="Arial" pitchFamily="34" charset="0"/>
-                <a:cs typeface="Arial" pitchFamily="34" charset="0"/>
-              </a:rPr>
-              <a:t>quality</a:t>
-            </a:r>
-            <a:endParaRPr lang="en-US" sz="1600" dirty="0" smtClean="0">
-              <a:latin typeface="Arial" pitchFamily="34" charset="0"/>
-              <a:cs typeface="Arial" pitchFamily="34" charset="0"/>
-            </a:endParaRPr>
-          </a:p>
-          <a:p>
-            <a:r>
-              <a:rPr lang="en-US" sz="1600" dirty="0" smtClean="0">
-                <a:latin typeface="Arial" pitchFamily="34" charset="0"/>
-                <a:cs typeface="Arial" pitchFamily="34" charset="0"/>
-              </a:rPr>
-              <a:t>  • LLaMA-3.1-8B fails entirely, Qwen3 scaling non-monotonic </a:t>
-            </a:r>
-            <a:endParaRPr lang="en-US" sz="1600" dirty="0" smtClean="0">
-              <a:latin typeface="Arial" pitchFamily="34" charset="0"/>
-              <a:cs typeface="Arial" pitchFamily="34" charset="0"/>
-            </a:endParaRPr>
-          </a:p>
-          <a:p>
-            <a:r>
-              <a:rPr lang="en-US" sz="1600" dirty="0" smtClean="0">
-                <a:latin typeface="Arial" pitchFamily="34" charset="0"/>
-                <a:cs typeface="Arial" pitchFamily="34" charset="0"/>
-              </a:rPr>
-              <a:t> </a:t>
-            </a:r>
-            <a:r>
-              <a:rPr lang="en-US" sz="1600" dirty="0" smtClean="0">
-                <a:latin typeface="Arial" pitchFamily="34" charset="0"/>
-                <a:cs typeface="Arial" pitchFamily="34" charset="0"/>
-              </a:rPr>
-              <a:t> </a:t>
-            </a:r>
-            <a:endParaRPr lang="en-US" sz="1600" dirty="0" smtClean="0">
-              <a:latin typeface="Arial" pitchFamily="34" charset="0"/>
-              <a:cs typeface="Arial" pitchFamily="34" charset="0"/>
-            </a:endParaRPr>
+              <a:t>  </a:t>
+            </a:r>
           </a:p>
         </p:txBody>
       </p:sp>
@@ -5357,6 +5300,13 @@
   <p:clrMapOvr>
     <a:masterClrMapping/>
   </p:clrMapOvr>
+  <p:timing>
+    <p:tnLst>
+      <p:par>
+        <p:cTn id="1" dur="indefinite" restart="never" nodeType="tmRoot"/>
+      </p:par>
+    </p:tnLst>
+  </p:timing>
 </p:sld>
 </file>
 
@@ -7701,6 +7651,13 @@
   <p:clrMapOvr>
     <a:masterClrMapping/>
   </p:clrMapOvr>
+  <p:timing>
+    <p:tnLst>
+      <p:par>
+        <p:cTn id="1" dur="indefinite" restart="never" nodeType="tmRoot"/>
+      </p:par>
+    </p:tnLst>
+  </p:timing>
 </p:sld>
 </file>
 
@@ -9205,6 +9162,13 @@
   <p:clrMapOvr>
     <a:masterClrMapping/>
   </p:clrMapOvr>
+  <p:timing>
+    <p:tnLst>
+      <p:par>
+        <p:cTn id="1" dur="indefinite" restart="never" nodeType="tmRoot"/>
+      </p:par>
+    </p:tnLst>
+  </p:timing>
 </p:sld>
 </file>
 
@@ -10474,6 +10438,13 @@
   <p:clrMapOvr>
     <a:masterClrMapping/>
   </p:clrMapOvr>
+  <p:timing>
+    <p:tnLst>
+      <p:par>
+        <p:cTn id="1" dur="indefinite" restart="never" nodeType="tmRoot"/>
+      </p:par>
+    </p:tnLst>
+  </p:timing>
 </p:sld>
 </file>
 
@@ -10705,6 +10676,13 @@
   <p:clrMapOvr>
     <a:masterClrMapping/>
   </p:clrMapOvr>
+  <p:timing>
+    <p:tnLst>
+      <p:par>
+        <p:cTn id="1" dur="indefinite" restart="never" nodeType="tmRoot"/>
+      </p:par>
+    </p:tnLst>
+  </p:timing>
 </p:sld>
 </file>
 
@@ -10748,6 +10726,144 @@
                 <a:latin typeface="Arial" pitchFamily="34" charset="0"/>
                 <a:cs typeface="Arial" pitchFamily="34" charset="0"/>
               </a:rPr>
+              <a:t>Contributions</a:t>
+            </a:r>
+            <a:endParaRPr lang="en-US" sz="3200" b="1" dirty="0">
+              <a:latin typeface="Arial" pitchFamily="34" charset="0"/>
+              <a:cs typeface="Arial" pitchFamily="34" charset="0"/>
+            </a:endParaRPr>
+          </a:p>
+        </p:txBody>
+      </p:sp>
+      <p:sp>
+        <p:nvSpPr>
+          <p:cNvPr id="3" name="Content Placeholder 2"/>
+          <p:cNvSpPr>
+            <a:spLocks noGrp="1"/>
+          </p:cNvSpPr>
+          <p:nvPr>
+            <p:ph idx="1"/>
+          </p:nvPr>
+        </p:nvSpPr>
+        <p:spPr/>
+        <p:txBody>
+          <a:bodyPr/>
+          <a:lstStyle/>
+          <a:p>
+            <a:r>
+              <a:rPr lang="en-US" sz="2000" dirty="0" smtClean="0">
+                <a:latin typeface="Arial" pitchFamily="34" charset="0"/>
+                <a:cs typeface="Arial" pitchFamily="34" charset="0"/>
+              </a:rPr>
+              <a:t>Controlled three-experiment design that isolates architectural decomposition </a:t>
+            </a:r>
+            <a:r>
+              <a:rPr lang="en-US" sz="2000" dirty="0" smtClean="0">
+                <a:latin typeface="Arial" pitchFamily="34" charset="0"/>
+                <a:cs typeface="Arial" pitchFamily="34" charset="0"/>
+              </a:rPr>
+              <a:t>(Exp 1 → Exp 2) and role-specific LoRA fine-tuning (Exp 2 → Exp 3) on the same data and </a:t>
+            </a:r>
+            <a:r>
+              <a:rPr lang="en-US" sz="2000" dirty="0" smtClean="0">
+                <a:latin typeface="Arial" pitchFamily="34" charset="0"/>
+                <a:cs typeface="Arial" pitchFamily="34" charset="0"/>
+              </a:rPr>
+              <a:t>metrics</a:t>
+            </a:r>
+          </a:p>
+          <a:p>
+            <a:r>
+              <a:rPr lang="en-US" sz="2000" dirty="0" smtClean="0">
+                <a:latin typeface="Arial" pitchFamily="34" charset="0"/>
+                <a:cs typeface="Arial" pitchFamily="34" charset="0"/>
+              </a:rPr>
+              <a:t>Head-to-head comparison of commercial APIs and small open-source models (3B–14B) across all three </a:t>
+            </a:r>
+            <a:r>
+              <a:rPr lang="en-US" sz="2000" dirty="0" smtClean="0">
+                <a:latin typeface="Arial" pitchFamily="34" charset="0"/>
+                <a:cs typeface="Arial" pitchFamily="34" charset="0"/>
+              </a:rPr>
+              <a:t>architectures</a:t>
+            </a:r>
+          </a:p>
+          <a:p>
+            <a:r>
+              <a:rPr lang="en-US" sz="2000" dirty="0" smtClean="0">
+                <a:latin typeface="Arial" pitchFamily="34" charset="0"/>
+                <a:cs typeface="Arial" pitchFamily="34" charset="0"/>
+              </a:rPr>
+              <a:t>Operational </a:t>
+            </a:r>
+            <a:r>
+              <a:rPr lang="en-US" sz="2000" dirty="0" smtClean="0">
+                <a:latin typeface="Arial" pitchFamily="34" charset="0"/>
+                <a:cs typeface="Arial" pitchFamily="34" charset="0"/>
+              </a:rPr>
+              <a:t>metrics (Hallucination Rate, Policy Violation Rate, Latency, API Cost) for deployment realism</a:t>
+            </a:r>
+            <a:endParaRPr lang="en-US" sz="2000" dirty="0" smtClean="0">
+              <a:latin typeface="Arial" pitchFamily="34" charset="0"/>
+              <a:cs typeface="Arial" pitchFamily="34" charset="0"/>
+            </a:endParaRPr>
+          </a:p>
+          <a:p>
+            <a:endParaRPr lang="en-US" sz="2000" dirty="0">
+              <a:latin typeface="Arial" pitchFamily="34" charset="0"/>
+              <a:cs typeface="Arial" pitchFamily="34" charset="0"/>
+            </a:endParaRPr>
+          </a:p>
+        </p:txBody>
+      </p:sp>
+    </p:spTree>
+  </p:cSld>
+  <p:clrMapOvr>
+    <a:masterClrMapping/>
+  </p:clrMapOvr>
+</p:sld>
+</file>
+
+<file path=ppt/slides/slide18.xml><?xml version="1.0" encoding="utf-8"?>
+<p:sld xmlns:a="http://schemas.openxmlformats.org/drawingml/2006/main" xmlns:r="http://schemas.openxmlformats.org/officeDocument/2006/relationships" xmlns:p="http://schemas.openxmlformats.org/presentationml/2006/main">
+  <p:cSld>
+    <p:spTree>
+      <p:nvGrpSpPr>
+        <p:cNvPr id="1" name=""/>
+        <p:cNvGrpSpPr/>
+        <p:nvPr/>
+      </p:nvGrpSpPr>
+      <p:grpSpPr>
+        <a:xfrm>
+          <a:off x="0" y="0"/>
+          <a:ext cx="0" cy="0"/>
+          <a:chOff x="0" y="0"/>
+          <a:chExt cx="0" cy="0"/>
+        </a:xfrm>
+      </p:grpSpPr>
+      <p:sp>
+        <p:nvSpPr>
+          <p:cNvPr id="2" name="Title 1"/>
+          <p:cNvSpPr>
+            <a:spLocks noGrp="1"/>
+          </p:cNvSpPr>
+          <p:nvPr>
+            <p:ph type="title"/>
+          </p:nvPr>
+        </p:nvSpPr>
+        <p:spPr/>
+        <p:txBody>
+          <a:bodyPr>
+            <a:normAutofit/>
+          </a:bodyPr>
+          <a:lstStyle/>
+          <a:p>
+            <a:pPr algn="l"/>
+            <a:r>
+              <a:rPr lang="en-US" sz="3200" b="1" dirty="0" smtClean="0">
+                <a:latin typeface="Arial" pitchFamily="34" charset="0"/>
+                <a:cs typeface="Arial" pitchFamily="34" charset="0"/>
+              </a:rPr>
               <a:t>Limitations and Future Work</a:t>
             </a:r>
             <a:endParaRPr lang="en-US" sz="3200" b="1" dirty="0">
@@ -10894,10 +11010,17 @@
   <p:clrMapOvr>
     <a:masterClrMapping/>
   </p:clrMapOvr>
+  <p:timing>
+    <p:tnLst>
+      <p:par>
+        <p:cTn id="1" dur="indefinite" restart="never" nodeType="tmRoot"/>
+      </p:par>
+    </p:tnLst>
+  </p:timing>
 </p:sld>
 </file>
 
-<file path=ppt/slides/slide18.xml><?xml version="1.0" encoding="utf-8"?>
+<file path=ppt/slides/slide19.xml><?xml version="1.0" encoding="utf-8"?>
 <p:sld xmlns:a="http://schemas.openxmlformats.org/drawingml/2006/main" xmlns:r="http://schemas.openxmlformats.org/officeDocument/2006/relationships" xmlns:p="http://schemas.openxmlformats.org/presentationml/2006/main">
   <p:cSld>
     <p:spTree>
@@ -10958,6 +11081,13 @@
   <p:clrMapOvr>
     <a:masterClrMapping/>
   </p:clrMapOvr>
+  <p:timing>
+    <p:tnLst>
+      <p:par>
+        <p:cTn id="1" dur="indefinite" restart="never" nodeType="tmRoot"/>
+      </p:par>
+    </p:tnLst>
+  </p:timing>
 </p:sld>
 </file>
 
@@ -11147,6 +11277,13 @@
   <p:clrMapOvr>
     <a:masterClrMapping/>
   </p:clrMapOvr>
+  <p:timing>
+    <p:tnLst>
+      <p:par>
+        <p:cTn id="1" dur="indefinite" restart="never" nodeType="tmRoot"/>
+      </p:par>
+    </p:tnLst>
+  </p:timing>
 </p:sld>
 </file>
 
@@ -11291,6 +11428,13 @@
   <p:clrMapOvr>
     <a:masterClrMapping/>
   </p:clrMapOvr>
+  <p:timing>
+    <p:tnLst>
+      <p:par>
+        <p:cTn id="1" dur="indefinite" restart="never" nodeType="tmRoot"/>
+      </p:par>
+    </p:tnLst>
+  </p:timing>
 </p:sld>
 </file>
 
@@ -11395,19 +11539,8 @@
                 <a:latin typeface="Arial" pitchFamily="34" charset="0"/>
                 <a:cs typeface="Arial" pitchFamily="34" charset="0"/>
               </a:rPr>
-              <a:t> Per-turn annotations: belief state (intent + slot values</a:t>
-            </a:r>
-            <a:r>
-              <a:rPr lang="en-US" sz="2000" dirty="0" smtClean="0">
-                <a:latin typeface="Arial" pitchFamily="34" charset="0"/>
-                <a:cs typeface="Arial" pitchFamily="34" charset="0"/>
-              </a:rPr>
-              <a:t>), dialog acts</a:t>
-            </a:r>
-            <a:endParaRPr lang="en-US" sz="2000" dirty="0" smtClean="0">
-              <a:latin typeface="Arial" pitchFamily="34" charset="0"/>
-              <a:cs typeface="Arial" pitchFamily="34" charset="0"/>
-            </a:endParaRPr>
+              <a:t> Per-turn annotations: belief state (intent + slot values), dialog acts</a:t>
+            </a:r>
           </a:p>
           <a:p>
             <a:pPr marL="0" indent="0"/>
@@ -11488,6 +11621,13 @@
   <p:clrMapOvr>
     <a:masterClrMapping/>
   </p:clrMapOvr>
+  <p:timing>
+    <p:tnLst>
+      <p:par>
+        <p:cTn id="1" dur="indefinite" restart="never" nodeType="tmRoot"/>
+      </p:par>
+    </p:tnLst>
+  </p:timing>
 </p:sld>
 </file>
 
@@ -11701,6 +11841,13 @@
   <p:clrMapOvr>
     <a:masterClrMapping/>
   </p:clrMapOvr>
+  <p:timing>
+    <p:tnLst>
+      <p:par>
+        <p:cTn id="1" dur="indefinite" restart="never" nodeType="tmRoot"/>
+      </p:par>
+    </p:tnLst>
+  </p:timing>
 </p:sld>
 </file>
 
@@ -11946,6 +12093,13 @@
   <p:clrMapOvr>
     <a:masterClrMapping/>
   </p:clrMapOvr>
+  <p:timing>
+    <p:tnLst>
+      <p:par>
+        <p:cTn id="1" dur="indefinite" restart="never" nodeType="tmRoot"/>
+      </p:par>
+    </p:tnLst>
+  </p:timing>
 </p:sld>
 </file>
 
@@ -12011,7 +12165,7 @@
         <p:spPr>
           <a:xfrm>
             <a:off x="457200" y="1412776"/>
-            <a:ext cx="8229600" cy="5256584"/>
+            <a:ext cx="8229600" cy="4032448"/>
           </a:xfrm>
         </p:spPr>
         <p:txBody>
@@ -12023,39 +12177,10 @@
             <a:pPr>
               <a:buNone/>
             </a:pPr>
-            <a:r>
-              <a:rPr lang="en-US" sz="2000" dirty="0" smtClean="0">
-                <a:latin typeface="Arial" pitchFamily="34" charset="0"/>
-                <a:cs typeface="Arial" pitchFamily="34" charset="0"/>
-              </a:rPr>
-              <a:t>Architecture (one LLM call per turn):</a:t>
-            </a:r>
-          </a:p>
-          <a:p>
-            <a:pPr>
-              <a:buNone/>
-            </a:pPr>
-            <a:r>
-              <a:rPr lang="en-US" sz="2000" dirty="0" smtClean="0">
-                <a:latin typeface="Arial" pitchFamily="34" charset="0"/>
-                <a:cs typeface="Arial" pitchFamily="34" charset="0"/>
-              </a:rPr>
-              <a:t> Dialogue History + DB → </a:t>
-            </a:r>
-            <a:r>
-              <a:rPr lang="en-US" sz="2000" b="1" dirty="0" smtClean="0">
-                <a:latin typeface="Arial" pitchFamily="34" charset="0"/>
-                <a:cs typeface="Arial" pitchFamily="34" charset="0"/>
-              </a:rPr>
-              <a:t>LLM</a:t>
-            </a:r>
-            <a:r>
-              <a:rPr lang="en-US" sz="2000" dirty="0" smtClean="0">
-                <a:latin typeface="Arial" pitchFamily="34" charset="0"/>
-                <a:cs typeface="Arial" pitchFamily="34" charset="0"/>
-              </a:rPr>
-              <a:t> → lexicalize → Response</a:t>
-            </a:r>
+            <a:endParaRPr lang="en-US" sz="2000" dirty="0" smtClean="0">
+              <a:latin typeface="Arial" pitchFamily="34" charset="0"/>
+              <a:cs typeface="Arial" pitchFamily="34" charset="0"/>
+            </a:endParaRPr>
           </a:p>
           <a:p>
             <a:pPr>
@@ -12070,49 +12195,10 @@
             <a:pPr>
               <a:buNone/>
             </a:pPr>
-            <a:r>
-              <a:rPr lang="en-US" sz="2000" dirty="0" smtClean="0">
-                <a:latin typeface="Arial" pitchFamily="34" charset="0"/>
-                <a:cs typeface="Arial" pitchFamily="34" charset="0"/>
-              </a:rPr>
-              <a:t>The LLM produces in a single prompt (including Policy):</a:t>
-            </a:r>
-          </a:p>
-          <a:p>
-            <a:pPr>
-              <a:buNone/>
-            </a:pPr>
-            <a:r>
-              <a:rPr lang="en-US" sz="2000" dirty="0" smtClean="0">
-                <a:latin typeface="Arial" pitchFamily="34" charset="0"/>
-                <a:cs typeface="Arial" pitchFamily="34" charset="0"/>
-              </a:rPr>
-              <a:t>  • Belief state (domain, intent, slot values)</a:t>
-            </a:r>
-          </a:p>
-          <a:p>
-            <a:pPr>
-              <a:buNone/>
-            </a:pPr>
-            <a:r>
-              <a:rPr lang="en-US" sz="2000" dirty="0" smtClean="0">
-                <a:latin typeface="Arial" pitchFamily="34" charset="0"/>
-                <a:cs typeface="Arial" pitchFamily="34" charset="0"/>
-              </a:rPr>
-              <a:t>  • Entity selection from the database</a:t>
-            </a:r>
-          </a:p>
-          <a:p>
-            <a:pPr>
-              <a:buNone/>
-            </a:pPr>
-            <a:r>
-              <a:rPr lang="en-US" sz="2000" dirty="0" smtClean="0">
-                <a:latin typeface="Arial" pitchFamily="34" charset="0"/>
-                <a:cs typeface="Arial" pitchFamily="34" charset="0"/>
-              </a:rPr>
-              <a:t>  • Delexicalized response</a:t>
-            </a:r>
+            <a:endParaRPr lang="en-US" sz="2000" dirty="0" smtClean="0">
+              <a:latin typeface="Arial" pitchFamily="34" charset="0"/>
+              <a:cs typeface="Arial" pitchFamily="34" charset="0"/>
+            </a:endParaRPr>
           </a:p>
           <a:p>
             <a:pPr>
@@ -12127,25 +12213,10 @@
             <a:pPr>
               <a:buNone/>
             </a:pPr>
-            <a:r>
-              <a:rPr lang="en-US" sz="2000" dirty="0" smtClean="0">
-                <a:latin typeface="Arial" pitchFamily="34" charset="0"/>
-                <a:cs typeface="Arial" pitchFamily="34" charset="0"/>
-              </a:rPr>
-              <a:t>Post-LLM steps (rule-based):</a:t>
-            </a:r>
-          </a:p>
-          <a:p>
-            <a:pPr>
-              <a:buNone/>
-            </a:pPr>
-            <a:r>
-              <a:rPr lang="en-US" sz="2000" dirty="0" smtClean="0">
-                <a:latin typeface="Arial" pitchFamily="34" charset="0"/>
-                <a:cs typeface="Arial" pitchFamily="34" charset="0"/>
-              </a:rPr>
-              <a:t>  • lexicalize: fills placeholders with real entity values</a:t>
-            </a:r>
+            <a:endParaRPr lang="en-US" sz="2000" dirty="0" smtClean="0">
+              <a:latin typeface="Arial" pitchFamily="34" charset="0"/>
+              <a:cs typeface="Arial" pitchFamily="34" charset="0"/>
+            </a:endParaRPr>
           </a:p>
           <a:p>
             <a:pPr>
@@ -12169,25 +12240,49 @@
             <a:pPr>
               <a:buNone/>
             </a:pPr>
-            <a:r>
-              <a:rPr lang="en-US" sz="2000" dirty="0" smtClean="0">
-                <a:latin typeface="Arial" pitchFamily="34" charset="0"/>
-                <a:cs typeface="Arial" pitchFamily="34" charset="0"/>
-              </a:rPr>
-              <a:t>Defines the reference point for Exp 2 and Exp 3.</a:t>
-            </a:r>
-            <a:endParaRPr lang="en-US" sz="2000" dirty="0">
+            <a:endParaRPr lang="en-US" sz="2000" dirty="0" smtClean="0">
               <a:latin typeface="Arial" pitchFamily="34" charset="0"/>
               <a:cs typeface="Arial" pitchFamily="34" charset="0"/>
             </a:endParaRPr>
           </a:p>
         </p:txBody>
       </p:sp>
+      <p:pic>
+        <p:nvPicPr>
+          <p:cNvPr id="6" name="Picture 5" descr="exp1_architecture.png"/>
+          <p:cNvPicPr>
+            <a:picLocks noChangeAspect="1"/>
+          </p:cNvPicPr>
+          <p:nvPr/>
+        </p:nvPicPr>
+        <p:blipFill>
+          <a:blip r:embed="rId2" cstate="print"/>
+          <a:stretch>
+            <a:fillRect/>
+          </a:stretch>
+        </p:blipFill>
+        <p:spPr>
+          <a:xfrm>
+            <a:off x="0" y="1268760"/>
+            <a:ext cx="9144000" cy="4576472"/>
+          </a:xfrm>
+          <a:prstGeom prst="rect">
+            <a:avLst/>
+          </a:prstGeom>
+        </p:spPr>
+      </p:pic>
     </p:spTree>
   </p:cSld>
   <p:clrMapOvr>
     <a:masterClrMapping/>
   </p:clrMapOvr>
+  <p:timing>
+    <p:tnLst>
+      <p:par>
+        <p:cTn id="1" dur="indefinite" restart="never" nodeType="tmRoot"/>
+      </p:par>
+    </p:tnLst>
+  </p:timing>
 </p:sld>
 </file>
 
@@ -12240,239 +12335,41 @@
           </a:p>
         </p:txBody>
       </p:sp>
-      <p:sp>
-        <p:nvSpPr>
-          <p:cNvPr id="3" name="Content Placeholder 2"/>
-          <p:cNvSpPr>
-            <a:spLocks noGrp="1"/>
-          </p:cNvSpPr>
+      <p:pic>
+        <p:nvPicPr>
+          <p:cNvPr id="6" name="Content Placeholder 5" descr="exp2_architecture.png"/>
+          <p:cNvPicPr>
+            <a:picLocks noGrp="1" noChangeAspect="1"/>
+          </p:cNvPicPr>
           <p:nvPr>
             <p:ph idx="1"/>
           </p:nvPr>
-        </p:nvSpPr>
+        </p:nvPicPr>
+        <p:blipFill>
+          <a:blip r:embed="rId2" cstate="print"/>
+          <a:stretch>
+            <a:fillRect/>
+          </a:stretch>
+        </p:blipFill>
         <p:spPr>
           <a:xfrm>
-            <a:off x="457200" y="1268760"/>
-            <a:ext cx="8229600" cy="5472608"/>
+            <a:off x="0" y="1628800"/>
+            <a:ext cx="9144000" cy="3456384"/>
           </a:xfrm>
         </p:spPr>
-        <p:txBody>
-          <a:bodyPr>
-            <a:noAutofit/>
-          </a:bodyPr>
-          <a:lstStyle/>
-          <a:p>
-            <a:pPr>
-              <a:buNone/>
-            </a:pPr>
-            <a:r>
-              <a:rPr lang="en-US" sz="2000" dirty="0" smtClean="0">
-                <a:latin typeface="Arial" pitchFamily="34" charset="0"/>
-                <a:cs typeface="Arial" pitchFamily="34" charset="0"/>
-              </a:rPr>
-              <a:t>Architecture (two LLM calls per turn):</a:t>
-            </a:r>
-          </a:p>
-          <a:p>
-            <a:pPr>
-              <a:buNone/>
-            </a:pPr>
-            <a:r>
-              <a:rPr lang="en-US" sz="2000" dirty="0" smtClean="0">
-                <a:latin typeface="Arial" pitchFamily="34" charset="0"/>
-                <a:cs typeface="Arial" pitchFamily="34" charset="0"/>
-              </a:rPr>
-              <a:t>  Dialogue History → </a:t>
-            </a:r>
-            <a:r>
-              <a:rPr lang="en-US" sz="2000" b="1" dirty="0" smtClean="0">
-                <a:latin typeface="Arial" pitchFamily="34" charset="0"/>
-                <a:cs typeface="Arial" pitchFamily="34" charset="0"/>
-              </a:rPr>
-              <a:t>DST</a:t>
-            </a:r>
-            <a:r>
-              <a:rPr lang="en-US" sz="2000" dirty="0" smtClean="0">
-                <a:latin typeface="Arial" pitchFamily="34" charset="0"/>
-                <a:cs typeface="Arial" pitchFamily="34" charset="0"/>
-              </a:rPr>
-              <a:t> → Policy → DB → </a:t>
-            </a:r>
-            <a:r>
-              <a:rPr lang="en-US" sz="2000" b="1" dirty="0" smtClean="0">
-                <a:latin typeface="Arial" pitchFamily="34" charset="0"/>
-                <a:cs typeface="Arial" pitchFamily="34" charset="0"/>
-              </a:rPr>
-              <a:t>ResponseGen</a:t>
-            </a:r>
-            <a:r>
-              <a:rPr lang="en-US" sz="2000" dirty="0" smtClean="0">
-                <a:latin typeface="Arial" pitchFamily="34" charset="0"/>
-                <a:cs typeface="Arial" pitchFamily="34" charset="0"/>
-              </a:rPr>
-              <a:t> </a:t>
-            </a:r>
-            <a:r>
-              <a:rPr lang="en-US" sz="2000" dirty="0" smtClean="0">
-                <a:latin typeface="Arial" pitchFamily="34" charset="0"/>
-                <a:cs typeface="Arial" pitchFamily="34" charset="0"/>
-              </a:rPr>
-              <a:t>→ </a:t>
-            </a:r>
-            <a:r>
-              <a:rPr lang="en-US" sz="2000" dirty="0" smtClean="0">
-                <a:latin typeface="Arial" pitchFamily="34" charset="0"/>
-                <a:cs typeface="Arial" pitchFamily="34" charset="0"/>
-              </a:rPr>
-              <a:t>supervisor → lexicalize → Response</a:t>
-            </a:r>
-          </a:p>
-          <a:p>
-            <a:pPr>
-              <a:buNone/>
-            </a:pPr>
-            <a:endParaRPr lang="en-US" sz="2000" dirty="0" smtClean="0">
-              <a:latin typeface="Arial" pitchFamily="34" charset="0"/>
-              <a:cs typeface="Arial" pitchFamily="34" charset="0"/>
-            </a:endParaRPr>
-          </a:p>
-          <a:p>
-            <a:pPr>
-              <a:buNone/>
-            </a:pPr>
-            <a:r>
-              <a:rPr lang="en-US" sz="2000" dirty="0" smtClean="0">
-                <a:latin typeface="Arial" pitchFamily="34" charset="0"/>
-                <a:cs typeface="Arial" pitchFamily="34" charset="0"/>
-              </a:rPr>
-              <a:t>Two LLM calls:</a:t>
-            </a:r>
-          </a:p>
-          <a:p>
-            <a:pPr>
-              <a:buNone/>
-            </a:pPr>
-            <a:r>
-              <a:rPr lang="en-US" sz="2000" dirty="0" smtClean="0">
-                <a:latin typeface="Arial" pitchFamily="34" charset="0"/>
-                <a:cs typeface="Arial" pitchFamily="34" charset="0"/>
-              </a:rPr>
-              <a:t>  • DST: extracts belief state (domain, intent, slot values)</a:t>
-            </a:r>
-          </a:p>
-          <a:p>
-            <a:pPr>
-              <a:buNone/>
-            </a:pPr>
-            <a:r>
-              <a:rPr lang="en-US" sz="2000" dirty="0" smtClean="0">
-                <a:latin typeface="Arial" pitchFamily="34" charset="0"/>
-                <a:cs typeface="Arial" pitchFamily="34" charset="0"/>
-              </a:rPr>
-              <a:t>  • ResponseGen: writes a delexicalized response</a:t>
-            </a:r>
-          </a:p>
-          <a:p>
-            <a:pPr>
-              <a:buNone/>
-            </a:pPr>
-            <a:endParaRPr lang="en-US" sz="2000" dirty="0" smtClean="0">
-              <a:latin typeface="Arial" pitchFamily="34" charset="0"/>
-              <a:cs typeface="Arial" pitchFamily="34" charset="0"/>
-            </a:endParaRPr>
-          </a:p>
-          <a:p>
-            <a:pPr>
-              <a:buNone/>
-            </a:pPr>
-            <a:r>
-              <a:rPr lang="en-US" sz="2000" dirty="0" smtClean="0">
-                <a:latin typeface="Arial" pitchFamily="34" charset="0"/>
-                <a:cs typeface="Arial" pitchFamily="34" charset="0"/>
-              </a:rPr>
-              <a:t>Deterministic steps (no LLM):</a:t>
-            </a:r>
-          </a:p>
-          <a:p>
-            <a:pPr>
-              <a:buNone/>
-            </a:pPr>
-            <a:r>
-              <a:rPr lang="en-US" sz="2000" dirty="0" smtClean="0">
-                <a:latin typeface="Arial" pitchFamily="34" charset="0"/>
-                <a:cs typeface="Arial" pitchFamily="34" charset="0"/>
-              </a:rPr>
-              <a:t>  • Policy: checks required booking slots</a:t>
-            </a:r>
-          </a:p>
-          <a:p>
-            <a:pPr>
-              <a:buNone/>
-            </a:pPr>
-            <a:r>
-              <a:rPr lang="en-US" sz="2000" dirty="0" smtClean="0">
-                <a:latin typeface="Arial" pitchFamily="34" charset="0"/>
-                <a:cs typeface="Arial" pitchFamily="34" charset="0"/>
-              </a:rPr>
-              <a:t>  • DB query: retrieves matching entities</a:t>
-            </a:r>
-          </a:p>
-          <a:p>
-            <a:pPr>
-              <a:buNone/>
-            </a:pPr>
-            <a:r>
-              <a:rPr lang="en-US" sz="2000" dirty="0" smtClean="0">
-                <a:latin typeface="Arial" pitchFamily="34" charset="0"/>
-                <a:cs typeface="Arial" pitchFamily="34" charset="0"/>
-              </a:rPr>
-              <a:t>  • supervisor: validates response, retries up to 2 times</a:t>
-            </a:r>
-          </a:p>
-          <a:p>
-            <a:pPr>
-              <a:buNone/>
-            </a:pPr>
-            <a:r>
-              <a:rPr lang="en-US" sz="2000" dirty="0" smtClean="0">
-                <a:latin typeface="Arial" pitchFamily="34" charset="0"/>
-                <a:cs typeface="Arial" pitchFamily="34" charset="0"/>
-              </a:rPr>
-              <a:t>  • lexicalize: fills placeholders with real entity values</a:t>
-            </a:r>
-          </a:p>
-          <a:p>
-            <a:pPr>
-              <a:buNone/>
-            </a:pPr>
-            <a:endParaRPr lang="en-US" sz="2000" dirty="0" smtClean="0">
-              <a:latin typeface="Arial" pitchFamily="34" charset="0"/>
-              <a:cs typeface="Arial" pitchFamily="34" charset="0"/>
-            </a:endParaRPr>
-          </a:p>
-          <a:p>
-            <a:pPr>
-              <a:buNone/>
-            </a:pPr>
-            <a:r>
-              <a:rPr lang="en-US" sz="2000" dirty="0" smtClean="0">
-                <a:latin typeface="Arial" pitchFamily="34" charset="0"/>
-                <a:cs typeface="Arial" pitchFamily="34" charset="0"/>
-              </a:rPr>
-              <a:t>Decomposes Exp 1’s task into focused, role-specialized calls.</a:t>
-            </a:r>
-            <a:endParaRPr lang="en-US" sz="2000" dirty="0">
-              <a:latin typeface="Arial" pitchFamily="34" charset="0"/>
-              <a:cs typeface="Arial" pitchFamily="34" charset="0"/>
-            </a:endParaRPr>
-          </a:p>
-        </p:txBody>
-      </p:sp>
+      </p:pic>
     </p:spTree>
   </p:cSld>
   <p:clrMapOvr>
     <a:masterClrMapping/>
   </p:clrMapOvr>
+  <p:timing>
+    <p:tnLst>
+      <p:par>
+        <p:cTn id="1" dur="indefinite" restart="never" nodeType="tmRoot"/>
+      </p:par>
+    </p:tnLst>
+  </p:timing>
 </p:sld>
 </file>
 
@@ -12711,6 +12608,13 @@
   <p:clrMapOvr>
     <a:masterClrMapping/>
   </p:clrMapOvr>
+  <p:timing>
+    <p:tnLst>
+      <p:par>
+        <p:cTn id="1" dur="indefinite" restart="never" nodeType="tmRoot"/>
+      </p:par>
+    </p:tnLst>
+  </p:timing>
 </p:sld>
 </file>
 

--- a/docs/presentation.pptx
+++ b/docs/presentation.pptx
@@ -307,7 +307,7 @@
             <a:fld id="{791D8748-2515-4448-AFB0-4E0BAD67A439}" type="datetimeFigureOut">
               <a:rPr lang="en-US" smtClean="0"/>
               <a:pPr/>
-              <a:t>6/16/2026</a:t>
+              <a:t>6/17/2026</a:t>
             </a:fld>
             <a:endParaRPr lang="en-US"/>
           </a:p>
@@ -474,7 +474,7 @@
             <a:fld id="{791D8748-2515-4448-AFB0-4E0BAD67A439}" type="datetimeFigureOut">
               <a:rPr lang="en-US" smtClean="0"/>
               <a:pPr/>
-              <a:t>6/16/2026</a:t>
+              <a:t>6/17/2026</a:t>
             </a:fld>
             <a:endParaRPr lang="en-US"/>
           </a:p>
@@ -651,7 +651,7 @@
             <a:fld id="{791D8748-2515-4448-AFB0-4E0BAD67A439}" type="datetimeFigureOut">
               <a:rPr lang="en-US" smtClean="0"/>
               <a:pPr/>
-              <a:t>6/16/2026</a:t>
+              <a:t>6/17/2026</a:t>
             </a:fld>
             <a:endParaRPr lang="en-US"/>
           </a:p>
@@ -818,7 +818,7 @@
             <a:fld id="{791D8748-2515-4448-AFB0-4E0BAD67A439}" type="datetimeFigureOut">
               <a:rPr lang="en-US" smtClean="0"/>
               <a:pPr/>
-              <a:t>6/16/2026</a:t>
+              <a:t>6/17/2026</a:t>
             </a:fld>
             <a:endParaRPr lang="en-US"/>
           </a:p>
@@ -1061,7 +1061,7 @@
             <a:fld id="{791D8748-2515-4448-AFB0-4E0BAD67A439}" type="datetimeFigureOut">
               <a:rPr lang="en-US" smtClean="0"/>
               <a:pPr/>
-              <a:t>6/16/2026</a:t>
+              <a:t>6/17/2026</a:t>
             </a:fld>
             <a:endParaRPr lang="en-US"/>
           </a:p>
@@ -1346,7 +1346,7 @@
             <a:fld id="{791D8748-2515-4448-AFB0-4E0BAD67A439}" type="datetimeFigureOut">
               <a:rPr lang="en-US" smtClean="0"/>
               <a:pPr/>
-              <a:t>6/16/2026</a:t>
+              <a:t>6/17/2026</a:t>
             </a:fld>
             <a:endParaRPr lang="en-US"/>
           </a:p>
@@ -1765,7 +1765,7 @@
             <a:fld id="{791D8748-2515-4448-AFB0-4E0BAD67A439}" type="datetimeFigureOut">
               <a:rPr lang="en-US" smtClean="0"/>
               <a:pPr/>
-              <a:t>6/16/2026</a:t>
+              <a:t>6/17/2026</a:t>
             </a:fld>
             <a:endParaRPr lang="en-US"/>
           </a:p>
@@ -1880,7 +1880,7 @@
             <a:fld id="{791D8748-2515-4448-AFB0-4E0BAD67A439}" type="datetimeFigureOut">
               <a:rPr lang="en-US" smtClean="0"/>
               <a:pPr/>
-              <a:t>6/16/2026</a:t>
+              <a:t>6/17/2026</a:t>
             </a:fld>
             <a:endParaRPr lang="en-US"/>
           </a:p>
@@ -1972,7 +1972,7 @@
             <a:fld id="{791D8748-2515-4448-AFB0-4E0BAD67A439}" type="datetimeFigureOut">
               <a:rPr lang="en-US" smtClean="0"/>
               <a:pPr/>
-              <a:t>6/16/2026</a:t>
+              <a:t>6/17/2026</a:t>
             </a:fld>
             <a:endParaRPr lang="en-US"/>
           </a:p>
@@ -2246,7 +2246,7 @@
             <a:fld id="{791D8748-2515-4448-AFB0-4E0BAD67A439}" type="datetimeFigureOut">
               <a:rPr lang="en-US" smtClean="0"/>
               <a:pPr/>
-              <a:t>6/16/2026</a:t>
+              <a:t>6/17/2026</a:t>
             </a:fld>
             <a:endParaRPr lang="en-US"/>
           </a:p>
@@ -2496,7 +2496,7 @@
             <a:fld id="{791D8748-2515-4448-AFB0-4E0BAD67A439}" type="datetimeFigureOut">
               <a:rPr lang="en-US" smtClean="0"/>
               <a:pPr/>
-              <a:t>6/16/2026</a:t>
+              <a:t>6/17/2026</a:t>
             </a:fld>
             <a:endParaRPr lang="en-US"/>
           </a:p>
@@ -2706,7 +2706,7 @@
             <a:fld id="{791D8748-2515-4448-AFB0-4E0BAD67A439}" type="datetimeFigureOut">
               <a:rPr lang="en-US" smtClean="0"/>
               <a:pPr/>
-              <a:t>6/16/2026</a:t>
+              <a:t>6/17/2026</a:t>
             </a:fld>
             <a:endParaRPr lang="en-US"/>
           </a:p>
@@ -9078,7 +9078,7 @@
         <p:spPr>
           <a:xfrm>
             <a:off x="467544" y="4005064"/>
-            <a:ext cx="7920880" cy="2123658"/>
+            <a:ext cx="7920880" cy="1846659"/>
           </a:xfrm>
           <a:prstGeom prst="rect">
             <a:avLst/>
@@ -9128,16 +9128,14 @@
                 <a:latin typeface="Arial" pitchFamily="34" charset="0"/>
                 <a:cs typeface="Arial" pitchFamily="34" charset="0"/>
               </a:rPr>
-              <a:t>  • But Combined Score stays at ~71, 21 points behind Haiku (91.4). Bottleneck </a:t>
-            </a:r>
-          </a:p>
-          <a:p>
+              <a:t>  • But Combined Score stays at ~71, 21 points behind Haiku (91.4</a:t>
+            </a:r>
             <a:r>
               <a:rPr lang="en-US" sz="1600" dirty="0" smtClean="0">
                 <a:latin typeface="Arial" pitchFamily="34" charset="0"/>
                 <a:cs typeface="Arial" pitchFamily="34" charset="0"/>
               </a:rPr>
-              <a:t>    shifts from DST to ResponseGen</a:t>
+              <a:t>)</a:t>
             </a:r>
           </a:p>
           <a:p>
@@ -9146,7 +9144,28 @@
                 <a:latin typeface="Arial" pitchFamily="34" charset="0"/>
                 <a:cs typeface="Arial" pitchFamily="34" charset="0"/>
               </a:rPr>
-              <a:t>  • Phi-4-14B recovers from its Exp 2 drop</a:t>
+              <a:t> </a:t>
+            </a:r>
+            <a:r>
+              <a:rPr lang="en-US" sz="1600" dirty="0" smtClean="0">
+                <a:latin typeface="Arial" pitchFamily="34" charset="0"/>
+                <a:cs typeface="Arial" pitchFamily="34" charset="0"/>
+              </a:rPr>
+              <a:t> </a:t>
+            </a:r>
+            <a:r>
+              <a:rPr lang="en-US" sz="1600" dirty="0" smtClean="0">
+                <a:latin typeface="Arial" pitchFamily="34" charset="0"/>
+                <a:cs typeface="Arial" pitchFamily="34" charset="0"/>
+              </a:rPr>
+              <a:t>• </a:t>
+            </a:r>
+            <a:r>
+              <a:rPr lang="en-US" sz="1600" dirty="0" smtClean="0">
+                <a:latin typeface="Arial" pitchFamily="34" charset="0"/>
+                <a:cs typeface="Arial" pitchFamily="34" charset="0"/>
+              </a:rPr>
+              <a:t>Phi-4-14B recovers from its Exp 2 drop</a:t>
             </a:r>
           </a:p>
           <a:p>
@@ -10755,60 +10774,26 @@
                 <a:latin typeface="Arial" pitchFamily="34" charset="0"/>
                 <a:cs typeface="Arial" pitchFamily="34" charset="0"/>
               </a:rPr>
-              <a:t>Controlled three-experiment design that isolates architectural decomposition </a:t>
-            </a:r>
+              <a:t>Controlled three-experiment design that isolates architectural decomposition (Exp 1 → Exp 2) and role-specific LoRA fine-tuning (Exp 2 → Exp 3) on the same data and metrics</a:t>
+            </a:r>
+          </a:p>
+          <a:p>
             <a:r>
               <a:rPr lang="en-US" sz="2000" dirty="0" smtClean="0">
                 <a:latin typeface="Arial" pitchFamily="34" charset="0"/>
                 <a:cs typeface="Arial" pitchFamily="34" charset="0"/>
               </a:rPr>
-              <a:t>(Exp 1 → Exp 2) and role-specific LoRA fine-tuning (Exp 2 → Exp 3) on the same data and </a:t>
-            </a:r>
+              <a:t>Head-to-head comparison of commercial APIs and small open-source models (3B–14B) across all three architectures</a:t>
+            </a:r>
+          </a:p>
+          <a:p>
             <a:r>
               <a:rPr lang="en-US" sz="2000" dirty="0" smtClean="0">
                 <a:latin typeface="Arial" pitchFamily="34" charset="0"/>
                 <a:cs typeface="Arial" pitchFamily="34" charset="0"/>
               </a:rPr>
-              <a:t>metrics</a:t>
-            </a:r>
-          </a:p>
-          <a:p>
-            <a:r>
-              <a:rPr lang="en-US" sz="2000" dirty="0" smtClean="0">
-                <a:latin typeface="Arial" pitchFamily="34" charset="0"/>
-                <a:cs typeface="Arial" pitchFamily="34" charset="0"/>
-              </a:rPr>
-              <a:t>Head-to-head comparison of commercial APIs and small open-source models (3B–14B) across all three </a:t>
-            </a:r>
-            <a:r>
-              <a:rPr lang="en-US" sz="2000" dirty="0" smtClean="0">
-                <a:latin typeface="Arial" pitchFamily="34" charset="0"/>
-                <a:cs typeface="Arial" pitchFamily="34" charset="0"/>
-              </a:rPr>
-              <a:t>architectures</a:t>
-            </a:r>
-          </a:p>
-          <a:p>
-            <a:r>
-              <a:rPr lang="en-US" sz="2000" dirty="0" smtClean="0">
-                <a:latin typeface="Arial" pitchFamily="34" charset="0"/>
-                <a:cs typeface="Arial" pitchFamily="34" charset="0"/>
-              </a:rPr>
-              <a:t>Operational </a:t>
-            </a:r>
-            <a:r>
-              <a:rPr lang="en-US" sz="2000" dirty="0" smtClean="0">
-                <a:latin typeface="Arial" pitchFamily="34" charset="0"/>
-                <a:cs typeface="Arial" pitchFamily="34" charset="0"/>
-              </a:rPr>
-              <a:t>metrics (Hallucination Rate, Policy Violation Rate, Latency, API Cost) for deployment realism</a:t>
-            </a:r>
-            <a:endParaRPr lang="en-US" sz="2000" dirty="0" smtClean="0">
-              <a:latin typeface="Arial" pitchFamily="34" charset="0"/>
-              <a:cs typeface="Arial" pitchFamily="34" charset="0"/>
-            </a:endParaRPr>
-          </a:p>
-          <a:p>
+              <a:t>Empirical evidence, across model families, that DST is the dominant bottleneck in modular pipelines</a:t>
+            </a:r>
             <a:endParaRPr lang="en-US" sz="2000" dirty="0">
               <a:latin typeface="Arial" pitchFamily="34" charset="0"/>
               <a:cs typeface="Arial" pitchFamily="34" charset="0"/>

--- a/docs/presentation.pptx
+++ b/docs/presentation.pptx
@@ -307,7 +307,7 @@
             <a:fld id="{791D8748-2515-4448-AFB0-4E0BAD67A439}" type="datetimeFigureOut">
               <a:rPr lang="en-US" smtClean="0"/>
               <a:pPr/>
-              <a:t>6/17/2026</a:t>
+              <a:t>6/18/2026</a:t>
             </a:fld>
             <a:endParaRPr lang="en-US"/>
           </a:p>
@@ -474,7 +474,7 @@
             <a:fld id="{791D8748-2515-4448-AFB0-4E0BAD67A439}" type="datetimeFigureOut">
               <a:rPr lang="en-US" smtClean="0"/>
               <a:pPr/>
-              <a:t>6/17/2026</a:t>
+              <a:t>6/18/2026</a:t>
             </a:fld>
             <a:endParaRPr lang="en-US"/>
           </a:p>
@@ -651,7 +651,7 @@
             <a:fld id="{791D8748-2515-4448-AFB0-4E0BAD67A439}" type="datetimeFigureOut">
               <a:rPr lang="en-US" smtClean="0"/>
               <a:pPr/>
-              <a:t>6/17/2026</a:t>
+              <a:t>6/18/2026</a:t>
             </a:fld>
             <a:endParaRPr lang="en-US"/>
           </a:p>
@@ -818,7 +818,7 @@
             <a:fld id="{791D8748-2515-4448-AFB0-4E0BAD67A439}" type="datetimeFigureOut">
               <a:rPr lang="en-US" smtClean="0"/>
               <a:pPr/>
-              <a:t>6/17/2026</a:t>
+              <a:t>6/18/2026</a:t>
             </a:fld>
             <a:endParaRPr lang="en-US"/>
           </a:p>
@@ -1061,7 +1061,7 @@
             <a:fld id="{791D8748-2515-4448-AFB0-4E0BAD67A439}" type="datetimeFigureOut">
               <a:rPr lang="en-US" smtClean="0"/>
               <a:pPr/>
-              <a:t>6/17/2026</a:t>
+              <a:t>6/18/2026</a:t>
             </a:fld>
             <a:endParaRPr lang="en-US"/>
           </a:p>
@@ -1346,7 +1346,7 @@
             <a:fld id="{791D8748-2515-4448-AFB0-4E0BAD67A439}" type="datetimeFigureOut">
               <a:rPr lang="en-US" smtClean="0"/>
               <a:pPr/>
-              <a:t>6/17/2026</a:t>
+              <a:t>6/18/2026</a:t>
             </a:fld>
             <a:endParaRPr lang="en-US"/>
           </a:p>
@@ -1765,7 +1765,7 @@
             <a:fld id="{791D8748-2515-4448-AFB0-4E0BAD67A439}" type="datetimeFigureOut">
               <a:rPr lang="en-US" smtClean="0"/>
               <a:pPr/>
-              <a:t>6/17/2026</a:t>
+              <a:t>6/18/2026</a:t>
             </a:fld>
             <a:endParaRPr lang="en-US"/>
           </a:p>
@@ -1880,7 +1880,7 @@
             <a:fld id="{791D8748-2515-4448-AFB0-4E0BAD67A439}" type="datetimeFigureOut">
               <a:rPr lang="en-US" smtClean="0"/>
               <a:pPr/>
-              <a:t>6/17/2026</a:t>
+              <a:t>6/18/2026</a:t>
             </a:fld>
             <a:endParaRPr lang="en-US"/>
           </a:p>
@@ -1972,7 +1972,7 @@
             <a:fld id="{791D8748-2515-4448-AFB0-4E0BAD67A439}" type="datetimeFigureOut">
               <a:rPr lang="en-US" smtClean="0"/>
               <a:pPr/>
-              <a:t>6/17/2026</a:t>
+              <a:t>6/18/2026</a:t>
             </a:fld>
             <a:endParaRPr lang="en-US"/>
           </a:p>
@@ -2246,7 +2246,7 @@
             <a:fld id="{791D8748-2515-4448-AFB0-4E0BAD67A439}" type="datetimeFigureOut">
               <a:rPr lang="en-US" smtClean="0"/>
               <a:pPr/>
-              <a:t>6/17/2026</a:t>
+              <a:t>6/18/2026</a:t>
             </a:fld>
             <a:endParaRPr lang="en-US"/>
           </a:p>
@@ -2496,7 +2496,7 @@
             <a:fld id="{791D8748-2515-4448-AFB0-4E0BAD67A439}" type="datetimeFigureOut">
               <a:rPr lang="en-US" smtClean="0"/>
               <a:pPr/>
-              <a:t>6/17/2026</a:t>
+              <a:t>6/18/2026</a:t>
             </a:fld>
             <a:endParaRPr lang="en-US"/>
           </a:p>
@@ -2706,7 +2706,7 @@
             <a:fld id="{791D8748-2515-4448-AFB0-4E0BAD67A439}" type="datetimeFigureOut">
               <a:rPr lang="en-US" smtClean="0"/>
               <a:pPr/>
-              <a:t>6/17/2026</a:t>
+              <a:t>6/18/2026</a:t>
             </a:fld>
             <a:endParaRPr lang="en-US"/>
           </a:p>
@@ -9128,44 +9128,16 @@
                 <a:latin typeface="Arial" pitchFamily="34" charset="0"/>
                 <a:cs typeface="Arial" pitchFamily="34" charset="0"/>
               </a:rPr>
-              <a:t>  • But Combined Score stays at ~71, 21 points behind Haiku (91.4</a:t>
-            </a:r>
+              <a:t>  • But Combined Score stays at ~71, 21 points behind Haiku (91.4)</a:t>
+            </a:r>
+          </a:p>
+          <a:p>
             <a:r>
               <a:rPr lang="en-US" sz="1600" dirty="0" smtClean="0">
                 <a:latin typeface="Arial" pitchFamily="34" charset="0"/>
                 <a:cs typeface="Arial" pitchFamily="34" charset="0"/>
               </a:rPr>
-              <a:t>)</a:t>
-            </a:r>
-          </a:p>
-          <a:p>
-            <a:r>
-              <a:rPr lang="en-US" sz="1600" dirty="0" smtClean="0">
-                <a:latin typeface="Arial" pitchFamily="34" charset="0"/>
-                <a:cs typeface="Arial" pitchFamily="34" charset="0"/>
-              </a:rPr>
-              <a:t> </a:t>
-            </a:r>
-            <a:r>
-              <a:rPr lang="en-US" sz="1600" dirty="0" smtClean="0">
-                <a:latin typeface="Arial" pitchFamily="34" charset="0"/>
-                <a:cs typeface="Arial" pitchFamily="34" charset="0"/>
-              </a:rPr>
-              <a:t> </a:t>
-            </a:r>
-            <a:r>
-              <a:rPr lang="en-US" sz="1600" dirty="0" smtClean="0">
-                <a:latin typeface="Arial" pitchFamily="34" charset="0"/>
-                <a:cs typeface="Arial" pitchFamily="34" charset="0"/>
-              </a:rPr>
-              <a:t>• </a:t>
-            </a:r>
-            <a:r>
-              <a:rPr lang="en-US" sz="1600" dirty="0" smtClean="0">
-                <a:latin typeface="Arial" pitchFamily="34" charset="0"/>
-                <a:cs typeface="Arial" pitchFamily="34" charset="0"/>
-              </a:rPr>
-              <a:t>Phi-4-14B recovers from its Exp 2 drop</a:t>
+              <a:t>  • Phi-4-14B recovers from its Exp 2 drop</a:t>
             </a:r>
           </a:p>
           <a:p>
@@ -12234,7 +12206,7 @@
       </p:sp>
       <p:pic>
         <p:nvPicPr>
-          <p:cNvPr id="6" name="Picture 5" descr="exp1_architecture.png"/>
+          <p:cNvPr id="7" name="Picture 6" descr="exp1_architecture.png"/>
           <p:cNvPicPr>
             <a:picLocks noChangeAspect="1"/>
           </p:cNvPicPr>
@@ -12248,8 +12220,8 @@
         </p:blipFill>
         <p:spPr>
           <a:xfrm>
-            <a:off x="0" y="1268760"/>
-            <a:ext cx="9144000" cy="4576472"/>
+            <a:off x="0" y="1340768"/>
+            <a:ext cx="9144000" cy="4621820"/>
           </a:xfrm>
           <a:prstGeom prst="rect">
             <a:avLst/>
@@ -12322,7 +12294,7 @@
       </p:sp>
       <p:pic>
         <p:nvPicPr>
-          <p:cNvPr id="6" name="Content Placeholder 5" descr="exp2_architecture.png"/>
+          <p:cNvPr id="5" name="Content Placeholder 4" descr="exp2_architecture.png"/>
           <p:cNvPicPr>
             <a:picLocks noGrp="1" noChangeAspect="1"/>
           </p:cNvPicPr>
@@ -12338,8 +12310,8 @@
         </p:blipFill>
         <p:spPr>
           <a:xfrm>
-            <a:off x="0" y="1628800"/>
-            <a:ext cx="9144000" cy="3456384"/>
+            <a:off x="0" y="1772816"/>
+            <a:ext cx="9144000" cy="3024336"/>
           </a:xfrm>
         </p:spPr>
       </p:pic>
